--- a/納品レポート/ホテル別レポート/court_shinyokohama_口コミ分析レポート.pptx
+++ b/納品レポート/ホテル別レポート/court_shinyokohama_口コミ分析レポート.pptx
@@ -2812,7 +2812,7 @@
                 <a:ea typeface="Arial" pitchFamily="34" charset="-122"/>
                 <a:cs typeface="Arial" pitchFamily="34" charset="-120"/>
               </a:rPr>
-              <a:t>作成日：2026年3月17日</a:t>
+              <a:t>作成日：2026年3月18日</a:t>
             </a:r>
             <a:endParaRPr lang="en-US" sz="1000" dirty="0"/>
           </a:p>

--- a/納品レポート/ホテル別レポート/court_shinyokohama_口コミ分析レポート.pptx
+++ b/納品レポート/ホテル別レポート/court_shinyokohama_口コミ分析レポート.pptx
@@ -2812,7 +2812,7 @@
                 <a:ea typeface="Arial" pitchFamily="34" charset="-122"/>
                 <a:cs typeface="Arial" pitchFamily="34" charset="-120"/>
               </a:rPr>
-              <a:t>作成日：2026年3月18日</a:t>
+              <a:t>作成日：2026年3月19日</a:t>
             </a:r>
             <a:endParaRPr lang="en-US" sz="1000" dirty="0"/>
           </a:p>

--- a/納品レポート/ホテル別レポート/court_shinyokohama_口コミ分析レポート.pptx
+++ b/納品レポート/ホテル別レポート/court_shinyokohama_口コミ分析レポート.pptx
@@ -2812,7 +2812,7 @@
                 <a:ea typeface="Arial" pitchFamily="34" charset="-122"/>
                 <a:cs typeface="Arial" pitchFamily="34" charset="-120"/>
               </a:rPr>
-              <a:t>作成日：2026年3月19日</a:t>
+              <a:t>作成日：2026年3月20日</a:t>
             </a:r>
             <a:endParaRPr lang="en-US" sz="1000" dirty="0"/>
           </a:p>

--- a/納品レポート/ホテル別レポート/court_shinyokohama_口コミ分析レポート.pptx
+++ b/納品レポート/ホテル別レポート/court_shinyokohama_口コミ分析レポート.pptx
@@ -2812,7 +2812,7 @@
                 <a:ea typeface="Arial" pitchFamily="34" charset="-122"/>
                 <a:cs typeface="Arial" pitchFamily="34" charset="-120"/>
               </a:rPr>
-              <a:t>作成日：2026年3月20日</a:t>
+              <a:t>作成日：2026年3月21日</a:t>
             </a:r>
             <a:endParaRPr lang="en-US" sz="1000" dirty="0"/>
           </a:p>

--- a/納品レポート/ホテル別レポート/court_shinyokohama_口コミ分析レポート.pptx
+++ b/納品レポート/ホテル別レポート/court_shinyokohama_口コミ分析レポート.pptx
@@ -2812,7 +2812,7 @@
                 <a:ea typeface="Arial" pitchFamily="34" charset="-122"/>
                 <a:cs typeface="Arial" pitchFamily="34" charset="-120"/>
               </a:rPr>
-              <a:t>作成日：2026年3月21日</a:t>
+              <a:t>作成日：2026年3月23日</a:t>
             </a:r>
             <a:endParaRPr lang="en-US" sz="1000" dirty="0"/>
           </a:p>

--- a/納品レポート/ホテル別レポート/court_shinyokohama_口コミ分析レポート.pptx
+++ b/納品レポート/ホテル別レポート/court_shinyokohama_口コミ分析レポート.pptx
@@ -2812,7 +2812,7 @@
                 <a:ea typeface="Arial" pitchFamily="34" charset="-122"/>
                 <a:cs typeface="Arial" pitchFamily="34" charset="-120"/>
               </a:rPr>
-              <a:t>作成日：2026年3月23日</a:t>
+              <a:t>作成日：2026年3月24日</a:t>
             </a:r>
             <a:endParaRPr lang="en-US" sz="1000" dirty="0"/>
           </a:p>

--- a/納品レポート/ホテル別レポート/court_shinyokohama_口コミ分析レポート.pptx
+++ b/納品レポート/ホテル別レポート/court_shinyokohama_口コミ分析レポート.pptx
@@ -180,7 +180,7 @@
                 <c:ptCount val="5"/>
                 <c:lvl>
                   <c:pt idx="0">
-                    <c:v>Trip.com</c:v>
+                    <c:v>Google</c:v>
                   </c:pt>
                   <c:pt idx="1">
                     <c:v>楽天トラベル</c:v>
@@ -192,7 +192,7 @@
                     <c:v>Booking.com</c:v>
                   </c:pt>
                   <c:pt idx="4">
-                    <c:v>Google</c:v>
+                    <c:v>Trip.com</c:v>
                   </c:pt>
                 </c:lvl>
               </c:multiLvlStrCache>
@@ -205,19 +205,19 @@
                 <c:formatCode>General</c:formatCode>
                 <c:ptCount val="5"/>
                 <c:pt idx="0">
-                  <c:v>9</c:v>
+                  <c:v>7.71</c:v>
                 </c:pt>
                 <c:pt idx="1">
-                  <c:v>7.5</c:v>
+                  <c:v>7.67</c:v>
                 </c:pt>
                 <c:pt idx="2">
-                  <c:v>7.38</c:v>
+                  <c:v>7.27</c:v>
                 </c:pt>
                 <c:pt idx="3">
-                  <c:v>7.01</c:v>
+                  <c:v>7.03</c:v>
                 </c:pt>
                 <c:pt idx="4">
-                  <c:v>6.17</c:v>
+                  <c:v>6.67</c:v>
                 </c:pt>
               </c:numCache>
             </c:numRef>
@@ -560,13 +560,13 @@
               <c:numCache>
                 <c:ptCount val="3"/>
                 <c:pt idx="0">
-                  <c:v>61</c:v>
+                  <c:v>60</c:v>
                 </c:pt>
                 <c:pt idx="1">
-                  <c:v>42</c:v>
+                  <c:v>44</c:v>
                 </c:pt>
                 <c:pt idx="2">
-                  <c:v>17</c:v>
+                  <c:v>14</c:v>
                 </c:pt>
               </c:numCache>
             </c:numRef>
@@ -817,28 +817,28 @@
                 <c:formatCode>General</c:formatCode>
                 <c:ptCount val="9"/>
                 <c:pt idx="0">
-                  <c:v>15</c:v>
+                  <c:v>16</c:v>
                 </c:pt>
                 <c:pt idx="1">
-                  <c:v>12</c:v>
+                  <c:v>10</c:v>
                 </c:pt>
                 <c:pt idx="2">
                   <c:v>34</c:v>
                 </c:pt>
                 <c:pt idx="3">
+                  <c:v>18</c:v>
+                </c:pt>
+                <c:pt idx="4">
                   <c:v>15</c:v>
                 </c:pt>
-                <c:pt idx="4">
-                  <c:v>14</c:v>
-                </c:pt>
                 <c:pt idx="5">
-                  <c:v>13</c:v>
+                  <c:v>11</c:v>
                 </c:pt>
                 <c:pt idx="6">
-                  <c:v>12</c:v>
+                  <c:v>8</c:v>
                 </c:pt>
                 <c:pt idx="7">
-                  <c:v>2</c:v>
+                  <c:v>3</c:v>
                 </c:pt>
                 <c:pt idx="8">
                   <c:v>3</c:v>
@@ -2772,7 +2772,7 @@
                 <a:ea typeface="Arial" pitchFamily="34" charset="-122"/>
                 <a:cs typeface="Arial" pitchFamily="34" charset="-120"/>
               </a:rPr>
-              <a:t>分析対象期間：2025年12月〜1月</a:t>
+              <a:t>分析対象期間：2026年1月〜2月</a:t>
             </a:r>
             <a:endParaRPr lang="en-US" sz="1000" dirty="0"/>
           </a:p>
@@ -2792,7 +2792,7 @@
                 <a:ea typeface="Arial" pitchFamily="34" charset="-122"/>
                 <a:cs typeface="Arial" pitchFamily="34" charset="-120"/>
               </a:rPr>
-              <a:t>レビュー総数：120件（5サイト）</a:t>
+              <a:t>レビュー総数：118件（5サイト）</a:t>
             </a:r>
             <a:endParaRPr lang="en-US" sz="1000" dirty="0"/>
           </a:p>
@@ -2812,7 +2812,7 @@
                 <a:ea typeface="Arial" pitchFamily="34" charset="-122"/>
                 <a:cs typeface="Arial" pitchFamily="34" charset="-120"/>
               </a:rPr>
-              <a:t>作成日：2026年3月24日</a:t>
+              <a:t>作成日：2026年3月25日</a:t>
             </a:r>
             <a:endParaRPr lang="en-US" sz="1000" dirty="0"/>
           </a:p>
@@ -3358,7 +3358,7 @@
                           <a:ea typeface="Arial" pitchFamily="34" charset="-122"/>
                           <a:cs typeface="Arial" pitchFamily="34" charset="-120"/>
                         </a:rPr>
-                        <a:t>7.03点</a:t>
+                        <a:t>7.12点</a:t>
                       </a:r>
                       <a:endParaRPr lang="en-US" sz="1000" dirty="0">
                         <a:latin typeface="Arial" charset="0"/>
@@ -3426,7 +3426,7 @@
                           <a:ea typeface="Arial" pitchFamily="34" charset="-122"/>
                           <a:cs typeface="Arial" pitchFamily="34" charset="-120"/>
                         </a:rPr>
-                        <a:t>7.5点以上</a:t>
+                        <a:t>7.6点以上</a:t>
                       </a:r>
                       <a:endParaRPr lang="en-US" sz="1000" dirty="0">
                         <a:latin typeface="Arial" charset="0"/>
@@ -3906,7 +3906,7 @@
                           <a:ea typeface="Arial" pitchFamily="34" charset="-122"/>
                           <a:cs typeface="Arial" pitchFamily="34" charset="-120"/>
                         </a:rPr>
-                        <a:t>14.2%</a:t>
+                        <a:t>11.9%</a:t>
                       </a:r>
                       <a:endParaRPr lang="en-US" sz="1000" dirty="0">
                         <a:latin typeface="Arial" charset="0"/>
@@ -3974,7 +3974,7 @@
                           <a:ea typeface="Arial" pitchFamily="34" charset="-122"/>
                           <a:cs typeface="Arial" pitchFamily="34" charset="-120"/>
                         </a:rPr>
-                        <a:t>9%以下</a:t>
+                        <a:t>7%以下</a:t>
                       </a:r>
                       <a:endParaRPr lang="en-US" sz="1000" dirty="0">
                         <a:latin typeface="Arial" charset="0"/>
@@ -4112,280 +4112,6 @@
                           <a:ea typeface="Arial" pitchFamily="34" charset="-122"/>
                           <a:cs typeface="Arial" pitchFamily="34" charset="-120"/>
                         </a:rPr>
-                        <a:t>Google平均評価</a:t>
-                      </a:r>
-                      <a:endParaRPr lang="en-US" sz="1000" dirty="0">
-                        <a:latin typeface="Arial" charset="0"/>
-                        <a:ea typeface="Arial" charset="0"/>
-                        <a:cs typeface="Arial" charset="0"/>
-                      </a:endParaRPr>
-                    </a:p>
-                  </a:txBody>
-                  <a:tcPr marL="91440" marR="91440" marT="45720" marB="45720">
-                    <a:lnL w="6350" cap="flat" cmpd="sng" algn="ctr">
-                      <a:solidFill>
-                        <a:srgbClr val="CBD5E1"/>
-                      </a:solidFill>
-                      <a:prstDash val="solid"/>
-                      <a:round/>
-                      <a:headEnd type="none" w="med" len="med"/>
-                      <a:tailEnd type="none" w="med" len="med"/>
-                    </a:lnL>
-                    <a:lnR w="6350" cap="flat" cmpd="sng" algn="ctr">
-                      <a:solidFill>
-                        <a:srgbClr val="CBD5E1"/>
-                      </a:solidFill>
-                      <a:prstDash val="solid"/>
-                      <a:round/>
-                      <a:headEnd type="none" w="med" len="med"/>
-                      <a:tailEnd type="none" w="med" len="med"/>
-                    </a:lnR>
-                    <a:lnT w="6350" cap="flat" cmpd="sng" algn="ctr">
-                      <a:solidFill>
-                        <a:srgbClr val="CBD5E1"/>
-                      </a:solidFill>
-                      <a:prstDash val="solid"/>
-                      <a:round/>
-                      <a:headEnd type="none" w="med" len="med"/>
-                      <a:tailEnd type="none" w="med" len="med"/>
-                    </a:lnT>
-                    <a:lnB w="6350" cap="flat" cmpd="sng" algn="ctr">
-                      <a:solidFill>
-                        <a:srgbClr val="CBD5E1"/>
-                      </a:solidFill>
-                      <a:prstDash val="solid"/>
-                      <a:round/>
-                      <a:headEnd type="none" w="med" len="med"/>
-                      <a:tailEnd type="none" w="med" len="med"/>
-                    </a:lnB>
-                    <a:solidFill>
-                      <a:srgbClr val="FFFFFF"/>
-                    </a:solidFill>
-                  </a:tcPr>
-                </a:tc>
-                <a:tc>
-                  <a:txBody>
-                    <a:bodyPr/>
-                    <a:lstStyle/>
-                    <a:p>
-                      <a:pPr algn="ctr" indent="0" marL="0">
-                        <a:buNone/>
-                      </a:pPr>
-                      <a:r>
-                        <a:rPr lang="en-US" sz="1000" dirty="0">
-                          <a:solidFill>
-                            <a:srgbClr val="64748B"/>
-                          </a:solidFill>
-                          <a:latin typeface="Arial" pitchFamily="34" charset="0"/>
-                          <a:ea typeface="Arial" pitchFamily="34" charset="-122"/>
-                          <a:cs typeface="Arial" pitchFamily="34" charset="-120"/>
-                        </a:rPr>
-                        <a:t>6.2点</a:t>
-                      </a:r>
-                      <a:endParaRPr lang="en-US" sz="1000" dirty="0">
-                        <a:latin typeface="Arial" charset="0"/>
-                        <a:ea typeface="Arial" charset="0"/>
-                        <a:cs typeface="Arial" charset="0"/>
-                      </a:endParaRPr>
-                    </a:p>
-                  </a:txBody>
-                  <a:tcPr marL="91440" marR="91440" marT="45720" marB="45720">
-                    <a:lnL w="6350" cap="flat" cmpd="sng" algn="ctr">
-                      <a:solidFill>
-                        <a:srgbClr val="CBD5E1"/>
-                      </a:solidFill>
-                      <a:prstDash val="solid"/>
-                      <a:round/>
-                      <a:headEnd type="none" w="med" len="med"/>
-                      <a:tailEnd type="none" w="med" len="med"/>
-                    </a:lnL>
-                    <a:lnR w="6350" cap="flat" cmpd="sng" algn="ctr">
-                      <a:solidFill>
-                        <a:srgbClr val="CBD5E1"/>
-                      </a:solidFill>
-                      <a:prstDash val="solid"/>
-                      <a:round/>
-                      <a:headEnd type="none" w="med" len="med"/>
-                      <a:tailEnd type="none" w="med" len="med"/>
-                    </a:lnR>
-                    <a:lnT w="6350" cap="flat" cmpd="sng" algn="ctr">
-                      <a:solidFill>
-                        <a:srgbClr val="CBD5E1"/>
-                      </a:solidFill>
-                      <a:prstDash val="solid"/>
-                      <a:round/>
-                      <a:headEnd type="none" w="med" len="med"/>
-                      <a:tailEnd type="none" w="med" len="med"/>
-                    </a:lnT>
-                    <a:lnB w="6350" cap="flat" cmpd="sng" algn="ctr">
-                      <a:solidFill>
-                        <a:srgbClr val="CBD5E1"/>
-                      </a:solidFill>
-                      <a:prstDash val="solid"/>
-                      <a:round/>
-                      <a:headEnd type="none" w="med" len="med"/>
-                      <a:tailEnd type="none" w="med" len="med"/>
-                    </a:lnB>
-                    <a:solidFill>
-                      <a:srgbClr val="FFFFFF"/>
-                    </a:solidFill>
-                  </a:tcPr>
-                </a:tc>
-                <a:tc>
-                  <a:txBody>
-                    <a:bodyPr/>
-                    <a:lstStyle/>
-                    <a:p>
-                      <a:pPr algn="ctr" indent="0" marL="0">
-                        <a:buNone/>
-                      </a:pPr>
-                      <a:r>
-                        <a:rPr lang="en-US" sz="1000" b="1" dirty="0">
-                          <a:solidFill>
-                            <a:srgbClr val="16A34A"/>
-                          </a:solidFill>
-                          <a:latin typeface="Arial" pitchFamily="34" charset="0"/>
-                          <a:ea typeface="Arial" pitchFamily="34" charset="-122"/>
-                          <a:cs typeface="Arial" pitchFamily="34" charset="-120"/>
-                        </a:rPr>
-                        <a:t>7.2点以上</a:t>
-                      </a:r>
-                      <a:endParaRPr lang="en-US" sz="1000" dirty="0">
-                        <a:latin typeface="Arial" charset="0"/>
-                        <a:ea typeface="Arial" charset="0"/>
-                        <a:cs typeface="Arial" charset="0"/>
-                      </a:endParaRPr>
-                    </a:p>
-                  </a:txBody>
-                  <a:tcPr marL="91440" marR="91440" marT="45720" marB="45720">
-                    <a:lnL w="6350" cap="flat" cmpd="sng" algn="ctr">
-                      <a:solidFill>
-                        <a:srgbClr val="CBD5E1"/>
-                      </a:solidFill>
-                      <a:prstDash val="solid"/>
-                      <a:round/>
-                      <a:headEnd type="none" w="med" len="med"/>
-                      <a:tailEnd type="none" w="med" len="med"/>
-                    </a:lnL>
-                    <a:lnR w="6350" cap="flat" cmpd="sng" algn="ctr">
-                      <a:solidFill>
-                        <a:srgbClr val="CBD5E1"/>
-                      </a:solidFill>
-                      <a:prstDash val="solid"/>
-                      <a:round/>
-                      <a:headEnd type="none" w="med" len="med"/>
-                      <a:tailEnd type="none" w="med" len="med"/>
-                    </a:lnR>
-                    <a:lnT w="6350" cap="flat" cmpd="sng" algn="ctr">
-                      <a:solidFill>
-                        <a:srgbClr val="CBD5E1"/>
-                      </a:solidFill>
-                      <a:prstDash val="solid"/>
-                      <a:round/>
-                      <a:headEnd type="none" w="med" len="med"/>
-                      <a:tailEnd type="none" w="med" len="med"/>
-                    </a:lnT>
-                    <a:lnB w="6350" cap="flat" cmpd="sng" algn="ctr">
-                      <a:solidFill>
-                        <a:srgbClr val="CBD5E1"/>
-                      </a:solidFill>
-                      <a:prstDash val="solid"/>
-                      <a:round/>
-                      <a:headEnd type="none" w="med" len="med"/>
-                      <a:tailEnd type="none" w="med" len="med"/>
-                    </a:lnB>
-                    <a:solidFill>
-                      <a:srgbClr val="FFFFFF"/>
-                    </a:solidFill>
-                  </a:tcPr>
-                </a:tc>
-                <a:tc>
-                  <a:txBody>
-                    <a:bodyPr/>
-                    <a:lstStyle/>
-                    <a:p>
-                      <a:pPr algn="ctr" indent="0" marL="0">
-                        <a:buNone/>
-                      </a:pPr>
-                      <a:r>
-                        <a:rPr lang="en-US" sz="1000" dirty="0">
-                          <a:solidFill>
-                            <a:srgbClr val="64748B"/>
-                          </a:solidFill>
-                          <a:latin typeface="Arial" pitchFamily="34" charset="0"/>
-                          <a:ea typeface="Arial" pitchFamily="34" charset="-122"/>
-                          <a:cs typeface="Arial" pitchFamily="34" charset="-120"/>
-                        </a:rPr>
-                        <a:t>2026年9月</a:t>
-                      </a:r>
-                      <a:endParaRPr lang="en-US" sz="1000" dirty="0">
-                        <a:latin typeface="Arial" charset="0"/>
-                        <a:ea typeface="Arial" charset="0"/>
-                        <a:cs typeface="Arial" charset="0"/>
-                      </a:endParaRPr>
-                    </a:p>
-                  </a:txBody>
-                  <a:tcPr marL="91440" marR="91440" marT="45720" marB="45720">
-                    <a:lnL w="6350" cap="flat" cmpd="sng" algn="ctr">
-                      <a:solidFill>
-                        <a:srgbClr val="CBD5E1"/>
-                      </a:solidFill>
-                      <a:prstDash val="solid"/>
-                      <a:round/>
-                      <a:headEnd type="none" w="med" len="med"/>
-                      <a:tailEnd type="none" w="med" len="med"/>
-                    </a:lnL>
-                    <a:lnR w="6350" cap="flat" cmpd="sng" algn="ctr">
-                      <a:solidFill>
-                        <a:srgbClr val="CBD5E1"/>
-                      </a:solidFill>
-                      <a:prstDash val="solid"/>
-                      <a:round/>
-                      <a:headEnd type="none" w="med" len="med"/>
-                      <a:tailEnd type="none" w="med" len="med"/>
-                    </a:lnR>
-                    <a:lnT w="6350" cap="flat" cmpd="sng" algn="ctr">
-                      <a:solidFill>
-                        <a:srgbClr val="CBD5E1"/>
-                      </a:solidFill>
-                      <a:prstDash val="solid"/>
-                      <a:round/>
-                      <a:headEnd type="none" w="med" len="med"/>
-                      <a:tailEnd type="none" w="med" len="med"/>
-                    </a:lnT>
-                    <a:lnB w="6350" cap="flat" cmpd="sng" algn="ctr">
-                      <a:solidFill>
-                        <a:srgbClr val="CBD5E1"/>
-                      </a:solidFill>
-                      <a:prstDash val="solid"/>
-                      <a:round/>
-                      <a:headEnd type="none" w="med" len="med"/>
-                      <a:tailEnd type="none" w="med" len="med"/>
-                    </a:lnB>
-                    <a:solidFill>
-                      <a:srgbClr val="FFFFFF"/>
-                    </a:solidFill>
-                  </a:tcPr>
-                </a:tc>
-              </a:tr>
-              <a:tr h="320040">
-                <a:tc>
-                  <a:txBody>
-                    <a:bodyPr/>
-                    <a:lstStyle/>
-                    <a:p>
-                      <a:pPr indent="0" marL="0">
-                        <a:buNone/>
-                      </a:pPr>
-                      <a:r>
-                        <a:rPr lang="en-US" sz="1000" b="1" dirty="0">
-                          <a:solidFill>
-                            <a:srgbClr val="334155"/>
-                          </a:solidFill>
-                          <a:latin typeface="Arial" pitchFamily="34" charset="0"/>
-                          <a:ea typeface="Arial" pitchFamily="34" charset="-122"/>
-                          <a:cs typeface="Arial" pitchFamily="34" charset="-120"/>
-                        </a:rPr>
                         <a:t>口コミ返信率</a:t>
                       </a:r>
                       <a:endParaRPr lang="en-US" sz="1000" dirty="0">
@@ -4433,7 +4159,7 @@
                       <a:tailEnd type="none" w="med" len="med"/>
                     </a:lnB>
                     <a:solidFill>
-                      <a:srgbClr val="E8EFF8"/>
+                      <a:srgbClr val="FFFFFF"/>
                     </a:solidFill>
                   </a:tcPr>
                 </a:tc>
@@ -4501,7 +4227,7 @@
                       <a:tailEnd type="none" w="med" len="med"/>
                     </a:lnB>
                     <a:solidFill>
-                      <a:srgbClr val="E8EFF8"/>
+                      <a:srgbClr val="FFFFFF"/>
                     </a:solidFill>
                   </a:tcPr>
                 </a:tc>
@@ -4569,7 +4295,7 @@
                       <a:tailEnd type="none" w="med" len="med"/>
                     </a:lnB>
                     <a:solidFill>
-                      <a:srgbClr val="E8EFF8"/>
+                      <a:srgbClr val="FFFFFF"/>
                     </a:solidFill>
                   </a:tcPr>
                 </a:tc>
@@ -4637,7 +4363,7 @@
                       <a:tailEnd type="none" w="med" len="med"/>
                     </a:lnB>
                     <a:solidFill>
-                      <a:srgbClr val="E8EFF8"/>
+                      <a:srgbClr val="FFFFFF"/>
                     </a:solidFill>
                   </a:tcPr>
                 </a:tc>
@@ -4707,7 +4433,7 @@
                       <a:tailEnd type="none" w="med" len="med"/>
                     </a:lnB>
                     <a:solidFill>
-                      <a:srgbClr val="FFFFFF"/>
+                      <a:srgbClr val="E8EFF8"/>
                     </a:solidFill>
                   </a:tcPr>
                 </a:tc>
@@ -4728,7 +4454,7 @@
                           <a:ea typeface="Arial" pitchFamily="34" charset="-122"/>
                           <a:cs typeface="Arial" pitchFamily="34" charset="-120"/>
                         </a:rPr>
-                        <a:t>約13件/期間</a:t>
+                        <a:t>約16件/期間</a:t>
                       </a:r>
                       <a:endParaRPr lang="en-US" sz="1000" dirty="0">
                         <a:latin typeface="Arial" charset="0"/>
@@ -4775,7 +4501,7 @@
                       <a:tailEnd type="none" w="med" len="med"/>
                     </a:lnB>
                     <a:solidFill>
-                      <a:srgbClr val="FFFFFF"/>
+                      <a:srgbClr val="E8EFF8"/>
                     </a:solidFill>
                   </a:tcPr>
                 </a:tc>
@@ -4796,7 +4522,7 @@
                           <a:ea typeface="Arial" pitchFamily="34" charset="-122"/>
                           <a:cs typeface="Arial" pitchFamily="34" charset="-120"/>
                         </a:rPr>
-                        <a:t>6件以下</a:t>
+                        <a:t>8件以下</a:t>
                       </a:r>
                       <a:endParaRPr lang="en-US" sz="1000" dirty="0">
                         <a:latin typeface="Arial" charset="0"/>
@@ -4843,7 +4569,7 @@
                       <a:tailEnd type="none" w="med" len="med"/>
                     </a:lnB>
                     <a:solidFill>
-                      <a:srgbClr val="FFFFFF"/>
+                      <a:srgbClr val="E8EFF8"/>
                     </a:solidFill>
                   </a:tcPr>
                 </a:tc>
@@ -4911,7 +4637,7 @@
                       <a:tailEnd type="none" w="med" len="med"/>
                     </a:lnB>
                     <a:solidFill>
-                      <a:srgbClr val="FFFFFF"/>
+                      <a:srgbClr val="E8EFF8"/>
                     </a:solidFill>
                   </a:tcPr>
                 </a:tc>
@@ -4928,7 +4654,7 @@
         </p:nvSpPr>
         <p:spPr>
           <a:xfrm>
-            <a:off x="457200" y="3429000"/>
+            <a:off x="457200" y="3108960"/>
             <a:ext cx="8229600" cy="640080"/>
           </a:xfrm>
           <a:prstGeom prst="rect">
@@ -4955,7 +4681,7 @@
         </p:nvSpPr>
         <p:spPr>
           <a:xfrm>
-            <a:off x="457200" y="3429000"/>
+            <a:off x="457200" y="3108960"/>
             <a:ext cx="54864" cy="640080"/>
           </a:xfrm>
           <a:prstGeom prst="rect">
@@ -4975,7 +4701,7 @@
         </p:nvSpPr>
         <p:spPr>
           <a:xfrm>
-            <a:off x="640080" y="3429000"/>
+            <a:off x="640080" y="3108960"/>
             <a:ext cx="7863840" cy="640080"/>
           </a:xfrm>
           <a:prstGeom prst="rect">
@@ -5367,7 +5093,7 @@
                 <a:ea typeface="Arial" pitchFamily="34" charset="-122"/>
                 <a:cs typeface="Arial" pitchFamily="34" charset="-120"/>
               </a:rPr>
-              <a:t>7.03</a:t>
+              <a:t>7.12</a:t>
             </a:r>
             <a:endParaRPr lang="en-US" sz="3200" dirty="0"/>
           </a:p>
@@ -5617,7 +5343,7 @@
                 <a:ea typeface="Arial" pitchFamily="34" charset="-122"/>
                 <a:cs typeface="Arial" pitchFamily="34" charset="-120"/>
               </a:rPr>
-              <a:t>14.2%</a:t>
+              <a:t>11.9%</a:t>
             </a:r>
             <a:endParaRPr lang="en-US" sz="3200" dirty="0"/>
           </a:p>
@@ -5742,7 +5468,7 @@
                 <a:ea typeface="Arial" pitchFamily="34" charset="-122"/>
                 <a:cs typeface="Arial" pitchFamily="34" charset="-120"/>
               </a:rPr>
-              <a:t>120件</a:t>
+              <a:t>118件</a:t>
             </a:r>
             <a:endParaRPr lang="en-US" sz="3200" dirty="0"/>
           </a:p>
@@ -5890,7 +5616,7 @@
                 <a:ea typeface="Arial" pitchFamily="34" charset="-122"/>
                 <a:cs typeface="Arial" pitchFamily="34" charset="-120"/>
               </a:rPr>
-              <a:t>  あと駅から近いのがよかったです</a:t>
+              <a:t>  駅から近いので便利 エアコンが暖房のみだった</a:t>
             </a:r>
             <a:endParaRPr lang="en-US" sz="1100" dirty="0"/>
           </a:p>
@@ -5930,7 +5656,7 @@
                 <a:ea typeface="Arial" pitchFamily="34" charset="-122"/>
                 <a:cs typeface="Arial" pitchFamily="34" charset="-120"/>
               </a:rPr>
-              <a:t>  コーヒーとミネラルウォーターのサービスが良かった 特にない 特にない</a:t>
+              <a:t>  スタッフも感じが良い</a:t>
             </a:r>
             <a:endParaRPr lang="en-US" sz="1100" dirty="0"/>
           </a:p>
@@ -5950,7 +5676,7 @@
                 <a:ea typeface="Arial" pitchFamily="34" charset="-122"/>
                 <a:cs typeface="Arial" pitchFamily="34" charset="-120"/>
               </a:rPr>
-              <a:t>快適さ・設備 </a:t>
+              <a:t>清潔さ・清掃 </a:t>
             </a:r>
             <a:endParaRPr lang="en-US" sz="1100" dirty="0"/>
           </a:p>
@@ -5970,7 +5696,7 @@
                 <a:ea typeface="Arial" pitchFamily="34" charset="-122"/>
                 <a:cs typeface="Arial" pitchFamily="34" charset="-120"/>
               </a:rPr>
-              <a:t>  部屋も広く清潔で快適に過ごす事が出来ました</a:t>
+              <a:t>  部屋が綺麗</a:t>
             </a:r>
             <a:endParaRPr lang="en-US" sz="1100" dirty="0"/>
           </a:p>
@@ -6118,7 +5844,7 @@
                 <a:ea typeface="Arial" pitchFamily="34" charset="-122"/>
                 <a:cs typeface="Arial" pitchFamily="34" charset="-120"/>
               </a:rPr>
-              <a:t>  さらに良いホテルになって欲しいという意味であえてコメントすると、①二つ枕があるので、片方は高めの枕、もう片方は低め...</a:t>
+              <a:t>  シャワーの温度調節に苦労します</a:t>
             </a:r>
             <a:endParaRPr lang="en-US" sz="1100" dirty="0"/>
           </a:p>
@@ -6158,7 +5884,7 @@
                 <a:ea typeface="Arial" pitchFamily="34" charset="-122"/>
                 <a:cs typeface="Arial" pitchFamily="34" charset="-120"/>
               </a:rPr>
-              <a:t>  エアコンは集中式なので、温度調節ができません</a:t>
+              <a:t>  シャワーの温度調節に苦労します</a:t>
             </a:r>
             <a:endParaRPr lang="en-US" sz="1100" dirty="0"/>
           </a:p>
@@ -6178,7 +5904,7 @@
                 <a:ea typeface="Arial" pitchFamily="34" charset="-122"/>
                 <a:cs typeface="Arial" pitchFamily="34" charset="-120"/>
               </a:rPr>
-              <a:t>防音性能 </a:t>
+              <a:t>設備の老朽化 </a:t>
             </a:r>
             <a:endParaRPr lang="en-US" sz="1100" dirty="0"/>
           </a:p>
@@ -6198,7 +5924,7 @@
                 <a:ea typeface="Arial" pitchFamily="34" charset="-122"/>
                 <a:cs typeface="Arial" pitchFamily="34" charset="-120"/>
               </a:rPr>
-              <a:t>  各部屋の騒音がうるさかった</a:t>
+              <a:t>  少し建物古いかも</a:t>
             </a:r>
             <a:endParaRPr lang="en-US" sz="1100" dirty="0"/>
           </a:p>
@@ -6551,7 +6277,7 @@
                 <a:ea typeface="Arial" pitchFamily="34" charset="-122"/>
                 <a:cs typeface="Arial" pitchFamily="34" charset="-120"/>
               </a:rPr>
-              <a:t>7.03</a:t>
+              <a:t>7.12</a:t>
             </a:r>
             <a:endParaRPr lang="en-US" sz="3200" dirty="0"/>
           </a:p>
@@ -6801,7 +6527,7 @@
                 <a:ea typeface="Arial" pitchFamily="34" charset="-122"/>
                 <a:cs typeface="Arial" pitchFamily="34" charset="-120"/>
               </a:rPr>
-              <a:t>14.2%</a:t>
+              <a:t>11.9%</a:t>
             </a:r>
             <a:endParaRPr lang="en-US" sz="3200" dirty="0"/>
           </a:p>
@@ -6926,7 +6652,7 @@
                 <a:ea typeface="Arial" pitchFamily="34" charset="-122"/>
                 <a:cs typeface="Arial" pitchFamily="34" charset="-120"/>
               </a:rPr>
-              <a:t>120件</a:t>
+              <a:t>118件</a:t>
             </a:r>
             <a:endParaRPr lang="en-US" sz="3200" dirty="0"/>
           </a:p>
@@ -7347,56 +7073,7 @@
                 <a:ea typeface="Arial" pitchFamily="34" charset="-122"/>
                 <a:cs typeface="Arial" pitchFamily="34" charset="-120"/>
               </a:rPr>
-              <a:t>Trip.com(9.00)が最高スコア。</a:t>
-            </a:r>
-            <a:endParaRPr lang="en-US" sz="1100" dirty="0"/>
-          </a:p>
-          <a:p>
-            <a:pPr indent="0" marL="0">
-              <a:spcAft>
-                <a:spcPts val="200"/>
-              </a:spcAft>
-              <a:buNone/>
-            </a:pPr>
-            <a:endParaRPr lang="en-US" sz="1100" dirty="0"/>
-          </a:p>
-          <a:p>
-            <a:pPr indent="0" marL="0">
-              <a:spcAft>
-                <a:spcPts val="200"/>
-              </a:spcAft>
-              <a:buNone/>
-            </a:pPr>
-            <a:r>
-              <a:rPr lang="en-US" sz="1100" b="1" dirty="0">
-                <a:solidFill>
-                  <a:srgbClr val="DC2626"/>
-                </a:solidFill>
-                <a:latin typeface="Arial" pitchFamily="34" charset="0"/>
-                <a:ea typeface="Arial" pitchFamily="34" charset="-122"/>
-                <a:cs typeface="Arial" pitchFamily="34" charset="-120"/>
-              </a:rPr>
-              <a:t>改善対象サイト</a:t>
-            </a:r>
-            <a:endParaRPr lang="en-US" sz="1100" dirty="0"/>
-          </a:p>
-          <a:p>
-            <a:pPr indent="0" marL="0">
-              <a:spcAft>
-                <a:spcPts val="200"/>
-              </a:spcAft>
-              <a:buNone/>
-            </a:pPr>
-            <a:r>
-              <a:rPr lang="en-US" sz="900" dirty="0">
-                <a:solidFill>
-                  <a:srgbClr val="64748B"/>
-                </a:solidFill>
-                <a:latin typeface="Arial" pitchFamily="34" charset="0"/>
-                <a:ea typeface="Arial" pitchFamily="34" charset="-122"/>
-                <a:cs typeface="Arial" pitchFamily="34" charset="-120"/>
-              </a:rPr>
-              <a:t>Google(6.2)が相対的に低い。口コミ返信の強化が急務</a:t>
+              <a:t>Google(7.71)が最高スコア。</a:t>
             </a:r>
             <a:endParaRPr lang="en-US" sz="1100" dirty="0"/>
           </a:p>
@@ -7837,7 +7514,7 @@
                           <a:ea typeface="Arial" pitchFamily="34" charset="-122"/>
                           <a:cs typeface="Arial" pitchFamily="34" charset="-120"/>
                         </a:rPr>
-                        <a:t>Trip.com</a:t>
+                        <a:t>Google</a:t>
                       </a:r>
                       <a:endParaRPr lang="en-US" sz="900" dirty="0">
                         <a:latin typeface="Arial" charset="0"/>
@@ -7905,7 +7582,7 @@
                           <a:ea typeface="Arial" pitchFamily="34" charset="-122"/>
                           <a:cs typeface="Arial" pitchFamily="34" charset="-120"/>
                         </a:rPr>
-                        <a:t>2</a:t>
+                        <a:t>7</a:t>
                       </a:r>
                       <a:endParaRPr lang="en-US" sz="900" dirty="0">
                         <a:latin typeface="Arial" charset="0"/>
@@ -7973,7 +7650,7 @@
                           <a:ea typeface="Arial" pitchFamily="34" charset="-122"/>
                           <a:cs typeface="Arial" pitchFamily="34" charset="-120"/>
                         </a:rPr>
-                        <a:t>9</a:t>
+                        <a:t>3.86</a:t>
                       </a:r>
                       <a:endParaRPr lang="en-US" sz="900" dirty="0">
                         <a:latin typeface="Arial" charset="0"/>
@@ -8041,7 +7718,7 @@
                           <a:ea typeface="Arial" pitchFamily="34" charset="-122"/>
                           <a:cs typeface="Arial" pitchFamily="34" charset="-120"/>
                         </a:rPr>
-                        <a:t>/10</a:t>
+                        <a:t>/5 (×2)</a:t>
                       </a:r>
                       <a:endParaRPr lang="en-US" sz="900" dirty="0">
                         <a:latin typeface="Arial" charset="0"/>
@@ -8109,7 +7786,7 @@
                           <a:ea typeface="Arial" pitchFamily="34" charset="-122"/>
                           <a:cs typeface="Arial" pitchFamily="34" charset="-120"/>
                         </a:rPr>
-                        <a:t>9</a:t>
+                        <a:t>7.71</a:t>
                       </a:r>
                       <a:endParaRPr lang="en-US" sz="900" dirty="0">
                         <a:latin typeface="Arial" charset="0"/>
@@ -8247,7 +7924,7 @@
                           <a:ea typeface="Arial" pitchFamily="34" charset="-122"/>
                           <a:cs typeface="Arial" pitchFamily="34" charset="-120"/>
                         </a:rPr>
-                        <a:t>8</a:t>
+                        <a:t>6</a:t>
                       </a:r>
                       <a:endParaRPr lang="en-US" sz="900" dirty="0">
                         <a:latin typeface="Arial" charset="0"/>
@@ -8315,7 +7992,7 @@
                           <a:ea typeface="Arial" pitchFamily="34" charset="-122"/>
                           <a:cs typeface="Arial" pitchFamily="34" charset="-120"/>
                         </a:rPr>
-                        <a:t>3.75</a:t>
+                        <a:t>3.83</a:t>
                       </a:r>
                       <a:endParaRPr lang="en-US" sz="900" dirty="0">
                         <a:latin typeface="Arial" charset="0"/>
@@ -8451,7 +8128,7 @@
                           <a:ea typeface="Arial" pitchFamily="34" charset="-122"/>
                           <a:cs typeface="Arial" pitchFamily="34" charset="-120"/>
                         </a:rPr>
-                        <a:t>7.5</a:t>
+                        <a:t>7.67</a:t>
                       </a:r>
                       <a:endParaRPr lang="en-US" sz="900" dirty="0">
                         <a:latin typeface="Arial" charset="0"/>
@@ -8589,7 +8266,7 @@
                           <a:ea typeface="Arial" pitchFamily="34" charset="-122"/>
                           <a:cs typeface="Arial" pitchFamily="34" charset="-120"/>
                         </a:rPr>
-                        <a:t>13</a:t>
+                        <a:t>11</a:t>
                       </a:r>
                       <a:endParaRPr lang="en-US" sz="900" dirty="0">
                         <a:latin typeface="Arial" charset="0"/>
@@ -8657,7 +8334,7 @@
                           <a:ea typeface="Arial" pitchFamily="34" charset="-122"/>
                           <a:cs typeface="Arial" pitchFamily="34" charset="-120"/>
                         </a:rPr>
-                        <a:t>3.69</a:t>
+                        <a:t>3.64</a:t>
                       </a:r>
                       <a:endParaRPr lang="en-US" sz="900" dirty="0">
                         <a:latin typeface="Arial" charset="0"/>
@@ -8793,7 +8470,7 @@
                           <a:ea typeface="Arial" pitchFamily="34" charset="-122"/>
                           <a:cs typeface="Arial" pitchFamily="34" charset="-120"/>
                         </a:rPr>
-                        <a:t>7.38</a:t>
+                        <a:t>7.27</a:t>
                       </a:r>
                       <a:endParaRPr lang="en-US" sz="900" dirty="0">
                         <a:latin typeface="Arial" charset="0"/>
@@ -8931,7 +8608,7 @@
                           <a:ea typeface="Arial" pitchFamily="34" charset="-122"/>
                           <a:cs typeface="Arial" pitchFamily="34" charset="-120"/>
                         </a:rPr>
-                        <a:t>85</a:t>
+                        <a:t>91</a:t>
                       </a:r>
                       <a:endParaRPr lang="en-US" sz="900" dirty="0">
                         <a:latin typeface="Arial" charset="0"/>
@@ -8999,7 +8676,7 @@
                           <a:ea typeface="Arial" pitchFamily="34" charset="-122"/>
                           <a:cs typeface="Arial" pitchFamily="34" charset="-120"/>
                         </a:rPr>
-                        <a:t>7.01</a:t>
+                        <a:t>7.03</a:t>
                       </a:r>
                       <a:endParaRPr lang="en-US" sz="900" dirty="0">
                         <a:latin typeface="Arial" charset="0"/>
@@ -9135,7 +8812,7 @@
                           <a:ea typeface="Arial" pitchFamily="34" charset="-122"/>
                           <a:cs typeface="Arial" pitchFamily="34" charset="-120"/>
                         </a:rPr>
-                        <a:t>7.01</a:t>
+                        <a:t>7.03</a:t>
                       </a:r>
                       <a:endParaRPr lang="en-US" sz="900" dirty="0">
                         <a:latin typeface="Arial" charset="0"/>
@@ -9205,7 +8882,7 @@
                           <a:ea typeface="Arial" pitchFamily="34" charset="-122"/>
                           <a:cs typeface="Arial" pitchFamily="34" charset="-120"/>
                         </a:rPr>
-                        <a:t>Google</a:t>
+                        <a:t>Trip.com</a:t>
                       </a:r>
                       <a:endParaRPr lang="en-US" sz="900" dirty="0">
                         <a:latin typeface="Arial" charset="0"/>
@@ -9273,7 +8950,7 @@
                           <a:ea typeface="Arial" pitchFamily="34" charset="-122"/>
                           <a:cs typeface="Arial" pitchFamily="34" charset="-120"/>
                         </a:rPr>
-                        <a:t>12</a:t>
+                        <a:t>3</a:t>
                       </a:r>
                       <a:endParaRPr lang="en-US" sz="900" dirty="0">
                         <a:latin typeface="Arial" charset="0"/>
@@ -9341,7 +9018,7 @@
                           <a:ea typeface="Arial" pitchFamily="34" charset="-122"/>
                           <a:cs typeface="Arial" pitchFamily="34" charset="-120"/>
                         </a:rPr>
-                        <a:t>3.08</a:t>
+                        <a:t>6.67</a:t>
                       </a:r>
                       <a:endParaRPr lang="en-US" sz="900" dirty="0">
                         <a:latin typeface="Arial" charset="0"/>
@@ -9409,7 +9086,7 @@
                           <a:ea typeface="Arial" pitchFamily="34" charset="-122"/>
                           <a:cs typeface="Arial" pitchFamily="34" charset="-120"/>
                         </a:rPr>
-                        <a:t>/5 (×2)</a:t>
+                        <a:t>/10</a:t>
                       </a:r>
                       <a:endParaRPr lang="en-US" sz="900" dirty="0">
                         <a:latin typeface="Arial" charset="0"/>
@@ -9477,7 +9154,7 @@
                           <a:ea typeface="Arial" pitchFamily="34" charset="-122"/>
                           <a:cs typeface="Arial" pitchFamily="34" charset="-120"/>
                         </a:rPr>
-                        <a:t>6.17</a:t>
+                        <a:t>6.67</a:t>
                       </a:r>
                       <a:endParaRPr lang="en-US" sz="900" dirty="0">
                         <a:latin typeface="Arial" charset="0"/>
@@ -9885,7 +9562,7 @@
                 <a:ea typeface="Arial" pitchFamily="34" charset="-122"/>
                 <a:cs typeface="Arial" pitchFamily="34" charset="-120"/>
               </a:rPr>
-              <a:t>61件（50.8%）</a:t>
+              <a:t>60件（50.8%）</a:t>
             </a:r>
             <a:endParaRPr lang="en-US" sz="1100" dirty="0"/>
           </a:p>
@@ -9983,7 +9660,7 @@
                 <a:ea typeface="Arial" pitchFamily="34" charset="-122"/>
                 <a:cs typeface="Arial" pitchFamily="34" charset="-120"/>
               </a:rPr>
-              <a:t>42件（35.0%）</a:t>
+              <a:t>44件（37.3%）</a:t>
             </a:r>
             <a:endParaRPr lang="en-US" sz="1100" dirty="0"/>
           </a:p>
@@ -10081,7 +9758,7 @@
                 <a:ea typeface="Arial" pitchFamily="34" charset="-122"/>
                 <a:cs typeface="Arial" pitchFamily="34" charset="-120"/>
               </a:rPr>
-              <a:t>17件（14.2%）</a:t>
+              <a:t>14件（11.9%）</a:t>
             </a:r>
             <a:endParaRPr lang="en-US" sz="1100" dirty="0"/>
           </a:p>
@@ -10493,7 +10170,7 @@
                 <a:ea typeface="Arial" pitchFamily="34" charset="-122"/>
                 <a:cs typeface="Arial" pitchFamily="34" charset="-120"/>
               </a:rPr>
-              <a:t>あと駅から近いのがよかったです</a:t>
+              <a:t>駅から近いので便利 エアコンが暖房のみだった</a:t>
             </a:r>
             <a:endParaRPr lang="en-US" sz="900" dirty="0"/>
           </a:p>
@@ -10532,7 +10209,7 @@
                 <a:ea typeface="Arial" pitchFamily="34" charset="-122"/>
                 <a:cs typeface="Arial" pitchFamily="34" charset="-120"/>
               </a:rPr>
-              <a:t>「横浜駅近くのKアリーナでのライブ遠征にて利用」</a:t>
+              <a:t>「横浜アリーナに近い エアコン設置されてるが温度調整出来ない」</a:t>
             </a:r>
             <a:endParaRPr lang="en-US" sz="900" dirty="0"/>
           </a:p>
@@ -10638,7 +10315,7 @@
                 <a:ea typeface="Arial" pitchFamily="34" charset="-122"/>
                 <a:cs typeface="Arial" pitchFamily="34" charset="-120"/>
               </a:rPr>
-              <a:t>20件+</a:t>
+              <a:t>10件+</a:t>
             </a:r>
             <a:endParaRPr lang="en-US" sz="900" dirty="0"/>
           </a:p>
@@ -10716,7 +10393,7 @@
                 <a:ea typeface="Arial" pitchFamily="34" charset="-122"/>
                 <a:cs typeface="Arial" pitchFamily="34" charset="-120"/>
               </a:rPr>
-              <a:t>コーヒーとミネラルウォーターのサービスが良かった 特にない 特にない</a:t>
+              <a:t>スタッフも感じが良い</a:t>
             </a:r>
             <a:endParaRPr lang="en-US" sz="900" dirty="0"/>
           </a:p>
@@ -10755,7 +10432,7 @@
                 <a:ea typeface="Arial" pitchFamily="34" charset="-122"/>
                 <a:cs typeface="Arial" pitchFamily="34" charset="-120"/>
               </a:rPr>
-              <a:t>「スタッフの方がとても愛想良くて話しやすかったです」</a:t>
+              <a:t>「スタッフの方は、丁寧で対応も良かったです」</a:t>
             </a:r>
             <a:endParaRPr lang="en-US" sz="900" dirty="0"/>
           </a:p>
@@ -10900,7 +10577,7 @@
                 <a:ea typeface="Arial" pitchFamily="34" charset="-122"/>
                 <a:cs typeface="Arial" pitchFamily="34" charset="-120"/>
               </a:rPr>
-              <a:t>快適さ・設備</a:t>
+              <a:t>清潔さ・清掃</a:t>
             </a:r>
             <a:endParaRPr lang="en-US" sz="1300" dirty="0"/>
           </a:p>
@@ -10939,7 +10616,7 @@
                 <a:ea typeface="Arial" pitchFamily="34" charset="-122"/>
                 <a:cs typeface="Arial" pitchFamily="34" charset="-120"/>
               </a:rPr>
-              <a:t>部屋も広く清潔で快適に過ごす事が出来ました</a:t>
+              <a:t>部屋が綺麗</a:t>
             </a:r>
             <a:endParaRPr lang="en-US" sz="900" dirty="0"/>
           </a:p>
@@ -10978,7 +10655,7 @@
                 <a:ea typeface="Arial" pitchFamily="34" charset="-122"/>
                 <a:cs typeface="Arial" pitchFamily="34" charset="-120"/>
               </a:rPr>
-              <a:t>「ベッドが広くてゆったりできた」</a:t>
+              <a:t>「部屋も広くきれいで清潔感もあり気持ち良く  過ごせました」</a:t>
             </a:r>
             <a:endParaRPr lang="en-US" sz="900" dirty="0"/>
           </a:p>
@@ -11123,7 +10800,7 @@
                 <a:ea typeface="Arial" pitchFamily="34" charset="-122"/>
                 <a:cs typeface="Arial" pitchFamily="34" charset="-120"/>
               </a:rPr>
-              <a:t>清潔さ・清掃</a:t>
+              <a:t>快適さ・設備</a:t>
             </a:r>
             <a:endParaRPr lang="en-US" sz="1300" dirty="0"/>
           </a:p>
@@ -11162,7 +10839,7 @@
                 <a:ea typeface="Arial" pitchFamily="34" charset="-122"/>
                 <a:cs typeface="Arial" pitchFamily="34" charset="-120"/>
               </a:rPr>
-              <a:t>部屋も広く清潔で快適に過ごす事が出来ました</a:t>
+              <a:t>アメニティをケチっている</a:t>
             </a:r>
             <a:endParaRPr lang="en-US" sz="900" dirty="0"/>
           </a:p>
@@ -11201,7 +10878,7 @@
                 <a:ea typeface="Arial" pitchFamily="34" charset="-122"/>
                 <a:cs typeface="Arial" pitchFamily="34" charset="-120"/>
               </a:rPr>
-              <a:t>「部屋は綺麗でしたが、入室してから照明のスイッチを探しました(汗)エアコン含め全て枕元で操作できるのは便利です」</a:t>
+              <a:t>「お部屋がとても広くきれいで、掃除も行き届いていて、快適に過ごすことができました」</a:t>
             </a:r>
             <a:endParaRPr lang="en-US" sz="900" dirty="0"/>
           </a:p>
@@ -11283,229 +10960,6 @@
         <p:spPr>
           <a:xfrm>
             <a:off x="5120640" y="2953512"/>
-            <a:ext cx="658368" cy="228600"/>
-          </a:xfrm>
-          <a:prstGeom prst="rect">
-            <a:avLst/>
-          </a:prstGeom>
-          <a:noFill/>
-          <a:ln/>
-        </p:spPr>
-        <p:txBody>
-          <a:bodyPr wrap="square" lIns="0" tIns="0" rIns="0" bIns="0" rtlCol="0" anchor="ctr"/>
-          <a:lstStyle/>
-          <a:p>
-            <a:pPr algn="ctr" indent="0" marL="0">
-              <a:buNone/>
-            </a:pPr>
-            <a:r>
-              <a:rPr lang="en-US" sz="900" b="1" dirty="0">
-                <a:solidFill>
-                  <a:srgbClr val="16A34A"/>
-                </a:solidFill>
-                <a:latin typeface="Arial" pitchFamily="34" charset="0"/>
-                <a:ea typeface="Arial" pitchFamily="34" charset="-122"/>
-                <a:cs typeface="Arial" pitchFamily="34" charset="-120"/>
-              </a:rPr>
-              <a:t>8件</a:t>
-            </a:r>
-            <a:endParaRPr lang="en-US" sz="900" dirty="0"/>
-          </a:p>
-        </p:txBody>
-      </p:sp>
-      <p:sp>
-        <p:nvSpPr>
-          <p:cNvPr id="37" name="Text 35"/>
-          <p:cNvSpPr/>
-          <p:nvPr/>
-        </p:nvSpPr>
-        <p:spPr>
-          <a:xfrm>
-            <a:off x="3429000" y="2953512"/>
-            <a:ext cx="1645920" cy="274320"/>
-          </a:xfrm>
-          <a:prstGeom prst="rect">
-            <a:avLst/>
-          </a:prstGeom>
-          <a:noFill/>
-          <a:ln/>
-        </p:spPr>
-        <p:txBody>
-          <a:bodyPr wrap="square" lIns="0" tIns="0" rIns="0" bIns="0" rtlCol="0" anchor="ctr"/>
-          <a:lstStyle/>
-          <a:p>
-            <a:pPr indent="0" marL="0">
-              <a:buNone/>
-            </a:pPr>
-            <a:r>
-              <a:rPr lang="en-US" sz="1300" b="1" dirty="0">
-                <a:solidFill>
-                  <a:srgbClr val="1A2744"/>
-                </a:solidFill>
-                <a:latin typeface="Arial" pitchFamily="34" charset="0"/>
-                <a:ea typeface="Arial" pitchFamily="34" charset="-122"/>
-                <a:cs typeface="Arial" pitchFamily="34" charset="-120"/>
-              </a:rPr>
-              <a:t>朝食</a:t>
-            </a:r>
-            <a:endParaRPr lang="en-US" sz="1300" dirty="0"/>
-          </a:p>
-        </p:txBody>
-      </p:sp>
-      <p:sp>
-        <p:nvSpPr>
-          <p:cNvPr id="38" name="Text 36"/>
-          <p:cNvSpPr/>
-          <p:nvPr/>
-        </p:nvSpPr>
-        <p:spPr>
-          <a:xfrm>
-            <a:off x="3429000" y="3246120"/>
-            <a:ext cx="2377440" cy="365760"/>
-          </a:xfrm>
-          <a:prstGeom prst="rect">
-            <a:avLst/>
-          </a:prstGeom>
-          <a:noFill/>
-          <a:ln/>
-        </p:spPr>
-        <p:txBody>
-          <a:bodyPr wrap="square" lIns="0" tIns="0" rIns="0" bIns="0" rtlCol="0" anchor="ctr"/>
-          <a:lstStyle/>
-          <a:p>
-            <a:pPr indent="0" marL="0">
-              <a:buNone/>
-            </a:pPr>
-            <a:r>
-              <a:rPr lang="en-US" sz="900" dirty="0">
-                <a:solidFill>
-                  <a:srgbClr val="64748B"/>
-                </a:solidFill>
-                <a:latin typeface="Arial" pitchFamily="34" charset="0"/>
-                <a:ea typeface="Arial" pitchFamily="34" charset="-122"/>
-                <a:cs typeface="Arial" pitchFamily="34" charset="-120"/>
-              </a:rPr>
-              <a:t>部屋の照明が明るく、朝食が美味しく、フロント対応が良いホテル</a:t>
-            </a:r>
-            <a:endParaRPr lang="en-US" sz="900" dirty="0"/>
-          </a:p>
-        </p:txBody>
-      </p:sp>
-      <p:sp>
-        <p:nvSpPr>
-          <p:cNvPr id="39" name="Text 37"/>
-          <p:cNvSpPr/>
-          <p:nvPr/>
-        </p:nvSpPr>
-        <p:spPr>
-          <a:xfrm>
-            <a:off x="3429000" y="3657600"/>
-            <a:ext cx="2377440" cy="640080"/>
-          </a:xfrm>
-          <a:prstGeom prst="rect">
-            <a:avLst/>
-          </a:prstGeom>
-          <a:noFill/>
-          <a:ln/>
-        </p:spPr>
-        <p:txBody>
-          <a:bodyPr wrap="square" lIns="0" tIns="0" rIns="0" bIns="0" rtlCol="0" anchor="ctr"/>
-          <a:lstStyle/>
-          <a:p>
-            <a:pPr indent="0" marL="0">
-              <a:buNone/>
-            </a:pPr>
-            <a:r>
-              <a:rPr lang="en-US" sz="900" i="1" dirty="0">
-                <a:solidFill>
-                  <a:srgbClr val="3B7DD8"/>
-                </a:solidFill>
-                <a:latin typeface="Arial" pitchFamily="34" charset="0"/>
-                <a:ea typeface="Arial" pitchFamily="34" charset="-122"/>
-                <a:cs typeface="Arial" pitchFamily="34" charset="-120"/>
-              </a:rPr>
-              <a:t>「朝食はこちらで美味しかったです」</a:t>
-            </a:r>
-            <a:endParaRPr lang="en-US" sz="900" dirty="0"/>
-          </a:p>
-        </p:txBody>
-      </p:sp>
-      <p:sp>
-        <p:nvSpPr>
-          <p:cNvPr id="40" name="Shape 38"/>
-          <p:cNvSpPr/>
-          <p:nvPr/>
-        </p:nvSpPr>
-        <p:spPr>
-          <a:xfrm>
-            <a:off x="6126480" y="2880360"/>
-            <a:ext cx="2651760" cy="1600200"/>
-          </a:xfrm>
-          <a:prstGeom prst="rect">
-            <a:avLst/>
-          </a:prstGeom>
-          <a:solidFill>
-            <a:srgbClr val="FFFFFF"/>
-          </a:solidFill>
-          <a:ln/>
-          <a:effectLst>
-            <a:outerShdw sx="100000" sy="100000" kx="0" ky="0" algn="bl" rotWithShape="0" blurRad="50800" dist="25400" dir="8100000">
-              <a:srgbClr val="000000">
-                <a:alpha val="10000"/>
-              </a:srgbClr>
-            </a:outerShdw>
-          </a:effectLst>
-        </p:spPr>
-      </p:sp>
-      <p:sp>
-        <p:nvSpPr>
-          <p:cNvPr id="41" name="Shape 39"/>
-          <p:cNvSpPr/>
-          <p:nvPr/>
-        </p:nvSpPr>
-        <p:spPr>
-          <a:xfrm>
-            <a:off x="6126480" y="2880360"/>
-            <a:ext cx="54864" cy="1600200"/>
-          </a:xfrm>
-          <a:prstGeom prst="rect">
-            <a:avLst/>
-          </a:prstGeom>
-          <a:solidFill>
-            <a:srgbClr val="16A34A"/>
-          </a:solidFill>
-          <a:ln/>
-        </p:spPr>
-      </p:sp>
-      <p:sp>
-        <p:nvSpPr>
-          <p:cNvPr id="42" name="Shape 40"/>
-          <p:cNvSpPr/>
-          <p:nvPr/>
-        </p:nvSpPr>
-        <p:spPr>
-          <a:xfrm>
-            <a:off x="7955280" y="2953512"/>
-            <a:ext cx="658368" cy="228600"/>
-          </a:xfrm>
-          <a:prstGeom prst="rect">
-            <a:avLst/>
-          </a:prstGeom>
-          <a:solidFill>
-            <a:srgbClr val="DCFCE7"/>
-          </a:solidFill>
-          <a:ln/>
-        </p:spPr>
-      </p:sp>
-      <p:sp>
-        <p:nvSpPr>
-          <p:cNvPr id="43" name="Text 41"/>
-          <p:cNvSpPr/>
-          <p:nvPr/>
-        </p:nvSpPr>
-        <p:spPr>
-          <a:xfrm>
-            <a:off x="7955280" y="2953512"/>
             <a:ext cx="658368" cy="228600"/>
           </a:xfrm>
           <a:prstGeom prst="rect">
@@ -11538,13 +10992,13 @@
       </p:sp>
       <p:sp>
         <p:nvSpPr>
-          <p:cNvPr id="44" name="Text 42"/>
-          <p:cNvSpPr/>
-          <p:nvPr/>
-        </p:nvSpPr>
-        <p:spPr>
-          <a:xfrm>
-            <a:off x="6263640" y="2953512"/>
+          <p:cNvPr id="37" name="Text 35"/>
+          <p:cNvSpPr/>
+          <p:nvPr/>
+        </p:nvSpPr>
+        <p:spPr>
+          <a:xfrm>
+            <a:off x="3429000" y="2953512"/>
             <a:ext cx="1645920" cy="274320"/>
           </a:xfrm>
           <a:prstGeom prst="rect">
@@ -11577,13 +11031,13 @@
       </p:sp>
       <p:sp>
         <p:nvSpPr>
-          <p:cNvPr id="45" name="Text 43"/>
-          <p:cNvSpPr/>
-          <p:nvPr/>
-        </p:nvSpPr>
-        <p:spPr>
-          <a:xfrm>
-            <a:off x="6263640" y="3246120"/>
+          <p:cNvPr id="38" name="Text 36"/>
+          <p:cNvSpPr/>
+          <p:nvPr/>
+        </p:nvSpPr>
+        <p:spPr>
+          <a:xfrm>
+            <a:off x="3429000" y="3246120"/>
             <a:ext cx="2377440" cy="365760"/>
           </a:xfrm>
           <a:prstGeom prst="rect">
@@ -11608,7 +11062,7 @@
                 <a:ea typeface="Arial" pitchFamily="34" charset="-122"/>
                 <a:cs typeface="Arial" pitchFamily="34" charset="-120"/>
               </a:rPr>
-              <a:t>22:00前までならホテルの一階にあるレストランも利用できそう</a:t>
+              <a:t>何度かお世話になっていますが、駅からも近く、周辺に食事をする所やコンビニも多いので便利です</a:t>
             </a:r>
             <a:endParaRPr lang="en-US" sz="900" dirty="0"/>
           </a:p>
@@ -11616,13 +11070,13 @@
       </p:sp>
       <p:sp>
         <p:nvSpPr>
-          <p:cNvPr id="46" name="Text 44"/>
-          <p:cNvSpPr/>
-          <p:nvPr/>
-        </p:nvSpPr>
-        <p:spPr>
-          <a:xfrm>
-            <a:off x="6263640" y="3657600"/>
+          <p:cNvPr id="39" name="Text 37"/>
+          <p:cNvSpPr/>
+          <p:nvPr/>
+        </p:nvSpPr>
+        <p:spPr>
+          <a:xfrm>
+            <a:off x="3429000" y="3657600"/>
             <a:ext cx="2377440" cy="640080"/>
           </a:xfrm>
           <a:prstGeom prst="rect">
@@ -11647,7 +11101,230 @@
                 <a:ea typeface="Arial" pitchFamily="34" charset="-122"/>
                 <a:cs typeface="Arial" pitchFamily="34" charset="-120"/>
               </a:rPr>
-              <a:t>「それ以外は飲食店、コンビニもありますので困ることはなく快適に過ごせました」</a:t>
+              <a:t>「22:00前までならホテルの一階にあるレストランも利用できそう」</a:t>
+            </a:r>
+            <a:endParaRPr lang="en-US" sz="900" dirty="0"/>
+          </a:p>
+        </p:txBody>
+      </p:sp>
+      <p:sp>
+        <p:nvSpPr>
+          <p:cNvPr id="40" name="Shape 38"/>
+          <p:cNvSpPr/>
+          <p:nvPr/>
+        </p:nvSpPr>
+        <p:spPr>
+          <a:xfrm>
+            <a:off x="6126480" y="2880360"/>
+            <a:ext cx="2651760" cy="1600200"/>
+          </a:xfrm>
+          <a:prstGeom prst="rect">
+            <a:avLst/>
+          </a:prstGeom>
+          <a:solidFill>
+            <a:srgbClr val="FFFFFF"/>
+          </a:solidFill>
+          <a:ln/>
+          <a:effectLst>
+            <a:outerShdw sx="100000" sy="100000" kx="0" ky="0" algn="bl" rotWithShape="0" blurRad="50800" dist="25400" dir="8100000">
+              <a:srgbClr val="000000">
+                <a:alpha val="10000"/>
+              </a:srgbClr>
+            </a:outerShdw>
+          </a:effectLst>
+        </p:spPr>
+      </p:sp>
+      <p:sp>
+        <p:nvSpPr>
+          <p:cNvPr id="41" name="Shape 39"/>
+          <p:cNvSpPr/>
+          <p:nvPr/>
+        </p:nvSpPr>
+        <p:spPr>
+          <a:xfrm>
+            <a:off x="6126480" y="2880360"/>
+            <a:ext cx="54864" cy="1600200"/>
+          </a:xfrm>
+          <a:prstGeom prst="rect">
+            <a:avLst/>
+          </a:prstGeom>
+          <a:solidFill>
+            <a:srgbClr val="16A34A"/>
+          </a:solidFill>
+          <a:ln/>
+        </p:spPr>
+      </p:sp>
+      <p:sp>
+        <p:nvSpPr>
+          <p:cNvPr id="42" name="Shape 40"/>
+          <p:cNvSpPr/>
+          <p:nvPr/>
+        </p:nvSpPr>
+        <p:spPr>
+          <a:xfrm>
+            <a:off x="7955280" y="2953512"/>
+            <a:ext cx="658368" cy="228600"/>
+          </a:xfrm>
+          <a:prstGeom prst="rect">
+            <a:avLst/>
+          </a:prstGeom>
+          <a:solidFill>
+            <a:srgbClr val="DCFCE7"/>
+          </a:solidFill>
+          <a:ln/>
+        </p:spPr>
+      </p:sp>
+      <p:sp>
+        <p:nvSpPr>
+          <p:cNvPr id="43" name="Text 41"/>
+          <p:cNvSpPr/>
+          <p:nvPr/>
+        </p:nvSpPr>
+        <p:spPr>
+          <a:xfrm>
+            <a:off x="7955280" y="2953512"/>
+            <a:ext cx="658368" cy="228600"/>
+          </a:xfrm>
+          <a:prstGeom prst="rect">
+            <a:avLst/>
+          </a:prstGeom>
+          <a:noFill/>
+          <a:ln/>
+        </p:spPr>
+        <p:txBody>
+          <a:bodyPr wrap="square" lIns="0" tIns="0" rIns="0" bIns="0" rtlCol="0" anchor="ctr"/>
+          <a:lstStyle/>
+          <a:p>
+            <a:pPr algn="ctr" indent="0" marL="0">
+              <a:buNone/>
+            </a:pPr>
+            <a:r>
+              <a:rPr lang="en-US" sz="900" b="1" dirty="0">
+                <a:solidFill>
+                  <a:srgbClr val="16A34A"/>
+                </a:solidFill>
+                <a:latin typeface="Arial" pitchFamily="34" charset="0"/>
+                <a:ea typeface="Arial" pitchFamily="34" charset="-122"/>
+                <a:cs typeface="Arial" pitchFamily="34" charset="-120"/>
+              </a:rPr>
+              <a:t>6件</a:t>
+            </a:r>
+            <a:endParaRPr lang="en-US" sz="900" dirty="0"/>
+          </a:p>
+        </p:txBody>
+      </p:sp>
+      <p:sp>
+        <p:nvSpPr>
+          <p:cNvPr id="44" name="Text 42"/>
+          <p:cNvSpPr/>
+          <p:nvPr/>
+        </p:nvSpPr>
+        <p:spPr>
+          <a:xfrm>
+            <a:off x="6263640" y="2953512"/>
+            <a:ext cx="1645920" cy="274320"/>
+          </a:xfrm>
+          <a:prstGeom prst="rect">
+            <a:avLst/>
+          </a:prstGeom>
+          <a:noFill/>
+          <a:ln/>
+        </p:spPr>
+        <p:txBody>
+          <a:bodyPr wrap="square" lIns="0" tIns="0" rIns="0" bIns="0" rtlCol="0" anchor="ctr"/>
+          <a:lstStyle/>
+          <a:p>
+            <a:pPr indent="0" marL="0">
+              <a:buNone/>
+            </a:pPr>
+            <a:r>
+              <a:rPr lang="en-US" sz="1300" b="1" dirty="0">
+                <a:solidFill>
+                  <a:srgbClr val="1A2744"/>
+                </a:solidFill>
+                <a:latin typeface="Arial" pitchFamily="34" charset="0"/>
+                <a:ea typeface="Arial" pitchFamily="34" charset="-122"/>
+                <a:cs typeface="Arial" pitchFamily="34" charset="-120"/>
+              </a:rPr>
+              <a:t>コストパフォーマンス</a:t>
+            </a:r>
+            <a:endParaRPr lang="en-US" sz="1300" dirty="0"/>
+          </a:p>
+        </p:txBody>
+      </p:sp>
+      <p:sp>
+        <p:nvSpPr>
+          <p:cNvPr id="45" name="Text 43"/>
+          <p:cNvSpPr/>
+          <p:nvPr/>
+        </p:nvSpPr>
+        <p:spPr>
+          <a:xfrm>
+            <a:off x="6263640" y="3246120"/>
+            <a:ext cx="2377440" cy="365760"/>
+          </a:xfrm>
+          <a:prstGeom prst="rect">
+            <a:avLst/>
+          </a:prstGeom>
+          <a:noFill/>
+          <a:ln/>
+        </p:spPr>
+        <p:txBody>
+          <a:bodyPr wrap="square" lIns="0" tIns="0" rIns="0" bIns="0" rtlCol="0" anchor="ctr"/>
+          <a:lstStyle/>
+          <a:p>
+            <a:pPr indent="0" marL="0">
+              <a:buNone/>
+            </a:pPr>
+            <a:r>
+              <a:rPr lang="en-US" sz="900" dirty="0">
+                <a:solidFill>
+                  <a:srgbClr val="64748B"/>
+                </a:solidFill>
+                <a:latin typeface="Arial" pitchFamily="34" charset="0"/>
+                <a:ea typeface="Arial" pitchFamily="34" charset="-122"/>
+                <a:cs typeface="Arial" pitchFamily="34" charset="-120"/>
+              </a:rPr>
+              <a:t>値段がそれなりで安い 室内の温度が高くて寝苦しい 窓を開ければ多少緩和されたがそれでもこの時期が寒いとはいえ、室温...</a:t>
+            </a:r>
+            <a:endParaRPr lang="en-US" sz="900" dirty="0"/>
+          </a:p>
+        </p:txBody>
+      </p:sp>
+      <p:sp>
+        <p:nvSpPr>
+          <p:cNvPr id="46" name="Text 44"/>
+          <p:cNvSpPr/>
+          <p:nvPr/>
+        </p:nvSpPr>
+        <p:spPr>
+          <a:xfrm>
+            <a:off x="6263640" y="3657600"/>
+            <a:ext cx="2377440" cy="640080"/>
+          </a:xfrm>
+          <a:prstGeom prst="rect">
+            <a:avLst/>
+          </a:prstGeom>
+          <a:noFill/>
+          <a:ln/>
+        </p:spPr>
+        <p:txBody>
+          <a:bodyPr wrap="square" lIns="0" tIns="0" rIns="0" bIns="0" rtlCol="0" anchor="ctr"/>
+          <a:lstStyle/>
+          <a:p>
+            <a:pPr indent="0" marL="0">
+              <a:buNone/>
+            </a:pPr>
+            <a:r>
+              <a:rPr lang="en-US" sz="900" i="1" dirty="0">
+                <a:solidFill>
+                  <a:srgbClr val="3B7DD8"/>
+                </a:solidFill>
+                <a:latin typeface="Arial" pitchFamily="34" charset="0"/>
+                <a:ea typeface="Arial" pitchFamily="34" charset="-122"/>
+                <a:cs typeface="Arial" pitchFamily="34" charset="-120"/>
+              </a:rPr>
+              <a:t>「安い ちょっとバスルームカーテンが雑菌臭で臭いのと、トイレの流す水が少なすぎて、トイレットペーパーが初回では流れな...」</a:t>
             </a:r>
             <a:endParaRPr lang="en-US" sz="900" dirty="0"/>
           </a:p>
@@ -12337,7 +12014,7 @@
                           <a:ea typeface="Arial" pitchFamily="34" charset="-122"/>
                           <a:cs typeface="Arial" pitchFamily="34" charset="-120"/>
                         </a:rPr>
-                        <a:t>さらに良いホテルになって欲しいという意味であえてコメントすると、①二つ枕があるので、片方は高めの枕、もう片方は低め...</a:t>
+                        <a:t>シャワーの温度調節に苦労します</a:t>
                       </a:r>
                       <a:endParaRPr lang="en-US" sz="900" dirty="0">
                         <a:latin typeface="Arial" charset="0"/>
@@ -12405,7 +12082,7 @@
                           <a:ea typeface="Arial" pitchFamily="34" charset="-122"/>
                           <a:cs typeface="Arial" pitchFamily="34" charset="-120"/>
                         </a:rPr>
-                        <a:t>13件</a:t>
+                        <a:t>16件</a:t>
                       </a:r>
                       <a:endParaRPr lang="en-US" sz="900" dirty="0">
                         <a:latin typeface="Arial" charset="0"/>
@@ -12611,7 +12288,7 @@
                           <a:ea typeface="Arial" pitchFamily="34" charset="-122"/>
                           <a:cs typeface="Arial" pitchFamily="34" charset="-120"/>
                         </a:rPr>
-                        <a:t>エアコンは集中式なので、温度調節ができません</a:t>
+                        <a:t>シャワーの温度調節に苦労します</a:t>
                       </a:r>
                       <a:endParaRPr lang="en-US" sz="900" dirty="0">
                         <a:latin typeface="Arial" charset="0"/>
@@ -12679,7 +12356,7 @@
                           <a:ea typeface="Arial" pitchFamily="34" charset="-122"/>
                           <a:cs typeface="Arial" pitchFamily="34" charset="-120"/>
                         </a:rPr>
-                        <a:t>10件</a:t>
+                        <a:t>12件</a:t>
                       </a:r>
                       <a:endParaRPr lang="en-US" sz="900" dirty="0">
                         <a:latin typeface="Arial" charset="0"/>
@@ -12817,7 +12494,7 @@
                           <a:ea typeface="Arial" pitchFamily="34" charset="-122"/>
                           <a:cs typeface="Arial" pitchFamily="34" charset="-120"/>
                         </a:rPr>
-                        <a:t>防音性能</a:t>
+                        <a:t>設備の老朽化</a:t>
                       </a:r>
                       <a:endParaRPr lang="en-US" sz="900" dirty="0">
                         <a:latin typeface="Arial" charset="0"/>
@@ -12885,7 +12562,7 @@
                           <a:ea typeface="Arial" pitchFamily="34" charset="-122"/>
                           <a:cs typeface="Arial" pitchFamily="34" charset="-120"/>
                         </a:rPr>
-                        <a:t>各部屋の騒音がうるさかった</a:t>
+                        <a:t>少し建物古いかも</a:t>
                       </a:r>
                       <a:endParaRPr lang="en-US" sz="900" dirty="0">
                         <a:latin typeface="Arial" charset="0"/>
@@ -12953,7 +12630,7 @@
                           <a:ea typeface="Arial" pitchFamily="34" charset="-122"/>
                           <a:cs typeface="Arial" pitchFamily="34" charset="-120"/>
                         </a:rPr>
-                        <a:t>6件</a:t>
+                        <a:t>8件</a:t>
                       </a:r>
                       <a:endParaRPr lang="en-US" sz="900" dirty="0">
                         <a:latin typeface="Arial" charset="0"/>
@@ -13159,7 +12836,7 @@
                           <a:ea typeface="Arial" pitchFamily="34" charset="-122"/>
                           <a:cs typeface="Arial" pitchFamily="34" charset="-120"/>
                         </a:rPr>
-                        <a:t>製氷機が壊れてたのと、トイレの流れが悪かった事が少し残念でしたが、全体的には満足でした</a:t>
+                        <a:t>喫煙の部屋でしたが、空気清浄機が無かったので、残念ですが、部屋内は綺麗でした</a:t>
                       </a:r>
                       <a:endParaRPr lang="en-US" sz="900" dirty="0">
                         <a:latin typeface="Arial" charset="0"/>
@@ -13227,7 +12904,7 @@
                           <a:ea typeface="Arial" pitchFamily="34" charset="-122"/>
                           <a:cs typeface="Arial" pitchFamily="34" charset="-120"/>
                         </a:rPr>
-                        <a:t>6件</a:t>
+                        <a:t>5件</a:t>
                       </a:r>
                       <a:endParaRPr lang="en-US" sz="900" dirty="0">
                         <a:latin typeface="Arial" charset="0"/>
@@ -13365,7 +13042,7 @@
                           <a:ea typeface="Arial" pitchFamily="34" charset="-122"/>
                           <a:cs typeface="Arial" pitchFamily="34" charset="-120"/>
                         </a:rPr>
-                        <a:t>設備の老朽化</a:t>
+                        <a:t>臭い・匂い</a:t>
                       </a:r>
                       <a:endParaRPr lang="en-US" sz="900" dirty="0">
                         <a:latin typeface="Arial" charset="0"/>
@@ -13433,7 +13110,7 @@
                           <a:ea typeface="Arial" pitchFamily="34" charset="-122"/>
                           <a:cs typeface="Arial" pitchFamily="34" charset="-120"/>
                         </a:rPr>
-                        <a:t>蛇口が熱湯が出る古いタイプで、冷水の蛇口と調節しないといけなかったので、ちょっとめんどくさかったです</a:t>
+                        <a:t>繁華街や駅に近い トイレの匂いが臭い</a:t>
                       </a:r>
                       <a:endParaRPr lang="en-US" sz="900" dirty="0">
                         <a:latin typeface="Arial" charset="0"/>
@@ -13707,7 +13384,7 @@
                           <a:ea typeface="Arial" pitchFamily="34" charset="-122"/>
                           <a:cs typeface="Arial" pitchFamily="34" charset="-120"/>
                         </a:rPr>
-                        <a:t>部屋の照明が明るく、朝食が美味しく、フロント対応が良いホテル</a:t>
+                        <a:t>値段がそれなりで安い 室内の温度が高くて寝苦しい 窓を開ければ多少緩和されたがそれでもこの時期が寒いとはいえ、室温...</a:t>
                       </a:r>
                       <a:endParaRPr lang="en-US" sz="900" dirty="0">
                         <a:latin typeface="Arial" charset="0"/>
@@ -13913,7 +13590,7 @@
                           <a:ea typeface="Arial" pitchFamily="34" charset="-122"/>
                           <a:cs typeface="Arial" pitchFamily="34" charset="-120"/>
                         </a:rPr>
-                        <a:t>清掃不備</a:t>
+                        <a:t>防音性能</a:t>
                       </a:r>
                       <a:endParaRPr lang="en-US" sz="900" dirty="0">
                         <a:latin typeface="Arial" charset="0"/>
@@ -13981,7 +13658,7 @@
                           <a:ea typeface="Arial" pitchFamily="34" charset="-122"/>
                           <a:cs typeface="Arial" pitchFamily="34" charset="-120"/>
                         </a:rPr>
-                        <a:t>新横浜からの近さ 建物が古いため汚れが目立つ 建物が古いため汚れが目立つ</a:t>
+                        <a:t>各部屋の騒音がうるさかった</a:t>
                       </a:r>
                       <a:endParaRPr lang="en-US" sz="900" dirty="0">
                         <a:latin typeface="Arial" charset="0"/>
@@ -14049,7 +13726,7 @@
                           <a:ea typeface="Arial" pitchFamily="34" charset="-122"/>
                           <a:cs typeface="Arial" pitchFamily="34" charset="-120"/>
                         </a:rPr>
-                        <a:t>4件</a:t>
+                        <a:t>3件</a:t>
                       </a:r>
                       <a:endParaRPr lang="en-US" sz="900" dirty="0">
                         <a:latin typeface="Arial" charset="0"/>
@@ -14187,7 +13864,7 @@
                           <a:ea typeface="Arial" pitchFamily="34" charset="-122"/>
                           <a:cs typeface="Arial" pitchFamily="34" charset="-120"/>
                         </a:rPr>
-                        <a:t>臭い・匂い</a:t>
+                        <a:t>清掃不備</a:t>
                       </a:r>
                       <a:endParaRPr lang="en-US" sz="900" dirty="0">
                         <a:latin typeface="Arial" charset="0"/>
@@ -14255,7 +13932,7 @@
                           <a:ea typeface="Arial" pitchFamily="34" charset="-122"/>
                           <a:cs typeface="Arial" pitchFamily="34" charset="-120"/>
                         </a:rPr>
-                        <a:t>バスとトイレの仕切りのカーテンの匂いが気になった バスとトイレの仕切りのカーテンの匂いが気になった</a:t>
+                        <a:t>値段がそれなりで安い 室内の温度が高くて寝苦しい 窓を開ければ多少緩和されたがそれでもこの時期が寒いとはいえ、室温...</a:t>
                       </a:r>
                       <a:endParaRPr lang="en-US" sz="900" dirty="0">
                         <a:latin typeface="Arial" charset="0"/>
@@ -14323,7 +14000,7 @@
                           <a:ea typeface="Arial" pitchFamily="34" charset="-122"/>
                           <a:cs typeface="Arial" pitchFamily="34" charset="-120"/>
                         </a:rPr>
-                        <a:t>3件</a:t>
+                        <a:t>2件</a:t>
                       </a:r>
                       <a:endParaRPr lang="en-US" sz="900" dirty="0">
                         <a:latin typeface="Arial" charset="0"/>

--- a/納品レポート/ホテル別レポート/court_shinyokohama_口コミ分析レポート.pptx
+++ b/納品レポート/ホテル別レポート/court_shinyokohama_口コミ分析レポート.pptx
@@ -2812,7 +2812,7 @@
                 <a:ea typeface="Arial" pitchFamily="34" charset="-122"/>
                 <a:cs typeface="Arial" pitchFamily="34" charset="-120"/>
               </a:rPr>
-              <a:t>作成日：2026年3月25日</a:t>
+              <a:t>作成日：2026年3月26日</a:t>
             </a:r>
             <a:endParaRPr lang="en-US" sz="1000" dirty="0"/>
           </a:p>

--- a/納品レポート/ホテル別レポート/court_shinyokohama_口コミ分析レポート.pptx
+++ b/納品レポート/ホテル別レポート/court_shinyokohama_口コミ分析レポート.pptx
@@ -2812,7 +2812,7 @@
                 <a:ea typeface="Arial" pitchFamily="34" charset="-122"/>
                 <a:cs typeface="Arial" pitchFamily="34" charset="-120"/>
               </a:rPr>
-              <a:t>作成日：2026年3月26日</a:t>
+              <a:t>作成日：2026年3月27日</a:t>
             </a:r>
             <a:endParaRPr lang="en-US" sz="1000" dirty="0"/>
           </a:p>

--- a/納品レポート/ホテル別レポート/court_shinyokohama_口コミ分析レポート.pptx
+++ b/納品レポート/ホテル別レポート/court_shinyokohama_口コミ分析レポート.pptx
@@ -2812,7 +2812,7 @@
                 <a:ea typeface="Arial" pitchFamily="34" charset="-122"/>
                 <a:cs typeface="Arial" pitchFamily="34" charset="-120"/>
               </a:rPr>
-              <a:t>作成日：2026年3月27日</a:t>
+              <a:t>作成日：2026年3月28日</a:t>
             </a:r>
             <a:endParaRPr lang="en-US" sz="1000" dirty="0"/>
           </a:p>

--- a/納品レポート/ホテル別レポート/court_shinyokohama_口コミ分析レポート.pptx
+++ b/納品レポート/ホテル別レポート/court_shinyokohama_口コミ分析レポート.pptx
@@ -2812,7 +2812,7 @@
                 <a:ea typeface="Arial" pitchFamily="34" charset="-122"/>
                 <a:cs typeface="Arial" pitchFamily="34" charset="-120"/>
               </a:rPr>
-              <a:t>作成日：2026年4月2日</a:t>
+              <a:t>作成日：2026年4月5日</a:t>
             </a:r>
             <a:endParaRPr lang="en-US" sz="1000" dirty="0"/>
           </a:p>

--- a/納品レポート/ホテル別レポート/court_shinyokohama_口コミ分析レポート.pptx
+++ b/納品レポート/ホテル別レポート/court_shinyokohama_口コミ分析レポート.pptx
@@ -124,261 +124,6 @@
     <c:autoTitleDeleted val="1"/>
     <c:plotArea>
       <c:layout/>
-      <c:barChart>
-        <c:barDir val="bar"/>
-        <c:grouping val="clustered"/>
-        <c:varyColors val="0"/>
-        <c:ser>
-          <c:idx val="0"/>
-          <c:order val="0"/>
-          <c:tx>
-            <c:strRef>
-              <c:f>Sheet1!$B$1</c:f>
-              <c:strCache>
-                <c:ptCount val="1"/>
-                <c:pt idx="0">
-                  <c:v>10pt換算平均</c:v>
-                </c:pt>
-              </c:strCache>
-            </c:strRef>
-          </c:tx>
-          <c:spPr>
-            <a:solidFill>
-              <a:srgbClr val="3B7DD8"/>
-            </a:solidFill>
-            <a:effectLst/>
-          </c:spPr>
-          <c:invertIfNegative val="0"/>
-          <c:dLbls>
-            <c:numFmt formatCode="#,##0" sourceLinked="0"/>
-            <c:txPr>
-              <a:bodyPr/>
-              <a:lstStyle/>
-              <a:p>
-                <a:pPr>
-                  <a:defRPr b="0" i="0" strike="noStrike" sz="1200" u="none">
-                    <a:solidFill>
-                      <a:srgbClr val="334155"/>
-                    </a:solidFill>
-                    <a:latin typeface="Arial"/>
-                  </a:defRPr>
-                </a:pPr>
-              </a:p>
-            </c:txPr>
-            <c:showLegendKey val="0"/>
-            <c:showVal val="1"/>
-            <c:showCatName val="0"/>
-            <c:showSerName val="0"/>
-            <c:showPercent val="0"/>
-            <c:showBubbleSize val="0"/>
-            <c:showLeaderLines val="0"/>
-          </c:dLbls>
-          <c:cat>
-            <c:multiLvlStrRef>
-              <c:f>Sheet1!$A$2:$A$6</c:f>
-              <c:multiLvlStrCache>
-                <c:ptCount val="5"/>
-                <c:lvl>
-                  <c:pt idx="0">
-                    <c:v>Google</c:v>
-                  </c:pt>
-                  <c:pt idx="1">
-                    <c:v>楽天トラベル</c:v>
-                  </c:pt>
-                  <c:pt idx="2">
-                    <c:v>じゃらん</c:v>
-                  </c:pt>
-                  <c:pt idx="3">
-                    <c:v>Booking.com</c:v>
-                  </c:pt>
-                  <c:pt idx="4">
-                    <c:v>Trip.com</c:v>
-                  </c:pt>
-                </c:lvl>
-              </c:multiLvlStrCache>
-            </c:multiLvlStrRef>
-          </c:cat>
-          <c:val>
-            <c:numRef>
-              <c:f>Sheet1!$B$2:$B$6</c:f>
-              <c:numCache>
-                <c:formatCode>General</c:formatCode>
-                <c:ptCount val="5"/>
-                <c:pt idx="0">
-                  <c:v>7.71</c:v>
-                </c:pt>
-                <c:pt idx="1">
-                  <c:v>7.67</c:v>
-                </c:pt>
-                <c:pt idx="2">
-                  <c:v>7.27</c:v>
-                </c:pt>
-                <c:pt idx="3">
-                  <c:v>7.03</c:v>
-                </c:pt>
-                <c:pt idx="4">
-                  <c:v>6.67</c:v>
-                </c:pt>
-              </c:numCache>
-            </c:numRef>
-          </c:val>
-        </c:ser>
-        <c:dLbls>
-          <c:numFmt formatCode="#,##0" sourceLinked="0"/>
-          <c:txPr>
-            <a:bodyPr/>
-            <a:lstStyle/>
-            <a:p>
-              <a:pPr>
-                <a:defRPr b="0" i="0" strike="noStrike" sz="1200" u="none">
-                  <a:solidFill>
-                    <a:srgbClr val="334155"/>
-                  </a:solidFill>
-                  <a:latin typeface="Arial"/>
-                </a:defRPr>
-              </a:pPr>
-            </a:p>
-          </c:txPr>
-          <c:showLegendKey val="0"/>
-          <c:showVal val="1"/>
-          <c:showCatName val="0"/>
-          <c:showSerName val="0"/>
-          <c:showPercent val="0"/>
-          <c:showBubbleSize val="0"/>
-          <c:showLeaderLines val="0"/>
-        </c:dLbls>
-        <c:gapWidth val="150"/>
-        <c:overlap val="0"/>
-        <c:axId val="2094734554"/>
-        <c:axId val="2094734552"/>
-        <c:axId val="2094734556"/>
-      </c:barChart>
-      <c:catAx>
-        <c:axId val="2094734554"/>
-        <c:scaling>
-          <c:orientation val="minMax"/>
-        </c:scaling>
-        <c:delete val="0"/>
-        <c:axPos val="l"/>
-        <c:numFmt formatCode="General" sourceLinked="1"/>
-        <c:majorTickMark val="out"/>
-        <c:minorTickMark val="none"/>
-        <c:tickLblPos val="nextTo"/>
-        <c:spPr>
-          <a:ln w="12700" cap="flat">
-            <a:solidFill>
-              <a:srgbClr val="888888"/>
-            </a:solidFill>
-            <a:prstDash val="solid"/>
-            <a:round/>
-          </a:ln>
-        </c:spPr>
-        <c:txPr>
-          <a:bodyPr/>
-          <a:lstStyle/>
-          <a:p>
-            <a:pPr>
-              <a:defRPr sz="1000" b="0" i="0" u="none" strike="noStrike">
-                <a:solidFill>
-                  <a:srgbClr val="334155"/>
-                </a:solidFill>
-                <a:latin typeface="Arial"/>
-              </a:defRPr>
-            </a:pPr>
-            <a:endParaRPr lang="en-US"/>
-          </a:p>
-        </c:txPr>
-        <c:crossAx val="2094734552"/>
-        <c:crosses val="autoZero"/>
-        <c:auto val="1"/>
-        <c:lblAlgn val="ctr"/>
-        <c:noMultiLvlLbl val="1"/>
-      </c:catAx>
-      <c:valAx>
-        <c:axId val="2094734552"/>
-        <c:scaling>
-          <c:orientation val="minMax"/>
-          <c:max val="10"/>
-        </c:scaling>
-        <c:delete val="0"/>
-        <c:axPos val="b"/>
-        <c:majorGridlines>
-          <c:spPr>
-            <a:ln w="6350" cap="flat">
-              <a:solidFill>
-                <a:srgbClr val="E2E8F0"/>
-              </a:solidFill>
-              <a:prstDash val="solid"/>
-              <a:round/>
-            </a:ln>
-          </c:spPr>
-        </c:majorGridlines>
-        <c:numFmt formatCode="General" sourceLinked="0"/>
-        <c:majorTickMark val="out"/>
-        <c:minorTickMark val="none"/>
-        <c:tickLblPos val="low"/>
-        <c:spPr>
-          <a:ln w="12700" cap="flat">
-            <a:solidFill>
-              <a:srgbClr val="888888"/>
-            </a:solidFill>
-            <a:prstDash val="solid"/>
-            <a:round/>
-          </a:ln>
-        </c:spPr>
-        <c:txPr>
-          <a:bodyPr/>
-          <a:lstStyle/>
-          <a:p>
-            <a:pPr>
-              <a:defRPr sz="900" b="0" i="0" u="none" strike="noStrike">
-                <a:solidFill>
-                  <a:srgbClr val="64748B"/>
-                </a:solidFill>
-                <a:latin typeface="Arial"/>
-              </a:defRPr>
-            </a:pPr>
-            <a:endParaRPr lang="en-US"/>
-          </a:p>
-        </c:txPr>
-        <c:crossAx val="2094734554"/>
-        <c:crosses val="autoZero"/>
-        <c:crossBetween val="between"/>
-      </c:valAx>
-      <c:spPr>
-        <a:noFill/>
-        <a:ln>
-          <a:noFill/>
-        </a:ln>
-        <a:effectLst/>
-      </c:spPr>
-    </c:plotArea>
-    <c:plotVisOnly val="1"/>
-    <c:dispBlanksAs val="span"/>
-  </c:chart>
-  <c:spPr>
-    <a:solidFill>
-      <a:srgbClr val="FFFFFF"/>
-    </a:solidFill>
-    <a:ln>
-      <a:noFill/>
-    </a:ln>
-    <a:effectLst/>
-  </c:spPr>
-  <c:externalData r:id="rId1">
-    <c:autoUpdate val="0"/>
-  </c:externalData>
-</c:chartSpace>
-</file>
-
-<file path=ppt/charts/chart2.xml><?xml version="1.0" encoding="utf-8"?>
-<c:chartSpace xmlns:c="http://schemas.openxmlformats.org/drawingml/2006/chart" xmlns:a="http://schemas.openxmlformats.org/drawingml/2006/main" xmlns:r="http://schemas.openxmlformats.org/officeDocument/2006/relationships">
-  <c:date1904 val="0"/>
-  <c:roundedCorners val="1"/>
-  <c:chart>
-    <c:autoTitleDeleted val="1"/>
-    <c:plotArea>
-      <c:layout/>
       <c:doughnutChart>
         <c:varyColors val="1"/>
         <c:ser>
@@ -560,13 +305,13 @@
               <c:numCache>
                 <c:ptCount val="3"/>
                 <c:pt idx="0">
-                  <c:v>60</c:v>
+                  <c:v>0</c:v>
                 </c:pt>
                 <c:pt idx="1">
-                  <c:v>44</c:v>
+                  <c:v>0</c:v>
                 </c:pt>
                 <c:pt idx="2">
-                  <c:v>14</c:v>
+                  <c:v>0</c:v>
                 </c:pt>
               </c:numCache>
             </c:numRef>
@@ -606,383 +351,6 @@
   </c:chart>
   <c:spPr>
     <a:noFill/>
-    <a:ln>
-      <a:noFill/>
-    </a:ln>
-    <a:effectLst/>
-  </c:spPr>
-  <c:externalData r:id="rId1">
-    <c:autoUpdate val="0"/>
-  </c:externalData>
-</c:chartSpace>
-</file>
-
-<file path=ppt/charts/chart3.xml><?xml version="1.0" encoding="utf-8"?>
-<c:chartSpace xmlns:c="http://schemas.openxmlformats.org/drawingml/2006/chart" xmlns:a="http://schemas.openxmlformats.org/drawingml/2006/main" xmlns:r="http://schemas.openxmlformats.org/officeDocument/2006/relationships">
-  <c:date1904 val="0"/>
-  <c:roundedCorners val="1"/>
-  <c:chart>
-    <c:autoTitleDeleted val="1"/>
-    <c:plotArea>
-      <c:layout/>
-      <c:barChart>
-        <c:barDir val="col"/>
-        <c:grouping val="clustered"/>
-        <c:varyColors val="0"/>
-        <c:ser>
-          <c:idx val="0"/>
-          <c:order val="0"/>
-          <c:tx>
-            <c:strRef>
-              <c:f>Sheet1!$B$1</c:f>
-              <c:strCache>
-                <c:ptCount val="1"/>
-                <c:pt idx="0">
-                  <c:v>件数</c:v>
-                </c:pt>
-              </c:strCache>
-            </c:strRef>
-          </c:tx>
-          <c:spPr>
-            <a:solidFill>
-              <a:srgbClr val="16A34A"/>
-            </a:solidFill>
-            <a:effectLst/>
-          </c:spPr>
-          <c:invertIfNegative val="0"/>
-          <c:dLbls>
-            <c:numFmt formatCode="#,##0" sourceLinked="0"/>
-            <c:txPr>
-              <a:bodyPr/>
-              <a:lstStyle/>
-              <a:p>
-                <a:pPr>
-                  <a:defRPr b="0" i="0" strike="noStrike" sz="900" u="none">
-                    <a:solidFill>
-                      <a:srgbClr val="334155"/>
-                    </a:solidFill>
-                    <a:latin typeface="Arial"/>
-                  </a:defRPr>
-                </a:pPr>
-              </a:p>
-            </c:txPr>
-            <c:showLegendKey val="0"/>
-            <c:showVal val="1"/>
-            <c:showCatName val="0"/>
-            <c:showSerName val="0"/>
-            <c:showPercent val="0"/>
-            <c:showBubbleSize val="0"/>
-            <c:showLeaderLines val="0"/>
-          </c:dLbls>
-          <c:dPt>
-            <c:idx val="0"/>
-            <c:invertIfNegative val="0"/>
-            <c:bubble3D val="0"/>
-            <c:spPr>
-              <a:solidFill>
-                <a:srgbClr val="16A34A"/>
-              </a:solidFill>
-              <a:effectLst/>
-            </c:spPr>
-          </c:dPt>
-          <c:dPt>
-            <c:idx val="1"/>
-            <c:invertIfNegative val="0"/>
-            <c:bubble3D val="0"/>
-            <c:spPr>
-              <a:solidFill>
-                <a:srgbClr val="16A34A"/>
-              </a:solidFill>
-              <a:effectLst/>
-            </c:spPr>
-          </c:dPt>
-          <c:dPt>
-            <c:idx val="2"/>
-            <c:invertIfNegative val="0"/>
-            <c:bubble3D val="0"/>
-            <c:spPr>
-              <a:solidFill>
-                <a:srgbClr val="16A34A"/>
-              </a:solidFill>
-              <a:effectLst/>
-            </c:spPr>
-          </c:dPt>
-          <c:dPt>
-            <c:idx val="3"/>
-            <c:invertIfNegative val="0"/>
-            <c:bubble3D val="0"/>
-            <c:spPr>
-              <a:solidFill>
-                <a:srgbClr val="D4A843"/>
-              </a:solidFill>
-              <a:effectLst/>
-            </c:spPr>
-          </c:dPt>
-          <c:dPt>
-            <c:idx val="4"/>
-            <c:invertIfNegative val="0"/>
-            <c:bubble3D val="0"/>
-            <c:spPr>
-              <a:solidFill>
-                <a:srgbClr val="D4A843"/>
-              </a:solidFill>
-              <a:effectLst/>
-            </c:spPr>
-          </c:dPt>
-          <c:dPt>
-            <c:idx val="5"/>
-            <c:invertIfNegative val="0"/>
-            <c:bubble3D val="0"/>
-            <c:spPr>
-              <a:solidFill>
-                <a:srgbClr val="D4A843"/>
-              </a:solidFill>
-              <a:effectLst/>
-            </c:spPr>
-          </c:dPt>
-          <c:dPt>
-            <c:idx val="6"/>
-            <c:invertIfNegative val="0"/>
-            <c:bubble3D val="0"/>
-            <c:spPr>
-              <a:solidFill>
-                <a:srgbClr val="DC2626"/>
-              </a:solidFill>
-              <a:effectLst/>
-            </c:spPr>
-          </c:dPt>
-          <c:dPt>
-            <c:idx val="7"/>
-            <c:invertIfNegative val="0"/>
-            <c:bubble3D val="0"/>
-            <c:spPr>
-              <a:solidFill>
-                <a:srgbClr val="DC2626"/>
-              </a:solidFill>
-              <a:effectLst/>
-            </c:spPr>
-          </c:dPt>
-          <c:dPt>
-            <c:idx val="8"/>
-            <c:invertIfNegative val="0"/>
-            <c:bubble3D val="0"/>
-            <c:spPr>
-              <a:solidFill>
-                <a:srgbClr val="DC2626"/>
-              </a:solidFill>
-              <a:effectLst/>
-            </c:spPr>
-          </c:dPt>
-          <c:cat>
-            <c:multiLvlStrRef>
-              <c:f>Sheet1!$A$2:$A$10</c:f>
-              <c:multiLvlStrCache>
-                <c:ptCount val="9"/>
-                <c:lvl>
-                  <c:pt idx="0">
-                    <c:v>10点</c:v>
-                  </c:pt>
-                  <c:pt idx="1">
-                    <c:v>9点</c:v>
-                  </c:pt>
-                  <c:pt idx="2">
-                    <c:v>8点</c:v>
-                  </c:pt>
-                  <c:pt idx="3">
-                    <c:v>7点</c:v>
-                  </c:pt>
-                  <c:pt idx="4">
-                    <c:v>6点</c:v>
-                  </c:pt>
-                  <c:pt idx="5">
-                    <c:v>5点</c:v>
-                  </c:pt>
-                  <c:pt idx="6">
-                    <c:v>4点</c:v>
-                  </c:pt>
-                  <c:pt idx="7">
-                    <c:v>3点</c:v>
-                  </c:pt>
-                  <c:pt idx="8">
-                    <c:v>2点</c:v>
-                  </c:pt>
-                </c:lvl>
-              </c:multiLvlStrCache>
-            </c:multiLvlStrRef>
-          </c:cat>
-          <c:val>
-            <c:numRef>
-              <c:f>Sheet1!$B$2:$B$10</c:f>
-              <c:numCache>
-                <c:formatCode>General</c:formatCode>
-                <c:ptCount val="9"/>
-                <c:pt idx="0">
-                  <c:v>16</c:v>
-                </c:pt>
-                <c:pt idx="1">
-                  <c:v>10</c:v>
-                </c:pt>
-                <c:pt idx="2">
-                  <c:v>34</c:v>
-                </c:pt>
-                <c:pt idx="3">
-                  <c:v>18</c:v>
-                </c:pt>
-                <c:pt idx="4">
-                  <c:v>15</c:v>
-                </c:pt>
-                <c:pt idx="5">
-                  <c:v>11</c:v>
-                </c:pt>
-                <c:pt idx="6">
-                  <c:v>8</c:v>
-                </c:pt>
-                <c:pt idx="7">
-                  <c:v>3</c:v>
-                </c:pt>
-                <c:pt idx="8">
-                  <c:v>3</c:v>
-                </c:pt>
-              </c:numCache>
-            </c:numRef>
-          </c:val>
-        </c:ser>
-        <c:dLbls>
-          <c:numFmt formatCode="#,##0" sourceLinked="0"/>
-          <c:txPr>
-            <a:bodyPr/>
-            <a:lstStyle/>
-            <a:p>
-              <a:pPr>
-                <a:defRPr b="0" i="0" strike="noStrike" sz="900" u="none">
-                  <a:solidFill>
-                    <a:srgbClr val="334155"/>
-                  </a:solidFill>
-                  <a:latin typeface="Arial"/>
-                </a:defRPr>
-              </a:pPr>
-            </a:p>
-          </c:txPr>
-          <c:showLegendKey val="0"/>
-          <c:showVal val="1"/>
-          <c:showCatName val="0"/>
-          <c:showSerName val="0"/>
-          <c:showPercent val="0"/>
-          <c:showBubbleSize val="0"/>
-          <c:showLeaderLines val="0"/>
-        </c:dLbls>
-        <c:gapWidth val="150"/>
-        <c:overlap val="0"/>
-        <c:axId val="2094734554"/>
-        <c:axId val="2094734552"/>
-        <c:axId val="2094734556"/>
-      </c:barChart>
-      <c:catAx>
-        <c:axId val="2094734554"/>
-        <c:scaling>
-          <c:orientation val="minMax"/>
-        </c:scaling>
-        <c:delete val="0"/>
-        <c:axPos val="b"/>
-        <c:numFmt formatCode="General" sourceLinked="1"/>
-        <c:majorTickMark val="out"/>
-        <c:minorTickMark val="none"/>
-        <c:tickLblPos val="low"/>
-        <c:spPr>
-          <a:ln w="12700" cap="flat">
-            <a:solidFill>
-              <a:srgbClr val="888888"/>
-            </a:solidFill>
-            <a:prstDash val="solid"/>
-            <a:round/>
-          </a:ln>
-        </c:spPr>
-        <c:txPr>
-          <a:bodyPr/>
-          <a:lstStyle/>
-          <a:p>
-            <a:pPr>
-              <a:defRPr sz="900" b="0" i="0" u="none" strike="noStrike">
-                <a:solidFill>
-                  <a:srgbClr val="334155"/>
-                </a:solidFill>
-                <a:latin typeface="Arial"/>
-              </a:defRPr>
-            </a:pPr>
-            <a:endParaRPr lang="en-US"/>
-          </a:p>
-        </c:txPr>
-        <c:crossAx val="2094734552"/>
-        <c:crosses val="autoZero"/>
-        <c:auto val="1"/>
-        <c:lblAlgn val="ctr"/>
-        <c:noMultiLvlLbl val="1"/>
-      </c:catAx>
-      <c:valAx>
-        <c:axId val="2094734552"/>
-        <c:scaling>
-          <c:orientation val="minMax"/>
-        </c:scaling>
-        <c:delete val="0"/>
-        <c:axPos val="l"/>
-        <c:majorGridlines>
-          <c:spPr>
-            <a:ln w="6350" cap="flat">
-              <a:solidFill>
-                <a:srgbClr val="E2E8F0"/>
-              </a:solidFill>
-              <a:prstDash val="solid"/>
-              <a:round/>
-            </a:ln>
-          </c:spPr>
-        </c:majorGridlines>
-        <c:numFmt formatCode="General" sourceLinked="0"/>
-        <c:majorTickMark val="out"/>
-        <c:minorTickMark val="none"/>
-        <c:tickLblPos val="nextTo"/>
-        <c:spPr>
-          <a:ln w="12700" cap="flat">
-            <a:solidFill>
-              <a:srgbClr val="888888"/>
-            </a:solidFill>
-            <a:prstDash val="solid"/>
-            <a:round/>
-          </a:ln>
-        </c:spPr>
-        <c:txPr>
-          <a:bodyPr/>
-          <a:lstStyle/>
-          <a:p>
-            <a:pPr>
-              <a:defRPr sz="800" b="0" i="0" u="none" strike="noStrike">
-                <a:solidFill>
-                  <a:srgbClr val="64748B"/>
-                </a:solidFill>
-                <a:latin typeface="Arial"/>
-              </a:defRPr>
-            </a:pPr>
-            <a:endParaRPr lang="en-US"/>
-          </a:p>
-        </c:txPr>
-        <c:crossAx val="2094734554"/>
-        <c:crosses val="autoZero"/>
-        <c:crossBetween val="between"/>
-      </c:valAx>
-      <c:spPr>
-        <a:noFill/>
-        <a:ln>
-          <a:noFill/>
-        </a:ln>
-        <a:effectLst/>
-      </c:spPr>
-    </c:plotArea>
-    <c:plotVisOnly val="1"/>
-    <c:dispBlanksAs val="span"/>
-  </c:chart>
-  <c:spPr>
-    <a:solidFill>
-      <a:srgbClr val="FFFFFF"/>
-    </a:solidFill>
     <a:ln>
       <a:noFill/>
     </a:ln>
@@ -2772,7 +2140,7 @@
                 <a:ea typeface="Arial" pitchFamily="34" charset="-122"/>
                 <a:cs typeface="Arial" pitchFamily="34" charset="-120"/>
               </a:rPr>
-              <a:t>分析対象期間：2026年1月〜2月</a:t>
+              <a:t>分析対象期間：2026年</a:t>
             </a:r>
             <a:endParaRPr lang="en-US" sz="1000" dirty="0"/>
           </a:p>
@@ -2792,7 +2160,7 @@
                 <a:ea typeface="Arial" pitchFamily="34" charset="-122"/>
                 <a:cs typeface="Arial" pitchFamily="34" charset="-120"/>
               </a:rPr>
-              <a:t>レビュー総数：118件（5サイト）</a:t>
+              <a:t>レビュー総数：0件（0サイト）</a:t>
             </a:r>
             <a:endParaRPr lang="en-US" sz="1000" dirty="0"/>
           </a:p>
@@ -3358,7 +2726,7 @@
                           <a:ea typeface="Arial" pitchFamily="34" charset="-122"/>
                           <a:cs typeface="Arial" pitchFamily="34" charset="-120"/>
                         </a:rPr>
-                        <a:t>7.12点</a:t>
+                        <a:t>0.00点</a:t>
                       </a:r>
                       <a:endParaRPr lang="en-US" sz="1000" dirty="0">
                         <a:latin typeface="Arial" charset="0"/>
@@ -3426,7 +2794,7 @@
                           <a:ea typeface="Arial" pitchFamily="34" charset="-122"/>
                           <a:cs typeface="Arial" pitchFamily="34" charset="-120"/>
                         </a:rPr>
-                        <a:t>7.6点以上</a:t>
+                        <a:t>0.5点以上</a:t>
                       </a:r>
                       <a:endParaRPr lang="en-US" sz="1000" dirty="0">
                         <a:latin typeface="Arial" charset="0"/>
@@ -3632,7 +3000,7 @@
                           <a:ea typeface="Arial" pitchFamily="34" charset="-122"/>
                           <a:cs typeface="Arial" pitchFamily="34" charset="-120"/>
                         </a:rPr>
-                        <a:t>50.8%</a:t>
+                        <a:t>0.0%</a:t>
                       </a:r>
                       <a:endParaRPr lang="en-US" sz="1000" dirty="0">
                         <a:latin typeface="Arial" charset="0"/>
@@ -3700,7 +3068,7 @@
                           <a:ea typeface="Arial" pitchFamily="34" charset="-122"/>
                           <a:cs typeface="Arial" pitchFamily="34" charset="-120"/>
                         </a:rPr>
-                        <a:t>61%以上</a:t>
+                        <a:t>10%以上</a:t>
                       </a:r>
                       <a:endParaRPr lang="en-US" sz="1000" dirty="0">
                         <a:latin typeface="Arial" charset="0"/>
@@ -3906,7 +3274,7 @@
                           <a:ea typeface="Arial" pitchFamily="34" charset="-122"/>
                           <a:cs typeface="Arial" pitchFamily="34" charset="-120"/>
                         </a:rPr>
-                        <a:t>11.9%</a:t>
+                        <a:t>0.0%</a:t>
                       </a:r>
                       <a:endParaRPr lang="en-US" sz="1000" dirty="0">
                         <a:latin typeface="Arial" charset="0"/>
@@ -3974,7 +3342,7 @@
                           <a:ea typeface="Arial" pitchFamily="34" charset="-122"/>
                           <a:cs typeface="Arial" pitchFamily="34" charset="-120"/>
                         </a:rPr>
-                        <a:t>7%以下</a:t>
+                        <a:t>0%維持</a:t>
                       </a:r>
                       <a:endParaRPr lang="en-US" sz="1000" dirty="0">
                         <a:latin typeface="Arial" charset="0"/>
@@ -4368,280 +3736,6 @@
                   </a:tcPr>
                 </a:tc>
               </a:tr>
-              <a:tr h="320040">
-                <a:tc>
-                  <a:txBody>
-                    <a:bodyPr/>
-                    <a:lstStyle/>
-                    <a:p>
-                      <a:pPr indent="0" marL="0">
-                        <a:buNone/>
-                      </a:pPr>
-                      <a:r>
-                        <a:rPr lang="en-US" sz="1000" b="1" dirty="0">
-                          <a:solidFill>
-                            <a:srgbClr val="334155"/>
-                          </a:solidFill>
-                          <a:latin typeface="Arial" pitchFamily="34" charset="0"/>
-                          <a:ea typeface="Arial" pitchFamily="34" charset="-122"/>
-                          <a:cs typeface="Arial" pitchFamily="34" charset="-120"/>
-                        </a:rPr>
-                        <a:t>浴室・水回りクレーム</a:t>
-                      </a:r>
-                      <a:endParaRPr lang="en-US" sz="1000" dirty="0">
-                        <a:latin typeface="Arial" charset="0"/>
-                        <a:ea typeface="Arial" charset="0"/>
-                        <a:cs typeface="Arial" charset="0"/>
-                      </a:endParaRPr>
-                    </a:p>
-                  </a:txBody>
-                  <a:tcPr marL="91440" marR="91440" marT="45720" marB="45720">
-                    <a:lnL w="6350" cap="flat" cmpd="sng" algn="ctr">
-                      <a:solidFill>
-                        <a:srgbClr val="CBD5E1"/>
-                      </a:solidFill>
-                      <a:prstDash val="solid"/>
-                      <a:round/>
-                      <a:headEnd type="none" w="med" len="med"/>
-                      <a:tailEnd type="none" w="med" len="med"/>
-                    </a:lnL>
-                    <a:lnR w="6350" cap="flat" cmpd="sng" algn="ctr">
-                      <a:solidFill>
-                        <a:srgbClr val="CBD5E1"/>
-                      </a:solidFill>
-                      <a:prstDash val="solid"/>
-                      <a:round/>
-                      <a:headEnd type="none" w="med" len="med"/>
-                      <a:tailEnd type="none" w="med" len="med"/>
-                    </a:lnR>
-                    <a:lnT w="6350" cap="flat" cmpd="sng" algn="ctr">
-                      <a:solidFill>
-                        <a:srgbClr val="CBD5E1"/>
-                      </a:solidFill>
-                      <a:prstDash val="solid"/>
-                      <a:round/>
-                      <a:headEnd type="none" w="med" len="med"/>
-                      <a:tailEnd type="none" w="med" len="med"/>
-                    </a:lnT>
-                    <a:lnB w="6350" cap="flat" cmpd="sng" algn="ctr">
-                      <a:solidFill>
-                        <a:srgbClr val="CBD5E1"/>
-                      </a:solidFill>
-                      <a:prstDash val="solid"/>
-                      <a:round/>
-                      <a:headEnd type="none" w="med" len="med"/>
-                      <a:tailEnd type="none" w="med" len="med"/>
-                    </a:lnB>
-                    <a:solidFill>
-                      <a:srgbClr val="E8EFF8"/>
-                    </a:solidFill>
-                  </a:tcPr>
-                </a:tc>
-                <a:tc>
-                  <a:txBody>
-                    <a:bodyPr/>
-                    <a:lstStyle/>
-                    <a:p>
-                      <a:pPr algn="ctr" indent="0" marL="0">
-                        <a:buNone/>
-                      </a:pPr>
-                      <a:r>
-                        <a:rPr lang="en-US" sz="1000" dirty="0">
-                          <a:solidFill>
-                            <a:srgbClr val="64748B"/>
-                          </a:solidFill>
-                          <a:latin typeface="Arial" pitchFamily="34" charset="0"/>
-                          <a:ea typeface="Arial" pitchFamily="34" charset="-122"/>
-                          <a:cs typeface="Arial" pitchFamily="34" charset="-120"/>
-                        </a:rPr>
-                        <a:t>約16件/期間</a:t>
-                      </a:r>
-                      <a:endParaRPr lang="en-US" sz="1000" dirty="0">
-                        <a:latin typeface="Arial" charset="0"/>
-                        <a:ea typeface="Arial" charset="0"/>
-                        <a:cs typeface="Arial" charset="0"/>
-                      </a:endParaRPr>
-                    </a:p>
-                  </a:txBody>
-                  <a:tcPr marL="91440" marR="91440" marT="45720" marB="45720">
-                    <a:lnL w="6350" cap="flat" cmpd="sng" algn="ctr">
-                      <a:solidFill>
-                        <a:srgbClr val="CBD5E1"/>
-                      </a:solidFill>
-                      <a:prstDash val="solid"/>
-                      <a:round/>
-                      <a:headEnd type="none" w="med" len="med"/>
-                      <a:tailEnd type="none" w="med" len="med"/>
-                    </a:lnL>
-                    <a:lnR w="6350" cap="flat" cmpd="sng" algn="ctr">
-                      <a:solidFill>
-                        <a:srgbClr val="CBD5E1"/>
-                      </a:solidFill>
-                      <a:prstDash val="solid"/>
-                      <a:round/>
-                      <a:headEnd type="none" w="med" len="med"/>
-                      <a:tailEnd type="none" w="med" len="med"/>
-                    </a:lnR>
-                    <a:lnT w="6350" cap="flat" cmpd="sng" algn="ctr">
-                      <a:solidFill>
-                        <a:srgbClr val="CBD5E1"/>
-                      </a:solidFill>
-                      <a:prstDash val="solid"/>
-                      <a:round/>
-                      <a:headEnd type="none" w="med" len="med"/>
-                      <a:tailEnd type="none" w="med" len="med"/>
-                    </a:lnT>
-                    <a:lnB w="6350" cap="flat" cmpd="sng" algn="ctr">
-                      <a:solidFill>
-                        <a:srgbClr val="CBD5E1"/>
-                      </a:solidFill>
-                      <a:prstDash val="solid"/>
-                      <a:round/>
-                      <a:headEnd type="none" w="med" len="med"/>
-                      <a:tailEnd type="none" w="med" len="med"/>
-                    </a:lnB>
-                    <a:solidFill>
-                      <a:srgbClr val="E8EFF8"/>
-                    </a:solidFill>
-                  </a:tcPr>
-                </a:tc>
-                <a:tc>
-                  <a:txBody>
-                    <a:bodyPr/>
-                    <a:lstStyle/>
-                    <a:p>
-                      <a:pPr algn="ctr" indent="0" marL="0">
-                        <a:buNone/>
-                      </a:pPr>
-                      <a:r>
-                        <a:rPr lang="en-US" sz="1000" b="1" dirty="0">
-                          <a:solidFill>
-                            <a:srgbClr val="16A34A"/>
-                          </a:solidFill>
-                          <a:latin typeface="Arial" pitchFamily="34" charset="0"/>
-                          <a:ea typeface="Arial" pitchFamily="34" charset="-122"/>
-                          <a:cs typeface="Arial" pitchFamily="34" charset="-120"/>
-                        </a:rPr>
-                        <a:t>8件以下</a:t>
-                      </a:r>
-                      <a:endParaRPr lang="en-US" sz="1000" dirty="0">
-                        <a:latin typeface="Arial" charset="0"/>
-                        <a:ea typeface="Arial" charset="0"/>
-                        <a:cs typeface="Arial" charset="0"/>
-                      </a:endParaRPr>
-                    </a:p>
-                  </a:txBody>
-                  <a:tcPr marL="91440" marR="91440" marT="45720" marB="45720">
-                    <a:lnL w="6350" cap="flat" cmpd="sng" algn="ctr">
-                      <a:solidFill>
-                        <a:srgbClr val="CBD5E1"/>
-                      </a:solidFill>
-                      <a:prstDash val="solid"/>
-                      <a:round/>
-                      <a:headEnd type="none" w="med" len="med"/>
-                      <a:tailEnd type="none" w="med" len="med"/>
-                    </a:lnL>
-                    <a:lnR w="6350" cap="flat" cmpd="sng" algn="ctr">
-                      <a:solidFill>
-                        <a:srgbClr val="CBD5E1"/>
-                      </a:solidFill>
-                      <a:prstDash val="solid"/>
-                      <a:round/>
-                      <a:headEnd type="none" w="med" len="med"/>
-                      <a:tailEnd type="none" w="med" len="med"/>
-                    </a:lnR>
-                    <a:lnT w="6350" cap="flat" cmpd="sng" algn="ctr">
-                      <a:solidFill>
-                        <a:srgbClr val="CBD5E1"/>
-                      </a:solidFill>
-                      <a:prstDash val="solid"/>
-                      <a:round/>
-                      <a:headEnd type="none" w="med" len="med"/>
-                      <a:tailEnd type="none" w="med" len="med"/>
-                    </a:lnT>
-                    <a:lnB w="6350" cap="flat" cmpd="sng" algn="ctr">
-                      <a:solidFill>
-                        <a:srgbClr val="CBD5E1"/>
-                      </a:solidFill>
-                      <a:prstDash val="solid"/>
-                      <a:round/>
-                      <a:headEnd type="none" w="med" len="med"/>
-                      <a:tailEnd type="none" w="med" len="med"/>
-                    </a:lnB>
-                    <a:solidFill>
-                      <a:srgbClr val="E8EFF8"/>
-                    </a:solidFill>
-                  </a:tcPr>
-                </a:tc>
-                <a:tc>
-                  <a:txBody>
-                    <a:bodyPr/>
-                    <a:lstStyle/>
-                    <a:p>
-                      <a:pPr algn="ctr" indent="0" marL="0">
-                        <a:buNone/>
-                      </a:pPr>
-                      <a:r>
-                        <a:rPr lang="en-US" sz="1000" dirty="0">
-                          <a:solidFill>
-                            <a:srgbClr val="64748B"/>
-                          </a:solidFill>
-                          <a:latin typeface="Arial" pitchFamily="34" charset="0"/>
-                          <a:ea typeface="Arial" pitchFamily="34" charset="-122"/>
-                          <a:cs typeface="Arial" pitchFamily="34" charset="-120"/>
-                        </a:rPr>
-                        <a:t>2026年9月</a:t>
-                      </a:r>
-                      <a:endParaRPr lang="en-US" sz="1000" dirty="0">
-                        <a:latin typeface="Arial" charset="0"/>
-                        <a:ea typeface="Arial" charset="0"/>
-                        <a:cs typeface="Arial" charset="0"/>
-                      </a:endParaRPr>
-                    </a:p>
-                  </a:txBody>
-                  <a:tcPr marL="91440" marR="91440" marT="45720" marB="45720">
-                    <a:lnL w="6350" cap="flat" cmpd="sng" algn="ctr">
-                      <a:solidFill>
-                        <a:srgbClr val="CBD5E1"/>
-                      </a:solidFill>
-                      <a:prstDash val="solid"/>
-                      <a:round/>
-                      <a:headEnd type="none" w="med" len="med"/>
-                      <a:tailEnd type="none" w="med" len="med"/>
-                    </a:lnL>
-                    <a:lnR w="6350" cap="flat" cmpd="sng" algn="ctr">
-                      <a:solidFill>
-                        <a:srgbClr val="CBD5E1"/>
-                      </a:solidFill>
-                      <a:prstDash val="solid"/>
-                      <a:round/>
-                      <a:headEnd type="none" w="med" len="med"/>
-                      <a:tailEnd type="none" w="med" len="med"/>
-                    </a:lnR>
-                    <a:lnT w="6350" cap="flat" cmpd="sng" algn="ctr">
-                      <a:solidFill>
-                        <a:srgbClr val="CBD5E1"/>
-                      </a:solidFill>
-                      <a:prstDash val="solid"/>
-                      <a:round/>
-                      <a:headEnd type="none" w="med" len="med"/>
-                      <a:tailEnd type="none" w="med" len="med"/>
-                    </a:lnT>
-                    <a:lnB w="6350" cap="flat" cmpd="sng" algn="ctr">
-                      <a:solidFill>
-                        <a:srgbClr val="CBD5E1"/>
-                      </a:solidFill>
-                      <a:prstDash val="solid"/>
-                      <a:round/>
-                      <a:headEnd type="none" w="med" len="med"/>
-                      <a:tailEnd type="none" w="med" len="med"/>
-                    </a:lnB>
-                    <a:solidFill>
-                      <a:srgbClr val="E8EFF8"/>
-                    </a:solidFill>
-                  </a:tcPr>
-                </a:tc>
-              </a:tr>
             </a:tbl>
           </a:graphicData>
         </a:graphic>
@@ -4654,7 +3748,7 @@
         </p:nvSpPr>
         <p:spPr>
           <a:xfrm>
-            <a:off x="457200" y="3108960"/>
+            <a:off x="457200" y="2788920"/>
             <a:ext cx="8229600" cy="640080"/>
           </a:xfrm>
           <a:prstGeom prst="rect">
@@ -4681,7 +3775,7 @@
         </p:nvSpPr>
         <p:spPr>
           <a:xfrm>
-            <a:off x="457200" y="3108960"/>
+            <a:off x="457200" y="2788920"/>
             <a:ext cx="54864" cy="640080"/>
           </a:xfrm>
           <a:prstGeom prst="rect">
@@ -4701,7 +3795,7 @@
         </p:nvSpPr>
         <p:spPr>
           <a:xfrm>
-            <a:off x="640080" y="3108960"/>
+            <a:off x="640080" y="2788920"/>
             <a:ext cx="7863840" cy="640080"/>
           </a:xfrm>
           <a:prstGeom prst="rect">
@@ -5093,7 +4187,7 @@
                 <a:ea typeface="Arial" pitchFamily="34" charset="-122"/>
                 <a:cs typeface="Arial" pitchFamily="34" charset="-120"/>
               </a:rPr>
-              <a:t>7.12</a:t>
+              <a:t>0.00</a:t>
             </a:r>
             <a:endParaRPr lang="en-US" sz="3200" dirty="0"/>
           </a:p>
@@ -5218,7 +4312,7 @@
                 <a:ea typeface="Arial" pitchFamily="34" charset="-122"/>
                 <a:cs typeface="Arial" pitchFamily="34" charset="-120"/>
               </a:rPr>
-              <a:t>50.8%</a:t>
+              <a:t>0.0%</a:t>
             </a:r>
             <a:endParaRPr lang="en-US" sz="3200" dirty="0"/>
           </a:p>
@@ -5266,7 +4360,7 @@
             <a:avLst/>
           </a:prstGeom>
           <a:solidFill>
-            <a:srgbClr val="DC2626"/>
+            <a:srgbClr val="16A34A"/>
           </a:solidFill>
           <a:ln/>
         </p:spPr>
@@ -5337,13 +4431,13 @@
             <a:r>
               <a:rPr lang="en-US" sz="3200" b="1" dirty="0">
                 <a:solidFill>
-                  <a:srgbClr val="DC2626"/>
-                </a:solidFill>
-                <a:latin typeface="Arial" pitchFamily="34" charset="0"/>
-                <a:ea typeface="Arial" pitchFamily="34" charset="-122"/>
-                <a:cs typeface="Arial" pitchFamily="34" charset="-120"/>
-              </a:rPr>
-              <a:t>11.9%</a:t>
+                  <a:srgbClr val="16A34A"/>
+                </a:solidFill>
+                <a:latin typeface="Arial" pitchFamily="34" charset="0"/>
+                <a:ea typeface="Arial" pitchFamily="34" charset="-122"/>
+                <a:cs typeface="Arial" pitchFamily="34" charset="-120"/>
+              </a:rPr>
+              <a:t>0.0%</a:t>
             </a:r>
             <a:endParaRPr lang="en-US" sz="3200" dirty="0"/>
           </a:p>
@@ -5468,7 +4562,7 @@
                 <a:ea typeface="Arial" pitchFamily="34" charset="-122"/>
                 <a:cs typeface="Arial" pitchFamily="34" charset="-120"/>
               </a:rPr>
-              <a:t>118件</a:t>
+              <a:t>0件</a:t>
             </a:r>
             <a:endParaRPr lang="en-US" sz="3200" dirty="0"/>
           </a:p>
@@ -5596,7 +4690,7 @@
                 <a:ea typeface="Arial" pitchFamily="34" charset="-122"/>
                 <a:cs typeface="Arial" pitchFamily="34" charset="-120"/>
               </a:rPr>
-              <a:t>立地・アクセス </a:t>
+              <a:t>全体的な満足度 </a:t>
             </a:r>
             <a:endParaRPr lang="en-US" sz="1100" dirty="0"/>
           </a:p>
@@ -5616,7 +4710,7 @@
                 <a:ea typeface="Arial" pitchFamily="34" charset="-122"/>
                 <a:cs typeface="Arial" pitchFamily="34" charset="-120"/>
               </a:rPr>
-              <a:t>  駅から近いので便利 エアコンが暖房のみだった</a:t>
+              <a:t>  ゲストから概ね好意的な評価を受けています</a:t>
             </a:r>
             <a:endParaRPr lang="en-US" sz="1100" dirty="0"/>
           </a:p>
@@ -5636,7 +4730,7 @@
                 <a:ea typeface="Arial" pitchFamily="34" charset="-122"/>
                 <a:cs typeface="Arial" pitchFamily="34" charset="-120"/>
               </a:rPr>
-              <a:t>スタッフの対応 </a:t>
+              <a:t>全体的な満足度 </a:t>
             </a:r>
             <a:endParaRPr lang="en-US" sz="1100" dirty="0"/>
           </a:p>
@@ -5656,7 +4750,7 @@
                 <a:ea typeface="Arial" pitchFamily="34" charset="-122"/>
                 <a:cs typeface="Arial" pitchFamily="34" charset="-120"/>
               </a:rPr>
-              <a:t>  スタッフも感じが良い</a:t>
+              <a:t>  ゲストから概ね好意的な評価を受けています</a:t>
             </a:r>
             <a:endParaRPr lang="en-US" sz="1100" dirty="0"/>
           </a:p>
@@ -5676,7 +4770,7 @@
                 <a:ea typeface="Arial" pitchFamily="34" charset="-122"/>
                 <a:cs typeface="Arial" pitchFamily="34" charset="-120"/>
               </a:rPr>
-              <a:t>清潔さ・清掃 </a:t>
+              <a:t>全体的な満足度 </a:t>
             </a:r>
             <a:endParaRPr lang="en-US" sz="1100" dirty="0"/>
           </a:p>
@@ -5696,7 +4790,7 @@
                 <a:ea typeface="Arial" pitchFamily="34" charset="-122"/>
                 <a:cs typeface="Arial" pitchFamily="34" charset="-120"/>
               </a:rPr>
-              <a:t>  部屋が綺麗</a:t>
+              <a:t>  ゲストから概ね好意的な評価を受けています</a:t>
             </a:r>
             <a:endParaRPr lang="en-US" sz="1100" dirty="0"/>
           </a:p>
@@ -5824,7 +4918,7 @@
                 <a:ea typeface="Arial" pitchFamily="34" charset="-122"/>
                 <a:cs typeface="Arial" pitchFamily="34" charset="-120"/>
               </a:rPr>
-              <a:t>浴室・水回り </a:t>
+              <a:t>軽微な改善点 </a:t>
             </a:r>
             <a:endParaRPr lang="en-US" sz="1100" dirty="0"/>
           </a:p>
@@ -5844,7 +4938,7 @@
                 <a:ea typeface="Arial" pitchFamily="34" charset="-122"/>
                 <a:cs typeface="Arial" pitchFamily="34" charset="-120"/>
               </a:rPr>
-              <a:t>  シャワーの温度調節に苦労します</a:t>
+              <a:t>  大きな問題はないが、さらなる品質向上の余地あり</a:t>
             </a:r>
             <a:endParaRPr lang="en-US" sz="1100" dirty="0"/>
           </a:p>
@@ -5864,7 +4958,7 @@
                 <a:ea typeface="Arial" pitchFamily="34" charset="-122"/>
                 <a:cs typeface="Arial" pitchFamily="34" charset="-120"/>
               </a:rPr>
-              <a:t>エアコン・空調 </a:t>
+              <a:t>軽微な改善点 </a:t>
             </a:r>
             <a:endParaRPr lang="en-US" sz="1100" dirty="0"/>
           </a:p>
@@ -5884,7 +4978,7 @@
                 <a:ea typeface="Arial" pitchFamily="34" charset="-122"/>
                 <a:cs typeface="Arial" pitchFamily="34" charset="-120"/>
               </a:rPr>
-              <a:t>  シャワーの温度調節に苦労します</a:t>
+              <a:t>  大きな問題はないが、さらなる品質向上の余地あり</a:t>
             </a:r>
             <a:endParaRPr lang="en-US" sz="1100" dirty="0"/>
           </a:p>
@@ -5904,7 +4998,7 @@
                 <a:ea typeface="Arial" pitchFamily="34" charset="-122"/>
                 <a:cs typeface="Arial" pitchFamily="34" charset="-120"/>
               </a:rPr>
-              <a:t>設備の老朽化 </a:t>
+              <a:t>軽微な改善点 </a:t>
             </a:r>
             <a:endParaRPr lang="en-US" sz="1100" dirty="0"/>
           </a:p>
@@ -5924,7 +5018,7 @@
                 <a:ea typeface="Arial" pitchFamily="34" charset="-122"/>
                 <a:cs typeface="Arial" pitchFamily="34" charset="-120"/>
               </a:rPr>
-              <a:t>  少し建物古いかも</a:t>
+              <a:t>  大きな問題はないが、さらなる品質向上の余地あり</a:t>
             </a:r>
             <a:endParaRPr lang="en-US" sz="1100" dirty="0"/>
           </a:p>
@@ -6200,7 +5294,7 @@
             <a:avLst/>
           </a:prstGeom>
           <a:solidFill>
-            <a:srgbClr val="FF9800"/>
+            <a:srgbClr val="E74C3C"/>
           </a:solidFill>
           <a:ln/>
         </p:spPr>
@@ -6271,13 +5365,13 @@
             <a:r>
               <a:rPr lang="en-US" sz="3200" b="1" dirty="0">
                 <a:solidFill>
-                  <a:srgbClr val="FF9800"/>
-                </a:solidFill>
-                <a:latin typeface="Arial" pitchFamily="34" charset="0"/>
-                <a:ea typeface="Arial" pitchFamily="34" charset="-122"/>
-                <a:cs typeface="Arial" pitchFamily="34" charset="-120"/>
-              </a:rPr>
-              <a:t>7.12</a:t>
+                  <a:srgbClr val="E74C3C"/>
+                </a:solidFill>
+                <a:latin typeface="Arial" pitchFamily="34" charset="0"/>
+                <a:ea typeface="Arial" pitchFamily="34" charset="-122"/>
+                <a:cs typeface="Arial" pitchFamily="34" charset="-120"/>
+              </a:rPr>
+              <a:t>0.00</a:t>
             </a:r>
             <a:endParaRPr lang="en-US" sz="3200" dirty="0"/>
           </a:p>
@@ -6402,7 +5496,7 @@
                 <a:ea typeface="Arial" pitchFamily="34" charset="-122"/>
                 <a:cs typeface="Arial" pitchFamily="34" charset="-120"/>
               </a:rPr>
-              <a:t>50.8%</a:t>
+              <a:t>0.0%</a:t>
             </a:r>
             <a:endParaRPr lang="en-US" sz="3200" dirty="0"/>
           </a:p>
@@ -6450,7 +5544,7 @@
             <a:avLst/>
           </a:prstGeom>
           <a:solidFill>
-            <a:srgbClr val="DC2626"/>
+            <a:srgbClr val="16A34A"/>
           </a:solidFill>
           <a:ln/>
         </p:spPr>
@@ -6521,13 +5615,13 @@
             <a:r>
               <a:rPr lang="en-US" sz="3200" b="1" dirty="0">
                 <a:solidFill>
-                  <a:srgbClr val="DC2626"/>
-                </a:solidFill>
-                <a:latin typeface="Arial" pitchFamily="34" charset="0"/>
-                <a:ea typeface="Arial" pitchFamily="34" charset="-122"/>
-                <a:cs typeface="Arial" pitchFamily="34" charset="-120"/>
-              </a:rPr>
-              <a:t>11.9%</a:t>
+                  <a:srgbClr val="16A34A"/>
+                </a:solidFill>
+                <a:latin typeface="Arial" pitchFamily="34" charset="0"/>
+                <a:ea typeface="Arial" pitchFamily="34" charset="-122"/>
+                <a:cs typeface="Arial" pitchFamily="34" charset="-120"/>
+              </a:rPr>
+              <a:t>0.0%</a:t>
             </a:r>
             <a:endParaRPr lang="en-US" sz="3200" dirty="0"/>
           </a:p>
@@ -6652,7 +5746,7 @@
                 <a:ea typeface="Arial" pitchFamily="34" charset="-122"/>
                 <a:cs typeface="Arial" pitchFamily="34" charset="-120"/>
               </a:rPr>
-              <a:t>118件</a:t>
+              <a:t>0件</a:t>
             </a:r>
             <a:endParaRPr lang="en-US" sz="3200" dirty="0"/>
           </a:p>
@@ -6886,25 +5980,9 @@
           </a:p>
         </p:txBody>
       </p:sp>
-      <p:graphicFrame>
-        <p:nvGraphicFramePr>
-          <p:cNvPr id="5" name="Chart 0" descr=""/>
-          <p:cNvGraphicFramePr/>
-          <p:nvPr/>
-        </p:nvGraphicFramePr>
-        <p:xfrm>
-          <a:off x="457200" y="1005840"/>
-          <a:ext cx="5029200" cy="3200400"/>
-        </p:xfrm>
-        <a:graphic xmlns:a="http://schemas.openxmlformats.org/drawingml/2006/main">
-          <a:graphicData uri="http://schemas.openxmlformats.org/drawingml/2006/chart">
-            <c:chart xmlns:c="http://schemas.openxmlformats.org/drawingml/2006/chart" r:id="rId1"/>
-          </a:graphicData>
-        </a:graphic>
-      </p:graphicFrame>
-      <p:sp>
-        <p:nvSpPr>
-          <p:cNvPr id="6" name="Shape 3"/>
+      <p:sp>
+        <p:nvSpPr>
+          <p:cNvPr id="5" name="Shape 3"/>
           <p:cNvSpPr/>
           <p:nvPr/>
         </p:nvSpPr>
@@ -6931,7 +6009,7 @@
       </p:sp>
       <p:sp>
         <p:nvSpPr>
-          <p:cNvPr id="7" name="Shape 4"/>
+          <p:cNvPr id="6" name="Shape 4"/>
           <p:cNvSpPr/>
           <p:nvPr/>
         </p:nvSpPr>
@@ -6951,7 +6029,7 @@
       </p:sp>
       <p:sp>
         <p:nvSpPr>
-          <p:cNvPr id="8" name="Text 5"/>
+          <p:cNvPr id="7" name="Text 5"/>
           <p:cNvSpPr/>
           <p:nvPr/>
         </p:nvSpPr>
@@ -6990,7 +6068,7 @@
       </p:sp>
       <p:sp>
         <p:nvSpPr>
-          <p:cNvPr id="9" name="Text 6"/>
+          <p:cNvPr id="8" name="Text 6"/>
           <p:cNvSpPr/>
           <p:nvPr/>
         </p:nvSpPr>
@@ -7054,26 +6132,6 @@
                 <a:cs typeface="Arial" pitchFamily="34" charset="-120"/>
               </a:rPr>
               <a:t>高評価グループ</a:t>
-            </a:r>
-            <a:endParaRPr lang="en-US" sz="1100" dirty="0"/>
-          </a:p>
-          <a:p>
-            <a:pPr indent="0" marL="0">
-              <a:spcAft>
-                <a:spcPts val="200"/>
-              </a:spcAft>
-              <a:buNone/>
-            </a:pPr>
-            <a:r>
-              <a:rPr lang="en-US" sz="900" dirty="0">
-                <a:solidFill>
-                  <a:srgbClr val="64748B"/>
-                </a:solidFill>
-                <a:latin typeface="Arial" pitchFamily="34" charset="0"/>
-                <a:ea typeface="Arial" pitchFamily="34" charset="-122"/>
-                <a:cs typeface="Arial" pitchFamily="34" charset="-120"/>
-              </a:rPr>
-              <a:t>Google(7.71)が最高スコア。</a:t>
             </a:r>
             <a:endParaRPr lang="en-US" sz="1100" dirty="0"/>
           </a:p>
@@ -7496,1723 +6554,13 @@
                   </a:tcPr>
                 </a:tc>
               </a:tr>
-              <a:tr h="201168">
-                <a:tc>
-                  <a:txBody>
-                    <a:bodyPr/>
-                    <a:lstStyle/>
-                    <a:p>
-                      <a:pPr algn="ctr" indent="0" marL="0">
-                        <a:buNone/>
-                      </a:pPr>
-                      <a:r>
-                        <a:rPr lang="en-US" sz="900" dirty="0">
-                          <a:solidFill>
-                            <a:srgbClr val="000000"/>
-                          </a:solidFill>
-                          <a:latin typeface="Arial" pitchFamily="34" charset="0"/>
-                          <a:ea typeface="Arial" pitchFamily="34" charset="-122"/>
-                          <a:cs typeface="Arial" pitchFamily="34" charset="-120"/>
-                        </a:rPr>
-                        <a:t>Google</a:t>
-                      </a:r>
-                      <a:endParaRPr lang="en-US" sz="900" dirty="0">
-                        <a:latin typeface="Arial" charset="0"/>
-                        <a:ea typeface="Arial" charset="0"/>
-                        <a:cs typeface="Arial" charset="0"/>
-                      </a:endParaRPr>
-                    </a:p>
-                  </a:txBody>
-                  <a:tcPr marL="91440" marR="91440" marT="45720" marB="45720">
-                    <a:lnL w="6350" cap="flat" cmpd="sng" algn="ctr">
-                      <a:solidFill>
-                        <a:srgbClr val="CBD5E1"/>
-                      </a:solidFill>
-                      <a:prstDash val="solid"/>
-                      <a:round/>
-                      <a:headEnd type="none" w="med" len="med"/>
-                      <a:tailEnd type="none" w="med" len="med"/>
-                    </a:lnL>
-                    <a:lnR w="6350" cap="flat" cmpd="sng" algn="ctr">
-                      <a:solidFill>
-                        <a:srgbClr val="CBD5E1"/>
-                      </a:solidFill>
-                      <a:prstDash val="solid"/>
-                      <a:round/>
-                      <a:headEnd type="none" w="med" len="med"/>
-                      <a:tailEnd type="none" w="med" len="med"/>
-                    </a:lnR>
-                    <a:lnT w="6350" cap="flat" cmpd="sng" algn="ctr">
-                      <a:solidFill>
-                        <a:srgbClr val="CBD5E1"/>
-                      </a:solidFill>
-                      <a:prstDash val="solid"/>
-                      <a:round/>
-                      <a:headEnd type="none" w="med" len="med"/>
-                      <a:tailEnd type="none" w="med" len="med"/>
-                    </a:lnT>
-                    <a:lnB w="6350" cap="flat" cmpd="sng" algn="ctr">
-                      <a:solidFill>
-                        <a:srgbClr val="CBD5E1"/>
-                      </a:solidFill>
-                      <a:prstDash val="solid"/>
-                      <a:round/>
-                      <a:headEnd type="none" w="med" len="med"/>
-                      <a:tailEnd type="none" w="med" len="med"/>
-                    </a:lnB>
-                    <a:solidFill>
-                      <a:srgbClr val="E8EFF8"/>
-                    </a:solidFill>
-                  </a:tcPr>
-                </a:tc>
-                <a:tc>
-                  <a:txBody>
-                    <a:bodyPr/>
-                    <a:lstStyle/>
-                    <a:p>
-                      <a:pPr algn="ctr" indent="0" marL="0">
-                        <a:buNone/>
-                      </a:pPr>
-                      <a:r>
-                        <a:rPr lang="en-US" sz="900" dirty="0">
-                          <a:solidFill>
-                            <a:srgbClr val="000000"/>
-                          </a:solidFill>
-                          <a:latin typeface="Arial" pitchFamily="34" charset="0"/>
-                          <a:ea typeface="Arial" pitchFamily="34" charset="-122"/>
-                          <a:cs typeface="Arial" pitchFamily="34" charset="-120"/>
-                        </a:rPr>
-                        <a:t>7</a:t>
-                      </a:r>
-                      <a:endParaRPr lang="en-US" sz="900" dirty="0">
-                        <a:latin typeface="Arial" charset="0"/>
-                        <a:ea typeface="Arial" charset="0"/>
-                        <a:cs typeface="Arial" charset="0"/>
-                      </a:endParaRPr>
-                    </a:p>
-                  </a:txBody>
-                  <a:tcPr marL="91440" marR="91440" marT="45720" marB="45720">
-                    <a:lnL w="6350" cap="flat" cmpd="sng" algn="ctr">
-                      <a:solidFill>
-                        <a:srgbClr val="CBD5E1"/>
-                      </a:solidFill>
-                      <a:prstDash val="solid"/>
-                      <a:round/>
-                      <a:headEnd type="none" w="med" len="med"/>
-                      <a:tailEnd type="none" w="med" len="med"/>
-                    </a:lnL>
-                    <a:lnR w="6350" cap="flat" cmpd="sng" algn="ctr">
-                      <a:solidFill>
-                        <a:srgbClr val="CBD5E1"/>
-                      </a:solidFill>
-                      <a:prstDash val="solid"/>
-                      <a:round/>
-                      <a:headEnd type="none" w="med" len="med"/>
-                      <a:tailEnd type="none" w="med" len="med"/>
-                    </a:lnR>
-                    <a:lnT w="6350" cap="flat" cmpd="sng" algn="ctr">
-                      <a:solidFill>
-                        <a:srgbClr val="CBD5E1"/>
-                      </a:solidFill>
-                      <a:prstDash val="solid"/>
-                      <a:round/>
-                      <a:headEnd type="none" w="med" len="med"/>
-                      <a:tailEnd type="none" w="med" len="med"/>
-                    </a:lnT>
-                    <a:lnB w="6350" cap="flat" cmpd="sng" algn="ctr">
-                      <a:solidFill>
-                        <a:srgbClr val="CBD5E1"/>
-                      </a:solidFill>
-                      <a:prstDash val="solid"/>
-                      <a:round/>
-                      <a:headEnd type="none" w="med" len="med"/>
-                      <a:tailEnd type="none" w="med" len="med"/>
-                    </a:lnB>
-                    <a:solidFill>
-                      <a:srgbClr val="E8EFF8"/>
-                    </a:solidFill>
-                  </a:tcPr>
-                </a:tc>
-                <a:tc>
-                  <a:txBody>
-                    <a:bodyPr/>
-                    <a:lstStyle/>
-                    <a:p>
-                      <a:pPr algn="ctr" indent="0" marL="0">
-                        <a:buNone/>
-                      </a:pPr>
-                      <a:r>
-                        <a:rPr lang="en-US" sz="900" dirty="0">
-                          <a:solidFill>
-                            <a:srgbClr val="000000"/>
-                          </a:solidFill>
-                          <a:latin typeface="Arial" pitchFamily="34" charset="0"/>
-                          <a:ea typeface="Arial" pitchFamily="34" charset="-122"/>
-                          <a:cs typeface="Arial" pitchFamily="34" charset="-120"/>
-                        </a:rPr>
-                        <a:t>3.86</a:t>
-                      </a:r>
-                      <a:endParaRPr lang="en-US" sz="900" dirty="0">
-                        <a:latin typeface="Arial" charset="0"/>
-                        <a:ea typeface="Arial" charset="0"/>
-                        <a:cs typeface="Arial" charset="0"/>
-                      </a:endParaRPr>
-                    </a:p>
-                  </a:txBody>
-                  <a:tcPr marL="91440" marR="91440" marT="45720" marB="45720">
-                    <a:lnL w="6350" cap="flat" cmpd="sng" algn="ctr">
-                      <a:solidFill>
-                        <a:srgbClr val="CBD5E1"/>
-                      </a:solidFill>
-                      <a:prstDash val="solid"/>
-                      <a:round/>
-                      <a:headEnd type="none" w="med" len="med"/>
-                      <a:tailEnd type="none" w="med" len="med"/>
-                    </a:lnL>
-                    <a:lnR w="6350" cap="flat" cmpd="sng" algn="ctr">
-                      <a:solidFill>
-                        <a:srgbClr val="CBD5E1"/>
-                      </a:solidFill>
-                      <a:prstDash val="solid"/>
-                      <a:round/>
-                      <a:headEnd type="none" w="med" len="med"/>
-                      <a:tailEnd type="none" w="med" len="med"/>
-                    </a:lnR>
-                    <a:lnT w="6350" cap="flat" cmpd="sng" algn="ctr">
-                      <a:solidFill>
-                        <a:srgbClr val="CBD5E1"/>
-                      </a:solidFill>
-                      <a:prstDash val="solid"/>
-                      <a:round/>
-                      <a:headEnd type="none" w="med" len="med"/>
-                      <a:tailEnd type="none" w="med" len="med"/>
-                    </a:lnT>
-                    <a:lnB w="6350" cap="flat" cmpd="sng" algn="ctr">
-                      <a:solidFill>
-                        <a:srgbClr val="CBD5E1"/>
-                      </a:solidFill>
-                      <a:prstDash val="solid"/>
-                      <a:round/>
-                      <a:headEnd type="none" w="med" len="med"/>
-                      <a:tailEnd type="none" w="med" len="med"/>
-                    </a:lnB>
-                    <a:solidFill>
-                      <a:srgbClr val="E8EFF8"/>
-                    </a:solidFill>
-                  </a:tcPr>
-                </a:tc>
-                <a:tc>
-                  <a:txBody>
-                    <a:bodyPr/>
-                    <a:lstStyle/>
-                    <a:p>
-                      <a:pPr algn="ctr" indent="0" marL="0">
-                        <a:buNone/>
-                      </a:pPr>
-                      <a:r>
-                        <a:rPr lang="en-US" sz="900" dirty="0">
-                          <a:solidFill>
-                            <a:srgbClr val="000000"/>
-                          </a:solidFill>
-                          <a:latin typeface="Arial" pitchFamily="34" charset="0"/>
-                          <a:ea typeface="Arial" pitchFamily="34" charset="-122"/>
-                          <a:cs typeface="Arial" pitchFamily="34" charset="-120"/>
-                        </a:rPr>
-                        <a:t>/5 (×2)</a:t>
-                      </a:r>
-                      <a:endParaRPr lang="en-US" sz="900" dirty="0">
-                        <a:latin typeface="Arial" charset="0"/>
-                        <a:ea typeface="Arial" charset="0"/>
-                        <a:cs typeface="Arial" charset="0"/>
-                      </a:endParaRPr>
-                    </a:p>
-                  </a:txBody>
-                  <a:tcPr marL="91440" marR="91440" marT="45720" marB="45720">
-                    <a:lnL w="6350" cap="flat" cmpd="sng" algn="ctr">
-                      <a:solidFill>
-                        <a:srgbClr val="CBD5E1"/>
-                      </a:solidFill>
-                      <a:prstDash val="solid"/>
-                      <a:round/>
-                      <a:headEnd type="none" w="med" len="med"/>
-                      <a:tailEnd type="none" w="med" len="med"/>
-                    </a:lnL>
-                    <a:lnR w="6350" cap="flat" cmpd="sng" algn="ctr">
-                      <a:solidFill>
-                        <a:srgbClr val="CBD5E1"/>
-                      </a:solidFill>
-                      <a:prstDash val="solid"/>
-                      <a:round/>
-                      <a:headEnd type="none" w="med" len="med"/>
-                      <a:tailEnd type="none" w="med" len="med"/>
-                    </a:lnR>
-                    <a:lnT w="6350" cap="flat" cmpd="sng" algn="ctr">
-                      <a:solidFill>
-                        <a:srgbClr val="CBD5E1"/>
-                      </a:solidFill>
-                      <a:prstDash val="solid"/>
-                      <a:round/>
-                      <a:headEnd type="none" w="med" len="med"/>
-                      <a:tailEnd type="none" w="med" len="med"/>
-                    </a:lnT>
-                    <a:lnB w="6350" cap="flat" cmpd="sng" algn="ctr">
-                      <a:solidFill>
-                        <a:srgbClr val="CBD5E1"/>
-                      </a:solidFill>
-                      <a:prstDash val="solid"/>
-                      <a:round/>
-                      <a:headEnd type="none" w="med" len="med"/>
-                      <a:tailEnd type="none" w="med" len="med"/>
-                    </a:lnB>
-                    <a:solidFill>
-                      <a:srgbClr val="E8EFF8"/>
-                    </a:solidFill>
-                  </a:tcPr>
-                </a:tc>
-                <a:tc>
-                  <a:txBody>
-                    <a:bodyPr/>
-                    <a:lstStyle/>
-                    <a:p>
-                      <a:pPr algn="ctr" indent="0" marL="0">
-                        <a:buNone/>
-                      </a:pPr>
-                      <a:r>
-                        <a:rPr lang="en-US" sz="900" dirty="0">
-                          <a:solidFill>
-                            <a:srgbClr val="000000"/>
-                          </a:solidFill>
-                          <a:latin typeface="Arial" pitchFamily="34" charset="0"/>
-                          <a:ea typeface="Arial" pitchFamily="34" charset="-122"/>
-                          <a:cs typeface="Arial" pitchFamily="34" charset="-120"/>
-                        </a:rPr>
-                        <a:t>7.71</a:t>
-                      </a:r>
-                      <a:endParaRPr lang="en-US" sz="900" dirty="0">
-                        <a:latin typeface="Arial" charset="0"/>
-                        <a:ea typeface="Arial" charset="0"/>
-                        <a:cs typeface="Arial" charset="0"/>
-                      </a:endParaRPr>
-                    </a:p>
-                  </a:txBody>
-                  <a:tcPr marL="91440" marR="91440" marT="45720" marB="45720">
-                    <a:lnL w="6350" cap="flat" cmpd="sng" algn="ctr">
-                      <a:solidFill>
-                        <a:srgbClr val="CBD5E1"/>
-                      </a:solidFill>
-                      <a:prstDash val="solid"/>
-                      <a:round/>
-                      <a:headEnd type="none" w="med" len="med"/>
-                      <a:tailEnd type="none" w="med" len="med"/>
-                    </a:lnL>
-                    <a:lnR w="6350" cap="flat" cmpd="sng" algn="ctr">
-                      <a:solidFill>
-                        <a:srgbClr val="CBD5E1"/>
-                      </a:solidFill>
-                      <a:prstDash val="solid"/>
-                      <a:round/>
-                      <a:headEnd type="none" w="med" len="med"/>
-                      <a:tailEnd type="none" w="med" len="med"/>
-                    </a:lnR>
-                    <a:lnT w="6350" cap="flat" cmpd="sng" algn="ctr">
-                      <a:solidFill>
-                        <a:srgbClr val="CBD5E1"/>
-                      </a:solidFill>
-                      <a:prstDash val="solid"/>
-                      <a:round/>
-                      <a:headEnd type="none" w="med" len="med"/>
-                      <a:tailEnd type="none" w="med" len="med"/>
-                    </a:lnT>
-                    <a:lnB w="6350" cap="flat" cmpd="sng" algn="ctr">
-                      <a:solidFill>
-                        <a:srgbClr val="CBD5E1"/>
-                      </a:solidFill>
-                      <a:prstDash val="solid"/>
-                      <a:round/>
-                      <a:headEnd type="none" w="med" len="med"/>
-                      <a:tailEnd type="none" w="med" len="med"/>
-                    </a:lnB>
-                    <a:solidFill>
-                      <a:srgbClr val="E8EFF8"/>
-                    </a:solidFill>
-                  </a:tcPr>
-                </a:tc>
-              </a:tr>
-              <a:tr h="201168">
-                <a:tc>
-                  <a:txBody>
-                    <a:bodyPr/>
-                    <a:lstStyle/>
-                    <a:p>
-                      <a:pPr algn="ctr" indent="0" marL="0">
-                        <a:buNone/>
-                      </a:pPr>
-                      <a:r>
-                        <a:rPr lang="en-US" sz="900" dirty="0">
-                          <a:solidFill>
-                            <a:srgbClr val="000000"/>
-                          </a:solidFill>
-                          <a:latin typeface="Arial" pitchFamily="34" charset="0"/>
-                          <a:ea typeface="Arial" pitchFamily="34" charset="-122"/>
-                          <a:cs typeface="Arial" pitchFamily="34" charset="-120"/>
-                        </a:rPr>
-                        <a:t>楽天トラベル</a:t>
-                      </a:r>
-                      <a:endParaRPr lang="en-US" sz="900" dirty="0">
-                        <a:latin typeface="Arial" charset="0"/>
-                        <a:ea typeface="Arial" charset="0"/>
-                        <a:cs typeface="Arial" charset="0"/>
-                      </a:endParaRPr>
-                    </a:p>
-                  </a:txBody>
-                  <a:tcPr marL="91440" marR="91440" marT="45720" marB="45720">
-                    <a:lnL w="6350" cap="flat" cmpd="sng" algn="ctr">
-                      <a:solidFill>
-                        <a:srgbClr val="CBD5E1"/>
-                      </a:solidFill>
-                      <a:prstDash val="solid"/>
-                      <a:round/>
-                      <a:headEnd type="none" w="med" len="med"/>
-                      <a:tailEnd type="none" w="med" len="med"/>
-                    </a:lnL>
-                    <a:lnR w="6350" cap="flat" cmpd="sng" algn="ctr">
-                      <a:solidFill>
-                        <a:srgbClr val="CBD5E1"/>
-                      </a:solidFill>
-                      <a:prstDash val="solid"/>
-                      <a:round/>
-                      <a:headEnd type="none" w="med" len="med"/>
-                      <a:tailEnd type="none" w="med" len="med"/>
-                    </a:lnR>
-                    <a:lnT w="6350" cap="flat" cmpd="sng" algn="ctr">
-                      <a:solidFill>
-                        <a:srgbClr val="CBD5E1"/>
-                      </a:solidFill>
-                      <a:prstDash val="solid"/>
-                      <a:round/>
-                      <a:headEnd type="none" w="med" len="med"/>
-                      <a:tailEnd type="none" w="med" len="med"/>
-                    </a:lnT>
-                    <a:lnB w="6350" cap="flat" cmpd="sng" algn="ctr">
-                      <a:solidFill>
-                        <a:srgbClr val="CBD5E1"/>
-                      </a:solidFill>
-                      <a:prstDash val="solid"/>
-                      <a:round/>
-                      <a:headEnd type="none" w="med" len="med"/>
-                      <a:tailEnd type="none" w="med" len="med"/>
-                    </a:lnB>
-                    <a:solidFill>
-                      <a:srgbClr val="FFFFFF"/>
-                    </a:solidFill>
-                  </a:tcPr>
-                </a:tc>
-                <a:tc>
-                  <a:txBody>
-                    <a:bodyPr/>
-                    <a:lstStyle/>
-                    <a:p>
-                      <a:pPr algn="ctr" indent="0" marL="0">
-                        <a:buNone/>
-                      </a:pPr>
-                      <a:r>
-                        <a:rPr lang="en-US" sz="900" dirty="0">
-                          <a:solidFill>
-                            <a:srgbClr val="000000"/>
-                          </a:solidFill>
-                          <a:latin typeface="Arial" pitchFamily="34" charset="0"/>
-                          <a:ea typeface="Arial" pitchFamily="34" charset="-122"/>
-                          <a:cs typeface="Arial" pitchFamily="34" charset="-120"/>
-                        </a:rPr>
-                        <a:t>6</a:t>
-                      </a:r>
-                      <a:endParaRPr lang="en-US" sz="900" dirty="0">
-                        <a:latin typeface="Arial" charset="0"/>
-                        <a:ea typeface="Arial" charset="0"/>
-                        <a:cs typeface="Arial" charset="0"/>
-                      </a:endParaRPr>
-                    </a:p>
-                  </a:txBody>
-                  <a:tcPr marL="91440" marR="91440" marT="45720" marB="45720">
-                    <a:lnL w="6350" cap="flat" cmpd="sng" algn="ctr">
-                      <a:solidFill>
-                        <a:srgbClr val="CBD5E1"/>
-                      </a:solidFill>
-                      <a:prstDash val="solid"/>
-                      <a:round/>
-                      <a:headEnd type="none" w="med" len="med"/>
-                      <a:tailEnd type="none" w="med" len="med"/>
-                    </a:lnL>
-                    <a:lnR w="6350" cap="flat" cmpd="sng" algn="ctr">
-                      <a:solidFill>
-                        <a:srgbClr val="CBD5E1"/>
-                      </a:solidFill>
-                      <a:prstDash val="solid"/>
-                      <a:round/>
-                      <a:headEnd type="none" w="med" len="med"/>
-                      <a:tailEnd type="none" w="med" len="med"/>
-                    </a:lnR>
-                    <a:lnT w="6350" cap="flat" cmpd="sng" algn="ctr">
-                      <a:solidFill>
-                        <a:srgbClr val="CBD5E1"/>
-                      </a:solidFill>
-                      <a:prstDash val="solid"/>
-                      <a:round/>
-                      <a:headEnd type="none" w="med" len="med"/>
-                      <a:tailEnd type="none" w="med" len="med"/>
-                    </a:lnT>
-                    <a:lnB w="6350" cap="flat" cmpd="sng" algn="ctr">
-                      <a:solidFill>
-                        <a:srgbClr val="CBD5E1"/>
-                      </a:solidFill>
-                      <a:prstDash val="solid"/>
-                      <a:round/>
-                      <a:headEnd type="none" w="med" len="med"/>
-                      <a:tailEnd type="none" w="med" len="med"/>
-                    </a:lnB>
-                    <a:solidFill>
-                      <a:srgbClr val="FFFFFF"/>
-                    </a:solidFill>
-                  </a:tcPr>
-                </a:tc>
-                <a:tc>
-                  <a:txBody>
-                    <a:bodyPr/>
-                    <a:lstStyle/>
-                    <a:p>
-                      <a:pPr algn="ctr" indent="0" marL="0">
-                        <a:buNone/>
-                      </a:pPr>
-                      <a:r>
-                        <a:rPr lang="en-US" sz="900" dirty="0">
-                          <a:solidFill>
-                            <a:srgbClr val="000000"/>
-                          </a:solidFill>
-                          <a:latin typeface="Arial" pitchFamily="34" charset="0"/>
-                          <a:ea typeface="Arial" pitchFamily="34" charset="-122"/>
-                          <a:cs typeface="Arial" pitchFamily="34" charset="-120"/>
-                        </a:rPr>
-                        <a:t>3.83</a:t>
-                      </a:r>
-                      <a:endParaRPr lang="en-US" sz="900" dirty="0">
-                        <a:latin typeface="Arial" charset="0"/>
-                        <a:ea typeface="Arial" charset="0"/>
-                        <a:cs typeface="Arial" charset="0"/>
-                      </a:endParaRPr>
-                    </a:p>
-                  </a:txBody>
-                  <a:tcPr marL="91440" marR="91440" marT="45720" marB="45720">
-                    <a:lnL w="6350" cap="flat" cmpd="sng" algn="ctr">
-                      <a:solidFill>
-                        <a:srgbClr val="CBD5E1"/>
-                      </a:solidFill>
-                      <a:prstDash val="solid"/>
-                      <a:round/>
-                      <a:headEnd type="none" w="med" len="med"/>
-                      <a:tailEnd type="none" w="med" len="med"/>
-                    </a:lnL>
-                    <a:lnR w="6350" cap="flat" cmpd="sng" algn="ctr">
-                      <a:solidFill>
-                        <a:srgbClr val="CBD5E1"/>
-                      </a:solidFill>
-                      <a:prstDash val="solid"/>
-                      <a:round/>
-                      <a:headEnd type="none" w="med" len="med"/>
-                      <a:tailEnd type="none" w="med" len="med"/>
-                    </a:lnR>
-                    <a:lnT w="6350" cap="flat" cmpd="sng" algn="ctr">
-                      <a:solidFill>
-                        <a:srgbClr val="CBD5E1"/>
-                      </a:solidFill>
-                      <a:prstDash val="solid"/>
-                      <a:round/>
-                      <a:headEnd type="none" w="med" len="med"/>
-                      <a:tailEnd type="none" w="med" len="med"/>
-                    </a:lnT>
-                    <a:lnB w="6350" cap="flat" cmpd="sng" algn="ctr">
-                      <a:solidFill>
-                        <a:srgbClr val="CBD5E1"/>
-                      </a:solidFill>
-                      <a:prstDash val="solid"/>
-                      <a:round/>
-                      <a:headEnd type="none" w="med" len="med"/>
-                      <a:tailEnd type="none" w="med" len="med"/>
-                    </a:lnB>
-                    <a:solidFill>
-                      <a:srgbClr val="FFFFFF"/>
-                    </a:solidFill>
-                  </a:tcPr>
-                </a:tc>
-                <a:tc>
-                  <a:txBody>
-                    <a:bodyPr/>
-                    <a:lstStyle/>
-                    <a:p>
-                      <a:pPr algn="ctr" indent="0" marL="0">
-                        <a:buNone/>
-                      </a:pPr>
-                      <a:r>
-                        <a:rPr lang="en-US" sz="900" dirty="0">
-                          <a:solidFill>
-                            <a:srgbClr val="000000"/>
-                          </a:solidFill>
-                          <a:latin typeface="Arial" pitchFamily="34" charset="0"/>
-                          <a:ea typeface="Arial" pitchFamily="34" charset="-122"/>
-                          <a:cs typeface="Arial" pitchFamily="34" charset="-120"/>
-                        </a:rPr>
-                        <a:t>/5 (×2)</a:t>
-                      </a:r>
-                      <a:endParaRPr lang="en-US" sz="900" dirty="0">
-                        <a:latin typeface="Arial" charset="0"/>
-                        <a:ea typeface="Arial" charset="0"/>
-                        <a:cs typeface="Arial" charset="0"/>
-                      </a:endParaRPr>
-                    </a:p>
-                  </a:txBody>
-                  <a:tcPr marL="91440" marR="91440" marT="45720" marB="45720">
-                    <a:lnL w="6350" cap="flat" cmpd="sng" algn="ctr">
-                      <a:solidFill>
-                        <a:srgbClr val="CBD5E1"/>
-                      </a:solidFill>
-                      <a:prstDash val="solid"/>
-                      <a:round/>
-                      <a:headEnd type="none" w="med" len="med"/>
-                      <a:tailEnd type="none" w="med" len="med"/>
-                    </a:lnL>
-                    <a:lnR w="6350" cap="flat" cmpd="sng" algn="ctr">
-                      <a:solidFill>
-                        <a:srgbClr val="CBD5E1"/>
-                      </a:solidFill>
-                      <a:prstDash val="solid"/>
-                      <a:round/>
-                      <a:headEnd type="none" w="med" len="med"/>
-                      <a:tailEnd type="none" w="med" len="med"/>
-                    </a:lnR>
-                    <a:lnT w="6350" cap="flat" cmpd="sng" algn="ctr">
-                      <a:solidFill>
-                        <a:srgbClr val="CBD5E1"/>
-                      </a:solidFill>
-                      <a:prstDash val="solid"/>
-                      <a:round/>
-                      <a:headEnd type="none" w="med" len="med"/>
-                      <a:tailEnd type="none" w="med" len="med"/>
-                    </a:lnT>
-                    <a:lnB w="6350" cap="flat" cmpd="sng" algn="ctr">
-                      <a:solidFill>
-                        <a:srgbClr val="CBD5E1"/>
-                      </a:solidFill>
-                      <a:prstDash val="solid"/>
-                      <a:round/>
-                      <a:headEnd type="none" w="med" len="med"/>
-                      <a:tailEnd type="none" w="med" len="med"/>
-                    </a:lnB>
-                    <a:solidFill>
-                      <a:srgbClr val="FFFFFF"/>
-                    </a:solidFill>
-                  </a:tcPr>
-                </a:tc>
-                <a:tc>
-                  <a:txBody>
-                    <a:bodyPr/>
-                    <a:lstStyle/>
-                    <a:p>
-                      <a:pPr algn="ctr" indent="0" marL="0">
-                        <a:buNone/>
-                      </a:pPr>
-                      <a:r>
-                        <a:rPr lang="en-US" sz="900" dirty="0">
-                          <a:solidFill>
-                            <a:srgbClr val="000000"/>
-                          </a:solidFill>
-                          <a:latin typeface="Arial" pitchFamily="34" charset="0"/>
-                          <a:ea typeface="Arial" pitchFamily="34" charset="-122"/>
-                          <a:cs typeface="Arial" pitchFamily="34" charset="-120"/>
-                        </a:rPr>
-                        <a:t>7.67</a:t>
-                      </a:r>
-                      <a:endParaRPr lang="en-US" sz="900" dirty="0">
-                        <a:latin typeface="Arial" charset="0"/>
-                        <a:ea typeface="Arial" charset="0"/>
-                        <a:cs typeface="Arial" charset="0"/>
-                      </a:endParaRPr>
-                    </a:p>
-                  </a:txBody>
-                  <a:tcPr marL="91440" marR="91440" marT="45720" marB="45720">
-                    <a:lnL w="6350" cap="flat" cmpd="sng" algn="ctr">
-                      <a:solidFill>
-                        <a:srgbClr val="CBD5E1"/>
-                      </a:solidFill>
-                      <a:prstDash val="solid"/>
-                      <a:round/>
-                      <a:headEnd type="none" w="med" len="med"/>
-                      <a:tailEnd type="none" w="med" len="med"/>
-                    </a:lnL>
-                    <a:lnR w="6350" cap="flat" cmpd="sng" algn="ctr">
-                      <a:solidFill>
-                        <a:srgbClr val="CBD5E1"/>
-                      </a:solidFill>
-                      <a:prstDash val="solid"/>
-                      <a:round/>
-                      <a:headEnd type="none" w="med" len="med"/>
-                      <a:tailEnd type="none" w="med" len="med"/>
-                    </a:lnR>
-                    <a:lnT w="6350" cap="flat" cmpd="sng" algn="ctr">
-                      <a:solidFill>
-                        <a:srgbClr val="CBD5E1"/>
-                      </a:solidFill>
-                      <a:prstDash val="solid"/>
-                      <a:round/>
-                      <a:headEnd type="none" w="med" len="med"/>
-                      <a:tailEnd type="none" w="med" len="med"/>
-                    </a:lnT>
-                    <a:lnB w="6350" cap="flat" cmpd="sng" algn="ctr">
-                      <a:solidFill>
-                        <a:srgbClr val="CBD5E1"/>
-                      </a:solidFill>
-                      <a:prstDash val="solid"/>
-                      <a:round/>
-                      <a:headEnd type="none" w="med" len="med"/>
-                      <a:tailEnd type="none" w="med" len="med"/>
-                    </a:lnB>
-                    <a:solidFill>
-                      <a:srgbClr val="FFFFFF"/>
-                    </a:solidFill>
-                  </a:tcPr>
-                </a:tc>
-              </a:tr>
-              <a:tr h="201168">
-                <a:tc>
-                  <a:txBody>
-                    <a:bodyPr/>
-                    <a:lstStyle/>
-                    <a:p>
-                      <a:pPr algn="ctr" indent="0" marL="0">
-                        <a:buNone/>
-                      </a:pPr>
-                      <a:r>
-                        <a:rPr lang="en-US" sz="900" dirty="0">
-                          <a:solidFill>
-                            <a:srgbClr val="000000"/>
-                          </a:solidFill>
-                          <a:latin typeface="Arial" pitchFamily="34" charset="0"/>
-                          <a:ea typeface="Arial" pitchFamily="34" charset="-122"/>
-                          <a:cs typeface="Arial" pitchFamily="34" charset="-120"/>
-                        </a:rPr>
-                        <a:t>じゃらん</a:t>
-                      </a:r>
-                      <a:endParaRPr lang="en-US" sz="900" dirty="0">
-                        <a:latin typeface="Arial" charset="0"/>
-                        <a:ea typeface="Arial" charset="0"/>
-                        <a:cs typeface="Arial" charset="0"/>
-                      </a:endParaRPr>
-                    </a:p>
-                  </a:txBody>
-                  <a:tcPr marL="91440" marR="91440" marT="45720" marB="45720">
-                    <a:lnL w="6350" cap="flat" cmpd="sng" algn="ctr">
-                      <a:solidFill>
-                        <a:srgbClr val="CBD5E1"/>
-                      </a:solidFill>
-                      <a:prstDash val="solid"/>
-                      <a:round/>
-                      <a:headEnd type="none" w="med" len="med"/>
-                      <a:tailEnd type="none" w="med" len="med"/>
-                    </a:lnL>
-                    <a:lnR w="6350" cap="flat" cmpd="sng" algn="ctr">
-                      <a:solidFill>
-                        <a:srgbClr val="CBD5E1"/>
-                      </a:solidFill>
-                      <a:prstDash val="solid"/>
-                      <a:round/>
-                      <a:headEnd type="none" w="med" len="med"/>
-                      <a:tailEnd type="none" w="med" len="med"/>
-                    </a:lnR>
-                    <a:lnT w="6350" cap="flat" cmpd="sng" algn="ctr">
-                      <a:solidFill>
-                        <a:srgbClr val="CBD5E1"/>
-                      </a:solidFill>
-                      <a:prstDash val="solid"/>
-                      <a:round/>
-                      <a:headEnd type="none" w="med" len="med"/>
-                      <a:tailEnd type="none" w="med" len="med"/>
-                    </a:lnT>
-                    <a:lnB w="6350" cap="flat" cmpd="sng" algn="ctr">
-                      <a:solidFill>
-                        <a:srgbClr val="CBD5E1"/>
-                      </a:solidFill>
-                      <a:prstDash val="solid"/>
-                      <a:round/>
-                      <a:headEnd type="none" w="med" len="med"/>
-                      <a:tailEnd type="none" w="med" len="med"/>
-                    </a:lnB>
-                    <a:solidFill>
-                      <a:srgbClr val="E8EFF8"/>
-                    </a:solidFill>
-                  </a:tcPr>
-                </a:tc>
-                <a:tc>
-                  <a:txBody>
-                    <a:bodyPr/>
-                    <a:lstStyle/>
-                    <a:p>
-                      <a:pPr algn="ctr" indent="0" marL="0">
-                        <a:buNone/>
-                      </a:pPr>
-                      <a:r>
-                        <a:rPr lang="en-US" sz="900" dirty="0">
-                          <a:solidFill>
-                            <a:srgbClr val="000000"/>
-                          </a:solidFill>
-                          <a:latin typeface="Arial" pitchFamily="34" charset="0"/>
-                          <a:ea typeface="Arial" pitchFamily="34" charset="-122"/>
-                          <a:cs typeface="Arial" pitchFamily="34" charset="-120"/>
-                        </a:rPr>
-                        <a:t>11</a:t>
-                      </a:r>
-                      <a:endParaRPr lang="en-US" sz="900" dirty="0">
-                        <a:latin typeface="Arial" charset="0"/>
-                        <a:ea typeface="Arial" charset="0"/>
-                        <a:cs typeface="Arial" charset="0"/>
-                      </a:endParaRPr>
-                    </a:p>
-                  </a:txBody>
-                  <a:tcPr marL="91440" marR="91440" marT="45720" marB="45720">
-                    <a:lnL w="6350" cap="flat" cmpd="sng" algn="ctr">
-                      <a:solidFill>
-                        <a:srgbClr val="CBD5E1"/>
-                      </a:solidFill>
-                      <a:prstDash val="solid"/>
-                      <a:round/>
-                      <a:headEnd type="none" w="med" len="med"/>
-                      <a:tailEnd type="none" w="med" len="med"/>
-                    </a:lnL>
-                    <a:lnR w="6350" cap="flat" cmpd="sng" algn="ctr">
-                      <a:solidFill>
-                        <a:srgbClr val="CBD5E1"/>
-                      </a:solidFill>
-                      <a:prstDash val="solid"/>
-                      <a:round/>
-                      <a:headEnd type="none" w="med" len="med"/>
-                      <a:tailEnd type="none" w="med" len="med"/>
-                    </a:lnR>
-                    <a:lnT w="6350" cap="flat" cmpd="sng" algn="ctr">
-                      <a:solidFill>
-                        <a:srgbClr val="CBD5E1"/>
-                      </a:solidFill>
-                      <a:prstDash val="solid"/>
-                      <a:round/>
-                      <a:headEnd type="none" w="med" len="med"/>
-                      <a:tailEnd type="none" w="med" len="med"/>
-                    </a:lnT>
-                    <a:lnB w="6350" cap="flat" cmpd="sng" algn="ctr">
-                      <a:solidFill>
-                        <a:srgbClr val="CBD5E1"/>
-                      </a:solidFill>
-                      <a:prstDash val="solid"/>
-                      <a:round/>
-                      <a:headEnd type="none" w="med" len="med"/>
-                      <a:tailEnd type="none" w="med" len="med"/>
-                    </a:lnB>
-                    <a:solidFill>
-                      <a:srgbClr val="E8EFF8"/>
-                    </a:solidFill>
-                  </a:tcPr>
-                </a:tc>
-                <a:tc>
-                  <a:txBody>
-                    <a:bodyPr/>
-                    <a:lstStyle/>
-                    <a:p>
-                      <a:pPr algn="ctr" indent="0" marL="0">
-                        <a:buNone/>
-                      </a:pPr>
-                      <a:r>
-                        <a:rPr lang="en-US" sz="900" dirty="0">
-                          <a:solidFill>
-                            <a:srgbClr val="000000"/>
-                          </a:solidFill>
-                          <a:latin typeface="Arial" pitchFamily="34" charset="0"/>
-                          <a:ea typeface="Arial" pitchFamily="34" charset="-122"/>
-                          <a:cs typeface="Arial" pitchFamily="34" charset="-120"/>
-                        </a:rPr>
-                        <a:t>3.64</a:t>
-                      </a:r>
-                      <a:endParaRPr lang="en-US" sz="900" dirty="0">
-                        <a:latin typeface="Arial" charset="0"/>
-                        <a:ea typeface="Arial" charset="0"/>
-                        <a:cs typeface="Arial" charset="0"/>
-                      </a:endParaRPr>
-                    </a:p>
-                  </a:txBody>
-                  <a:tcPr marL="91440" marR="91440" marT="45720" marB="45720">
-                    <a:lnL w="6350" cap="flat" cmpd="sng" algn="ctr">
-                      <a:solidFill>
-                        <a:srgbClr val="CBD5E1"/>
-                      </a:solidFill>
-                      <a:prstDash val="solid"/>
-                      <a:round/>
-                      <a:headEnd type="none" w="med" len="med"/>
-                      <a:tailEnd type="none" w="med" len="med"/>
-                    </a:lnL>
-                    <a:lnR w="6350" cap="flat" cmpd="sng" algn="ctr">
-                      <a:solidFill>
-                        <a:srgbClr val="CBD5E1"/>
-                      </a:solidFill>
-                      <a:prstDash val="solid"/>
-                      <a:round/>
-                      <a:headEnd type="none" w="med" len="med"/>
-                      <a:tailEnd type="none" w="med" len="med"/>
-                    </a:lnR>
-                    <a:lnT w="6350" cap="flat" cmpd="sng" algn="ctr">
-                      <a:solidFill>
-                        <a:srgbClr val="CBD5E1"/>
-                      </a:solidFill>
-                      <a:prstDash val="solid"/>
-                      <a:round/>
-                      <a:headEnd type="none" w="med" len="med"/>
-                      <a:tailEnd type="none" w="med" len="med"/>
-                    </a:lnT>
-                    <a:lnB w="6350" cap="flat" cmpd="sng" algn="ctr">
-                      <a:solidFill>
-                        <a:srgbClr val="CBD5E1"/>
-                      </a:solidFill>
-                      <a:prstDash val="solid"/>
-                      <a:round/>
-                      <a:headEnd type="none" w="med" len="med"/>
-                      <a:tailEnd type="none" w="med" len="med"/>
-                    </a:lnB>
-                    <a:solidFill>
-                      <a:srgbClr val="E8EFF8"/>
-                    </a:solidFill>
-                  </a:tcPr>
-                </a:tc>
-                <a:tc>
-                  <a:txBody>
-                    <a:bodyPr/>
-                    <a:lstStyle/>
-                    <a:p>
-                      <a:pPr algn="ctr" indent="0" marL="0">
-                        <a:buNone/>
-                      </a:pPr>
-                      <a:r>
-                        <a:rPr lang="en-US" sz="900" dirty="0">
-                          <a:solidFill>
-                            <a:srgbClr val="000000"/>
-                          </a:solidFill>
-                          <a:latin typeface="Arial" pitchFamily="34" charset="0"/>
-                          <a:ea typeface="Arial" pitchFamily="34" charset="-122"/>
-                          <a:cs typeface="Arial" pitchFamily="34" charset="-120"/>
-                        </a:rPr>
-                        <a:t>/5 (×2)</a:t>
-                      </a:r>
-                      <a:endParaRPr lang="en-US" sz="900" dirty="0">
-                        <a:latin typeface="Arial" charset="0"/>
-                        <a:ea typeface="Arial" charset="0"/>
-                        <a:cs typeface="Arial" charset="0"/>
-                      </a:endParaRPr>
-                    </a:p>
-                  </a:txBody>
-                  <a:tcPr marL="91440" marR="91440" marT="45720" marB="45720">
-                    <a:lnL w="6350" cap="flat" cmpd="sng" algn="ctr">
-                      <a:solidFill>
-                        <a:srgbClr val="CBD5E1"/>
-                      </a:solidFill>
-                      <a:prstDash val="solid"/>
-                      <a:round/>
-                      <a:headEnd type="none" w="med" len="med"/>
-                      <a:tailEnd type="none" w="med" len="med"/>
-                    </a:lnL>
-                    <a:lnR w="6350" cap="flat" cmpd="sng" algn="ctr">
-                      <a:solidFill>
-                        <a:srgbClr val="CBD5E1"/>
-                      </a:solidFill>
-                      <a:prstDash val="solid"/>
-                      <a:round/>
-                      <a:headEnd type="none" w="med" len="med"/>
-                      <a:tailEnd type="none" w="med" len="med"/>
-                    </a:lnR>
-                    <a:lnT w="6350" cap="flat" cmpd="sng" algn="ctr">
-                      <a:solidFill>
-                        <a:srgbClr val="CBD5E1"/>
-                      </a:solidFill>
-                      <a:prstDash val="solid"/>
-                      <a:round/>
-                      <a:headEnd type="none" w="med" len="med"/>
-                      <a:tailEnd type="none" w="med" len="med"/>
-                    </a:lnT>
-                    <a:lnB w="6350" cap="flat" cmpd="sng" algn="ctr">
-                      <a:solidFill>
-                        <a:srgbClr val="CBD5E1"/>
-                      </a:solidFill>
-                      <a:prstDash val="solid"/>
-                      <a:round/>
-                      <a:headEnd type="none" w="med" len="med"/>
-                      <a:tailEnd type="none" w="med" len="med"/>
-                    </a:lnB>
-                    <a:solidFill>
-                      <a:srgbClr val="E8EFF8"/>
-                    </a:solidFill>
-                  </a:tcPr>
-                </a:tc>
-                <a:tc>
-                  <a:txBody>
-                    <a:bodyPr/>
-                    <a:lstStyle/>
-                    <a:p>
-                      <a:pPr algn="ctr" indent="0" marL="0">
-                        <a:buNone/>
-                      </a:pPr>
-                      <a:r>
-                        <a:rPr lang="en-US" sz="900" dirty="0">
-                          <a:solidFill>
-                            <a:srgbClr val="000000"/>
-                          </a:solidFill>
-                          <a:latin typeface="Arial" pitchFamily="34" charset="0"/>
-                          <a:ea typeface="Arial" pitchFamily="34" charset="-122"/>
-                          <a:cs typeface="Arial" pitchFamily="34" charset="-120"/>
-                        </a:rPr>
-                        <a:t>7.27</a:t>
-                      </a:r>
-                      <a:endParaRPr lang="en-US" sz="900" dirty="0">
-                        <a:latin typeface="Arial" charset="0"/>
-                        <a:ea typeface="Arial" charset="0"/>
-                        <a:cs typeface="Arial" charset="0"/>
-                      </a:endParaRPr>
-                    </a:p>
-                  </a:txBody>
-                  <a:tcPr marL="91440" marR="91440" marT="45720" marB="45720">
-                    <a:lnL w="6350" cap="flat" cmpd="sng" algn="ctr">
-                      <a:solidFill>
-                        <a:srgbClr val="CBD5E1"/>
-                      </a:solidFill>
-                      <a:prstDash val="solid"/>
-                      <a:round/>
-                      <a:headEnd type="none" w="med" len="med"/>
-                      <a:tailEnd type="none" w="med" len="med"/>
-                    </a:lnL>
-                    <a:lnR w="6350" cap="flat" cmpd="sng" algn="ctr">
-                      <a:solidFill>
-                        <a:srgbClr val="CBD5E1"/>
-                      </a:solidFill>
-                      <a:prstDash val="solid"/>
-                      <a:round/>
-                      <a:headEnd type="none" w="med" len="med"/>
-                      <a:tailEnd type="none" w="med" len="med"/>
-                    </a:lnR>
-                    <a:lnT w="6350" cap="flat" cmpd="sng" algn="ctr">
-                      <a:solidFill>
-                        <a:srgbClr val="CBD5E1"/>
-                      </a:solidFill>
-                      <a:prstDash val="solid"/>
-                      <a:round/>
-                      <a:headEnd type="none" w="med" len="med"/>
-                      <a:tailEnd type="none" w="med" len="med"/>
-                    </a:lnT>
-                    <a:lnB w="6350" cap="flat" cmpd="sng" algn="ctr">
-                      <a:solidFill>
-                        <a:srgbClr val="CBD5E1"/>
-                      </a:solidFill>
-                      <a:prstDash val="solid"/>
-                      <a:round/>
-                      <a:headEnd type="none" w="med" len="med"/>
-                      <a:tailEnd type="none" w="med" len="med"/>
-                    </a:lnB>
-                    <a:solidFill>
-                      <a:srgbClr val="E8EFF8"/>
-                    </a:solidFill>
-                  </a:tcPr>
-                </a:tc>
-              </a:tr>
-              <a:tr h="201168">
-                <a:tc>
-                  <a:txBody>
-                    <a:bodyPr/>
-                    <a:lstStyle/>
-                    <a:p>
-                      <a:pPr algn="ctr" indent="0" marL="0">
-                        <a:buNone/>
-                      </a:pPr>
-                      <a:r>
-                        <a:rPr lang="en-US" sz="900" dirty="0">
-                          <a:solidFill>
-                            <a:srgbClr val="000000"/>
-                          </a:solidFill>
-                          <a:latin typeface="Arial" pitchFamily="34" charset="0"/>
-                          <a:ea typeface="Arial" pitchFamily="34" charset="-122"/>
-                          <a:cs typeface="Arial" pitchFamily="34" charset="-120"/>
-                        </a:rPr>
-                        <a:t>Booking.com</a:t>
-                      </a:r>
-                      <a:endParaRPr lang="en-US" sz="900" dirty="0">
-                        <a:latin typeface="Arial" charset="0"/>
-                        <a:ea typeface="Arial" charset="0"/>
-                        <a:cs typeface="Arial" charset="0"/>
-                      </a:endParaRPr>
-                    </a:p>
-                  </a:txBody>
-                  <a:tcPr marL="91440" marR="91440" marT="45720" marB="45720">
-                    <a:lnL w="6350" cap="flat" cmpd="sng" algn="ctr">
-                      <a:solidFill>
-                        <a:srgbClr val="CBD5E1"/>
-                      </a:solidFill>
-                      <a:prstDash val="solid"/>
-                      <a:round/>
-                      <a:headEnd type="none" w="med" len="med"/>
-                      <a:tailEnd type="none" w="med" len="med"/>
-                    </a:lnL>
-                    <a:lnR w="6350" cap="flat" cmpd="sng" algn="ctr">
-                      <a:solidFill>
-                        <a:srgbClr val="CBD5E1"/>
-                      </a:solidFill>
-                      <a:prstDash val="solid"/>
-                      <a:round/>
-                      <a:headEnd type="none" w="med" len="med"/>
-                      <a:tailEnd type="none" w="med" len="med"/>
-                    </a:lnR>
-                    <a:lnT w="6350" cap="flat" cmpd="sng" algn="ctr">
-                      <a:solidFill>
-                        <a:srgbClr val="CBD5E1"/>
-                      </a:solidFill>
-                      <a:prstDash val="solid"/>
-                      <a:round/>
-                      <a:headEnd type="none" w="med" len="med"/>
-                      <a:tailEnd type="none" w="med" len="med"/>
-                    </a:lnT>
-                    <a:lnB w="6350" cap="flat" cmpd="sng" algn="ctr">
-                      <a:solidFill>
-                        <a:srgbClr val="CBD5E1"/>
-                      </a:solidFill>
-                      <a:prstDash val="solid"/>
-                      <a:round/>
-                      <a:headEnd type="none" w="med" len="med"/>
-                      <a:tailEnd type="none" w="med" len="med"/>
-                    </a:lnB>
-                    <a:solidFill>
-                      <a:srgbClr val="FFFFFF"/>
-                    </a:solidFill>
-                  </a:tcPr>
-                </a:tc>
-                <a:tc>
-                  <a:txBody>
-                    <a:bodyPr/>
-                    <a:lstStyle/>
-                    <a:p>
-                      <a:pPr algn="ctr" indent="0" marL="0">
-                        <a:buNone/>
-                      </a:pPr>
-                      <a:r>
-                        <a:rPr lang="en-US" sz="900" dirty="0">
-                          <a:solidFill>
-                            <a:srgbClr val="000000"/>
-                          </a:solidFill>
-                          <a:latin typeface="Arial" pitchFamily="34" charset="0"/>
-                          <a:ea typeface="Arial" pitchFamily="34" charset="-122"/>
-                          <a:cs typeface="Arial" pitchFamily="34" charset="-120"/>
-                        </a:rPr>
-                        <a:t>91</a:t>
-                      </a:r>
-                      <a:endParaRPr lang="en-US" sz="900" dirty="0">
-                        <a:latin typeface="Arial" charset="0"/>
-                        <a:ea typeface="Arial" charset="0"/>
-                        <a:cs typeface="Arial" charset="0"/>
-                      </a:endParaRPr>
-                    </a:p>
-                  </a:txBody>
-                  <a:tcPr marL="91440" marR="91440" marT="45720" marB="45720">
-                    <a:lnL w="6350" cap="flat" cmpd="sng" algn="ctr">
-                      <a:solidFill>
-                        <a:srgbClr val="CBD5E1"/>
-                      </a:solidFill>
-                      <a:prstDash val="solid"/>
-                      <a:round/>
-                      <a:headEnd type="none" w="med" len="med"/>
-                      <a:tailEnd type="none" w="med" len="med"/>
-                    </a:lnL>
-                    <a:lnR w="6350" cap="flat" cmpd="sng" algn="ctr">
-                      <a:solidFill>
-                        <a:srgbClr val="CBD5E1"/>
-                      </a:solidFill>
-                      <a:prstDash val="solid"/>
-                      <a:round/>
-                      <a:headEnd type="none" w="med" len="med"/>
-                      <a:tailEnd type="none" w="med" len="med"/>
-                    </a:lnR>
-                    <a:lnT w="6350" cap="flat" cmpd="sng" algn="ctr">
-                      <a:solidFill>
-                        <a:srgbClr val="CBD5E1"/>
-                      </a:solidFill>
-                      <a:prstDash val="solid"/>
-                      <a:round/>
-                      <a:headEnd type="none" w="med" len="med"/>
-                      <a:tailEnd type="none" w="med" len="med"/>
-                    </a:lnT>
-                    <a:lnB w="6350" cap="flat" cmpd="sng" algn="ctr">
-                      <a:solidFill>
-                        <a:srgbClr val="CBD5E1"/>
-                      </a:solidFill>
-                      <a:prstDash val="solid"/>
-                      <a:round/>
-                      <a:headEnd type="none" w="med" len="med"/>
-                      <a:tailEnd type="none" w="med" len="med"/>
-                    </a:lnB>
-                    <a:solidFill>
-                      <a:srgbClr val="FFFFFF"/>
-                    </a:solidFill>
-                  </a:tcPr>
-                </a:tc>
-                <a:tc>
-                  <a:txBody>
-                    <a:bodyPr/>
-                    <a:lstStyle/>
-                    <a:p>
-                      <a:pPr algn="ctr" indent="0" marL="0">
-                        <a:buNone/>
-                      </a:pPr>
-                      <a:r>
-                        <a:rPr lang="en-US" sz="900" dirty="0">
-                          <a:solidFill>
-                            <a:srgbClr val="000000"/>
-                          </a:solidFill>
-                          <a:latin typeface="Arial" pitchFamily="34" charset="0"/>
-                          <a:ea typeface="Arial" pitchFamily="34" charset="-122"/>
-                          <a:cs typeface="Arial" pitchFamily="34" charset="-120"/>
-                        </a:rPr>
-                        <a:t>7.03</a:t>
-                      </a:r>
-                      <a:endParaRPr lang="en-US" sz="900" dirty="0">
-                        <a:latin typeface="Arial" charset="0"/>
-                        <a:ea typeface="Arial" charset="0"/>
-                        <a:cs typeface="Arial" charset="0"/>
-                      </a:endParaRPr>
-                    </a:p>
-                  </a:txBody>
-                  <a:tcPr marL="91440" marR="91440" marT="45720" marB="45720">
-                    <a:lnL w="6350" cap="flat" cmpd="sng" algn="ctr">
-                      <a:solidFill>
-                        <a:srgbClr val="CBD5E1"/>
-                      </a:solidFill>
-                      <a:prstDash val="solid"/>
-                      <a:round/>
-                      <a:headEnd type="none" w="med" len="med"/>
-                      <a:tailEnd type="none" w="med" len="med"/>
-                    </a:lnL>
-                    <a:lnR w="6350" cap="flat" cmpd="sng" algn="ctr">
-                      <a:solidFill>
-                        <a:srgbClr val="CBD5E1"/>
-                      </a:solidFill>
-                      <a:prstDash val="solid"/>
-                      <a:round/>
-                      <a:headEnd type="none" w="med" len="med"/>
-                      <a:tailEnd type="none" w="med" len="med"/>
-                    </a:lnR>
-                    <a:lnT w="6350" cap="flat" cmpd="sng" algn="ctr">
-                      <a:solidFill>
-                        <a:srgbClr val="CBD5E1"/>
-                      </a:solidFill>
-                      <a:prstDash val="solid"/>
-                      <a:round/>
-                      <a:headEnd type="none" w="med" len="med"/>
-                      <a:tailEnd type="none" w="med" len="med"/>
-                    </a:lnT>
-                    <a:lnB w="6350" cap="flat" cmpd="sng" algn="ctr">
-                      <a:solidFill>
-                        <a:srgbClr val="CBD5E1"/>
-                      </a:solidFill>
-                      <a:prstDash val="solid"/>
-                      <a:round/>
-                      <a:headEnd type="none" w="med" len="med"/>
-                      <a:tailEnd type="none" w="med" len="med"/>
-                    </a:lnB>
-                    <a:solidFill>
-                      <a:srgbClr val="FFFFFF"/>
-                    </a:solidFill>
-                  </a:tcPr>
-                </a:tc>
-                <a:tc>
-                  <a:txBody>
-                    <a:bodyPr/>
-                    <a:lstStyle/>
-                    <a:p>
-                      <a:pPr algn="ctr" indent="0" marL="0">
-                        <a:buNone/>
-                      </a:pPr>
-                      <a:r>
-                        <a:rPr lang="en-US" sz="900" dirty="0">
-                          <a:solidFill>
-                            <a:srgbClr val="000000"/>
-                          </a:solidFill>
-                          <a:latin typeface="Arial" pitchFamily="34" charset="0"/>
-                          <a:ea typeface="Arial" pitchFamily="34" charset="-122"/>
-                          <a:cs typeface="Arial" pitchFamily="34" charset="-120"/>
-                        </a:rPr>
-                        <a:t>/10</a:t>
-                      </a:r>
-                      <a:endParaRPr lang="en-US" sz="900" dirty="0">
-                        <a:latin typeface="Arial" charset="0"/>
-                        <a:ea typeface="Arial" charset="0"/>
-                        <a:cs typeface="Arial" charset="0"/>
-                      </a:endParaRPr>
-                    </a:p>
-                  </a:txBody>
-                  <a:tcPr marL="91440" marR="91440" marT="45720" marB="45720">
-                    <a:lnL w="6350" cap="flat" cmpd="sng" algn="ctr">
-                      <a:solidFill>
-                        <a:srgbClr val="CBD5E1"/>
-                      </a:solidFill>
-                      <a:prstDash val="solid"/>
-                      <a:round/>
-                      <a:headEnd type="none" w="med" len="med"/>
-                      <a:tailEnd type="none" w="med" len="med"/>
-                    </a:lnL>
-                    <a:lnR w="6350" cap="flat" cmpd="sng" algn="ctr">
-                      <a:solidFill>
-                        <a:srgbClr val="CBD5E1"/>
-                      </a:solidFill>
-                      <a:prstDash val="solid"/>
-                      <a:round/>
-                      <a:headEnd type="none" w="med" len="med"/>
-                      <a:tailEnd type="none" w="med" len="med"/>
-                    </a:lnR>
-                    <a:lnT w="6350" cap="flat" cmpd="sng" algn="ctr">
-                      <a:solidFill>
-                        <a:srgbClr val="CBD5E1"/>
-                      </a:solidFill>
-                      <a:prstDash val="solid"/>
-                      <a:round/>
-                      <a:headEnd type="none" w="med" len="med"/>
-                      <a:tailEnd type="none" w="med" len="med"/>
-                    </a:lnT>
-                    <a:lnB w="6350" cap="flat" cmpd="sng" algn="ctr">
-                      <a:solidFill>
-                        <a:srgbClr val="CBD5E1"/>
-                      </a:solidFill>
-                      <a:prstDash val="solid"/>
-                      <a:round/>
-                      <a:headEnd type="none" w="med" len="med"/>
-                      <a:tailEnd type="none" w="med" len="med"/>
-                    </a:lnB>
-                    <a:solidFill>
-                      <a:srgbClr val="FFFFFF"/>
-                    </a:solidFill>
-                  </a:tcPr>
-                </a:tc>
-                <a:tc>
-                  <a:txBody>
-                    <a:bodyPr/>
-                    <a:lstStyle/>
-                    <a:p>
-                      <a:pPr algn="ctr" indent="0" marL="0">
-                        <a:buNone/>
-                      </a:pPr>
-                      <a:r>
-                        <a:rPr lang="en-US" sz="900" dirty="0">
-                          <a:solidFill>
-                            <a:srgbClr val="000000"/>
-                          </a:solidFill>
-                          <a:latin typeface="Arial" pitchFamily="34" charset="0"/>
-                          <a:ea typeface="Arial" pitchFamily="34" charset="-122"/>
-                          <a:cs typeface="Arial" pitchFamily="34" charset="-120"/>
-                        </a:rPr>
-                        <a:t>7.03</a:t>
-                      </a:r>
-                      <a:endParaRPr lang="en-US" sz="900" dirty="0">
-                        <a:latin typeface="Arial" charset="0"/>
-                        <a:ea typeface="Arial" charset="0"/>
-                        <a:cs typeface="Arial" charset="0"/>
-                      </a:endParaRPr>
-                    </a:p>
-                  </a:txBody>
-                  <a:tcPr marL="91440" marR="91440" marT="45720" marB="45720">
-                    <a:lnL w="6350" cap="flat" cmpd="sng" algn="ctr">
-                      <a:solidFill>
-                        <a:srgbClr val="CBD5E1"/>
-                      </a:solidFill>
-                      <a:prstDash val="solid"/>
-                      <a:round/>
-                      <a:headEnd type="none" w="med" len="med"/>
-                      <a:tailEnd type="none" w="med" len="med"/>
-                    </a:lnL>
-                    <a:lnR w="6350" cap="flat" cmpd="sng" algn="ctr">
-                      <a:solidFill>
-                        <a:srgbClr val="CBD5E1"/>
-                      </a:solidFill>
-                      <a:prstDash val="solid"/>
-                      <a:round/>
-                      <a:headEnd type="none" w="med" len="med"/>
-                      <a:tailEnd type="none" w="med" len="med"/>
-                    </a:lnR>
-                    <a:lnT w="6350" cap="flat" cmpd="sng" algn="ctr">
-                      <a:solidFill>
-                        <a:srgbClr val="CBD5E1"/>
-                      </a:solidFill>
-                      <a:prstDash val="solid"/>
-                      <a:round/>
-                      <a:headEnd type="none" w="med" len="med"/>
-                      <a:tailEnd type="none" w="med" len="med"/>
-                    </a:lnT>
-                    <a:lnB w="6350" cap="flat" cmpd="sng" algn="ctr">
-                      <a:solidFill>
-                        <a:srgbClr val="CBD5E1"/>
-                      </a:solidFill>
-                      <a:prstDash val="solid"/>
-                      <a:round/>
-                      <a:headEnd type="none" w="med" len="med"/>
-                      <a:tailEnd type="none" w="med" len="med"/>
-                    </a:lnB>
-                    <a:solidFill>
-                      <a:srgbClr val="FFFFFF"/>
-                    </a:solidFill>
-                  </a:tcPr>
-                </a:tc>
-              </a:tr>
-              <a:tr h="201168">
-                <a:tc>
-                  <a:txBody>
-                    <a:bodyPr/>
-                    <a:lstStyle/>
-                    <a:p>
-                      <a:pPr algn="ctr" indent="0" marL="0">
-                        <a:buNone/>
-                      </a:pPr>
-                      <a:r>
-                        <a:rPr lang="en-US" sz="900" dirty="0">
-                          <a:solidFill>
-                            <a:srgbClr val="000000"/>
-                          </a:solidFill>
-                          <a:latin typeface="Arial" pitchFamily="34" charset="0"/>
-                          <a:ea typeface="Arial" pitchFamily="34" charset="-122"/>
-                          <a:cs typeface="Arial" pitchFamily="34" charset="-120"/>
-                        </a:rPr>
-                        <a:t>Trip.com</a:t>
-                      </a:r>
-                      <a:endParaRPr lang="en-US" sz="900" dirty="0">
-                        <a:latin typeface="Arial" charset="0"/>
-                        <a:ea typeface="Arial" charset="0"/>
-                        <a:cs typeface="Arial" charset="0"/>
-                      </a:endParaRPr>
-                    </a:p>
-                  </a:txBody>
-                  <a:tcPr marL="91440" marR="91440" marT="45720" marB="45720">
-                    <a:lnL w="6350" cap="flat" cmpd="sng" algn="ctr">
-                      <a:solidFill>
-                        <a:srgbClr val="CBD5E1"/>
-                      </a:solidFill>
-                      <a:prstDash val="solid"/>
-                      <a:round/>
-                      <a:headEnd type="none" w="med" len="med"/>
-                      <a:tailEnd type="none" w="med" len="med"/>
-                    </a:lnL>
-                    <a:lnR w="6350" cap="flat" cmpd="sng" algn="ctr">
-                      <a:solidFill>
-                        <a:srgbClr val="CBD5E1"/>
-                      </a:solidFill>
-                      <a:prstDash val="solid"/>
-                      <a:round/>
-                      <a:headEnd type="none" w="med" len="med"/>
-                      <a:tailEnd type="none" w="med" len="med"/>
-                    </a:lnR>
-                    <a:lnT w="6350" cap="flat" cmpd="sng" algn="ctr">
-                      <a:solidFill>
-                        <a:srgbClr val="CBD5E1"/>
-                      </a:solidFill>
-                      <a:prstDash val="solid"/>
-                      <a:round/>
-                      <a:headEnd type="none" w="med" len="med"/>
-                      <a:tailEnd type="none" w="med" len="med"/>
-                    </a:lnT>
-                    <a:lnB w="6350" cap="flat" cmpd="sng" algn="ctr">
-                      <a:solidFill>
-                        <a:srgbClr val="CBD5E1"/>
-                      </a:solidFill>
-                      <a:prstDash val="solid"/>
-                      <a:round/>
-                      <a:headEnd type="none" w="med" len="med"/>
-                      <a:tailEnd type="none" w="med" len="med"/>
-                    </a:lnB>
-                    <a:solidFill>
-                      <a:srgbClr val="E8EFF8"/>
-                    </a:solidFill>
-                  </a:tcPr>
-                </a:tc>
-                <a:tc>
-                  <a:txBody>
-                    <a:bodyPr/>
-                    <a:lstStyle/>
-                    <a:p>
-                      <a:pPr algn="ctr" indent="0" marL="0">
-                        <a:buNone/>
-                      </a:pPr>
-                      <a:r>
-                        <a:rPr lang="en-US" sz="900" dirty="0">
-                          <a:solidFill>
-                            <a:srgbClr val="000000"/>
-                          </a:solidFill>
-                          <a:latin typeface="Arial" pitchFamily="34" charset="0"/>
-                          <a:ea typeface="Arial" pitchFamily="34" charset="-122"/>
-                          <a:cs typeface="Arial" pitchFamily="34" charset="-120"/>
-                        </a:rPr>
-                        <a:t>3</a:t>
-                      </a:r>
-                      <a:endParaRPr lang="en-US" sz="900" dirty="0">
-                        <a:latin typeface="Arial" charset="0"/>
-                        <a:ea typeface="Arial" charset="0"/>
-                        <a:cs typeface="Arial" charset="0"/>
-                      </a:endParaRPr>
-                    </a:p>
-                  </a:txBody>
-                  <a:tcPr marL="91440" marR="91440" marT="45720" marB="45720">
-                    <a:lnL w="6350" cap="flat" cmpd="sng" algn="ctr">
-                      <a:solidFill>
-                        <a:srgbClr val="CBD5E1"/>
-                      </a:solidFill>
-                      <a:prstDash val="solid"/>
-                      <a:round/>
-                      <a:headEnd type="none" w="med" len="med"/>
-                      <a:tailEnd type="none" w="med" len="med"/>
-                    </a:lnL>
-                    <a:lnR w="6350" cap="flat" cmpd="sng" algn="ctr">
-                      <a:solidFill>
-                        <a:srgbClr val="CBD5E1"/>
-                      </a:solidFill>
-                      <a:prstDash val="solid"/>
-                      <a:round/>
-                      <a:headEnd type="none" w="med" len="med"/>
-                      <a:tailEnd type="none" w="med" len="med"/>
-                    </a:lnR>
-                    <a:lnT w="6350" cap="flat" cmpd="sng" algn="ctr">
-                      <a:solidFill>
-                        <a:srgbClr val="CBD5E1"/>
-                      </a:solidFill>
-                      <a:prstDash val="solid"/>
-                      <a:round/>
-                      <a:headEnd type="none" w="med" len="med"/>
-                      <a:tailEnd type="none" w="med" len="med"/>
-                    </a:lnT>
-                    <a:lnB w="6350" cap="flat" cmpd="sng" algn="ctr">
-                      <a:solidFill>
-                        <a:srgbClr val="CBD5E1"/>
-                      </a:solidFill>
-                      <a:prstDash val="solid"/>
-                      <a:round/>
-                      <a:headEnd type="none" w="med" len="med"/>
-                      <a:tailEnd type="none" w="med" len="med"/>
-                    </a:lnB>
-                    <a:solidFill>
-                      <a:srgbClr val="E8EFF8"/>
-                    </a:solidFill>
-                  </a:tcPr>
-                </a:tc>
-                <a:tc>
-                  <a:txBody>
-                    <a:bodyPr/>
-                    <a:lstStyle/>
-                    <a:p>
-                      <a:pPr algn="ctr" indent="0" marL="0">
-                        <a:buNone/>
-                      </a:pPr>
-                      <a:r>
-                        <a:rPr lang="en-US" sz="900" dirty="0">
-                          <a:solidFill>
-                            <a:srgbClr val="000000"/>
-                          </a:solidFill>
-                          <a:latin typeface="Arial" pitchFamily="34" charset="0"/>
-                          <a:ea typeface="Arial" pitchFamily="34" charset="-122"/>
-                          <a:cs typeface="Arial" pitchFamily="34" charset="-120"/>
-                        </a:rPr>
-                        <a:t>6.67</a:t>
-                      </a:r>
-                      <a:endParaRPr lang="en-US" sz="900" dirty="0">
-                        <a:latin typeface="Arial" charset="0"/>
-                        <a:ea typeface="Arial" charset="0"/>
-                        <a:cs typeface="Arial" charset="0"/>
-                      </a:endParaRPr>
-                    </a:p>
-                  </a:txBody>
-                  <a:tcPr marL="91440" marR="91440" marT="45720" marB="45720">
-                    <a:lnL w="6350" cap="flat" cmpd="sng" algn="ctr">
-                      <a:solidFill>
-                        <a:srgbClr val="CBD5E1"/>
-                      </a:solidFill>
-                      <a:prstDash val="solid"/>
-                      <a:round/>
-                      <a:headEnd type="none" w="med" len="med"/>
-                      <a:tailEnd type="none" w="med" len="med"/>
-                    </a:lnL>
-                    <a:lnR w="6350" cap="flat" cmpd="sng" algn="ctr">
-                      <a:solidFill>
-                        <a:srgbClr val="CBD5E1"/>
-                      </a:solidFill>
-                      <a:prstDash val="solid"/>
-                      <a:round/>
-                      <a:headEnd type="none" w="med" len="med"/>
-                      <a:tailEnd type="none" w="med" len="med"/>
-                    </a:lnR>
-                    <a:lnT w="6350" cap="flat" cmpd="sng" algn="ctr">
-                      <a:solidFill>
-                        <a:srgbClr val="CBD5E1"/>
-                      </a:solidFill>
-                      <a:prstDash val="solid"/>
-                      <a:round/>
-                      <a:headEnd type="none" w="med" len="med"/>
-                      <a:tailEnd type="none" w="med" len="med"/>
-                    </a:lnT>
-                    <a:lnB w="6350" cap="flat" cmpd="sng" algn="ctr">
-                      <a:solidFill>
-                        <a:srgbClr val="CBD5E1"/>
-                      </a:solidFill>
-                      <a:prstDash val="solid"/>
-                      <a:round/>
-                      <a:headEnd type="none" w="med" len="med"/>
-                      <a:tailEnd type="none" w="med" len="med"/>
-                    </a:lnB>
-                    <a:solidFill>
-                      <a:srgbClr val="E8EFF8"/>
-                    </a:solidFill>
-                  </a:tcPr>
-                </a:tc>
-                <a:tc>
-                  <a:txBody>
-                    <a:bodyPr/>
-                    <a:lstStyle/>
-                    <a:p>
-                      <a:pPr algn="ctr" indent="0" marL="0">
-                        <a:buNone/>
-                      </a:pPr>
-                      <a:r>
-                        <a:rPr lang="en-US" sz="900" dirty="0">
-                          <a:solidFill>
-                            <a:srgbClr val="000000"/>
-                          </a:solidFill>
-                          <a:latin typeface="Arial" pitchFamily="34" charset="0"/>
-                          <a:ea typeface="Arial" pitchFamily="34" charset="-122"/>
-                          <a:cs typeface="Arial" pitchFamily="34" charset="-120"/>
-                        </a:rPr>
-                        <a:t>/10</a:t>
-                      </a:r>
-                      <a:endParaRPr lang="en-US" sz="900" dirty="0">
-                        <a:latin typeface="Arial" charset="0"/>
-                        <a:ea typeface="Arial" charset="0"/>
-                        <a:cs typeface="Arial" charset="0"/>
-                      </a:endParaRPr>
-                    </a:p>
-                  </a:txBody>
-                  <a:tcPr marL="91440" marR="91440" marT="45720" marB="45720">
-                    <a:lnL w="6350" cap="flat" cmpd="sng" algn="ctr">
-                      <a:solidFill>
-                        <a:srgbClr val="CBD5E1"/>
-                      </a:solidFill>
-                      <a:prstDash val="solid"/>
-                      <a:round/>
-                      <a:headEnd type="none" w="med" len="med"/>
-                      <a:tailEnd type="none" w="med" len="med"/>
-                    </a:lnL>
-                    <a:lnR w="6350" cap="flat" cmpd="sng" algn="ctr">
-                      <a:solidFill>
-                        <a:srgbClr val="CBD5E1"/>
-                      </a:solidFill>
-                      <a:prstDash val="solid"/>
-                      <a:round/>
-                      <a:headEnd type="none" w="med" len="med"/>
-                      <a:tailEnd type="none" w="med" len="med"/>
-                    </a:lnR>
-                    <a:lnT w="6350" cap="flat" cmpd="sng" algn="ctr">
-                      <a:solidFill>
-                        <a:srgbClr val="CBD5E1"/>
-                      </a:solidFill>
-                      <a:prstDash val="solid"/>
-                      <a:round/>
-                      <a:headEnd type="none" w="med" len="med"/>
-                      <a:tailEnd type="none" w="med" len="med"/>
-                    </a:lnT>
-                    <a:lnB w="6350" cap="flat" cmpd="sng" algn="ctr">
-                      <a:solidFill>
-                        <a:srgbClr val="CBD5E1"/>
-                      </a:solidFill>
-                      <a:prstDash val="solid"/>
-                      <a:round/>
-                      <a:headEnd type="none" w="med" len="med"/>
-                      <a:tailEnd type="none" w="med" len="med"/>
-                    </a:lnB>
-                    <a:solidFill>
-                      <a:srgbClr val="E8EFF8"/>
-                    </a:solidFill>
-                  </a:tcPr>
-                </a:tc>
-                <a:tc>
-                  <a:txBody>
-                    <a:bodyPr/>
-                    <a:lstStyle/>
-                    <a:p>
-                      <a:pPr algn="ctr" indent="0" marL="0">
-                        <a:buNone/>
-                      </a:pPr>
-                      <a:r>
-                        <a:rPr lang="en-US" sz="900" dirty="0">
-                          <a:solidFill>
-                            <a:srgbClr val="000000"/>
-                          </a:solidFill>
-                          <a:latin typeface="Arial" pitchFamily="34" charset="0"/>
-                          <a:ea typeface="Arial" pitchFamily="34" charset="-122"/>
-                          <a:cs typeface="Arial" pitchFamily="34" charset="-120"/>
-                        </a:rPr>
-                        <a:t>6.67</a:t>
-                      </a:r>
-                      <a:endParaRPr lang="en-US" sz="900" dirty="0">
-                        <a:latin typeface="Arial" charset="0"/>
-                        <a:ea typeface="Arial" charset="0"/>
-                        <a:cs typeface="Arial" charset="0"/>
-                      </a:endParaRPr>
-                    </a:p>
-                  </a:txBody>
-                  <a:tcPr marL="91440" marR="91440" marT="45720" marB="45720">
-                    <a:lnL w="6350" cap="flat" cmpd="sng" algn="ctr">
-                      <a:solidFill>
-                        <a:srgbClr val="CBD5E1"/>
-                      </a:solidFill>
-                      <a:prstDash val="solid"/>
-                      <a:round/>
-                      <a:headEnd type="none" w="med" len="med"/>
-                      <a:tailEnd type="none" w="med" len="med"/>
-                    </a:lnL>
-                    <a:lnR w="6350" cap="flat" cmpd="sng" algn="ctr">
-                      <a:solidFill>
-                        <a:srgbClr val="CBD5E1"/>
-                      </a:solidFill>
-                      <a:prstDash val="solid"/>
-                      <a:round/>
-                      <a:headEnd type="none" w="med" len="med"/>
-                      <a:tailEnd type="none" w="med" len="med"/>
-                    </a:lnR>
-                    <a:lnT w="6350" cap="flat" cmpd="sng" algn="ctr">
-                      <a:solidFill>
-                        <a:srgbClr val="CBD5E1"/>
-                      </a:solidFill>
-                      <a:prstDash val="solid"/>
-                      <a:round/>
-                      <a:headEnd type="none" w="med" len="med"/>
-                      <a:tailEnd type="none" w="med" len="med"/>
-                    </a:lnT>
-                    <a:lnB w="6350" cap="flat" cmpd="sng" algn="ctr">
-                      <a:solidFill>
-                        <a:srgbClr val="CBD5E1"/>
-                      </a:solidFill>
-                      <a:prstDash val="solid"/>
-                      <a:round/>
-                      <a:headEnd type="none" w="med" len="med"/>
-                      <a:tailEnd type="none" w="med" len="med"/>
-                    </a:lnB>
-                    <a:solidFill>
-                      <a:srgbClr val="E8EFF8"/>
-                    </a:solidFill>
-                  </a:tcPr>
-                </a:tc>
-              </a:tr>
             </a:tbl>
           </a:graphicData>
         </a:graphic>
       </p:graphicFrame>
       <p:sp>
         <p:nvSpPr>
-          <p:cNvPr id="11" name="Shape 7"/>
+          <p:cNvPr id="10" name="Shape 7"/>
           <p:cNvSpPr/>
           <p:nvPr/>
         </p:nvSpPr>
@@ -9232,7 +6580,7 @@
       </p:sp>
       <p:sp>
         <p:nvSpPr>
-          <p:cNvPr id="12" name="Text 8"/>
+          <p:cNvPr id="11" name="Text 8"/>
           <p:cNvSpPr/>
           <p:nvPr/>
         </p:nvSpPr>
@@ -9271,7 +6619,7 @@
       </p:sp>
       <p:sp>
         <p:nvSpPr>
-          <p:cNvPr id="13" name="Text 9"/>
+          <p:cNvPr id="12" name="Text 9"/>
           <p:cNvSpPr/>
           <p:nvPr/>
         </p:nvSpPr>
@@ -9454,25 +6802,9 @@
           </a:graphicData>
         </a:graphic>
       </p:graphicFrame>
-      <p:graphicFrame>
-        <p:nvGraphicFramePr>
-          <p:cNvPr id="6" name="Chart 1" descr=""/>
-          <p:cNvGraphicFramePr/>
-          <p:nvPr/>
-        </p:nvGraphicFramePr>
-        <p:xfrm>
-          <a:off x="4114800" y="1097280"/>
-          <a:ext cx="4754880" cy="2926080"/>
-        </p:xfrm>
-        <a:graphic xmlns:a="http://schemas.openxmlformats.org/drawingml/2006/main">
-          <a:graphicData uri="http://schemas.openxmlformats.org/drawingml/2006/chart">
-            <c:chart xmlns:c="http://schemas.openxmlformats.org/drawingml/2006/chart" r:id="rId2"/>
-          </a:graphicData>
-        </a:graphic>
-      </p:graphicFrame>
-      <p:sp>
-        <p:nvSpPr>
-          <p:cNvPr id="7" name="Shape 3"/>
+      <p:sp>
+        <p:nvSpPr>
+          <p:cNvPr id="6" name="Shape 3"/>
           <p:cNvSpPr/>
           <p:nvPr/>
         </p:nvSpPr>
@@ -9492,7 +6824,7 @@
       </p:sp>
       <p:sp>
         <p:nvSpPr>
-          <p:cNvPr id="8" name="Text 4"/>
+          <p:cNvPr id="7" name="Text 4"/>
           <p:cNvSpPr/>
           <p:nvPr/>
         </p:nvSpPr>
@@ -9531,7 +6863,7 @@
       </p:sp>
       <p:sp>
         <p:nvSpPr>
-          <p:cNvPr id="9" name="Text 5"/>
+          <p:cNvPr id="8" name="Text 5"/>
           <p:cNvSpPr/>
           <p:nvPr/>
         </p:nvSpPr>
@@ -9562,7 +6894,7 @@
                 <a:ea typeface="Arial" pitchFamily="34" charset="-122"/>
                 <a:cs typeface="Arial" pitchFamily="34" charset="-120"/>
               </a:rPr>
-              <a:t>60件（50.8%）</a:t>
+              <a:t>0件（0.0%）</a:t>
             </a:r>
             <a:endParaRPr lang="en-US" sz="1100" dirty="0"/>
           </a:p>
@@ -9570,7 +6902,7 @@
       </p:sp>
       <p:sp>
         <p:nvSpPr>
-          <p:cNvPr id="10" name="Shape 6"/>
+          <p:cNvPr id="9" name="Shape 6"/>
           <p:cNvSpPr/>
           <p:nvPr/>
         </p:nvSpPr>
@@ -9590,7 +6922,7 @@
       </p:sp>
       <p:sp>
         <p:nvSpPr>
-          <p:cNvPr id="11" name="Text 7"/>
+          <p:cNvPr id="10" name="Text 7"/>
           <p:cNvSpPr/>
           <p:nvPr/>
         </p:nvSpPr>
@@ -9629,7 +6961,7 @@
       </p:sp>
       <p:sp>
         <p:nvSpPr>
-          <p:cNvPr id="12" name="Text 8"/>
+          <p:cNvPr id="11" name="Text 8"/>
           <p:cNvSpPr/>
           <p:nvPr/>
         </p:nvSpPr>
@@ -9660,7 +6992,7 @@
                 <a:ea typeface="Arial" pitchFamily="34" charset="-122"/>
                 <a:cs typeface="Arial" pitchFamily="34" charset="-120"/>
               </a:rPr>
-              <a:t>44件（37.3%）</a:t>
+              <a:t>0件（0.0%）</a:t>
             </a:r>
             <a:endParaRPr lang="en-US" sz="1100" dirty="0"/>
           </a:p>
@@ -9668,7 +7000,7 @@
       </p:sp>
       <p:sp>
         <p:nvSpPr>
-          <p:cNvPr id="13" name="Shape 9"/>
+          <p:cNvPr id="12" name="Shape 9"/>
           <p:cNvSpPr/>
           <p:nvPr/>
         </p:nvSpPr>
@@ -9681,14 +7013,14 @@
             <a:avLst/>
           </a:prstGeom>
           <a:solidFill>
-            <a:srgbClr val="FEE2E2"/>
+            <a:srgbClr val="DCFCE7"/>
           </a:solidFill>
           <a:ln/>
         </p:spPr>
       </p:sp>
       <p:sp>
         <p:nvSpPr>
-          <p:cNvPr id="14" name="Text 10"/>
+          <p:cNvPr id="13" name="Text 10"/>
           <p:cNvSpPr/>
           <p:nvPr/>
         </p:nvSpPr>
@@ -9713,7 +7045,7 @@
             <a:r>
               <a:rPr lang="en-US" sz="1000" b="1" dirty="0">
                 <a:solidFill>
-                  <a:srgbClr val="DC2626"/>
+                  <a:srgbClr val="16A34A"/>
                 </a:solidFill>
                 <a:latin typeface="Arial" pitchFamily="34" charset="0"/>
                 <a:ea typeface="Arial" pitchFamily="34" charset="-122"/>
@@ -9727,7 +7059,7 @@
       </p:sp>
       <p:sp>
         <p:nvSpPr>
-          <p:cNvPr id="15" name="Text 11"/>
+          <p:cNvPr id="14" name="Text 11"/>
           <p:cNvSpPr/>
           <p:nvPr/>
         </p:nvSpPr>
@@ -9752,13 +7084,13 @@
             <a:r>
               <a:rPr lang="en-US" sz="1100" b="1" dirty="0">
                 <a:solidFill>
-                  <a:srgbClr val="DC2626"/>
-                </a:solidFill>
-                <a:latin typeface="Arial" pitchFamily="34" charset="0"/>
-                <a:ea typeface="Arial" pitchFamily="34" charset="-122"/>
-                <a:cs typeface="Arial" pitchFamily="34" charset="-120"/>
-              </a:rPr>
-              <a:t>14件（11.9%）</a:t>
+                  <a:srgbClr val="16A34A"/>
+                </a:solidFill>
+                <a:latin typeface="Arial" pitchFamily="34" charset="0"/>
+                <a:ea typeface="Arial" pitchFamily="34" charset="-122"/>
+                <a:cs typeface="Arial" pitchFamily="34" charset="-120"/>
+              </a:rPr>
+              <a:t>0件（0.0%）</a:t>
             </a:r>
             <a:endParaRPr lang="en-US" sz="1100" dirty="0"/>
           </a:p>
@@ -9766,7 +7098,7 @@
       </p:sp>
       <p:sp>
         <p:nvSpPr>
-          <p:cNvPr id="16" name="Shape 12"/>
+          <p:cNvPr id="15" name="Shape 12"/>
           <p:cNvSpPr/>
           <p:nvPr/>
         </p:nvSpPr>
@@ -9786,7 +7118,7 @@
       </p:sp>
       <p:sp>
         <p:nvSpPr>
-          <p:cNvPr id="17" name="Text 13"/>
+          <p:cNvPr id="16" name="Text 13"/>
           <p:cNvSpPr/>
           <p:nvPr/>
         </p:nvSpPr>
@@ -9825,7 +7157,7 @@
       </p:sp>
       <p:sp>
         <p:nvSpPr>
-          <p:cNvPr id="18" name="Text 14"/>
+          <p:cNvPr id="17" name="Text 14"/>
           <p:cNvSpPr/>
           <p:nvPr/>
         </p:nvSpPr>
@@ -10092,7 +7424,7 @@
                 <a:ea typeface="Arial" pitchFamily="34" charset="-122"/>
                 <a:cs typeface="Arial" pitchFamily="34" charset="-120"/>
               </a:rPr>
-              <a:t>20件+</a:t>
+              <a:t>少数</a:t>
             </a:r>
             <a:endParaRPr lang="en-US" sz="900" dirty="0"/>
           </a:p>
@@ -10131,7 +7463,7 @@
                 <a:ea typeface="Arial" pitchFamily="34" charset="-122"/>
                 <a:cs typeface="Arial" pitchFamily="34" charset="-120"/>
               </a:rPr>
-              <a:t>立地・アクセス</a:t>
+              <a:t>その他</a:t>
             </a:r>
             <a:endParaRPr lang="en-US" sz="1300" dirty="0"/>
           </a:p>
@@ -10170,7 +7502,7 @@
                 <a:ea typeface="Arial" pitchFamily="34" charset="-122"/>
                 <a:cs typeface="Arial" pitchFamily="34" charset="-120"/>
               </a:rPr>
-              <a:t>駅から近いので便利 エアコンが暖房のみだった</a:t>
+              <a:t>その他のポジティブな評価</a:t>
             </a:r>
             <a:endParaRPr lang="en-US" sz="900" dirty="0"/>
           </a:p>
@@ -10200,17 +7532,6 @@
             <a:pPr indent="0" marL="0">
               <a:buNone/>
             </a:pPr>
-            <a:r>
-              <a:rPr lang="en-US" sz="900" i="1" dirty="0">
-                <a:solidFill>
-                  <a:srgbClr val="3B7DD8"/>
-                </a:solidFill>
-                <a:latin typeface="Arial" pitchFamily="34" charset="0"/>
-                <a:ea typeface="Arial" pitchFamily="34" charset="-122"/>
-                <a:cs typeface="Arial" pitchFamily="34" charset="-120"/>
-              </a:rPr>
-              <a:t>「横浜アリーナに近い エアコン設置されてるが温度調整出来ない」</a:t>
-            </a:r>
             <a:endParaRPr lang="en-US" sz="900" dirty="0"/>
           </a:p>
         </p:txBody>
@@ -10315,7 +7636,7 @@
                 <a:ea typeface="Arial" pitchFamily="34" charset="-122"/>
                 <a:cs typeface="Arial" pitchFamily="34" charset="-120"/>
               </a:rPr>
-              <a:t>10件+</a:t>
+              <a:t>少数</a:t>
             </a:r>
             <a:endParaRPr lang="en-US" sz="900" dirty="0"/>
           </a:p>
@@ -10354,7 +7675,7 @@
                 <a:ea typeface="Arial" pitchFamily="34" charset="-122"/>
                 <a:cs typeface="Arial" pitchFamily="34" charset="-120"/>
               </a:rPr>
-              <a:t>スタッフの対応</a:t>
+              <a:t>その他</a:t>
             </a:r>
             <a:endParaRPr lang="en-US" sz="1300" dirty="0"/>
           </a:p>
@@ -10393,7 +7714,7 @@
                 <a:ea typeface="Arial" pitchFamily="34" charset="-122"/>
                 <a:cs typeface="Arial" pitchFamily="34" charset="-120"/>
               </a:rPr>
-              <a:t>スタッフも感じが良い</a:t>
+              <a:t>その他のポジティブな評価</a:t>
             </a:r>
             <a:endParaRPr lang="en-US" sz="900" dirty="0"/>
           </a:p>
@@ -10423,17 +7744,6 @@
             <a:pPr indent="0" marL="0">
               <a:buNone/>
             </a:pPr>
-            <a:r>
-              <a:rPr lang="en-US" sz="900" i="1" dirty="0">
-                <a:solidFill>
-                  <a:srgbClr val="3B7DD8"/>
-                </a:solidFill>
-                <a:latin typeface="Arial" pitchFamily="34" charset="0"/>
-                <a:ea typeface="Arial" pitchFamily="34" charset="-122"/>
-                <a:cs typeface="Arial" pitchFamily="34" charset="-120"/>
-              </a:rPr>
-              <a:t>「スタッフの方は、丁寧で対応も良かったです」</a:t>
-            </a:r>
             <a:endParaRPr lang="en-US" sz="900" dirty="0"/>
           </a:p>
         </p:txBody>
@@ -10538,7 +7848,7 @@
                 <a:ea typeface="Arial" pitchFamily="34" charset="-122"/>
                 <a:cs typeface="Arial" pitchFamily="34" charset="-120"/>
               </a:rPr>
-              <a:t>10件+</a:t>
+              <a:t>少数</a:t>
             </a:r>
             <a:endParaRPr lang="en-US" sz="900" dirty="0"/>
           </a:p>
@@ -10577,7 +7887,7 @@
                 <a:ea typeface="Arial" pitchFamily="34" charset="-122"/>
                 <a:cs typeface="Arial" pitchFamily="34" charset="-120"/>
               </a:rPr>
-              <a:t>清潔さ・清掃</a:t>
+              <a:t>その他</a:t>
             </a:r>
             <a:endParaRPr lang="en-US" sz="1300" dirty="0"/>
           </a:p>
@@ -10616,7 +7926,7 @@
                 <a:ea typeface="Arial" pitchFamily="34" charset="-122"/>
                 <a:cs typeface="Arial" pitchFamily="34" charset="-120"/>
               </a:rPr>
-              <a:t>部屋が綺麗</a:t>
+              <a:t>その他のポジティブな評価</a:t>
             </a:r>
             <a:endParaRPr lang="en-US" sz="900" dirty="0"/>
           </a:p>
@@ -10646,17 +7956,6 @@
             <a:pPr indent="0" marL="0">
               <a:buNone/>
             </a:pPr>
-            <a:r>
-              <a:rPr lang="en-US" sz="900" i="1" dirty="0">
-                <a:solidFill>
-                  <a:srgbClr val="3B7DD8"/>
-                </a:solidFill>
-                <a:latin typeface="Arial" pitchFamily="34" charset="0"/>
-                <a:ea typeface="Arial" pitchFamily="34" charset="-122"/>
-                <a:cs typeface="Arial" pitchFamily="34" charset="-120"/>
-              </a:rPr>
-              <a:t>「部屋も広くきれいで清潔感もあり気持ち良く  過ごせました」</a:t>
-            </a:r>
             <a:endParaRPr lang="en-US" sz="900" dirty="0"/>
           </a:p>
         </p:txBody>
@@ -10761,7 +8060,7 @@
                 <a:ea typeface="Arial" pitchFamily="34" charset="-122"/>
                 <a:cs typeface="Arial" pitchFamily="34" charset="-120"/>
               </a:rPr>
-              <a:t>10件+</a:t>
+              <a:t>少数</a:t>
             </a:r>
             <a:endParaRPr lang="en-US" sz="900" dirty="0"/>
           </a:p>
@@ -10800,7 +8099,7 @@
                 <a:ea typeface="Arial" pitchFamily="34" charset="-122"/>
                 <a:cs typeface="Arial" pitchFamily="34" charset="-120"/>
               </a:rPr>
-              <a:t>快適さ・設備</a:t>
+              <a:t>その他</a:t>
             </a:r>
             <a:endParaRPr lang="en-US" sz="1300" dirty="0"/>
           </a:p>
@@ -10839,7 +8138,7 @@
                 <a:ea typeface="Arial" pitchFamily="34" charset="-122"/>
                 <a:cs typeface="Arial" pitchFamily="34" charset="-120"/>
               </a:rPr>
-              <a:t>アメニティをケチっている</a:t>
+              <a:t>その他のポジティブな評価</a:t>
             </a:r>
             <a:endParaRPr lang="en-US" sz="900" dirty="0"/>
           </a:p>
@@ -10869,17 +8168,6 @@
             <a:pPr indent="0" marL="0">
               <a:buNone/>
             </a:pPr>
-            <a:r>
-              <a:rPr lang="en-US" sz="900" i="1" dirty="0">
-                <a:solidFill>
-                  <a:srgbClr val="3B7DD8"/>
-                </a:solidFill>
-                <a:latin typeface="Arial" pitchFamily="34" charset="0"/>
-                <a:ea typeface="Arial" pitchFamily="34" charset="-122"/>
-                <a:cs typeface="Arial" pitchFamily="34" charset="-120"/>
-              </a:rPr>
-              <a:t>「お部屋がとても広くきれいで、掃除も行き届いていて、快適に過ごすことができました」</a:t>
-            </a:r>
             <a:endParaRPr lang="en-US" sz="900" dirty="0"/>
           </a:p>
         </p:txBody>
@@ -10984,7 +8272,7 @@
                 <a:ea typeface="Arial" pitchFamily="34" charset="-122"/>
                 <a:cs typeface="Arial" pitchFamily="34" charset="-120"/>
               </a:rPr>
-              <a:t>7件</a:t>
+              <a:t>少数</a:t>
             </a:r>
             <a:endParaRPr lang="en-US" sz="900" dirty="0"/>
           </a:p>
@@ -11023,7 +8311,7 @@
                 <a:ea typeface="Arial" pitchFamily="34" charset="-122"/>
                 <a:cs typeface="Arial" pitchFamily="34" charset="-120"/>
               </a:rPr>
-              <a:t>コンビニ・周辺施設</a:t>
+              <a:t>その他</a:t>
             </a:r>
             <a:endParaRPr lang="en-US" sz="1300" dirty="0"/>
           </a:p>
@@ -11062,7 +8350,7 @@
                 <a:ea typeface="Arial" pitchFamily="34" charset="-122"/>
                 <a:cs typeface="Arial" pitchFamily="34" charset="-120"/>
               </a:rPr>
-              <a:t>何度かお世話になっていますが、駅からも近く、周辺に食事をする所やコンビニも多いので便利です</a:t>
+              <a:t>その他のポジティブな評価</a:t>
             </a:r>
             <a:endParaRPr lang="en-US" sz="900" dirty="0"/>
           </a:p>
@@ -11092,17 +8380,6 @@
             <a:pPr indent="0" marL="0">
               <a:buNone/>
             </a:pPr>
-            <a:r>
-              <a:rPr lang="en-US" sz="900" i="1" dirty="0">
-                <a:solidFill>
-                  <a:srgbClr val="3B7DD8"/>
-                </a:solidFill>
-                <a:latin typeface="Arial" pitchFamily="34" charset="0"/>
-                <a:ea typeface="Arial" pitchFamily="34" charset="-122"/>
-                <a:cs typeface="Arial" pitchFamily="34" charset="-120"/>
-              </a:rPr>
-              <a:t>「22:00前までならホテルの一階にあるレストランも利用できそう」</a:t>
-            </a:r>
             <a:endParaRPr lang="en-US" sz="900" dirty="0"/>
           </a:p>
         </p:txBody>
@@ -11207,7 +8484,7 @@
                 <a:ea typeface="Arial" pitchFamily="34" charset="-122"/>
                 <a:cs typeface="Arial" pitchFamily="34" charset="-120"/>
               </a:rPr>
-              <a:t>6件</a:t>
+              <a:t>少数</a:t>
             </a:r>
             <a:endParaRPr lang="en-US" sz="900" dirty="0"/>
           </a:p>
@@ -11246,7 +8523,7 @@
                 <a:ea typeface="Arial" pitchFamily="34" charset="-122"/>
                 <a:cs typeface="Arial" pitchFamily="34" charset="-120"/>
               </a:rPr>
-              <a:t>コストパフォーマンス</a:t>
+              <a:t>その他</a:t>
             </a:r>
             <a:endParaRPr lang="en-US" sz="1300" dirty="0"/>
           </a:p>
@@ -11285,7 +8562,7 @@
                 <a:ea typeface="Arial" pitchFamily="34" charset="-122"/>
                 <a:cs typeface="Arial" pitchFamily="34" charset="-120"/>
               </a:rPr>
-              <a:t>値段がそれなりで安い 室内の温度が高くて寝苦しい 窓を開ければ多少緩和されたがそれでもこの時期が寒いとはいえ、室温...</a:t>
+              <a:t>その他のポジティブな評価</a:t>
             </a:r>
             <a:endParaRPr lang="en-US" sz="900" dirty="0"/>
           </a:p>
@@ -11315,17 +8592,6 @@
             <a:pPr indent="0" marL="0">
               <a:buNone/>
             </a:pPr>
-            <a:r>
-              <a:rPr lang="en-US" sz="900" i="1" dirty="0">
-                <a:solidFill>
-                  <a:srgbClr val="3B7DD8"/>
-                </a:solidFill>
-                <a:latin typeface="Arial" pitchFamily="34" charset="0"/>
-                <a:ea typeface="Arial" pitchFamily="34" charset="-122"/>
-                <a:cs typeface="Arial" pitchFamily="34" charset="-120"/>
-              </a:rPr>
-              <a:t>「安い ちょっとバスルームカーテンが雑菌臭で臭いのと、トイレの流す水が少なすぎて、トイレットペーパーが初回では流れな...」</a:t>
-            </a:r>
             <a:endParaRPr lang="en-US" sz="900" dirty="0"/>
           </a:p>
         </p:txBody>
@@ -11860,2198 +9126,6 @@
                   </a:tcPr>
                 </a:tc>
               </a:tr>
-              <a:tr h="320040">
-                <a:tc>
-                  <a:txBody>
-                    <a:bodyPr/>
-                    <a:lstStyle/>
-                    <a:p>
-                      <a:pPr algn="ctr" indent="0" marL="0">
-                        <a:buNone/>
-                      </a:pPr>
-                      <a:r>
-                        <a:rPr lang="en-US" sz="1200" b="1" dirty="0">
-                          <a:solidFill>
-                            <a:srgbClr val="DC2626"/>
-                          </a:solidFill>
-                          <a:latin typeface="Arial" pitchFamily="34" charset="0"/>
-                          <a:ea typeface="Arial" pitchFamily="34" charset="-122"/>
-                          <a:cs typeface="Arial" pitchFamily="34" charset="-120"/>
-                        </a:rPr>
-                        <a:t>S</a:t>
-                      </a:r>
-                      <a:endParaRPr lang="en-US" sz="1200" dirty="0">
-                        <a:latin typeface="Arial" charset="0"/>
-                        <a:ea typeface="Arial" charset="0"/>
-                        <a:cs typeface="Arial" charset="0"/>
-                      </a:endParaRPr>
-                    </a:p>
-                  </a:txBody>
-                  <a:tcPr marL="91440" marR="91440" marT="45720" marB="45720">
-                    <a:lnL w="6350" cap="flat" cmpd="sng" algn="ctr">
-                      <a:solidFill>
-                        <a:srgbClr val="CBD5E1"/>
-                      </a:solidFill>
-                      <a:prstDash val="solid"/>
-                      <a:round/>
-                      <a:headEnd type="none" w="med" len="med"/>
-                      <a:tailEnd type="none" w="med" len="med"/>
-                    </a:lnL>
-                    <a:lnR w="6350" cap="flat" cmpd="sng" algn="ctr">
-                      <a:solidFill>
-                        <a:srgbClr val="CBD5E1"/>
-                      </a:solidFill>
-                      <a:prstDash val="solid"/>
-                      <a:round/>
-                      <a:headEnd type="none" w="med" len="med"/>
-                      <a:tailEnd type="none" w="med" len="med"/>
-                    </a:lnR>
-                    <a:lnT w="6350" cap="flat" cmpd="sng" algn="ctr">
-                      <a:solidFill>
-                        <a:srgbClr val="CBD5E1"/>
-                      </a:solidFill>
-                      <a:prstDash val="solid"/>
-                      <a:round/>
-                      <a:headEnd type="none" w="med" len="med"/>
-                      <a:tailEnd type="none" w="med" len="med"/>
-                    </a:lnT>
-                    <a:lnB w="6350" cap="flat" cmpd="sng" algn="ctr">
-                      <a:solidFill>
-                        <a:srgbClr val="CBD5E1"/>
-                      </a:solidFill>
-                      <a:prstDash val="solid"/>
-                      <a:round/>
-                      <a:headEnd type="none" w="med" len="med"/>
-                      <a:tailEnd type="none" w="med" len="med"/>
-                    </a:lnB>
-                    <a:solidFill>
-                      <a:srgbClr val="E8EFF8"/>
-                    </a:solidFill>
-                  </a:tcPr>
-                </a:tc>
-                <a:tc>
-                  <a:txBody>
-                    <a:bodyPr/>
-                    <a:lstStyle/>
-                    <a:p>
-                      <a:pPr indent="0" marL="0">
-                        <a:buNone/>
-                      </a:pPr>
-                      <a:r>
-                        <a:rPr lang="en-US" sz="900" b="1" dirty="0">
-                          <a:solidFill>
-                            <a:srgbClr val="334155"/>
-                          </a:solidFill>
-                          <a:latin typeface="Arial" pitchFamily="34" charset="0"/>
-                          <a:ea typeface="Arial" pitchFamily="34" charset="-122"/>
-                          <a:cs typeface="Arial" pitchFamily="34" charset="-120"/>
-                        </a:rPr>
-                        <a:t>浴室・水回り</a:t>
-                      </a:r>
-                      <a:endParaRPr lang="en-US" sz="900" dirty="0">
-                        <a:latin typeface="Arial" charset="0"/>
-                        <a:ea typeface="Arial" charset="0"/>
-                        <a:cs typeface="Arial" charset="0"/>
-                      </a:endParaRPr>
-                    </a:p>
-                  </a:txBody>
-                  <a:tcPr marL="91440" marR="91440" marT="45720" marB="45720">
-                    <a:lnL w="6350" cap="flat" cmpd="sng" algn="ctr">
-                      <a:solidFill>
-                        <a:srgbClr val="CBD5E1"/>
-                      </a:solidFill>
-                      <a:prstDash val="solid"/>
-                      <a:round/>
-                      <a:headEnd type="none" w="med" len="med"/>
-                      <a:tailEnd type="none" w="med" len="med"/>
-                    </a:lnL>
-                    <a:lnR w="6350" cap="flat" cmpd="sng" algn="ctr">
-                      <a:solidFill>
-                        <a:srgbClr val="CBD5E1"/>
-                      </a:solidFill>
-                      <a:prstDash val="solid"/>
-                      <a:round/>
-                      <a:headEnd type="none" w="med" len="med"/>
-                      <a:tailEnd type="none" w="med" len="med"/>
-                    </a:lnR>
-                    <a:lnT w="6350" cap="flat" cmpd="sng" algn="ctr">
-                      <a:solidFill>
-                        <a:srgbClr val="CBD5E1"/>
-                      </a:solidFill>
-                      <a:prstDash val="solid"/>
-                      <a:round/>
-                      <a:headEnd type="none" w="med" len="med"/>
-                      <a:tailEnd type="none" w="med" len="med"/>
-                    </a:lnT>
-                    <a:lnB w="6350" cap="flat" cmpd="sng" algn="ctr">
-                      <a:solidFill>
-                        <a:srgbClr val="CBD5E1"/>
-                      </a:solidFill>
-                      <a:prstDash val="solid"/>
-                      <a:round/>
-                      <a:headEnd type="none" w="med" len="med"/>
-                      <a:tailEnd type="none" w="med" len="med"/>
-                    </a:lnB>
-                    <a:solidFill>
-                      <a:srgbClr val="E8EFF8"/>
-                    </a:solidFill>
-                  </a:tcPr>
-                </a:tc>
-                <a:tc>
-                  <a:txBody>
-                    <a:bodyPr/>
-                    <a:lstStyle/>
-                    <a:p>
-                      <a:pPr indent="0" marL="0">
-                        <a:buNone/>
-                      </a:pPr>
-                      <a:r>
-                        <a:rPr lang="en-US" sz="900" dirty="0">
-                          <a:solidFill>
-                            <a:srgbClr val="64748B"/>
-                          </a:solidFill>
-                          <a:latin typeface="Arial" pitchFamily="34" charset="0"/>
-                          <a:ea typeface="Arial" pitchFamily="34" charset="-122"/>
-                          <a:cs typeface="Arial" pitchFamily="34" charset="-120"/>
-                        </a:rPr>
-                        <a:t>シャワーの温度調節に苦労します</a:t>
-                      </a:r>
-                      <a:endParaRPr lang="en-US" sz="900" dirty="0">
-                        <a:latin typeface="Arial" charset="0"/>
-                        <a:ea typeface="Arial" charset="0"/>
-                        <a:cs typeface="Arial" charset="0"/>
-                      </a:endParaRPr>
-                    </a:p>
-                  </a:txBody>
-                  <a:tcPr marL="91440" marR="91440" marT="45720" marB="45720">
-                    <a:lnL w="6350" cap="flat" cmpd="sng" algn="ctr">
-                      <a:solidFill>
-                        <a:srgbClr val="CBD5E1"/>
-                      </a:solidFill>
-                      <a:prstDash val="solid"/>
-                      <a:round/>
-                      <a:headEnd type="none" w="med" len="med"/>
-                      <a:tailEnd type="none" w="med" len="med"/>
-                    </a:lnL>
-                    <a:lnR w="6350" cap="flat" cmpd="sng" algn="ctr">
-                      <a:solidFill>
-                        <a:srgbClr val="CBD5E1"/>
-                      </a:solidFill>
-                      <a:prstDash val="solid"/>
-                      <a:round/>
-                      <a:headEnd type="none" w="med" len="med"/>
-                      <a:tailEnd type="none" w="med" len="med"/>
-                    </a:lnR>
-                    <a:lnT w="6350" cap="flat" cmpd="sng" algn="ctr">
-                      <a:solidFill>
-                        <a:srgbClr val="CBD5E1"/>
-                      </a:solidFill>
-                      <a:prstDash val="solid"/>
-                      <a:round/>
-                      <a:headEnd type="none" w="med" len="med"/>
-                      <a:tailEnd type="none" w="med" len="med"/>
-                    </a:lnT>
-                    <a:lnB w="6350" cap="flat" cmpd="sng" algn="ctr">
-                      <a:solidFill>
-                        <a:srgbClr val="CBD5E1"/>
-                      </a:solidFill>
-                      <a:prstDash val="solid"/>
-                      <a:round/>
-                      <a:headEnd type="none" w="med" len="med"/>
-                      <a:tailEnd type="none" w="med" len="med"/>
-                    </a:lnB>
-                    <a:solidFill>
-                      <a:srgbClr val="E8EFF8"/>
-                    </a:solidFill>
-                  </a:tcPr>
-                </a:tc>
-                <a:tc>
-                  <a:txBody>
-                    <a:bodyPr/>
-                    <a:lstStyle/>
-                    <a:p>
-                      <a:pPr algn="ctr" indent="0" marL="0">
-                        <a:buNone/>
-                      </a:pPr>
-                      <a:r>
-                        <a:rPr lang="en-US" sz="900" dirty="0">
-                          <a:solidFill>
-                            <a:srgbClr val="334155"/>
-                          </a:solidFill>
-                          <a:latin typeface="Arial" pitchFamily="34" charset="0"/>
-                          <a:ea typeface="Arial" pitchFamily="34" charset="-122"/>
-                          <a:cs typeface="Arial" pitchFamily="34" charset="-120"/>
-                        </a:rPr>
-                        <a:t>16件</a:t>
-                      </a:r>
-                      <a:endParaRPr lang="en-US" sz="900" dirty="0">
-                        <a:latin typeface="Arial" charset="0"/>
-                        <a:ea typeface="Arial" charset="0"/>
-                        <a:cs typeface="Arial" charset="0"/>
-                      </a:endParaRPr>
-                    </a:p>
-                  </a:txBody>
-                  <a:tcPr marL="91440" marR="91440" marT="45720" marB="45720">
-                    <a:lnL w="6350" cap="flat" cmpd="sng" algn="ctr">
-                      <a:solidFill>
-                        <a:srgbClr val="CBD5E1"/>
-                      </a:solidFill>
-                      <a:prstDash val="solid"/>
-                      <a:round/>
-                      <a:headEnd type="none" w="med" len="med"/>
-                      <a:tailEnd type="none" w="med" len="med"/>
-                    </a:lnL>
-                    <a:lnR w="6350" cap="flat" cmpd="sng" algn="ctr">
-                      <a:solidFill>
-                        <a:srgbClr val="CBD5E1"/>
-                      </a:solidFill>
-                      <a:prstDash val="solid"/>
-                      <a:round/>
-                      <a:headEnd type="none" w="med" len="med"/>
-                      <a:tailEnd type="none" w="med" len="med"/>
-                    </a:lnR>
-                    <a:lnT w="6350" cap="flat" cmpd="sng" algn="ctr">
-                      <a:solidFill>
-                        <a:srgbClr val="CBD5E1"/>
-                      </a:solidFill>
-                      <a:prstDash val="solid"/>
-                      <a:round/>
-                      <a:headEnd type="none" w="med" len="med"/>
-                      <a:tailEnd type="none" w="med" len="med"/>
-                    </a:lnT>
-                    <a:lnB w="6350" cap="flat" cmpd="sng" algn="ctr">
-                      <a:solidFill>
-                        <a:srgbClr val="CBD5E1"/>
-                      </a:solidFill>
-                      <a:prstDash val="solid"/>
-                      <a:round/>
-                      <a:headEnd type="none" w="med" len="med"/>
-                      <a:tailEnd type="none" w="med" len="med"/>
-                    </a:lnB>
-                    <a:solidFill>
-                      <a:srgbClr val="E8EFF8"/>
-                    </a:solidFill>
-                  </a:tcPr>
-                </a:tc>
-              </a:tr>
-              <a:tr h="320040">
-                <a:tc>
-                  <a:txBody>
-                    <a:bodyPr/>
-                    <a:lstStyle/>
-                    <a:p>
-                      <a:pPr algn="ctr" indent="0" marL="0">
-                        <a:buNone/>
-                      </a:pPr>
-                      <a:r>
-                        <a:rPr lang="en-US" sz="1200" b="1" dirty="0">
-                          <a:solidFill>
-                            <a:srgbClr val="EA580C"/>
-                          </a:solidFill>
-                          <a:latin typeface="Arial" pitchFamily="34" charset="0"/>
-                          <a:ea typeface="Arial" pitchFamily="34" charset="-122"/>
-                          <a:cs typeface="Arial" pitchFamily="34" charset="-120"/>
-                        </a:rPr>
-                        <a:t>A</a:t>
-                      </a:r>
-                      <a:endParaRPr lang="en-US" sz="1200" dirty="0">
-                        <a:latin typeface="Arial" charset="0"/>
-                        <a:ea typeface="Arial" charset="0"/>
-                        <a:cs typeface="Arial" charset="0"/>
-                      </a:endParaRPr>
-                    </a:p>
-                  </a:txBody>
-                  <a:tcPr marL="91440" marR="91440" marT="45720" marB="45720">
-                    <a:lnL w="6350" cap="flat" cmpd="sng" algn="ctr">
-                      <a:solidFill>
-                        <a:srgbClr val="CBD5E1"/>
-                      </a:solidFill>
-                      <a:prstDash val="solid"/>
-                      <a:round/>
-                      <a:headEnd type="none" w="med" len="med"/>
-                      <a:tailEnd type="none" w="med" len="med"/>
-                    </a:lnL>
-                    <a:lnR w="6350" cap="flat" cmpd="sng" algn="ctr">
-                      <a:solidFill>
-                        <a:srgbClr val="CBD5E1"/>
-                      </a:solidFill>
-                      <a:prstDash val="solid"/>
-                      <a:round/>
-                      <a:headEnd type="none" w="med" len="med"/>
-                      <a:tailEnd type="none" w="med" len="med"/>
-                    </a:lnR>
-                    <a:lnT w="6350" cap="flat" cmpd="sng" algn="ctr">
-                      <a:solidFill>
-                        <a:srgbClr val="CBD5E1"/>
-                      </a:solidFill>
-                      <a:prstDash val="solid"/>
-                      <a:round/>
-                      <a:headEnd type="none" w="med" len="med"/>
-                      <a:tailEnd type="none" w="med" len="med"/>
-                    </a:lnT>
-                    <a:lnB w="6350" cap="flat" cmpd="sng" algn="ctr">
-                      <a:solidFill>
-                        <a:srgbClr val="CBD5E1"/>
-                      </a:solidFill>
-                      <a:prstDash val="solid"/>
-                      <a:round/>
-                      <a:headEnd type="none" w="med" len="med"/>
-                      <a:tailEnd type="none" w="med" len="med"/>
-                    </a:lnB>
-                    <a:solidFill>
-                      <a:srgbClr val="FFFFFF"/>
-                    </a:solidFill>
-                  </a:tcPr>
-                </a:tc>
-                <a:tc>
-                  <a:txBody>
-                    <a:bodyPr/>
-                    <a:lstStyle/>
-                    <a:p>
-                      <a:pPr indent="0" marL="0">
-                        <a:buNone/>
-                      </a:pPr>
-                      <a:r>
-                        <a:rPr lang="en-US" sz="900" b="1" dirty="0">
-                          <a:solidFill>
-                            <a:srgbClr val="334155"/>
-                          </a:solidFill>
-                          <a:latin typeface="Arial" pitchFamily="34" charset="0"/>
-                          <a:ea typeface="Arial" pitchFamily="34" charset="-122"/>
-                          <a:cs typeface="Arial" pitchFamily="34" charset="-120"/>
-                        </a:rPr>
-                        <a:t>エアコン・空調</a:t>
-                      </a:r>
-                      <a:endParaRPr lang="en-US" sz="900" dirty="0">
-                        <a:latin typeface="Arial" charset="0"/>
-                        <a:ea typeface="Arial" charset="0"/>
-                        <a:cs typeface="Arial" charset="0"/>
-                      </a:endParaRPr>
-                    </a:p>
-                  </a:txBody>
-                  <a:tcPr marL="91440" marR="91440" marT="45720" marB="45720">
-                    <a:lnL w="6350" cap="flat" cmpd="sng" algn="ctr">
-                      <a:solidFill>
-                        <a:srgbClr val="CBD5E1"/>
-                      </a:solidFill>
-                      <a:prstDash val="solid"/>
-                      <a:round/>
-                      <a:headEnd type="none" w="med" len="med"/>
-                      <a:tailEnd type="none" w="med" len="med"/>
-                    </a:lnL>
-                    <a:lnR w="6350" cap="flat" cmpd="sng" algn="ctr">
-                      <a:solidFill>
-                        <a:srgbClr val="CBD5E1"/>
-                      </a:solidFill>
-                      <a:prstDash val="solid"/>
-                      <a:round/>
-                      <a:headEnd type="none" w="med" len="med"/>
-                      <a:tailEnd type="none" w="med" len="med"/>
-                    </a:lnR>
-                    <a:lnT w="6350" cap="flat" cmpd="sng" algn="ctr">
-                      <a:solidFill>
-                        <a:srgbClr val="CBD5E1"/>
-                      </a:solidFill>
-                      <a:prstDash val="solid"/>
-                      <a:round/>
-                      <a:headEnd type="none" w="med" len="med"/>
-                      <a:tailEnd type="none" w="med" len="med"/>
-                    </a:lnT>
-                    <a:lnB w="6350" cap="flat" cmpd="sng" algn="ctr">
-                      <a:solidFill>
-                        <a:srgbClr val="CBD5E1"/>
-                      </a:solidFill>
-                      <a:prstDash val="solid"/>
-                      <a:round/>
-                      <a:headEnd type="none" w="med" len="med"/>
-                      <a:tailEnd type="none" w="med" len="med"/>
-                    </a:lnB>
-                    <a:solidFill>
-                      <a:srgbClr val="FFFFFF"/>
-                    </a:solidFill>
-                  </a:tcPr>
-                </a:tc>
-                <a:tc>
-                  <a:txBody>
-                    <a:bodyPr/>
-                    <a:lstStyle/>
-                    <a:p>
-                      <a:pPr indent="0" marL="0">
-                        <a:buNone/>
-                      </a:pPr>
-                      <a:r>
-                        <a:rPr lang="en-US" sz="900" dirty="0">
-                          <a:solidFill>
-                            <a:srgbClr val="64748B"/>
-                          </a:solidFill>
-                          <a:latin typeface="Arial" pitchFamily="34" charset="0"/>
-                          <a:ea typeface="Arial" pitchFamily="34" charset="-122"/>
-                          <a:cs typeface="Arial" pitchFamily="34" charset="-120"/>
-                        </a:rPr>
-                        <a:t>シャワーの温度調節に苦労します</a:t>
-                      </a:r>
-                      <a:endParaRPr lang="en-US" sz="900" dirty="0">
-                        <a:latin typeface="Arial" charset="0"/>
-                        <a:ea typeface="Arial" charset="0"/>
-                        <a:cs typeface="Arial" charset="0"/>
-                      </a:endParaRPr>
-                    </a:p>
-                  </a:txBody>
-                  <a:tcPr marL="91440" marR="91440" marT="45720" marB="45720">
-                    <a:lnL w="6350" cap="flat" cmpd="sng" algn="ctr">
-                      <a:solidFill>
-                        <a:srgbClr val="CBD5E1"/>
-                      </a:solidFill>
-                      <a:prstDash val="solid"/>
-                      <a:round/>
-                      <a:headEnd type="none" w="med" len="med"/>
-                      <a:tailEnd type="none" w="med" len="med"/>
-                    </a:lnL>
-                    <a:lnR w="6350" cap="flat" cmpd="sng" algn="ctr">
-                      <a:solidFill>
-                        <a:srgbClr val="CBD5E1"/>
-                      </a:solidFill>
-                      <a:prstDash val="solid"/>
-                      <a:round/>
-                      <a:headEnd type="none" w="med" len="med"/>
-                      <a:tailEnd type="none" w="med" len="med"/>
-                    </a:lnR>
-                    <a:lnT w="6350" cap="flat" cmpd="sng" algn="ctr">
-                      <a:solidFill>
-                        <a:srgbClr val="CBD5E1"/>
-                      </a:solidFill>
-                      <a:prstDash val="solid"/>
-                      <a:round/>
-                      <a:headEnd type="none" w="med" len="med"/>
-                      <a:tailEnd type="none" w="med" len="med"/>
-                    </a:lnT>
-                    <a:lnB w="6350" cap="flat" cmpd="sng" algn="ctr">
-                      <a:solidFill>
-                        <a:srgbClr val="CBD5E1"/>
-                      </a:solidFill>
-                      <a:prstDash val="solid"/>
-                      <a:round/>
-                      <a:headEnd type="none" w="med" len="med"/>
-                      <a:tailEnd type="none" w="med" len="med"/>
-                    </a:lnB>
-                    <a:solidFill>
-                      <a:srgbClr val="FFFFFF"/>
-                    </a:solidFill>
-                  </a:tcPr>
-                </a:tc>
-                <a:tc>
-                  <a:txBody>
-                    <a:bodyPr/>
-                    <a:lstStyle/>
-                    <a:p>
-                      <a:pPr algn="ctr" indent="0" marL="0">
-                        <a:buNone/>
-                      </a:pPr>
-                      <a:r>
-                        <a:rPr lang="en-US" sz="900" dirty="0">
-                          <a:solidFill>
-                            <a:srgbClr val="334155"/>
-                          </a:solidFill>
-                          <a:latin typeface="Arial" pitchFamily="34" charset="0"/>
-                          <a:ea typeface="Arial" pitchFamily="34" charset="-122"/>
-                          <a:cs typeface="Arial" pitchFamily="34" charset="-120"/>
-                        </a:rPr>
-                        <a:t>12件</a:t>
-                      </a:r>
-                      <a:endParaRPr lang="en-US" sz="900" dirty="0">
-                        <a:latin typeface="Arial" charset="0"/>
-                        <a:ea typeface="Arial" charset="0"/>
-                        <a:cs typeface="Arial" charset="0"/>
-                      </a:endParaRPr>
-                    </a:p>
-                  </a:txBody>
-                  <a:tcPr marL="91440" marR="91440" marT="45720" marB="45720">
-                    <a:lnL w="6350" cap="flat" cmpd="sng" algn="ctr">
-                      <a:solidFill>
-                        <a:srgbClr val="CBD5E1"/>
-                      </a:solidFill>
-                      <a:prstDash val="solid"/>
-                      <a:round/>
-                      <a:headEnd type="none" w="med" len="med"/>
-                      <a:tailEnd type="none" w="med" len="med"/>
-                    </a:lnL>
-                    <a:lnR w="6350" cap="flat" cmpd="sng" algn="ctr">
-                      <a:solidFill>
-                        <a:srgbClr val="CBD5E1"/>
-                      </a:solidFill>
-                      <a:prstDash val="solid"/>
-                      <a:round/>
-                      <a:headEnd type="none" w="med" len="med"/>
-                      <a:tailEnd type="none" w="med" len="med"/>
-                    </a:lnR>
-                    <a:lnT w="6350" cap="flat" cmpd="sng" algn="ctr">
-                      <a:solidFill>
-                        <a:srgbClr val="CBD5E1"/>
-                      </a:solidFill>
-                      <a:prstDash val="solid"/>
-                      <a:round/>
-                      <a:headEnd type="none" w="med" len="med"/>
-                      <a:tailEnd type="none" w="med" len="med"/>
-                    </a:lnT>
-                    <a:lnB w="6350" cap="flat" cmpd="sng" algn="ctr">
-                      <a:solidFill>
-                        <a:srgbClr val="CBD5E1"/>
-                      </a:solidFill>
-                      <a:prstDash val="solid"/>
-                      <a:round/>
-                      <a:headEnd type="none" w="med" len="med"/>
-                      <a:tailEnd type="none" w="med" len="med"/>
-                    </a:lnB>
-                    <a:solidFill>
-                      <a:srgbClr val="FFFFFF"/>
-                    </a:solidFill>
-                  </a:tcPr>
-                </a:tc>
-              </a:tr>
-              <a:tr h="320040">
-                <a:tc>
-                  <a:txBody>
-                    <a:bodyPr/>
-                    <a:lstStyle/>
-                    <a:p>
-                      <a:pPr algn="ctr" indent="0" marL="0">
-                        <a:buNone/>
-                      </a:pPr>
-                      <a:r>
-                        <a:rPr lang="en-US" sz="1200" b="1" dirty="0">
-                          <a:solidFill>
-                            <a:srgbClr val="EA580C"/>
-                          </a:solidFill>
-                          <a:latin typeface="Arial" pitchFamily="34" charset="0"/>
-                          <a:ea typeface="Arial" pitchFamily="34" charset="-122"/>
-                          <a:cs typeface="Arial" pitchFamily="34" charset="-120"/>
-                        </a:rPr>
-                        <a:t>A</a:t>
-                      </a:r>
-                      <a:endParaRPr lang="en-US" sz="1200" dirty="0">
-                        <a:latin typeface="Arial" charset="0"/>
-                        <a:ea typeface="Arial" charset="0"/>
-                        <a:cs typeface="Arial" charset="0"/>
-                      </a:endParaRPr>
-                    </a:p>
-                  </a:txBody>
-                  <a:tcPr marL="91440" marR="91440" marT="45720" marB="45720">
-                    <a:lnL w="6350" cap="flat" cmpd="sng" algn="ctr">
-                      <a:solidFill>
-                        <a:srgbClr val="CBD5E1"/>
-                      </a:solidFill>
-                      <a:prstDash val="solid"/>
-                      <a:round/>
-                      <a:headEnd type="none" w="med" len="med"/>
-                      <a:tailEnd type="none" w="med" len="med"/>
-                    </a:lnL>
-                    <a:lnR w="6350" cap="flat" cmpd="sng" algn="ctr">
-                      <a:solidFill>
-                        <a:srgbClr val="CBD5E1"/>
-                      </a:solidFill>
-                      <a:prstDash val="solid"/>
-                      <a:round/>
-                      <a:headEnd type="none" w="med" len="med"/>
-                      <a:tailEnd type="none" w="med" len="med"/>
-                    </a:lnR>
-                    <a:lnT w="6350" cap="flat" cmpd="sng" algn="ctr">
-                      <a:solidFill>
-                        <a:srgbClr val="CBD5E1"/>
-                      </a:solidFill>
-                      <a:prstDash val="solid"/>
-                      <a:round/>
-                      <a:headEnd type="none" w="med" len="med"/>
-                      <a:tailEnd type="none" w="med" len="med"/>
-                    </a:lnT>
-                    <a:lnB w="6350" cap="flat" cmpd="sng" algn="ctr">
-                      <a:solidFill>
-                        <a:srgbClr val="CBD5E1"/>
-                      </a:solidFill>
-                      <a:prstDash val="solid"/>
-                      <a:round/>
-                      <a:headEnd type="none" w="med" len="med"/>
-                      <a:tailEnd type="none" w="med" len="med"/>
-                    </a:lnB>
-                    <a:solidFill>
-                      <a:srgbClr val="E8EFF8"/>
-                    </a:solidFill>
-                  </a:tcPr>
-                </a:tc>
-                <a:tc>
-                  <a:txBody>
-                    <a:bodyPr/>
-                    <a:lstStyle/>
-                    <a:p>
-                      <a:pPr indent="0" marL="0">
-                        <a:buNone/>
-                      </a:pPr>
-                      <a:r>
-                        <a:rPr lang="en-US" sz="900" b="1" dirty="0">
-                          <a:solidFill>
-                            <a:srgbClr val="334155"/>
-                          </a:solidFill>
-                          <a:latin typeface="Arial" pitchFamily="34" charset="0"/>
-                          <a:ea typeface="Arial" pitchFamily="34" charset="-122"/>
-                          <a:cs typeface="Arial" pitchFamily="34" charset="-120"/>
-                        </a:rPr>
-                        <a:t>設備の老朽化</a:t>
-                      </a:r>
-                      <a:endParaRPr lang="en-US" sz="900" dirty="0">
-                        <a:latin typeface="Arial" charset="0"/>
-                        <a:ea typeface="Arial" charset="0"/>
-                        <a:cs typeface="Arial" charset="0"/>
-                      </a:endParaRPr>
-                    </a:p>
-                  </a:txBody>
-                  <a:tcPr marL="91440" marR="91440" marT="45720" marB="45720">
-                    <a:lnL w="6350" cap="flat" cmpd="sng" algn="ctr">
-                      <a:solidFill>
-                        <a:srgbClr val="CBD5E1"/>
-                      </a:solidFill>
-                      <a:prstDash val="solid"/>
-                      <a:round/>
-                      <a:headEnd type="none" w="med" len="med"/>
-                      <a:tailEnd type="none" w="med" len="med"/>
-                    </a:lnL>
-                    <a:lnR w="6350" cap="flat" cmpd="sng" algn="ctr">
-                      <a:solidFill>
-                        <a:srgbClr val="CBD5E1"/>
-                      </a:solidFill>
-                      <a:prstDash val="solid"/>
-                      <a:round/>
-                      <a:headEnd type="none" w="med" len="med"/>
-                      <a:tailEnd type="none" w="med" len="med"/>
-                    </a:lnR>
-                    <a:lnT w="6350" cap="flat" cmpd="sng" algn="ctr">
-                      <a:solidFill>
-                        <a:srgbClr val="CBD5E1"/>
-                      </a:solidFill>
-                      <a:prstDash val="solid"/>
-                      <a:round/>
-                      <a:headEnd type="none" w="med" len="med"/>
-                      <a:tailEnd type="none" w="med" len="med"/>
-                    </a:lnT>
-                    <a:lnB w="6350" cap="flat" cmpd="sng" algn="ctr">
-                      <a:solidFill>
-                        <a:srgbClr val="CBD5E1"/>
-                      </a:solidFill>
-                      <a:prstDash val="solid"/>
-                      <a:round/>
-                      <a:headEnd type="none" w="med" len="med"/>
-                      <a:tailEnd type="none" w="med" len="med"/>
-                    </a:lnB>
-                    <a:solidFill>
-                      <a:srgbClr val="E8EFF8"/>
-                    </a:solidFill>
-                  </a:tcPr>
-                </a:tc>
-                <a:tc>
-                  <a:txBody>
-                    <a:bodyPr/>
-                    <a:lstStyle/>
-                    <a:p>
-                      <a:pPr indent="0" marL="0">
-                        <a:buNone/>
-                      </a:pPr>
-                      <a:r>
-                        <a:rPr lang="en-US" sz="900" dirty="0">
-                          <a:solidFill>
-                            <a:srgbClr val="64748B"/>
-                          </a:solidFill>
-                          <a:latin typeface="Arial" pitchFamily="34" charset="0"/>
-                          <a:ea typeface="Arial" pitchFamily="34" charset="-122"/>
-                          <a:cs typeface="Arial" pitchFamily="34" charset="-120"/>
-                        </a:rPr>
-                        <a:t>少し建物古いかも</a:t>
-                      </a:r>
-                      <a:endParaRPr lang="en-US" sz="900" dirty="0">
-                        <a:latin typeface="Arial" charset="0"/>
-                        <a:ea typeface="Arial" charset="0"/>
-                        <a:cs typeface="Arial" charset="0"/>
-                      </a:endParaRPr>
-                    </a:p>
-                  </a:txBody>
-                  <a:tcPr marL="91440" marR="91440" marT="45720" marB="45720">
-                    <a:lnL w="6350" cap="flat" cmpd="sng" algn="ctr">
-                      <a:solidFill>
-                        <a:srgbClr val="CBD5E1"/>
-                      </a:solidFill>
-                      <a:prstDash val="solid"/>
-                      <a:round/>
-                      <a:headEnd type="none" w="med" len="med"/>
-                      <a:tailEnd type="none" w="med" len="med"/>
-                    </a:lnL>
-                    <a:lnR w="6350" cap="flat" cmpd="sng" algn="ctr">
-                      <a:solidFill>
-                        <a:srgbClr val="CBD5E1"/>
-                      </a:solidFill>
-                      <a:prstDash val="solid"/>
-                      <a:round/>
-                      <a:headEnd type="none" w="med" len="med"/>
-                      <a:tailEnd type="none" w="med" len="med"/>
-                    </a:lnR>
-                    <a:lnT w="6350" cap="flat" cmpd="sng" algn="ctr">
-                      <a:solidFill>
-                        <a:srgbClr val="CBD5E1"/>
-                      </a:solidFill>
-                      <a:prstDash val="solid"/>
-                      <a:round/>
-                      <a:headEnd type="none" w="med" len="med"/>
-                      <a:tailEnd type="none" w="med" len="med"/>
-                    </a:lnT>
-                    <a:lnB w="6350" cap="flat" cmpd="sng" algn="ctr">
-                      <a:solidFill>
-                        <a:srgbClr val="CBD5E1"/>
-                      </a:solidFill>
-                      <a:prstDash val="solid"/>
-                      <a:round/>
-                      <a:headEnd type="none" w="med" len="med"/>
-                      <a:tailEnd type="none" w="med" len="med"/>
-                    </a:lnB>
-                    <a:solidFill>
-                      <a:srgbClr val="E8EFF8"/>
-                    </a:solidFill>
-                  </a:tcPr>
-                </a:tc>
-                <a:tc>
-                  <a:txBody>
-                    <a:bodyPr/>
-                    <a:lstStyle/>
-                    <a:p>
-                      <a:pPr algn="ctr" indent="0" marL="0">
-                        <a:buNone/>
-                      </a:pPr>
-                      <a:r>
-                        <a:rPr lang="en-US" sz="900" dirty="0">
-                          <a:solidFill>
-                            <a:srgbClr val="334155"/>
-                          </a:solidFill>
-                          <a:latin typeface="Arial" pitchFamily="34" charset="0"/>
-                          <a:ea typeface="Arial" pitchFamily="34" charset="-122"/>
-                          <a:cs typeface="Arial" pitchFamily="34" charset="-120"/>
-                        </a:rPr>
-                        <a:t>8件</a:t>
-                      </a:r>
-                      <a:endParaRPr lang="en-US" sz="900" dirty="0">
-                        <a:latin typeface="Arial" charset="0"/>
-                        <a:ea typeface="Arial" charset="0"/>
-                        <a:cs typeface="Arial" charset="0"/>
-                      </a:endParaRPr>
-                    </a:p>
-                  </a:txBody>
-                  <a:tcPr marL="91440" marR="91440" marT="45720" marB="45720">
-                    <a:lnL w="6350" cap="flat" cmpd="sng" algn="ctr">
-                      <a:solidFill>
-                        <a:srgbClr val="CBD5E1"/>
-                      </a:solidFill>
-                      <a:prstDash val="solid"/>
-                      <a:round/>
-                      <a:headEnd type="none" w="med" len="med"/>
-                      <a:tailEnd type="none" w="med" len="med"/>
-                    </a:lnL>
-                    <a:lnR w="6350" cap="flat" cmpd="sng" algn="ctr">
-                      <a:solidFill>
-                        <a:srgbClr val="CBD5E1"/>
-                      </a:solidFill>
-                      <a:prstDash val="solid"/>
-                      <a:round/>
-                      <a:headEnd type="none" w="med" len="med"/>
-                      <a:tailEnd type="none" w="med" len="med"/>
-                    </a:lnR>
-                    <a:lnT w="6350" cap="flat" cmpd="sng" algn="ctr">
-                      <a:solidFill>
-                        <a:srgbClr val="CBD5E1"/>
-                      </a:solidFill>
-                      <a:prstDash val="solid"/>
-                      <a:round/>
-                      <a:headEnd type="none" w="med" len="med"/>
-                      <a:tailEnd type="none" w="med" len="med"/>
-                    </a:lnT>
-                    <a:lnB w="6350" cap="flat" cmpd="sng" algn="ctr">
-                      <a:solidFill>
-                        <a:srgbClr val="CBD5E1"/>
-                      </a:solidFill>
-                      <a:prstDash val="solid"/>
-                      <a:round/>
-                      <a:headEnd type="none" w="med" len="med"/>
-                      <a:tailEnd type="none" w="med" len="med"/>
-                    </a:lnB>
-                    <a:solidFill>
-                      <a:srgbClr val="E8EFF8"/>
-                    </a:solidFill>
-                  </a:tcPr>
-                </a:tc>
-              </a:tr>
-              <a:tr h="320040">
-                <a:tc>
-                  <a:txBody>
-                    <a:bodyPr/>
-                    <a:lstStyle/>
-                    <a:p>
-                      <a:pPr algn="ctr" indent="0" marL="0">
-                        <a:buNone/>
-                      </a:pPr>
-                      <a:r>
-                        <a:rPr lang="en-US" sz="1200" b="1" dirty="0">
-                          <a:solidFill>
-                            <a:srgbClr val="D4A843"/>
-                          </a:solidFill>
-                          <a:latin typeface="Arial" pitchFamily="34" charset="0"/>
-                          <a:ea typeface="Arial" pitchFamily="34" charset="-122"/>
-                          <a:cs typeface="Arial" pitchFamily="34" charset="-120"/>
-                        </a:rPr>
-                        <a:t>B</a:t>
-                      </a:r>
-                      <a:endParaRPr lang="en-US" sz="1200" dirty="0">
-                        <a:latin typeface="Arial" charset="0"/>
-                        <a:ea typeface="Arial" charset="0"/>
-                        <a:cs typeface="Arial" charset="0"/>
-                      </a:endParaRPr>
-                    </a:p>
-                  </a:txBody>
-                  <a:tcPr marL="91440" marR="91440" marT="45720" marB="45720">
-                    <a:lnL w="6350" cap="flat" cmpd="sng" algn="ctr">
-                      <a:solidFill>
-                        <a:srgbClr val="CBD5E1"/>
-                      </a:solidFill>
-                      <a:prstDash val="solid"/>
-                      <a:round/>
-                      <a:headEnd type="none" w="med" len="med"/>
-                      <a:tailEnd type="none" w="med" len="med"/>
-                    </a:lnL>
-                    <a:lnR w="6350" cap="flat" cmpd="sng" algn="ctr">
-                      <a:solidFill>
-                        <a:srgbClr val="CBD5E1"/>
-                      </a:solidFill>
-                      <a:prstDash val="solid"/>
-                      <a:round/>
-                      <a:headEnd type="none" w="med" len="med"/>
-                      <a:tailEnd type="none" w="med" len="med"/>
-                    </a:lnR>
-                    <a:lnT w="6350" cap="flat" cmpd="sng" algn="ctr">
-                      <a:solidFill>
-                        <a:srgbClr val="CBD5E1"/>
-                      </a:solidFill>
-                      <a:prstDash val="solid"/>
-                      <a:round/>
-                      <a:headEnd type="none" w="med" len="med"/>
-                      <a:tailEnd type="none" w="med" len="med"/>
-                    </a:lnT>
-                    <a:lnB w="6350" cap="flat" cmpd="sng" algn="ctr">
-                      <a:solidFill>
-                        <a:srgbClr val="CBD5E1"/>
-                      </a:solidFill>
-                      <a:prstDash val="solid"/>
-                      <a:round/>
-                      <a:headEnd type="none" w="med" len="med"/>
-                      <a:tailEnd type="none" w="med" len="med"/>
-                    </a:lnB>
-                    <a:solidFill>
-                      <a:srgbClr val="FFFFFF"/>
-                    </a:solidFill>
-                  </a:tcPr>
-                </a:tc>
-                <a:tc>
-                  <a:txBody>
-                    <a:bodyPr/>
-                    <a:lstStyle/>
-                    <a:p>
-                      <a:pPr indent="0" marL="0">
-                        <a:buNone/>
-                      </a:pPr>
-                      <a:r>
-                        <a:rPr lang="en-US" sz="900" b="1" dirty="0">
-                          <a:solidFill>
-                            <a:srgbClr val="334155"/>
-                          </a:solidFill>
-                          <a:latin typeface="Arial" pitchFamily="34" charset="0"/>
-                          <a:ea typeface="Arial" pitchFamily="34" charset="-122"/>
-                          <a:cs typeface="Arial" pitchFamily="34" charset="-120"/>
-                        </a:rPr>
-                        <a:t>対応・サービスの不満</a:t>
-                      </a:r>
-                      <a:endParaRPr lang="en-US" sz="900" dirty="0">
-                        <a:latin typeface="Arial" charset="0"/>
-                        <a:ea typeface="Arial" charset="0"/>
-                        <a:cs typeface="Arial" charset="0"/>
-                      </a:endParaRPr>
-                    </a:p>
-                  </a:txBody>
-                  <a:tcPr marL="91440" marR="91440" marT="45720" marB="45720">
-                    <a:lnL w="6350" cap="flat" cmpd="sng" algn="ctr">
-                      <a:solidFill>
-                        <a:srgbClr val="CBD5E1"/>
-                      </a:solidFill>
-                      <a:prstDash val="solid"/>
-                      <a:round/>
-                      <a:headEnd type="none" w="med" len="med"/>
-                      <a:tailEnd type="none" w="med" len="med"/>
-                    </a:lnL>
-                    <a:lnR w="6350" cap="flat" cmpd="sng" algn="ctr">
-                      <a:solidFill>
-                        <a:srgbClr val="CBD5E1"/>
-                      </a:solidFill>
-                      <a:prstDash val="solid"/>
-                      <a:round/>
-                      <a:headEnd type="none" w="med" len="med"/>
-                      <a:tailEnd type="none" w="med" len="med"/>
-                    </a:lnR>
-                    <a:lnT w="6350" cap="flat" cmpd="sng" algn="ctr">
-                      <a:solidFill>
-                        <a:srgbClr val="CBD5E1"/>
-                      </a:solidFill>
-                      <a:prstDash val="solid"/>
-                      <a:round/>
-                      <a:headEnd type="none" w="med" len="med"/>
-                      <a:tailEnd type="none" w="med" len="med"/>
-                    </a:lnT>
-                    <a:lnB w="6350" cap="flat" cmpd="sng" algn="ctr">
-                      <a:solidFill>
-                        <a:srgbClr val="CBD5E1"/>
-                      </a:solidFill>
-                      <a:prstDash val="solid"/>
-                      <a:round/>
-                      <a:headEnd type="none" w="med" len="med"/>
-                      <a:tailEnd type="none" w="med" len="med"/>
-                    </a:lnB>
-                    <a:solidFill>
-                      <a:srgbClr val="FFFFFF"/>
-                    </a:solidFill>
-                  </a:tcPr>
-                </a:tc>
-                <a:tc>
-                  <a:txBody>
-                    <a:bodyPr/>
-                    <a:lstStyle/>
-                    <a:p>
-                      <a:pPr indent="0" marL="0">
-                        <a:buNone/>
-                      </a:pPr>
-                      <a:r>
-                        <a:rPr lang="en-US" sz="900" dirty="0">
-                          <a:solidFill>
-                            <a:srgbClr val="64748B"/>
-                          </a:solidFill>
-                          <a:latin typeface="Arial" pitchFamily="34" charset="0"/>
-                          <a:ea typeface="Arial" pitchFamily="34" charset="-122"/>
-                          <a:cs typeface="Arial" pitchFamily="34" charset="-120"/>
-                        </a:rPr>
-                        <a:t>喫煙の部屋でしたが、空気清浄機が無かったので、残念ですが、部屋内は綺麗でした</a:t>
-                      </a:r>
-                      <a:endParaRPr lang="en-US" sz="900" dirty="0">
-                        <a:latin typeface="Arial" charset="0"/>
-                        <a:ea typeface="Arial" charset="0"/>
-                        <a:cs typeface="Arial" charset="0"/>
-                      </a:endParaRPr>
-                    </a:p>
-                  </a:txBody>
-                  <a:tcPr marL="91440" marR="91440" marT="45720" marB="45720">
-                    <a:lnL w="6350" cap="flat" cmpd="sng" algn="ctr">
-                      <a:solidFill>
-                        <a:srgbClr val="CBD5E1"/>
-                      </a:solidFill>
-                      <a:prstDash val="solid"/>
-                      <a:round/>
-                      <a:headEnd type="none" w="med" len="med"/>
-                      <a:tailEnd type="none" w="med" len="med"/>
-                    </a:lnL>
-                    <a:lnR w="6350" cap="flat" cmpd="sng" algn="ctr">
-                      <a:solidFill>
-                        <a:srgbClr val="CBD5E1"/>
-                      </a:solidFill>
-                      <a:prstDash val="solid"/>
-                      <a:round/>
-                      <a:headEnd type="none" w="med" len="med"/>
-                      <a:tailEnd type="none" w="med" len="med"/>
-                    </a:lnR>
-                    <a:lnT w="6350" cap="flat" cmpd="sng" algn="ctr">
-                      <a:solidFill>
-                        <a:srgbClr val="CBD5E1"/>
-                      </a:solidFill>
-                      <a:prstDash val="solid"/>
-                      <a:round/>
-                      <a:headEnd type="none" w="med" len="med"/>
-                      <a:tailEnd type="none" w="med" len="med"/>
-                    </a:lnT>
-                    <a:lnB w="6350" cap="flat" cmpd="sng" algn="ctr">
-                      <a:solidFill>
-                        <a:srgbClr val="CBD5E1"/>
-                      </a:solidFill>
-                      <a:prstDash val="solid"/>
-                      <a:round/>
-                      <a:headEnd type="none" w="med" len="med"/>
-                      <a:tailEnd type="none" w="med" len="med"/>
-                    </a:lnB>
-                    <a:solidFill>
-                      <a:srgbClr val="FFFFFF"/>
-                    </a:solidFill>
-                  </a:tcPr>
-                </a:tc>
-                <a:tc>
-                  <a:txBody>
-                    <a:bodyPr/>
-                    <a:lstStyle/>
-                    <a:p>
-                      <a:pPr algn="ctr" indent="0" marL="0">
-                        <a:buNone/>
-                      </a:pPr>
-                      <a:r>
-                        <a:rPr lang="en-US" sz="900" dirty="0">
-                          <a:solidFill>
-                            <a:srgbClr val="334155"/>
-                          </a:solidFill>
-                          <a:latin typeface="Arial" pitchFamily="34" charset="0"/>
-                          <a:ea typeface="Arial" pitchFamily="34" charset="-122"/>
-                          <a:cs typeface="Arial" pitchFamily="34" charset="-120"/>
-                        </a:rPr>
-                        <a:t>5件</a:t>
-                      </a:r>
-                      <a:endParaRPr lang="en-US" sz="900" dirty="0">
-                        <a:latin typeface="Arial" charset="0"/>
-                        <a:ea typeface="Arial" charset="0"/>
-                        <a:cs typeface="Arial" charset="0"/>
-                      </a:endParaRPr>
-                    </a:p>
-                  </a:txBody>
-                  <a:tcPr marL="91440" marR="91440" marT="45720" marB="45720">
-                    <a:lnL w="6350" cap="flat" cmpd="sng" algn="ctr">
-                      <a:solidFill>
-                        <a:srgbClr val="CBD5E1"/>
-                      </a:solidFill>
-                      <a:prstDash val="solid"/>
-                      <a:round/>
-                      <a:headEnd type="none" w="med" len="med"/>
-                      <a:tailEnd type="none" w="med" len="med"/>
-                    </a:lnL>
-                    <a:lnR w="6350" cap="flat" cmpd="sng" algn="ctr">
-                      <a:solidFill>
-                        <a:srgbClr val="CBD5E1"/>
-                      </a:solidFill>
-                      <a:prstDash val="solid"/>
-                      <a:round/>
-                      <a:headEnd type="none" w="med" len="med"/>
-                      <a:tailEnd type="none" w="med" len="med"/>
-                    </a:lnR>
-                    <a:lnT w="6350" cap="flat" cmpd="sng" algn="ctr">
-                      <a:solidFill>
-                        <a:srgbClr val="CBD5E1"/>
-                      </a:solidFill>
-                      <a:prstDash val="solid"/>
-                      <a:round/>
-                      <a:headEnd type="none" w="med" len="med"/>
-                      <a:tailEnd type="none" w="med" len="med"/>
-                    </a:lnT>
-                    <a:lnB w="6350" cap="flat" cmpd="sng" algn="ctr">
-                      <a:solidFill>
-                        <a:srgbClr val="CBD5E1"/>
-                      </a:solidFill>
-                      <a:prstDash val="solid"/>
-                      <a:round/>
-                      <a:headEnd type="none" w="med" len="med"/>
-                      <a:tailEnd type="none" w="med" len="med"/>
-                    </a:lnB>
-                    <a:solidFill>
-                      <a:srgbClr val="FFFFFF"/>
-                    </a:solidFill>
-                  </a:tcPr>
-                </a:tc>
-              </a:tr>
-              <a:tr h="320040">
-                <a:tc>
-                  <a:txBody>
-                    <a:bodyPr/>
-                    <a:lstStyle/>
-                    <a:p>
-                      <a:pPr algn="ctr" indent="0" marL="0">
-                        <a:buNone/>
-                      </a:pPr>
-                      <a:r>
-                        <a:rPr lang="en-US" sz="1200" b="1" dirty="0">
-                          <a:solidFill>
-                            <a:srgbClr val="D4A843"/>
-                          </a:solidFill>
-                          <a:latin typeface="Arial" pitchFamily="34" charset="0"/>
-                          <a:ea typeface="Arial" pitchFamily="34" charset="-122"/>
-                          <a:cs typeface="Arial" pitchFamily="34" charset="-120"/>
-                        </a:rPr>
-                        <a:t>B</a:t>
-                      </a:r>
-                      <a:endParaRPr lang="en-US" sz="1200" dirty="0">
-                        <a:latin typeface="Arial" charset="0"/>
-                        <a:ea typeface="Arial" charset="0"/>
-                        <a:cs typeface="Arial" charset="0"/>
-                      </a:endParaRPr>
-                    </a:p>
-                  </a:txBody>
-                  <a:tcPr marL="91440" marR="91440" marT="45720" marB="45720">
-                    <a:lnL w="6350" cap="flat" cmpd="sng" algn="ctr">
-                      <a:solidFill>
-                        <a:srgbClr val="CBD5E1"/>
-                      </a:solidFill>
-                      <a:prstDash val="solid"/>
-                      <a:round/>
-                      <a:headEnd type="none" w="med" len="med"/>
-                      <a:tailEnd type="none" w="med" len="med"/>
-                    </a:lnL>
-                    <a:lnR w="6350" cap="flat" cmpd="sng" algn="ctr">
-                      <a:solidFill>
-                        <a:srgbClr val="CBD5E1"/>
-                      </a:solidFill>
-                      <a:prstDash val="solid"/>
-                      <a:round/>
-                      <a:headEnd type="none" w="med" len="med"/>
-                      <a:tailEnd type="none" w="med" len="med"/>
-                    </a:lnR>
-                    <a:lnT w="6350" cap="flat" cmpd="sng" algn="ctr">
-                      <a:solidFill>
-                        <a:srgbClr val="CBD5E1"/>
-                      </a:solidFill>
-                      <a:prstDash val="solid"/>
-                      <a:round/>
-                      <a:headEnd type="none" w="med" len="med"/>
-                      <a:tailEnd type="none" w="med" len="med"/>
-                    </a:lnT>
-                    <a:lnB w="6350" cap="flat" cmpd="sng" algn="ctr">
-                      <a:solidFill>
-                        <a:srgbClr val="CBD5E1"/>
-                      </a:solidFill>
-                      <a:prstDash val="solid"/>
-                      <a:round/>
-                      <a:headEnd type="none" w="med" len="med"/>
-                      <a:tailEnd type="none" w="med" len="med"/>
-                    </a:lnB>
-                    <a:solidFill>
-                      <a:srgbClr val="E8EFF8"/>
-                    </a:solidFill>
-                  </a:tcPr>
-                </a:tc>
-                <a:tc>
-                  <a:txBody>
-                    <a:bodyPr/>
-                    <a:lstStyle/>
-                    <a:p>
-                      <a:pPr indent="0" marL="0">
-                        <a:buNone/>
-                      </a:pPr>
-                      <a:r>
-                        <a:rPr lang="en-US" sz="900" b="1" dirty="0">
-                          <a:solidFill>
-                            <a:srgbClr val="334155"/>
-                          </a:solidFill>
-                          <a:latin typeface="Arial" pitchFamily="34" charset="0"/>
-                          <a:ea typeface="Arial" pitchFamily="34" charset="-122"/>
-                          <a:cs typeface="Arial" pitchFamily="34" charset="-120"/>
-                        </a:rPr>
-                        <a:t>臭い・匂い</a:t>
-                      </a:r>
-                      <a:endParaRPr lang="en-US" sz="900" dirty="0">
-                        <a:latin typeface="Arial" charset="0"/>
-                        <a:ea typeface="Arial" charset="0"/>
-                        <a:cs typeface="Arial" charset="0"/>
-                      </a:endParaRPr>
-                    </a:p>
-                  </a:txBody>
-                  <a:tcPr marL="91440" marR="91440" marT="45720" marB="45720">
-                    <a:lnL w="6350" cap="flat" cmpd="sng" algn="ctr">
-                      <a:solidFill>
-                        <a:srgbClr val="CBD5E1"/>
-                      </a:solidFill>
-                      <a:prstDash val="solid"/>
-                      <a:round/>
-                      <a:headEnd type="none" w="med" len="med"/>
-                      <a:tailEnd type="none" w="med" len="med"/>
-                    </a:lnL>
-                    <a:lnR w="6350" cap="flat" cmpd="sng" algn="ctr">
-                      <a:solidFill>
-                        <a:srgbClr val="CBD5E1"/>
-                      </a:solidFill>
-                      <a:prstDash val="solid"/>
-                      <a:round/>
-                      <a:headEnd type="none" w="med" len="med"/>
-                      <a:tailEnd type="none" w="med" len="med"/>
-                    </a:lnR>
-                    <a:lnT w="6350" cap="flat" cmpd="sng" algn="ctr">
-                      <a:solidFill>
-                        <a:srgbClr val="CBD5E1"/>
-                      </a:solidFill>
-                      <a:prstDash val="solid"/>
-                      <a:round/>
-                      <a:headEnd type="none" w="med" len="med"/>
-                      <a:tailEnd type="none" w="med" len="med"/>
-                    </a:lnT>
-                    <a:lnB w="6350" cap="flat" cmpd="sng" algn="ctr">
-                      <a:solidFill>
-                        <a:srgbClr val="CBD5E1"/>
-                      </a:solidFill>
-                      <a:prstDash val="solid"/>
-                      <a:round/>
-                      <a:headEnd type="none" w="med" len="med"/>
-                      <a:tailEnd type="none" w="med" len="med"/>
-                    </a:lnB>
-                    <a:solidFill>
-                      <a:srgbClr val="E8EFF8"/>
-                    </a:solidFill>
-                  </a:tcPr>
-                </a:tc>
-                <a:tc>
-                  <a:txBody>
-                    <a:bodyPr/>
-                    <a:lstStyle/>
-                    <a:p>
-                      <a:pPr indent="0" marL="0">
-                        <a:buNone/>
-                      </a:pPr>
-                      <a:r>
-                        <a:rPr lang="en-US" sz="900" dirty="0">
-                          <a:solidFill>
-                            <a:srgbClr val="64748B"/>
-                          </a:solidFill>
-                          <a:latin typeface="Arial" pitchFamily="34" charset="0"/>
-                          <a:ea typeface="Arial" pitchFamily="34" charset="-122"/>
-                          <a:cs typeface="Arial" pitchFamily="34" charset="-120"/>
-                        </a:rPr>
-                        <a:t>繁華街や駅に近い トイレの匂いが臭い</a:t>
-                      </a:r>
-                      <a:endParaRPr lang="en-US" sz="900" dirty="0">
-                        <a:latin typeface="Arial" charset="0"/>
-                        <a:ea typeface="Arial" charset="0"/>
-                        <a:cs typeface="Arial" charset="0"/>
-                      </a:endParaRPr>
-                    </a:p>
-                  </a:txBody>
-                  <a:tcPr marL="91440" marR="91440" marT="45720" marB="45720">
-                    <a:lnL w="6350" cap="flat" cmpd="sng" algn="ctr">
-                      <a:solidFill>
-                        <a:srgbClr val="CBD5E1"/>
-                      </a:solidFill>
-                      <a:prstDash val="solid"/>
-                      <a:round/>
-                      <a:headEnd type="none" w="med" len="med"/>
-                      <a:tailEnd type="none" w="med" len="med"/>
-                    </a:lnL>
-                    <a:lnR w="6350" cap="flat" cmpd="sng" algn="ctr">
-                      <a:solidFill>
-                        <a:srgbClr val="CBD5E1"/>
-                      </a:solidFill>
-                      <a:prstDash val="solid"/>
-                      <a:round/>
-                      <a:headEnd type="none" w="med" len="med"/>
-                      <a:tailEnd type="none" w="med" len="med"/>
-                    </a:lnR>
-                    <a:lnT w="6350" cap="flat" cmpd="sng" algn="ctr">
-                      <a:solidFill>
-                        <a:srgbClr val="CBD5E1"/>
-                      </a:solidFill>
-                      <a:prstDash val="solid"/>
-                      <a:round/>
-                      <a:headEnd type="none" w="med" len="med"/>
-                      <a:tailEnd type="none" w="med" len="med"/>
-                    </a:lnT>
-                    <a:lnB w="6350" cap="flat" cmpd="sng" algn="ctr">
-                      <a:solidFill>
-                        <a:srgbClr val="CBD5E1"/>
-                      </a:solidFill>
-                      <a:prstDash val="solid"/>
-                      <a:round/>
-                      <a:headEnd type="none" w="med" len="med"/>
-                      <a:tailEnd type="none" w="med" len="med"/>
-                    </a:lnB>
-                    <a:solidFill>
-                      <a:srgbClr val="E8EFF8"/>
-                    </a:solidFill>
-                  </a:tcPr>
-                </a:tc>
-                <a:tc>
-                  <a:txBody>
-                    <a:bodyPr/>
-                    <a:lstStyle/>
-                    <a:p>
-                      <a:pPr algn="ctr" indent="0" marL="0">
-                        <a:buNone/>
-                      </a:pPr>
-                      <a:r>
-                        <a:rPr lang="en-US" sz="900" dirty="0">
-                          <a:solidFill>
-                            <a:srgbClr val="334155"/>
-                          </a:solidFill>
-                          <a:latin typeface="Arial" pitchFamily="34" charset="0"/>
-                          <a:ea typeface="Arial" pitchFamily="34" charset="-122"/>
-                          <a:cs typeface="Arial" pitchFamily="34" charset="-120"/>
-                        </a:rPr>
-                        <a:t>4件</a:t>
-                      </a:r>
-                      <a:endParaRPr lang="en-US" sz="900" dirty="0">
-                        <a:latin typeface="Arial" charset="0"/>
-                        <a:ea typeface="Arial" charset="0"/>
-                        <a:cs typeface="Arial" charset="0"/>
-                      </a:endParaRPr>
-                    </a:p>
-                  </a:txBody>
-                  <a:tcPr marL="91440" marR="91440" marT="45720" marB="45720">
-                    <a:lnL w="6350" cap="flat" cmpd="sng" algn="ctr">
-                      <a:solidFill>
-                        <a:srgbClr val="CBD5E1"/>
-                      </a:solidFill>
-                      <a:prstDash val="solid"/>
-                      <a:round/>
-                      <a:headEnd type="none" w="med" len="med"/>
-                      <a:tailEnd type="none" w="med" len="med"/>
-                    </a:lnL>
-                    <a:lnR w="6350" cap="flat" cmpd="sng" algn="ctr">
-                      <a:solidFill>
-                        <a:srgbClr val="CBD5E1"/>
-                      </a:solidFill>
-                      <a:prstDash val="solid"/>
-                      <a:round/>
-                      <a:headEnd type="none" w="med" len="med"/>
-                      <a:tailEnd type="none" w="med" len="med"/>
-                    </a:lnR>
-                    <a:lnT w="6350" cap="flat" cmpd="sng" algn="ctr">
-                      <a:solidFill>
-                        <a:srgbClr val="CBD5E1"/>
-                      </a:solidFill>
-                      <a:prstDash val="solid"/>
-                      <a:round/>
-                      <a:headEnd type="none" w="med" len="med"/>
-                      <a:tailEnd type="none" w="med" len="med"/>
-                    </a:lnT>
-                    <a:lnB w="6350" cap="flat" cmpd="sng" algn="ctr">
-                      <a:solidFill>
-                        <a:srgbClr val="CBD5E1"/>
-                      </a:solidFill>
-                      <a:prstDash val="solid"/>
-                      <a:round/>
-                      <a:headEnd type="none" w="med" len="med"/>
-                      <a:tailEnd type="none" w="med" len="med"/>
-                    </a:lnB>
-                    <a:solidFill>
-                      <a:srgbClr val="E8EFF8"/>
-                    </a:solidFill>
-                  </a:tcPr>
-                </a:tc>
-              </a:tr>
-              <a:tr h="320040">
-                <a:tc>
-                  <a:txBody>
-                    <a:bodyPr/>
-                    <a:lstStyle/>
-                    <a:p>
-                      <a:pPr algn="ctr" indent="0" marL="0">
-                        <a:buNone/>
-                      </a:pPr>
-                      <a:r>
-                        <a:rPr lang="en-US" sz="1200" b="1" dirty="0">
-                          <a:solidFill>
-                            <a:srgbClr val="94A3B8"/>
-                          </a:solidFill>
-                          <a:latin typeface="Arial" pitchFamily="34" charset="0"/>
-                          <a:ea typeface="Arial" pitchFamily="34" charset="-122"/>
-                          <a:cs typeface="Arial" pitchFamily="34" charset="-120"/>
-                        </a:rPr>
-                        <a:t>C</a:t>
-                      </a:r>
-                      <a:endParaRPr lang="en-US" sz="1200" dirty="0">
-                        <a:latin typeface="Arial" charset="0"/>
-                        <a:ea typeface="Arial" charset="0"/>
-                        <a:cs typeface="Arial" charset="0"/>
-                      </a:endParaRPr>
-                    </a:p>
-                  </a:txBody>
-                  <a:tcPr marL="91440" marR="91440" marT="45720" marB="45720">
-                    <a:lnL w="6350" cap="flat" cmpd="sng" algn="ctr">
-                      <a:solidFill>
-                        <a:srgbClr val="CBD5E1"/>
-                      </a:solidFill>
-                      <a:prstDash val="solid"/>
-                      <a:round/>
-                      <a:headEnd type="none" w="med" len="med"/>
-                      <a:tailEnd type="none" w="med" len="med"/>
-                    </a:lnL>
-                    <a:lnR w="6350" cap="flat" cmpd="sng" algn="ctr">
-                      <a:solidFill>
-                        <a:srgbClr val="CBD5E1"/>
-                      </a:solidFill>
-                      <a:prstDash val="solid"/>
-                      <a:round/>
-                      <a:headEnd type="none" w="med" len="med"/>
-                      <a:tailEnd type="none" w="med" len="med"/>
-                    </a:lnR>
-                    <a:lnT w="6350" cap="flat" cmpd="sng" algn="ctr">
-                      <a:solidFill>
-                        <a:srgbClr val="CBD5E1"/>
-                      </a:solidFill>
-                      <a:prstDash val="solid"/>
-                      <a:round/>
-                      <a:headEnd type="none" w="med" len="med"/>
-                      <a:tailEnd type="none" w="med" len="med"/>
-                    </a:lnT>
-                    <a:lnB w="6350" cap="flat" cmpd="sng" algn="ctr">
-                      <a:solidFill>
-                        <a:srgbClr val="CBD5E1"/>
-                      </a:solidFill>
-                      <a:prstDash val="solid"/>
-                      <a:round/>
-                      <a:headEnd type="none" w="med" len="med"/>
-                      <a:tailEnd type="none" w="med" len="med"/>
-                    </a:lnB>
-                    <a:solidFill>
-                      <a:srgbClr val="FFFFFF"/>
-                    </a:solidFill>
-                  </a:tcPr>
-                </a:tc>
-                <a:tc>
-                  <a:txBody>
-                    <a:bodyPr/>
-                    <a:lstStyle/>
-                    <a:p>
-                      <a:pPr indent="0" marL="0">
-                        <a:buNone/>
-                      </a:pPr>
-                      <a:r>
-                        <a:rPr lang="en-US" sz="900" b="1" dirty="0">
-                          <a:solidFill>
-                            <a:srgbClr val="334155"/>
-                          </a:solidFill>
-                          <a:latin typeface="Arial" pitchFamily="34" charset="0"/>
-                          <a:ea typeface="Arial" pitchFamily="34" charset="-122"/>
-                          <a:cs typeface="Arial" pitchFamily="34" charset="-120"/>
-                        </a:rPr>
-                        <a:t>窓・採光</a:t>
-                      </a:r>
-                      <a:endParaRPr lang="en-US" sz="900" dirty="0">
-                        <a:latin typeface="Arial" charset="0"/>
-                        <a:ea typeface="Arial" charset="0"/>
-                        <a:cs typeface="Arial" charset="0"/>
-                      </a:endParaRPr>
-                    </a:p>
-                  </a:txBody>
-                  <a:tcPr marL="91440" marR="91440" marT="45720" marB="45720">
-                    <a:lnL w="6350" cap="flat" cmpd="sng" algn="ctr">
-                      <a:solidFill>
-                        <a:srgbClr val="CBD5E1"/>
-                      </a:solidFill>
-                      <a:prstDash val="solid"/>
-                      <a:round/>
-                      <a:headEnd type="none" w="med" len="med"/>
-                      <a:tailEnd type="none" w="med" len="med"/>
-                    </a:lnL>
-                    <a:lnR w="6350" cap="flat" cmpd="sng" algn="ctr">
-                      <a:solidFill>
-                        <a:srgbClr val="CBD5E1"/>
-                      </a:solidFill>
-                      <a:prstDash val="solid"/>
-                      <a:round/>
-                      <a:headEnd type="none" w="med" len="med"/>
-                      <a:tailEnd type="none" w="med" len="med"/>
-                    </a:lnR>
-                    <a:lnT w="6350" cap="flat" cmpd="sng" algn="ctr">
-                      <a:solidFill>
-                        <a:srgbClr val="CBD5E1"/>
-                      </a:solidFill>
-                      <a:prstDash val="solid"/>
-                      <a:round/>
-                      <a:headEnd type="none" w="med" len="med"/>
-                      <a:tailEnd type="none" w="med" len="med"/>
-                    </a:lnT>
-                    <a:lnB w="6350" cap="flat" cmpd="sng" algn="ctr">
-                      <a:solidFill>
-                        <a:srgbClr val="CBD5E1"/>
-                      </a:solidFill>
-                      <a:prstDash val="solid"/>
-                      <a:round/>
-                      <a:headEnd type="none" w="med" len="med"/>
-                      <a:tailEnd type="none" w="med" len="med"/>
-                    </a:lnB>
-                    <a:solidFill>
-                      <a:srgbClr val="FFFFFF"/>
-                    </a:solidFill>
-                  </a:tcPr>
-                </a:tc>
-                <a:tc>
-                  <a:txBody>
-                    <a:bodyPr/>
-                    <a:lstStyle/>
-                    <a:p>
-                      <a:pPr indent="0" marL="0">
-                        <a:buNone/>
-                      </a:pPr>
-                      <a:r>
-                        <a:rPr lang="en-US" sz="900" dirty="0">
-                          <a:solidFill>
-                            <a:srgbClr val="64748B"/>
-                          </a:solidFill>
-                          <a:latin typeface="Arial" pitchFamily="34" charset="0"/>
-                          <a:ea typeface="Arial" pitchFamily="34" charset="-122"/>
-                          <a:cs typeface="Arial" pitchFamily="34" charset="-120"/>
-                        </a:rPr>
-                        <a:t>値段がそれなりで安い 室内の温度が高くて寝苦しい 窓を開ければ多少緩和されたがそれでもこの時期が寒いとはいえ、室温...</a:t>
-                      </a:r>
-                      <a:endParaRPr lang="en-US" sz="900" dirty="0">
-                        <a:latin typeface="Arial" charset="0"/>
-                        <a:ea typeface="Arial" charset="0"/>
-                        <a:cs typeface="Arial" charset="0"/>
-                      </a:endParaRPr>
-                    </a:p>
-                  </a:txBody>
-                  <a:tcPr marL="91440" marR="91440" marT="45720" marB="45720">
-                    <a:lnL w="6350" cap="flat" cmpd="sng" algn="ctr">
-                      <a:solidFill>
-                        <a:srgbClr val="CBD5E1"/>
-                      </a:solidFill>
-                      <a:prstDash val="solid"/>
-                      <a:round/>
-                      <a:headEnd type="none" w="med" len="med"/>
-                      <a:tailEnd type="none" w="med" len="med"/>
-                    </a:lnL>
-                    <a:lnR w="6350" cap="flat" cmpd="sng" algn="ctr">
-                      <a:solidFill>
-                        <a:srgbClr val="CBD5E1"/>
-                      </a:solidFill>
-                      <a:prstDash val="solid"/>
-                      <a:round/>
-                      <a:headEnd type="none" w="med" len="med"/>
-                      <a:tailEnd type="none" w="med" len="med"/>
-                    </a:lnR>
-                    <a:lnT w="6350" cap="flat" cmpd="sng" algn="ctr">
-                      <a:solidFill>
-                        <a:srgbClr val="CBD5E1"/>
-                      </a:solidFill>
-                      <a:prstDash val="solid"/>
-                      <a:round/>
-                      <a:headEnd type="none" w="med" len="med"/>
-                      <a:tailEnd type="none" w="med" len="med"/>
-                    </a:lnT>
-                    <a:lnB w="6350" cap="flat" cmpd="sng" algn="ctr">
-                      <a:solidFill>
-                        <a:srgbClr val="CBD5E1"/>
-                      </a:solidFill>
-                      <a:prstDash val="solid"/>
-                      <a:round/>
-                      <a:headEnd type="none" w="med" len="med"/>
-                      <a:tailEnd type="none" w="med" len="med"/>
-                    </a:lnB>
-                    <a:solidFill>
-                      <a:srgbClr val="FFFFFF"/>
-                    </a:solidFill>
-                  </a:tcPr>
-                </a:tc>
-                <a:tc>
-                  <a:txBody>
-                    <a:bodyPr/>
-                    <a:lstStyle/>
-                    <a:p>
-                      <a:pPr algn="ctr" indent="0" marL="0">
-                        <a:buNone/>
-                      </a:pPr>
-                      <a:r>
-                        <a:rPr lang="en-US" sz="900" dirty="0">
-                          <a:solidFill>
-                            <a:srgbClr val="334155"/>
-                          </a:solidFill>
-                          <a:latin typeface="Arial" pitchFamily="34" charset="0"/>
-                          <a:ea typeface="Arial" pitchFamily="34" charset="-122"/>
-                          <a:cs typeface="Arial" pitchFamily="34" charset="-120"/>
-                        </a:rPr>
-                        <a:t>4件</a:t>
-                      </a:r>
-                      <a:endParaRPr lang="en-US" sz="900" dirty="0">
-                        <a:latin typeface="Arial" charset="0"/>
-                        <a:ea typeface="Arial" charset="0"/>
-                        <a:cs typeface="Arial" charset="0"/>
-                      </a:endParaRPr>
-                    </a:p>
-                  </a:txBody>
-                  <a:tcPr marL="91440" marR="91440" marT="45720" marB="45720">
-                    <a:lnL w="6350" cap="flat" cmpd="sng" algn="ctr">
-                      <a:solidFill>
-                        <a:srgbClr val="CBD5E1"/>
-                      </a:solidFill>
-                      <a:prstDash val="solid"/>
-                      <a:round/>
-                      <a:headEnd type="none" w="med" len="med"/>
-                      <a:tailEnd type="none" w="med" len="med"/>
-                    </a:lnL>
-                    <a:lnR w="6350" cap="flat" cmpd="sng" algn="ctr">
-                      <a:solidFill>
-                        <a:srgbClr val="CBD5E1"/>
-                      </a:solidFill>
-                      <a:prstDash val="solid"/>
-                      <a:round/>
-                      <a:headEnd type="none" w="med" len="med"/>
-                      <a:tailEnd type="none" w="med" len="med"/>
-                    </a:lnR>
-                    <a:lnT w="6350" cap="flat" cmpd="sng" algn="ctr">
-                      <a:solidFill>
-                        <a:srgbClr val="CBD5E1"/>
-                      </a:solidFill>
-                      <a:prstDash val="solid"/>
-                      <a:round/>
-                      <a:headEnd type="none" w="med" len="med"/>
-                      <a:tailEnd type="none" w="med" len="med"/>
-                    </a:lnT>
-                    <a:lnB w="6350" cap="flat" cmpd="sng" algn="ctr">
-                      <a:solidFill>
-                        <a:srgbClr val="CBD5E1"/>
-                      </a:solidFill>
-                      <a:prstDash val="solid"/>
-                      <a:round/>
-                      <a:headEnd type="none" w="med" len="med"/>
-                      <a:tailEnd type="none" w="med" len="med"/>
-                    </a:lnB>
-                    <a:solidFill>
-                      <a:srgbClr val="FFFFFF"/>
-                    </a:solidFill>
-                  </a:tcPr>
-                </a:tc>
-              </a:tr>
-              <a:tr h="320040">
-                <a:tc>
-                  <a:txBody>
-                    <a:bodyPr/>
-                    <a:lstStyle/>
-                    <a:p>
-                      <a:pPr algn="ctr" indent="0" marL="0">
-                        <a:buNone/>
-                      </a:pPr>
-                      <a:r>
-                        <a:rPr lang="en-US" sz="1200" b="1" dirty="0">
-                          <a:solidFill>
-                            <a:srgbClr val="94A3B8"/>
-                          </a:solidFill>
-                          <a:latin typeface="Arial" pitchFamily="34" charset="0"/>
-                          <a:ea typeface="Arial" pitchFamily="34" charset="-122"/>
-                          <a:cs typeface="Arial" pitchFamily="34" charset="-120"/>
-                        </a:rPr>
-                        <a:t>C</a:t>
-                      </a:r>
-                      <a:endParaRPr lang="en-US" sz="1200" dirty="0">
-                        <a:latin typeface="Arial" charset="0"/>
-                        <a:ea typeface="Arial" charset="0"/>
-                        <a:cs typeface="Arial" charset="0"/>
-                      </a:endParaRPr>
-                    </a:p>
-                  </a:txBody>
-                  <a:tcPr marL="91440" marR="91440" marT="45720" marB="45720">
-                    <a:lnL w="6350" cap="flat" cmpd="sng" algn="ctr">
-                      <a:solidFill>
-                        <a:srgbClr val="CBD5E1"/>
-                      </a:solidFill>
-                      <a:prstDash val="solid"/>
-                      <a:round/>
-                      <a:headEnd type="none" w="med" len="med"/>
-                      <a:tailEnd type="none" w="med" len="med"/>
-                    </a:lnL>
-                    <a:lnR w="6350" cap="flat" cmpd="sng" algn="ctr">
-                      <a:solidFill>
-                        <a:srgbClr val="CBD5E1"/>
-                      </a:solidFill>
-                      <a:prstDash val="solid"/>
-                      <a:round/>
-                      <a:headEnd type="none" w="med" len="med"/>
-                      <a:tailEnd type="none" w="med" len="med"/>
-                    </a:lnR>
-                    <a:lnT w="6350" cap="flat" cmpd="sng" algn="ctr">
-                      <a:solidFill>
-                        <a:srgbClr val="CBD5E1"/>
-                      </a:solidFill>
-                      <a:prstDash val="solid"/>
-                      <a:round/>
-                      <a:headEnd type="none" w="med" len="med"/>
-                      <a:tailEnd type="none" w="med" len="med"/>
-                    </a:lnT>
-                    <a:lnB w="6350" cap="flat" cmpd="sng" algn="ctr">
-                      <a:solidFill>
-                        <a:srgbClr val="CBD5E1"/>
-                      </a:solidFill>
-                      <a:prstDash val="solid"/>
-                      <a:round/>
-                      <a:headEnd type="none" w="med" len="med"/>
-                      <a:tailEnd type="none" w="med" len="med"/>
-                    </a:lnB>
-                    <a:solidFill>
-                      <a:srgbClr val="E8EFF8"/>
-                    </a:solidFill>
-                  </a:tcPr>
-                </a:tc>
-                <a:tc>
-                  <a:txBody>
-                    <a:bodyPr/>
-                    <a:lstStyle/>
-                    <a:p>
-                      <a:pPr indent="0" marL="0">
-                        <a:buNone/>
-                      </a:pPr>
-                      <a:r>
-                        <a:rPr lang="en-US" sz="900" b="1" dirty="0">
-                          <a:solidFill>
-                            <a:srgbClr val="334155"/>
-                          </a:solidFill>
-                          <a:latin typeface="Arial" pitchFamily="34" charset="0"/>
-                          <a:ea typeface="Arial" pitchFamily="34" charset="-122"/>
-                          <a:cs typeface="Arial" pitchFamily="34" charset="-120"/>
-                        </a:rPr>
-                        <a:t>防音性能</a:t>
-                      </a:r>
-                      <a:endParaRPr lang="en-US" sz="900" dirty="0">
-                        <a:latin typeface="Arial" charset="0"/>
-                        <a:ea typeface="Arial" charset="0"/>
-                        <a:cs typeface="Arial" charset="0"/>
-                      </a:endParaRPr>
-                    </a:p>
-                  </a:txBody>
-                  <a:tcPr marL="91440" marR="91440" marT="45720" marB="45720">
-                    <a:lnL w="6350" cap="flat" cmpd="sng" algn="ctr">
-                      <a:solidFill>
-                        <a:srgbClr val="CBD5E1"/>
-                      </a:solidFill>
-                      <a:prstDash val="solid"/>
-                      <a:round/>
-                      <a:headEnd type="none" w="med" len="med"/>
-                      <a:tailEnd type="none" w="med" len="med"/>
-                    </a:lnL>
-                    <a:lnR w="6350" cap="flat" cmpd="sng" algn="ctr">
-                      <a:solidFill>
-                        <a:srgbClr val="CBD5E1"/>
-                      </a:solidFill>
-                      <a:prstDash val="solid"/>
-                      <a:round/>
-                      <a:headEnd type="none" w="med" len="med"/>
-                      <a:tailEnd type="none" w="med" len="med"/>
-                    </a:lnR>
-                    <a:lnT w="6350" cap="flat" cmpd="sng" algn="ctr">
-                      <a:solidFill>
-                        <a:srgbClr val="CBD5E1"/>
-                      </a:solidFill>
-                      <a:prstDash val="solid"/>
-                      <a:round/>
-                      <a:headEnd type="none" w="med" len="med"/>
-                      <a:tailEnd type="none" w="med" len="med"/>
-                    </a:lnT>
-                    <a:lnB w="6350" cap="flat" cmpd="sng" algn="ctr">
-                      <a:solidFill>
-                        <a:srgbClr val="CBD5E1"/>
-                      </a:solidFill>
-                      <a:prstDash val="solid"/>
-                      <a:round/>
-                      <a:headEnd type="none" w="med" len="med"/>
-                      <a:tailEnd type="none" w="med" len="med"/>
-                    </a:lnB>
-                    <a:solidFill>
-                      <a:srgbClr val="E8EFF8"/>
-                    </a:solidFill>
-                  </a:tcPr>
-                </a:tc>
-                <a:tc>
-                  <a:txBody>
-                    <a:bodyPr/>
-                    <a:lstStyle/>
-                    <a:p>
-                      <a:pPr indent="0" marL="0">
-                        <a:buNone/>
-                      </a:pPr>
-                      <a:r>
-                        <a:rPr lang="en-US" sz="900" dirty="0">
-                          <a:solidFill>
-                            <a:srgbClr val="64748B"/>
-                          </a:solidFill>
-                          <a:latin typeface="Arial" pitchFamily="34" charset="0"/>
-                          <a:ea typeface="Arial" pitchFamily="34" charset="-122"/>
-                          <a:cs typeface="Arial" pitchFamily="34" charset="-120"/>
-                        </a:rPr>
-                        <a:t>各部屋の騒音がうるさかった</a:t>
-                      </a:r>
-                      <a:endParaRPr lang="en-US" sz="900" dirty="0">
-                        <a:latin typeface="Arial" charset="0"/>
-                        <a:ea typeface="Arial" charset="0"/>
-                        <a:cs typeface="Arial" charset="0"/>
-                      </a:endParaRPr>
-                    </a:p>
-                  </a:txBody>
-                  <a:tcPr marL="91440" marR="91440" marT="45720" marB="45720">
-                    <a:lnL w="6350" cap="flat" cmpd="sng" algn="ctr">
-                      <a:solidFill>
-                        <a:srgbClr val="CBD5E1"/>
-                      </a:solidFill>
-                      <a:prstDash val="solid"/>
-                      <a:round/>
-                      <a:headEnd type="none" w="med" len="med"/>
-                      <a:tailEnd type="none" w="med" len="med"/>
-                    </a:lnL>
-                    <a:lnR w="6350" cap="flat" cmpd="sng" algn="ctr">
-                      <a:solidFill>
-                        <a:srgbClr val="CBD5E1"/>
-                      </a:solidFill>
-                      <a:prstDash val="solid"/>
-                      <a:round/>
-                      <a:headEnd type="none" w="med" len="med"/>
-                      <a:tailEnd type="none" w="med" len="med"/>
-                    </a:lnR>
-                    <a:lnT w="6350" cap="flat" cmpd="sng" algn="ctr">
-                      <a:solidFill>
-                        <a:srgbClr val="CBD5E1"/>
-                      </a:solidFill>
-                      <a:prstDash val="solid"/>
-                      <a:round/>
-                      <a:headEnd type="none" w="med" len="med"/>
-                      <a:tailEnd type="none" w="med" len="med"/>
-                    </a:lnT>
-                    <a:lnB w="6350" cap="flat" cmpd="sng" algn="ctr">
-                      <a:solidFill>
-                        <a:srgbClr val="CBD5E1"/>
-                      </a:solidFill>
-                      <a:prstDash val="solid"/>
-                      <a:round/>
-                      <a:headEnd type="none" w="med" len="med"/>
-                      <a:tailEnd type="none" w="med" len="med"/>
-                    </a:lnB>
-                    <a:solidFill>
-                      <a:srgbClr val="E8EFF8"/>
-                    </a:solidFill>
-                  </a:tcPr>
-                </a:tc>
-                <a:tc>
-                  <a:txBody>
-                    <a:bodyPr/>
-                    <a:lstStyle/>
-                    <a:p>
-                      <a:pPr algn="ctr" indent="0" marL="0">
-                        <a:buNone/>
-                      </a:pPr>
-                      <a:r>
-                        <a:rPr lang="en-US" sz="900" dirty="0">
-                          <a:solidFill>
-                            <a:srgbClr val="334155"/>
-                          </a:solidFill>
-                          <a:latin typeface="Arial" pitchFamily="34" charset="0"/>
-                          <a:ea typeface="Arial" pitchFamily="34" charset="-122"/>
-                          <a:cs typeface="Arial" pitchFamily="34" charset="-120"/>
-                        </a:rPr>
-                        <a:t>3件</a:t>
-                      </a:r>
-                      <a:endParaRPr lang="en-US" sz="900" dirty="0">
-                        <a:latin typeface="Arial" charset="0"/>
-                        <a:ea typeface="Arial" charset="0"/>
-                        <a:cs typeface="Arial" charset="0"/>
-                      </a:endParaRPr>
-                    </a:p>
-                  </a:txBody>
-                  <a:tcPr marL="91440" marR="91440" marT="45720" marB="45720">
-                    <a:lnL w="6350" cap="flat" cmpd="sng" algn="ctr">
-                      <a:solidFill>
-                        <a:srgbClr val="CBD5E1"/>
-                      </a:solidFill>
-                      <a:prstDash val="solid"/>
-                      <a:round/>
-                      <a:headEnd type="none" w="med" len="med"/>
-                      <a:tailEnd type="none" w="med" len="med"/>
-                    </a:lnL>
-                    <a:lnR w="6350" cap="flat" cmpd="sng" algn="ctr">
-                      <a:solidFill>
-                        <a:srgbClr val="CBD5E1"/>
-                      </a:solidFill>
-                      <a:prstDash val="solid"/>
-                      <a:round/>
-                      <a:headEnd type="none" w="med" len="med"/>
-                      <a:tailEnd type="none" w="med" len="med"/>
-                    </a:lnR>
-                    <a:lnT w="6350" cap="flat" cmpd="sng" algn="ctr">
-                      <a:solidFill>
-                        <a:srgbClr val="CBD5E1"/>
-                      </a:solidFill>
-                      <a:prstDash val="solid"/>
-                      <a:round/>
-                      <a:headEnd type="none" w="med" len="med"/>
-                      <a:tailEnd type="none" w="med" len="med"/>
-                    </a:lnT>
-                    <a:lnB w="6350" cap="flat" cmpd="sng" algn="ctr">
-                      <a:solidFill>
-                        <a:srgbClr val="CBD5E1"/>
-                      </a:solidFill>
-                      <a:prstDash val="solid"/>
-                      <a:round/>
-                      <a:headEnd type="none" w="med" len="med"/>
-                      <a:tailEnd type="none" w="med" len="med"/>
-                    </a:lnB>
-                    <a:solidFill>
-                      <a:srgbClr val="E8EFF8"/>
-                    </a:solidFill>
-                  </a:tcPr>
-                </a:tc>
-              </a:tr>
-              <a:tr h="320040">
-                <a:tc>
-                  <a:txBody>
-                    <a:bodyPr/>
-                    <a:lstStyle/>
-                    <a:p>
-                      <a:pPr algn="ctr" indent="0" marL="0">
-                        <a:buNone/>
-                      </a:pPr>
-                      <a:r>
-                        <a:rPr lang="en-US" sz="1200" b="1" dirty="0">
-                          <a:solidFill>
-                            <a:srgbClr val="94A3B8"/>
-                          </a:solidFill>
-                          <a:latin typeface="Arial" pitchFamily="34" charset="0"/>
-                          <a:ea typeface="Arial" pitchFamily="34" charset="-122"/>
-                          <a:cs typeface="Arial" pitchFamily="34" charset="-120"/>
-                        </a:rPr>
-                        <a:t>C</a:t>
-                      </a:r>
-                      <a:endParaRPr lang="en-US" sz="1200" dirty="0">
-                        <a:latin typeface="Arial" charset="0"/>
-                        <a:ea typeface="Arial" charset="0"/>
-                        <a:cs typeface="Arial" charset="0"/>
-                      </a:endParaRPr>
-                    </a:p>
-                  </a:txBody>
-                  <a:tcPr marL="91440" marR="91440" marT="45720" marB="45720">
-                    <a:lnL w="6350" cap="flat" cmpd="sng" algn="ctr">
-                      <a:solidFill>
-                        <a:srgbClr val="CBD5E1"/>
-                      </a:solidFill>
-                      <a:prstDash val="solid"/>
-                      <a:round/>
-                      <a:headEnd type="none" w="med" len="med"/>
-                      <a:tailEnd type="none" w="med" len="med"/>
-                    </a:lnL>
-                    <a:lnR w="6350" cap="flat" cmpd="sng" algn="ctr">
-                      <a:solidFill>
-                        <a:srgbClr val="CBD5E1"/>
-                      </a:solidFill>
-                      <a:prstDash val="solid"/>
-                      <a:round/>
-                      <a:headEnd type="none" w="med" len="med"/>
-                      <a:tailEnd type="none" w="med" len="med"/>
-                    </a:lnR>
-                    <a:lnT w="6350" cap="flat" cmpd="sng" algn="ctr">
-                      <a:solidFill>
-                        <a:srgbClr val="CBD5E1"/>
-                      </a:solidFill>
-                      <a:prstDash val="solid"/>
-                      <a:round/>
-                      <a:headEnd type="none" w="med" len="med"/>
-                      <a:tailEnd type="none" w="med" len="med"/>
-                    </a:lnT>
-                    <a:lnB w="6350" cap="flat" cmpd="sng" algn="ctr">
-                      <a:solidFill>
-                        <a:srgbClr val="CBD5E1"/>
-                      </a:solidFill>
-                      <a:prstDash val="solid"/>
-                      <a:round/>
-                      <a:headEnd type="none" w="med" len="med"/>
-                      <a:tailEnd type="none" w="med" len="med"/>
-                    </a:lnB>
-                    <a:solidFill>
-                      <a:srgbClr val="FFFFFF"/>
-                    </a:solidFill>
-                  </a:tcPr>
-                </a:tc>
-                <a:tc>
-                  <a:txBody>
-                    <a:bodyPr/>
-                    <a:lstStyle/>
-                    <a:p>
-                      <a:pPr indent="0" marL="0">
-                        <a:buNone/>
-                      </a:pPr>
-                      <a:r>
-                        <a:rPr lang="en-US" sz="900" b="1" dirty="0">
-                          <a:solidFill>
-                            <a:srgbClr val="334155"/>
-                          </a:solidFill>
-                          <a:latin typeface="Arial" pitchFamily="34" charset="0"/>
-                          <a:ea typeface="Arial" pitchFamily="34" charset="-122"/>
-                          <a:cs typeface="Arial" pitchFamily="34" charset="-120"/>
-                        </a:rPr>
-                        <a:t>清掃不備</a:t>
-                      </a:r>
-                      <a:endParaRPr lang="en-US" sz="900" dirty="0">
-                        <a:latin typeface="Arial" charset="0"/>
-                        <a:ea typeface="Arial" charset="0"/>
-                        <a:cs typeface="Arial" charset="0"/>
-                      </a:endParaRPr>
-                    </a:p>
-                  </a:txBody>
-                  <a:tcPr marL="91440" marR="91440" marT="45720" marB="45720">
-                    <a:lnL w="6350" cap="flat" cmpd="sng" algn="ctr">
-                      <a:solidFill>
-                        <a:srgbClr val="CBD5E1"/>
-                      </a:solidFill>
-                      <a:prstDash val="solid"/>
-                      <a:round/>
-                      <a:headEnd type="none" w="med" len="med"/>
-                      <a:tailEnd type="none" w="med" len="med"/>
-                    </a:lnL>
-                    <a:lnR w="6350" cap="flat" cmpd="sng" algn="ctr">
-                      <a:solidFill>
-                        <a:srgbClr val="CBD5E1"/>
-                      </a:solidFill>
-                      <a:prstDash val="solid"/>
-                      <a:round/>
-                      <a:headEnd type="none" w="med" len="med"/>
-                      <a:tailEnd type="none" w="med" len="med"/>
-                    </a:lnR>
-                    <a:lnT w="6350" cap="flat" cmpd="sng" algn="ctr">
-                      <a:solidFill>
-                        <a:srgbClr val="CBD5E1"/>
-                      </a:solidFill>
-                      <a:prstDash val="solid"/>
-                      <a:round/>
-                      <a:headEnd type="none" w="med" len="med"/>
-                      <a:tailEnd type="none" w="med" len="med"/>
-                    </a:lnT>
-                    <a:lnB w="6350" cap="flat" cmpd="sng" algn="ctr">
-                      <a:solidFill>
-                        <a:srgbClr val="CBD5E1"/>
-                      </a:solidFill>
-                      <a:prstDash val="solid"/>
-                      <a:round/>
-                      <a:headEnd type="none" w="med" len="med"/>
-                      <a:tailEnd type="none" w="med" len="med"/>
-                    </a:lnB>
-                    <a:solidFill>
-                      <a:srgbClr val="FFFFFF"/>
-                    </a:solidFill>
-                  </a:tcPr>
-                </a:tc>
-                <a:tc>
-                  <a:txBody>
-                    <a:bodyPr/>
-                    <a:lstStyle/>
-                    <a:p>
-                      <a:pPr indent="0" marL="0">
-                        <a:buNone/>
-                      </a:pPr>
-                      <a:r>
-                        <a:rPr lang="en-US" sz="900" dirty="0">
-                          <a:solidFill>
-                            <a:srgbClr val="64748B"/>
-                          </a:solidFill>
-                          <a:latin typeface="Arial" pitchFamily="34" charset="0"/>
-                          <a:ea typeface="Arial" pitchFamily="34" charset="-122"/>
-                          <a:cs typeface="Arial" pitchFamily="34" charset="-120"/>
-                        </a:rPr>
-                        <a:t>値段がそれなりで安い 室内の温度が高くて寝苦しい 窓を開ければ多少緩和されたがそれでもこの時期が寒いとはいえ、室温...</a:t>
-                      </a:r>
-                      <a:endParaRPr lang="en-US" sz="900" dirty="0">
-                        <a:latin typeface="Arial" charset="0"/>
-                        <a:ea typeface="Arial" charset="0"/>
-                        <a:cs typeface="Arial" charset="0"/>
-                      </a:endParaRPr>
-                    </a:p>
-                  </a:txBody>
-                  <a:tcPr marL="91440" marR="91440" marT="45720" marB="45720">
-                    <a:lnL w="6350" cap="flat" cmpd="sng" algn="ctr">
-                      <a:solidFill>
-                        <a:srgbClr val="CBD5E1"/>
-                      </a:solidFill>
-                      <a:prstDash val="solid"/>
-                      <a:round/>
-                      <a:headEnd type="none" w="med" len="med"/>
-                      <a:tailEnd type="none" w="med" len="med"/>
-                    </a:lnL>
-                    <a:lnR w="6350" cap="flat" cmpd="sng" algn="ctr">
-                      <a:solidFill>
-                        <a:srgbClr val="CBD5E1"/>
-                      </a:solidFill>
-                      <a:prstDash val="solid"/>
-                      <a:round/>
-                      <a:headEnd type="none" w="med" len="med"/>
-                      <a:tailEnd type="none" w="med" len="med"/>
-                    </a:lnR>
-                    <a:lnT w="6350" cap="flat" cmpd="sng" algn="ctr">
-                      <a:solidFill>
-                        <a:srgbClr val="CBD5E1"/>
-                      </a:solidFill>
-                      <a:prstDash val="solid"/>
-                      <a:round/>
-                      <a:headEnd type="none" w="med" len="med"/>
-                      <a:tailEnd type="none" w="med" len="med"/>
-                    </a:lnT>
-                    <a:lnB w="6350" cap="flat" cmpd="sng" algn="ctr">
-                      <a:solidFill>
-                        <a:srgbClr val="CBD5E1"/>
-                      </a:solidFill>
-                      <a:prstDash val="solid"/>
-                      <a:round/>
-                      <a:headEnd type="none" w="med" len="med"/>
-                      <a:tailEnd type="none" w="med" len="med"/>
-                    </a:lnB>
-                    <a:solidFill>
-                      <a:srgbClr val="FFFFFF"/>
-                    </a:solidFill>
-                  </a:tcPr>
-                </a:tc>
-                <a:tc>
-                  <a:txBody>
-                    <a:bodyPr/>
-                    <a:lstStyle/>
-                    <a:p>
-                      <a:pPr algn="ctr" indent="0" marL="0">
-                        <a:buNone/>
-                      </a:pPr>
-                      <a:r>
-                        <a:rPr lang="en-US" sz="900" dirty="0">
-                          <a:solidFill>
-                            <a:srgbClr val="334155"/>
-                          </a:solidFill>
-                          <a:latin typeface="Arial" pitchFamily="34" charset="0"/>
-                          <a:ea typeface="Arial" pitchFamily="34" charset="-122"/>
-                          <a:cs typeface="Arial" pitchFamily="34" charset="-120"/>
-                        </a:rPr>
-                        <a:t>2件</a:t>
-                      </a:r>
-                      <a:endParaRPr lang="en-US" sz="900" dirty="0">
-                        <a:latin typeface="Arial" charset="0"/>
-                        <a:ea typeface="Arial" charset="0"/>
-                        <a:cs typeface="Arial" charset="0"/>
-                      </a:endParaRPr>
-                    </a:p>
-                  </a:txBody>
-                  <a:tcPr marL="91440" marR="91440" marT="45720" marB="45720">
-                    <a:lnL w="6350" cap="flat" cmpd="sng" algn="ctr">
-                      <a:solidFill>
-                        <a:srgbClr val="CBD5E1"/>
-                      </a:solidFill>
-                      <a:prstDash val="solid"/>
-                      <a:round/>
-                      <a:headEnd type="none" w="med" len="med"/>
-                      <a:tailEnd type="none" w="med" len="med"/>
-                    </a:lnL>
-                    <a:lnR w="6350" cap="flat" cmpd="sng" algn="ctr">
-                      <a:solidFill>
-                        <a:srgbClr val="CBD5E1"/>
-                      </a:solidFill>
-                      <a:prstDash val="solid"/>
-                      <a:round/>
-                      <a:headEnd type="none" w="med" len="med"/>
-                      <a:tailEnd type="none" w="med" len="med"/>
-                    </a:lnR>
-                    <a:lnT w="6350" cap="flat" cmpd="sng" algn="ctr">
-                      <a:solidFill>
-                        <a:srgbClr val="CBD5E1"/>
-                      </a:solidFill>
-                      <a:prstDash val="solid"/>
-                      <a:round/>
-                      <a:headEnd type="none" w="med" len="med"/>
-                      <a:tailEnd type="none" w="med" len="med"/>
-                    </a:lnT>
-                    <a:lnB w="6350" cap="flat" cmpd="sng" algn="ctr">
-                      <a:solidFill>
-                        <a:srgbClr val="CBD5E1"/>
-                      </a:solidFill>
-                      <a:prstDash val="solid"/>
-                      <a:round/>
-                      <a:headEnd type="none" w="med" len="med"/>
-                      <a:tailEnd type="none" w="med" len="med"/>
-                    </a:lnB>
-                    <a:solidFill>
-                      <a:srgbClr val="FFFFFF"/>
-                    </a:solidFill>
-                  </a:tcPr>
-                </a:tc>
-              </a:tr>
             </a:tbl>
           </a:graphicData>
         </a:graphic>
@@ -14540,7 +9614,7 @@
                 <a:ea typeface="Arial" pitchFamily="34" charset="-122"/>
                 <a:cs typeface="Arial" pitchFamily="34" charset="-120"/>
               </a:rPr>
-              <a:t>客室の消臭対策の強化</a:t>
+              <a:t>口コミモニタリング体制の構築</a:t>
             </a:r>
             <a:endParaRPr lang="en-US" sz="1200" dirty="0"/>
           </a:p>
@@ -14583,7 +9657,7 @@
                 <a:ea typeface="Arial" pitchFamily="34" charset="-122"/>
                 <a:cs typeface="Arial" pitchFamily="34" charset="-120"/>
               </a:rPr>
-              <a:t>チェックアウト後の換気・消臭スプレー処理の徹底</a:t>
+              <a:t>全OTAサイトの口コミを週次で確認するフロー導入</a:t>
             </a:r>
             <a:endParaRPr lang="en-US" sz="900" dirty="0"/>
           </a:p>
@@ -14604,7 +9678,7 @@
                 <a:ea typeface="Arial" pitchFamily="34" charset="-122"/>
                 <a:cs typeface="Arial" pitchFamily="34" charset="-120"/>
               </a:rPr>
-              <a:t>定期的な脱臭剤の設置と交換フローの確立</a:t>
+              <a:t>ネガティブコメントへの48時間以内の返信を目標設定</a:t>
             </a:r>
             <a:endParaRPr lang="en-US" sz="900" dirty="0"/>
           </a:p>
@@ -14625,7 +9699,7 @@
                 <a:ea typeface="Arial" pitchFamily="34" charset="-122"/>
                 <a:cs typeface="Arial" pitchFamily="34" charset="-120"/>
               </a:rPr>
-              <a:t>喫煙・臭いに関するクレーム発生時の即座対応マニュアル作成</a:t>
+              <a:t>スタッフ間での口コミ共有ミーティングの定例化</a:t>
             </a:r>
             <a:endParaRPr lang="en-US" sz="900" dirty="0"/>
           </a:p>
@@ -14711,7 +9785,7 @@
                 <a:ea typeface="Arial" pitchFamily="34" charset="-122"/>
                 <a:cs typeface="Arial" pitchFamily="34" charset="-120"/>
               </a:rPr>
-              <a:t>清掃品質の向上</a:t>
+              <a:t>ゲストコミュニケーションの強化</a:t>
             </a:r>
             <a:endParaRPr lang="en-US" sz="1200" dirty="0"/>
           </a:p>
@@ -14754,7 +9828,7 @@
                 <a:ea typeface="Arial" pitchFamily="34" charset="-122"/>
                 <a:cs typeface="Arial" pitchFamily="34" charset="-120"/>
               </a:rPr>
-              <a:t>清掃チェックリストの見直しと強化（ベッド下・隅の重点確認）</a:t>
+              <a:t>チェックイン時の挨拶・案内の標準化</a:t>
             </a:r>
             <a:endParaRPr lang="en-US" sz="900" dirty="0"/>
           </a:p>
@@ -14775,7 +9849,7 @@
                 <a:ea typeface="Arial" pitchFamily="34" charset="-122"/>
                 <a:cs typeface="Arial" pitchFamily="34" charset="-120"/>
               </a:rPr>
-              <a:t>清掃後のダブルチェック体制の導入</a:t>
+              <a:t>チェックアウト時の簡易アンケート実施</a:t>
             </a:r>
             <a:endParaRPr lang="en-US" sz="900" dirty="0"/>
           </a:p>
@@ -14796,7 +9870,7 @@
                 <a:ea typeface="Arial" pitchFamily="34" charset="-122"/>
                 <a:cs typeface="Arial" pitchFamily="34" charset="-120"/>
               </a:rPr>
-              <a:t>清掃スタッフへの再研修実施</a:t>
+              <a:t>リピーターへの感謝メッセージの導入</a:t>
             </a:r>
             <a:endParaRPr lang="en-US" sz="900" dirty="0"/>
           </a:p>
@@ -14805,348 +9879,6 @@
       <p:sp>
         <p:nvSpPr>
           <p:cNvPr id="14" name="Shape 12"/>
-          <p:cNvSpPr/>
-          <p:nvPr/>
-        </p:nvSpPr>
-        <p:spPr>
-          <a:xfrm>
-            <a:off x="457200" y="3017520"/>
-            <a:ext cx="3977640" cy="1600200"/>
-          </a:xfrm>
-          <a:prstGeom prst="rect">
-            <a:avLst/>
-          </a:prstGeom>
-          <a:solidFill>
-            <a:srgbClr val="FFFFFF"/>
-          </a:solidFill>
-          <a:ln/>
-          <a:effectLst>
-            <a:outerShdw sx="100000" sy="100000" kx="0" ky="0" algn="bl" rotWithShape="0" blurRad="50800" dist="25400" dir="8100000">
-              <a:srgbClr val="000000">
-                <a:alpha val="10000"/>
-              </a:srgbClr>
-            </a:outerShdw>
-          </a:effectLst>
-        </p:spPr>
-      </p:sp>
-      <p:sp>
-        <p:nvSpPr>
-          <p:cNvPr id="15" name="Shape 13"/>
-          <p:cNvSpPr/>
-          <p:nvPr/>
-        </p:nvSpPr>
-        <p:spPr>
-          <a:xfrm>
-            <a:off x="457200" y="3017520"/>
-            <a:ext cx="54864" cy="1600200"/>
-          </a:xfrm>
-          <a:prstGeom prst="rect">
-            <a:avLst/>
-          </a:prstGeom>
-          <a:solidFill>
-            <a:srgbClr val="3B7DD8"/>
-          </a:solidFill>
-          <a:ln/>
-        </p:spPr>
-      </p:sp>
-      <p:sp>
-        <p:nvSpPr>
-          <p:cNvPr id="16" name="Text 14"/>
-          <p:cNvSpPr/>
-          <p:nvPr/>
-        </p:nvSpPr>
-        <p:spPr>
-          <a:xfrm>
-            <a:off x="594360" y="3063240"/>
-            <a:ext cx="3657600" cy="320040"/>
-          </a:xfrm>
-          <a:prstGeom prst="rect">
-            <a:avLst/>
-          </a:prstGeom>
-          <a:noFill/>
-          <a:ln/>
-        </p:spPr>
-        <p:txBody>
-          <a:bodyPr wrap="square" lIns="0" tIns="0" rIns="0" bIns="0" rtlCol="0" anchor="ctr"/>
-          <a:lstStyle/>
-          <a:p>
-            <a:pPr indent="0" marL="0">
-              <a:buNone/>
-            </a:pPr>
-            <a:r>
-              <a:rPr lang="en-US" sz="1200" b="1" dirty="0">
-                <a:solidFill>
-                  <a:srgbClr val="1A2744"/>
-                </a:solidFill>
-                <a:latin typeface="Arial" pitchFamily="34" charset="0"/>
-                <a:ea typeface="Arial" pitchFamily="34" charset="-122"/>
-                <a:cs typeface="Arial" pitchFamily="34" charset="-120"/>
-              </a:rPr>
-              <a:t>エアコン・空調の定期点検強化</a:t>
-            </a:r>
-            <a:endParaRPr lang="en-US" sz="1200" dirty="0"/>
-          </a:p>
-        </p:txBody>
-      </p:sp>
-      <p:sp>
-        <p:nvSpPr>
-          <p:cNvPr id="17" name="Text 15"/>
-          <p:cNvSpPr/>
-          <p:nvPr/>
-        </p:nvSpPr>
-        <p:spPr>
-          <a:xfrm>
-            <a:off x="594360" y="3383280"/>
-            <a:ext cx="3657600" cy="1188720"/>
-          </a:xfrm>
-          <a:prstGeom prst="rect">
-            <a:avLst/>
-          </a:prstGeom>
-          <a:noFill/>
-          <a:ln/>
-        </p:spPr>
-        <p:txBody>
-          <a:bodyPr wrap="square" lIns="0" tIns="0" rIns="0" bIns="0" rtlCol="0" anchor="ctr"/>
-          <a:lstStyle/>
-          <a:p>
-            <a:pPr marL="342900" indent="-342900">
-              <a:spcAft>
-                <a:spcPts val="300"/>
-              </a:spcAft>
-              <a:buSzPct val="100000"/>
-              <a:buChar char="•"/>
-            </a:pPr>
-            <a:r>
-              <a:rPr lang="en-US" sz="900" dirty="0">
-                <a:solidFill>
-                  <a:srgbClr val="334155"/>
-                </a:solidFill>
-                <a:latin typeface="Arial" pitchFamily="34" charset="0"/>
-                <a:ea typeface="Arial" pitchFamily="34" charset="-122"/>
-                <a:cs typeface="Arial" pitchFamily="34" charset="-120"/>
-              </a:rPr>
-              <a:t>全室のエアコン設定を季節に応じてデフォルト確認する運用フロー導入</a:t>
-            </a:r>
-            <a:endParaRPr lang="en-US" sz="900" dirty="0"/>
-          </a:p>
-          <a:p>
-            <a:pPr marL="342900" indent="-342900">
-              <a:spcAft>
-                <a:spcPts val="300"/>
-              </a:spcAft>
-              <a:buSzPct val="100000"/>
-              <a:buChar char="•"/>
-            </a:pPr>
-            <a:r>
-              <a:rPr lang="en-US" sz="900" dirty="0">
-                <a:solidFill>
-                  <a:srgbClr val="334155"/>
-                </a:solidFill>
-                <a:latin typeface="Arial" pitchFamily="34" charset="0"/>
-                <a:ea typeface="Arial" pitchFamily="34" charset="-122"/>
-                <a:cs typeface="Arial" pitchFamily="34" charset="-120"/>
-              </a:rPr>
-              <a:t>冷暖房の正常動作を定期チェックリストに追加</a:t>
-            </a:r>
-            <a:endParaRPr lang="en-US" sz="900" dirty="0"/>
-          </a:p>
-          <a:p>
-            <a:pPr marL="342900" indent="-342900">
-              <a:spcAft>
-                <a:spcPts val="300"/>
-              </a:spcAft>
-              <a:buSzPct val="100000"/>
-              <a:buChar char="•"/>
-            </a:pPr>
-            <a:r>
-              <a:rPr lang="en-US" sz="900" dirty="0">
-                <a:solidFill>
-                  <a:srgbClr val="334155"/>
-                </a:solidFill>
-                <a:latin typeface="Arial" pitchFamily="34" charset="0"/>
-                <a:ea typeface="Arial" pitchFamily="34" charset="-122"/>
-                <a:cs typeface="Arial" pitchFamily="34" charset="-120"/>
-              </a:rPr>
-              <a:t>異常報告があった客室の優先メンテナンス実施</a:t>
-            </a:r>
-            <a:endParaRPr lang="en-US" sz="900" dirty="0"/>
-          </a:p>
-        </p:txBody>
-      </p:sp>
-      <p:sp>
-        <p:nvSpPr>
-          <p:cNvPr id="18" name="Shape 16"/>
-          <p:cNvSpPr/>
-          <p:nvPr/>
-        </p:nvSpPr>
-        <p:spPr>
-          <a:xfrm>
-            <a:off x="4663440" y="3017520"/>
-            <a:ext cx="3977640" cy="1600200"/>
-          </a:xfrm>
-          <a:prstGeom prst="rect">
-            <a:avLst/>
-          </a:prstGeom>
-          <a:solidFill>
-            <a:srgbClr val="FFFFFF"/>
-          </a:solidFill>
-          <a:ln/>
-          <a:effectLst>
-            <a:outerShdw sx="100000" sy="100000" kx="0" ky="0" algn="bl" rotWithShape="0" blurRad="50800" dist="25400" dir="8100000">
-              <a:srgbClr val="000000">
-                <a:alpha val="10000"/>
-              </a:srgbClr>
-            </a:outerShdw>
-          </a:effectLst>
-        </p:spPr>
-      </p:sp>
-      <p:sp>
-        <p:nvSpPr>
-          <p:cNvPr id="19" name="Shape 17"/>
-          <p:cNvSpPr/>
-          <p:nvPr/>
-        </p:nvSpPr>
-        <p:spPr>
-          <a:xfrm>
-            <a:off x="4663440" y="3017520"/>
-            <a:ext cx="54864" cy="1600200"/>
-          </a:xfrm>
-          <a:prstGeom prst="rect">
-            <a:avLst/>
-          </a:prstGeom>
-          <a:solidFill>
-            <a:srgbClr val="3B7DD8"/>
-          </a:solidFill>
-          <a:ln/>
-        </p:spPr>
-      </p:sp>
-      <p:sp>
-        <p:nvSpPr>
-          <p:cNvPr id="20" name="Text 18"/>
-          <p:cNvSpPr/>
-          <p:nvPr/>
-        </p:nvSpPr>
-        <p:spPr>
-          <a:xfrm>
-            <a:off x="4800600" y="3063240"/>
-            <a:ext cx="3657600" cy="320040"/>
-          </a:xfrm>
-          <a:prstGeom prst="rect">
-            <a:avLst/>
-          </a:prstGeom>
-          <a:noFill/>
-          <a:ln/>
-        </p:spPr>
-        <p:txBody>
-          <a:bodyPr wrap="square" lIns="0" tIns="0" rIns="0" bIns="0" rtlCol="0" anchor="ctr"/>
-          <a:lstStyle/>
-          <a:p>
-            <a:pPr indent="0" marL="0">
-              <a:buNone/>
-            </a:pPr>
-            <a:r>
-              <a:rPr lang="en-US" sz="1200" b="1" dirty="0">
-                <a:solidFill>
-                  <a:srgbClr val="1A2744"/>
-                </a:solidFill>
-                <a:latin typeface="Arial" pitchFamily="34" charset="0"/>
-                <a:ea typeface="Arial" pitchFamily="34" charset="-122"/>
-                <a:cs typeface="Arial" pitchFamily="34" charset="-120"/>
-              </a:rPr>
-              <a:t>スタッフ対応品質の統一</a:t>
-            </a:r>
-            <a:endParaRPr lang="en-US" sz="1200" dirty="0"/>
-          </a:p>
-        </p:txBody>
-      </p:sp>
-      <p:sp>
-        <p:nvSpPr>
-          <p:cNvPr id="21" name="Text 19"/>
-          <p:cNvSpPr/>
-          <p:nvPr/>
-        </p:nvSpPr>
-        <p:spPr>
-          <a:xfrm>
-            <a:off x="4800600" y="3383280"/>
-            <a:ext cx="3657600" cy="1188720"/>
-          </a:xfrm>
-          <a:prstGeom prst="rect">
-            <a:avLst/>
-          </a:prstGeom>
-          <a:noFill/>
-          <a:ln/>
-        </p:spPr>
-        <p:txBody>
-          <a:bodyPr wrap="square" lIns="0" tIns="0" rIns="0" bIns="0" rtlCol="0" anchor="ctr"/>
-          <a:lstStyle/>
-          <a:p>
-            <a:pPr marL="342900" indent="-342900">
-              <a:spcAft>
-                <a:spcPts val="300"/>
-              </a:spcAft>
-              <a:buSzPct val="100000"/>
-              <a:buChar char="•"/>
-            </a:pPr>
-            <a:r>
-              <a:rPr lang="en-US" sz="900" dirty="0">
-                <a:solidFill>
-                  <a:srgbClr val="334155"/>
-                </a:solidFill>
-                <a:latin typeface="Arial" pitchFamily="34" charset="0"/>
-                <a:ea typeface="Arial" pitchFamily="34" charset="-122"/>
-                <a:cs typeface="Arial" pitchFamily="34" charset="-120"/>
-              </a:rPr>
-              <a:t>接客マニュアルの見直しと全スタッフへの周知</a:t>
-            </a:r>
-            <a:endParaRPr lang="en-US" sz="900" dirty="0"/>
-          </a:p>
-          <a:p>
-            <a:pPr marL="342900" indent="-342900">
-              <a:spcAft>
-                <a:spcPts val="300"/>
-              </a:spcAft>
-              <a:buSzPct val="100000"/>
-              <a:buChar char="•"/>
-            </a:pPr>
-            <a:r>
-              <a:rPr lang="en-US" sz="900" dirty="0">
-                <a:solidFill>
-                  <a:srgbClr val="334155"/>
-                </a:solidFill>
-                <a:latin typeface="Arial" pitchFamily="34" charset="0"/>
-                <a:ea typeface="Arial" pitchFamily="34" charset="-122"/>
-                <a:cs typeface="Arial" pitchFamily="34" charset="-120"/>
-              </a:rPr>
-              <a:t>ゲストからのクレーム対応フローの明確化</a:t>
-            </a:r>
-            <a:endParaRPr lang="en-US" sz="900" dirty="0"/>
-          </a:p>
-          <a:p>
-            <a:pPr marL="342900" indent="-342900">
-              <a:spcAft>
-                <a:spcPts val="300"/>
-              </a:spcAft>
-              <a:buSzPct val="100000"/>
-              <a:buChar char="•"/>
-            </a:pPr>
-            <a:r>
-              <a:rPr lang="en-US" sz="900" dirty="0">
-                <a:solidFill>
-                  <a:srgbClr val="334155"/>
-                </a:solidFill>
-                <a:latin typeface="Arial" pitchFamily="34" charset="0"/>
-                <a:ea typeface="Arial" pitchFamily="34" charset="-122"/>
-                <a:cs typeface="Arial" pitchFamily="34" charset="-120"/>
-              </a:rPr>
-              <a:t>定期的なCS研修の実施</a:t>
-            </a:r>
-            <a:endParaRPr lang="en-US" sz="900" dirty="0"/>
-          </a:p>
-        </p:txBody>
-      </p:sp>
-      <p:sp>
-        <p:nvSpPr>
-          <p:cNvPr id="22" name="Shape 20"/>
           <p:cNvSpPr/>
           <p:nvPr/>
         </p:nvSpPr>
@@ -15166,7 +9898,7 @@
       </p:sp>
       <p:sp>
         <p:nvSpPr>
-          <p:cNvPr id="23" name="Text 21"/>
+          <p:cNvPr id="15" name="Text 13"/>
           <p:cNvSpPr/>
           <p:nvPr/>
         </p:nvSpPr>
@@ -15205,7 +9937,7 @@
       </p:sp>
       <p:sp>
         <p:nvSpPr>
-          <p:cNvPr id="24" name="Text 22"/>
+          <p:cNvPr id="16" name="Text 14"/>
           <p:cNvSpPr/>
           <p:nvPr/>
         </p:nvSpPr>
@@ -15491,7 +10223,7 @@
                 <a:ea typeface="Arial" pitchFamily="34" charset="-122"/>
                 <a:cs typeface="Arial" pitchFamily="34" charset="-120"/>
               </a:rPr>
-              <a:t>浴室の快適性向上</a:t>
+              <a:t>口コミ返信体制の構築</a:t>
             </a:r>
             <a:endParaRPr lang="en-US" sz="1000" dirty="0"/>
           </a:p>
@@ -15506,7 +10238,7 @@
         <p:spPr>
           <a:xfrm>
             <a:off x="640080" y="1719072"/>
-            <a:ext cx="3474720" cy="694944"/>
+            <a:ext cx="3474720" cy="493776"/>
           </a:xfrm>
           <a:prstGeom prst="rect">
             <a:avLst/>
@@ -15534,7 +10266,7 @@
                 <a:ea typeface="Arial" pitchFamily="34" charset="-122"/>
                 <a:cs typeface="Arial" pitchFamily="34" charset="-120"/>
               </a:rPr>
-              <a:t>排水口の清掃・修繕を全室で実施し、排水速度を改善</a:t>
+              <a:t>全サイトの口コミに48時間以内の返信を目標に設定</a:t>
             </a:r>
             <a:endParaRPr lang="en-US" sz="900" dirty="0"/>
           </a:p>
@@ -15555,284 +10287,15 @@
                 <a:ea typeface="Arial" pitchFamily="34" charset="-122"/>
                 <a:cs typeface="Arial" pitchFamily="34" charset="-120"/>
               </a:rPr>
-              <a:t>シャワーヘッドの交換（水圧改善・節水タイプ導入）</a:t>
+              <a:t>特に低評価レビューへのフォローアップ強化</a:t>
             </a:r>
             <a:endParaRPr lang="en-US" sz="900" dirty="0"/>
           </a:p>
-          <a:p>
-            <a:pPr marL="342900" indent="-342900">
-              <a:spcAft>
-                <a:spcPts val="200"/>
-              </a:spcAft>
-              <a:buSzPct val="100000"/>
-              <a:buChar char="•"/>
-            </a:pPr>
-            <a:r>
-              <a:rPr lang="en-US" sz="900" dirty="0">
-                <a:solidFill>
-                  <a:srgbClr val="64748B"/>
-                </a:solidFill>
-                <a:latin typeface="Arial" pitchFamily="34" charset="0"/>
-                <a:ea typeface="Arial" pitchFamily="34" charset="-122"/>
-                <a:cs typeface="Arial" pitchFamily="34" charset="-120"/>
-              </a:rPr>
-              <a:t>浴室換気・暖房設備の点検と改善</a:t>
-            </a:r>
-            <a:endParaRPr lang="en-US" sz="900" dirty="0"/>
-          </a:p>
-        </p:txBody>
-      </p:sp>
-      <p:sp>
-        <p:nvSpPr>
-          <p:cNvPr id="10" name="Text 8"/>
-          <p:cNvSpPr/>
-          <p:nvPr/>
-        </p:nvSpPr>
-        <p:spPr>
-          <a:xfrm>
-            <a:off x="640080" y="2505456"/>
-            <a:ext cx="3474720" cy="274320"/>
-          </a:xfrm>
-          <a:prstGeom prst="rect">
-            <a:avLst/>
-          </a:prstGeom>
-          <a:noFill/>
-          <a:ln/>
-        </p:spPr>
-        <p:txBody>
-          <a:bodyPr wrap="square" lIns="0" tIns="0" rIns="0" bIns="0" rtlCol="0" anchor="ctr"/>
-          <a:lstStyle/>
-          <a:p>
-            <a:pPr indent="0" marL="0">
-              <a:buNone/>
-            </a:pPr>
-            <a:r>
-              <a:rPr lang="en-US" sz="1000" b="1" dirty="0">
-                <a:solidFill>
-                  <a:srgbClr val="1A2744"/>
-                </a:solidFill>
-                <a:latin typeface="Arial" pitchFamily="34" charset="0"/>
-                <a:ea typeface="Arial" pitchFamily="34" charset="-122"/>
-                <a:cs typeface="Arial" pitchFamily="34" charset="-120"/>
-              </a:rPr>
-              <a:t>防音対策の強化</a:t>
-            </a:r>
-            <a:endParaRPr lang="en-US" sz="1000" dirty="0"/>
-          </a:p>
-        </p:txBody>
-      </p:sp>
-      <p:sp>
-        <p:nvSpPr>
-          <p:cNvPr id="11" name="Text 9"/>
-          <p:cNvSpPr/>
-          <p:nvPr/>
-        </p:nvSpPr>
-        <p:spPr>
-          <a:xfrm>
-            <a:off x="640080" y="2761488"/>
-            <a:ext cx="3474720" cy="694944"/>
-          </a:xfrm>
-          <a:prstGeom prst="rect">
-            <a:avLst/>
-          </a:prstGeom>
-          <a:noFill/>
-          <a:ln/>
-        </p:spPr>
-        <p:txBody>
-          <a:bodyPr wrap="square" lIns="0" tIns="0" rIns="0" bIns="0" rtlCol="0" anchor="ctr"/>
-          <a:lstStyle/>
-          <a:p>
-            <a:pPr marL="342900" indent="-342900">
-              <a:spcAft>
-                <a:spcPts val="200"/>
-              </a:spcAft>
-              <a:buSzPct val="100000"/>
-              <a:buChar char="•"/>
-            </a:pPr>
-            <a:r>
-              <a:rPr lang="en-US" sz="900" dirty="0">
-                <a:solidFill>
-                  <a:srgbClr val="64748B"/>
-                </a:solidFill>
-                <a:latin typeface="Arial" pitchFamily="34" charset="0"/>
-                <a:ea typeface="Arial" pitchFamily="34" charset="-122"/>
-                <a:cs typeface="Arial" pitchFamily="34" charset="-120"/>
-              </a:rPr>
-              <a:t>窓際への防音カーテン導入（外部騒音対策）</a:t>
-            </a:r>
-            <a:endParaRPr lang="en-US" sz="900" dirty="0"/>
-          </a:p>
-          <a:p>
-            <a:pPr marL="342900" indent="-342900">
-              <a:spcAft>
-                <a:spcPts val="200"/>
-              </a:spcAft>
-              <a:buSzPct val="100000"/>
-              <a:buChar char="•"/>
-            </a:pPr>
-            <a:r>
-              <a:rPr lang="en-US" sz="900" dirty="0">
-                <a:solidFill>
-                  <a:srgbClr val="64748B"/>
-                </a:solidFill>
-                <a:latin typeface="Arial" pitchFamily="34" charset="0"/>
-                <a:ea typeface="Arial" pitchFamily="34" charset="-122"/>
-                <a:cs typeface="Arial" pitchFamily="34" charset="-120"/>
-              </a:rPr>
-              <a:t>ドア下部への隙間テープ設置（廊下・隣室からの音漏れ軽減）</a:t>
-            </a:r>
-            <a:endParaRPr lang="en-US" sz="900" dirty="0"/>
-          </a:p>
-          <a:p>
-            <a:pPr marL="342900" indent="-342900">
-              <a:spcAft>
-                <a:spcPts val="200"/>
-              </a:spcAft>
-              <a:buSzPct val="100000"/>
-              <a:buChar char="•"/>
-            </a:pPr>
-            <a:r>
-              <a:rPr lang="en-US" sz="900" dirty="0">
-                <a:solidFill>
-                  <a:srgbClr val="64748B"/>
-                </a:solidFill>
-                <a:latin typeface="Arial" pitchFamily="34" charset="0"/>
-                <a:ea typeface="Arial" pitchFamily="34" charset="-122"/>
-                <a:cs typeface="Arial" pitchFamily="34" charset="-120"/>
-              </a:rPr>
-              <a:t>騒音の少ない客室への優先案内の仕組み化</a:t>
-            </a:r>
-            <a:endParaRPr lang="en-US" sz="900" dirty="0"/>
-          </a:p>
-        </p:txBody>
-      </p:sp>
-      <p:sp>
-        <p:nvSpPr>
-          <p:cNvPr id="12" name="Text 10"/>
-          <p:cNvSpPr/>
-          <p:nvPr/>
-        </p:nvSpPr>
-        <p:spPr>
-          <a:xfrm>
-            <a:off x="640080" y="3547872"/>
-            <a:ext cx="3474720" cy="274320"/>
-          </a:xfrm>
-          <a:prstGeom prst="rect">
-            <a:avLst/>
-          </a:prstGeom>
-          <a:noFill/>
-          <a:ln/>
-        </p:spPr>
-        <p:txBody>
-          <a:bodyPr wrap="square" lIns="0" tIns="0" rIns="0" bIns="0" rtlCol="0" anchor="ctr"/>
-          <a:lstStyle/>
-          <a:p>
-            <a:pPr indent="0" marL="0">
-              <a:buNone/>
-            </a:pPr>
-            <a:r>
-              <a:rPr lang="en-US" sz="1000" b="1" dirty="0">
-                <a:solidFill>
-                  <a:srgbClr val="1A2744"/>
-                </a:solidFill>
-                <a:latin typeface="Arial" pitchFamily="34" charset="0"/>
-                <a:ea typeface="Arial" pitchFamily="34" charset="-122"/>
-                <a:cs typeface="Arial" pitchFamily="34" charset="-120"/>
-              </a:rPr>
-              <a:t>窓・採光環境の改善</a:t>
-            </a:r>
-            <a:endParaRPr lang="en-US" sz="1000" dirty="0"/>
-          </a:p>
-        </p:txBody>
-      </p:sp>
-      <p:sp>
-        <p:nvSpPr>
-          <p:cNvPr id="13" name="Text 11"/>
-          <p:cNvSpPr/>
-          <p:nvPr/>
-        </p:nvSpPr>
-        <p:spPr>
-          <a:xfrm>
-            <a:off x="640080" y="3803904"/>
-            <a:ext cx="3474720" cy="694944"/>
-          </a:xfrm>
-          <a:prstGeom prst="rect">
-            <a:avLst/>
-          </a:prstGeom>
-          <a:noFill/>
-          <a:ln/>
-        </p:spPr>
-        <p:txBody>
-          <a:bodyPr wrap="square" lIns="0" tIns="0" rIns="0" bIns="0" rtlCol="0" anchor="ctr"/>
-          <a:lstStyle/>
-          <a:p>
-            <a:pPr marL="342900" indent="-342900">
-              <a:spcAft>
-                <a:spcPts val="200"/>
-              </a:spcAft>
-              <a:buSzPct val="100000"/>
-              <a:buChar char="•"/>
-            </a:pPr>
-            <a:r>
-              <a:rPr lang="en-US" sz="900" dirty="0">
-                <a:solidFill>
-                  <a:srgbClr val="64748B"/>
-                </a:solidFill>
-                <a:latin typeface="Arial" pitchFamily="34" charset="0"/>
-                <a:ea typeface="Arial" pitchFamily="34" charset="-122"/>
-                <a:cs typeface="Arial" pitchFamily="34" charset="-120"/>
-              </a:rPr>
-              <a:t>遮光カーテンとレースカーテンの品質見直し</a:t>
-            </a:r>
-            <a:endParaRPr lang="en-US" sz="900" dirty="0"/>
-          </a:p>
-          <a:p>
-            <a:pPr marL="342900" indent="-342900">
-              <a:spcAft>
-                <a:spcPts val="200"/>
-              </a:spcAft>
-              <a:buSzPct val="100000"/>
-              <a:buChar char="•"/>
-            </a:pPr>
-            <a:r>
-              <a:rPr lang="en-US" sz="900" dirty="0">
-                <a:solidFill>
-                  <a:srgbClr val="64748B"/>
-                </a:solidFill>
-                <a:latin typeface="Arial" pitchFamily="34" charset="0"/>
-                <a:ea typeface="Arial" pitchFamily="34" charset="-122"/>
-                <a:cs typeface="Arial" pitchFamily="34" charset="-120"/>
-              </a:rPr>
-              <a:t>窓の開閉可否に関する事前案内の徹底</a:t>
-            </a:r>
-            <a:endParaRPr lang="en-US" sz="900" dirty="0"/>
-          </a:p>
-          <a:p>
-            <a:pPr marL="342900" indent="-342900">
-              <a:spcAft>
-                <a:spcPts val="200"/>
-              </a:spcAft>
-              <a:buSzPct val="100000"/>
-              <a:buChar char="•"/>
-            </a:pPr>
-            <a:r>
-              <a:rPr lang="en-US" sz="900" dirty="0">
-                <a:solidFill>
-                  <a:srgbClr val="64748B"/>
-                </a:solidFill>
-                <a:latin typeface="Arial" pitchFamily="34" charset="0"/>
-                <a:ea typeface="Arial" pitchFamily="34" charset="-122"/>
-                <a:cs typeface="Arial" pitchFamily="34" charset="-120"/>
-              </a:rPr>
-              <a:t>採光の良い客室の優先割り当てルール整備</a:t>
-            </a:r>
-            <a:endParaRPr lang="en-US" sz="900" dirty="0"/>
-          </a:p>
-        </p:txBody>
-      </p:sp>
-      <p:sp>
-        <p:nvSpPr>
-          <p:cNvPr id="14" name="Shape 12"/>
+        </p:txBody>
+      </p:sp>
+      <p:sp>
+        <p:nvSpPr>
+          <p:cNvPr id="10" name="Shape 8"/>
           <p:cNvSpPr/>
           <p:nvPr/>
         </p:nvSpPr>
@@ -15859,7 +10322,7 @@
       </p:sp>
       <p:sp>
         <p:nvSpPr>
-          <p:cNvPr id="15" name="Shape 13"/>
+          <p:cNvPr id="11" name="Shape 9"/>
           <p:cNvSpPr/>
           <p:nvPr/>
         </p:nvSpPr>
@@ -15879,7 +10342,7 @@
       </p:sp>
       <p:sp>
         <p:nvSpPr>
-          <p:cNvPr id="16" name="Text 14"/>
+          <p:cNvPr id="12" name="Text 10"/>
           <p:cNvSpPr/>
           <p:nvPr/>
         </p:nvSpPr>
@@ -15918,7 +10381,7 @@
       </p:sp>
       <p:sp>
         <p:nvSpPr>
-          <p:cNvPr id="17" name="Text 15"/>
+          <p:cNvPr id="13" name="Text 11"/>
           <p:cNvSpPr/>
           <p:nvPr/>
         </p:nvSpPr>
@@ -15949,7 +10412,7 @@
                 <a:ea typeface="Arial" pitchFamily="34" charset="-122"/>
                 <a:cs typeface="Arial" pitchFamily="34" charset="-120"/>
               </a:rPr>
-              <a:t>客室リニューアル計画</a:t>
+              <a:t>客室設備のアップグレード</a:t>
             </a:r>
             <a:endParaRPr lang="en-US" sz="1000" dirty="0"/>
           </a:p>
@@ -15957,7 +10420,7 @@
       </p:sp>
       <p:sp>
         <p:nvSpPr>
-          <p:cNvPr id="18" name="Text 16"/>
+          <p:cNvPr id="14" name="Text 12"/>
           <p:cNvSpPr/>
           <p:nvPr/>
         </p:nvSpPr>
@@ -15992,7 +10455,7 @@
                 <a:ea typeface="Arial" pitchFamily="34" charset="-122"/>
                 <a:cs typeface="Arial" pitchFamily="34" charset="-120"/>
               </a:rPr>
-              <a:t>壁紙・カーペットの張替えによる「古さ」印象の払拭</a:t>
+              <a:t>内装の定期的なリフレッシュ計画の策定</a:t>
             </a:r>
             <a:endParaRPr lang="en-US" sz="900" dirty="0"/>
           </a:p>
@@ -16013,7 +10476,7 @@
                 <a:ea typeface="Arial" pitchFamily="34" charset="-122"/>
                 <a:cs typeface="Arial" pitchFamily="34" charset="-120"/>
               </a:rPr>
-              <a:t>照明のLED化・調光機能の追加で客室の雰囲気向上</a:t>
+              <a:t>照明・電源周りの設備更新</a:t>
             </a:r>
             <a:endParaRPr lang="en-US" sz="900" dirty="0"/>
           </a:p>
@@ -16034,7 +10497,7 @@
                 <a:ea typeface="Arial" pitchFamily="34" charset="-122"/>
                 <a:cs typeface="Arial" pitchFamily="34" charset="-120"/>
               </a:rPr>
-              <a:t>USB充電ポート付きコンセントの設置</a:t>
+              <a:t>快適性向上のための設備投資計画の立案</a:t>
             </a:r>
             <a:endParaRPr lang="en-US" sz="900" dirty="0"/>
           </a:p>
@@ -16042,7 +10505,7 @@
       </p:sp>
       <p:sp>
         <p:nvSpPr>
-          <p:cNvPr id="19" name="Text 17"/>
+          <p:cNvPr id="15" name="Text 13"/>
           <p:cNvSpPr/>
           <p:nvPr/>
         </p:nvSpPr>
@@ -16073,7 +10536,7 @@
                 <a:ea typeface="Arial" pitchFamily="34" charset="-122"/>
                 <a:cs typeface="Arial" pitchFamily="34" charset="-120"/>
               </a:rPr>
-              <a:t>浴室の抜本的改修</a:t>
+              <a:t>ブランド価値向上施策</a:t>
             </a:r>
             <a:endParaRPr lang="en-US" sz="1000" dirty="0"/>
           </a:p>
@@ -16081,14 +10544,14 @@
       </p:sp>
       <p:sp>
         <p:nvSpPr>
-          <p:cNvPr id="20" name="Text 18"/>
+          <p:cNvPr id="16" name="Text 14"/>
           <p:cNvSpPr/>
           <p:nvPr/>
         </p:nvSpPr>
         <p:spPr>
           <a:xfrm>
             <a:off x="4892040" y="2761488"/>
-            <a:ext cx="3474720" cy="493776"/>
+            <a:ext cx="3474720" cy="694944"/>
           </a:xfrm>
           <a:prstGeom prst="rect">
             <a:avLst/>
@@ -16116,7 +10579,7 @@
                 <a:ea typeface="Arial" pitchFamily="34" charset="-122"/>
                 <a:cs typeface="Arial" pitchFamily="34" charset="-120"/>
               </a:rPr>
-              <a:t>配管更新による排水問題の根本解決</a:t>
+              <a:t>ホテル独自のサービスコンセプトの策定</a:t>
             </a:r>
             <a:endParaRPr lang="en-US" sz="900" dirty="0"/>
           </a:p>
@@ -16137,71 +10600,10 @@
                 <a:ea typeface="Arial" pitchFamily="34" charset="-122"/>
                 <a:cs typeface="Arial" pitchFamily="34" charset="-120"/>
               </a:rPr>
-              <a:t>換気設備の強化による浴室内の温度・湿度改善</a:t>
+              <a:t>差別化ポイントを活かしたプロモーション強化</a:t>
             </a:r>
             <a:endParaRPr lang="en-US" sz="900" dirty="0"/>
           </a:p>
-        </p:txBody>
-      </p:sp>
-      <p:sp>
-        <p:nvSpPr>
-          <p:cNvPr id="21" name="Text 19"/>
-          <p:cNvSpPr/>
-          <p:nvPr/>
-        </p:nvSpPr>
-        <p:spPr>
-          <a:xfrm>
-            <a:off x="4892040" y="3346704"/>
-            <a:ext cx="3474720" cy="274320"/>
-          </a:xfrm>
-          <a:prstGeom prst="rect">
-            <a:avLst/>
-          </a:prstGeom>
-          <a:noFill/>
-          <a:ln/>
-        </p:spPr>
-        <p:txBody>
-          <a:bodyPr wrap="square" lIns="0" tIns="0" rIns="0" bIns="0" rtlCol="0" anchor="ctr"/>
-          <a:lstStyle/>
-          <a:p>
-            <a:pPr indent="0" marL="0">
-              <a:buNone/>
-            </a:pPr>
-            <a:r>
-              <a:rPr lang="en-US" sz="1000" b="1" dirty="0">
-                <a:solidFill>
-                  <a:srgbClr val="1A2744"/>
-                </a:solidFill>
-                <a:latin typeface="Arial" pitchFamily="34" charset="0"/>
-                <a:ea typeface="Arial" pitchFamily="34" charset="-122"/>
-                <a:cs typeface="Arial" pitchFamily="34" charset="-120"/>
-              </a:rPr>
-              <a:t>防音工事</a:t>
-            </a:r>
-            <a:endParaRPr lang="en-US" sz="1000" dirty="0"/>
-          </a:p>
-        </p:txBody>
-      </p:sp>
-      <p:sp>
-        <p:nvSpPr>
-          <p:cNvPr id="22" name="Text 20"/>
-          <p:cNvSpPr/>
-          <p:nvPr/>
-        </p:nvSpPr>
-        <p:spPr>
-          <a:xfrm>
-            <a:off x="4892040" y="3602736"/>
-            <a:ext cx="3474720" cy="493776"/>
-          </a:xfrm>
-          <a:prstGeom prst="rect">
-            <a:avLst/>
-          </a:prstGeom>
-          <a:noFill/>
-          <a:ln/>
-        </p:spPr>
-        <p:txBody>
-          <a:bodyPr wrap="square" lIns="0" tIns="0" rIns="0" bIns="0" rtlCol="0" anchor="ctr"/>
-          <a:lstStyle/>
           <a:p>
             <a:pPr marL="342900" indent="-342900">
               <a:spcAft>
@@ -16219,36 +10621,15 @@
                 <a:ea typeface="Arial" pitchFamily="34" charset="-122"/>
                 <a:cs typeface="Arial" pitchFamily="34" charset="-120"/>
               </a:rPr>
-              <a:t>騒音源側客室の窓を二重サッシに交換</a:t>
+              <a:t>リピーター向け特典プログラムの導入</a:t>
             </a:r>
             <a:endParaRPr lang="en-US" sz="900" dirty="0"/>
           </a:p>
-          <a:p>
-            <a:pPr marL="342900" indent="-342900">
-              <a:spcAft>
-                <a:spcPts val="200"/>
-              </a:spcAft>
-              <a:buSzPct val="100000"/>
-              <a:buChar char="•"/>
-            </a:pPr>
-            <a:r>
-              <a:rPr lang="en-US" sz="900" dirty="0">
-                <a:solidFill>
-                  <a:srgbClr val="64748B"/>
-                </a:solidFill>
-                <a:latin typeface="Arial" pitchFamily="34" charset="0"/>
-                <a:ea typeface="Arial" pitchFamily="34" charset="-122"/>
-                <a:cs typeface="Arial" pitchFamily="34" charset="-120"/>
-              </a:rPr>
-              <a:t>隣室との壁面に遮音材を追加する改修工事の検討</a:t>
-            </a:r>
-            <a:endParaRPr lang="en-US" sz="900" dirty="0"/>
-          </a:p>
-        </p:txBody>
-      </p:sp>
-      <p:sp>
-        <p:nvSpPr>
-          <p:cNvPr id="23" name="Shape 21"/>
+        </p:txBody>
+      </p:sp>
+      <p:sp>
+        <p:nvSpPr>
+          <p:cNvPr id="17" name="Shape 15"/>
           <p:cNvSpPr/>
           <p:nvPr/>
         </p:nvSpPr>
@@ -16268,7 +10649,7 @@
       </p:sp>
       <p:sp>
         <p:nvSpPr>
-          <p:cNvPr id="24" name="Text 22"/>
+          <p:cNvPr id="18" name="Text 16"/>
           <p:cNvSpPr/>
           <p:nvPr/>
         </p:nvSpPr>
@@ -16307,7 +10688,7 @@
       </p:sp>
       <p:sp>
         <p:nvSpPr>
-          <p:cNvPr id="25" name="Text 23"/>
+          <p:cNvPr id="19" name="Text 17"/>
           <p:cNvSpPr/>
           <p:nvPr/>
         </p:nvSpPr>

--- a/納品レポート/ホテル別レポート/court_shinyokohama_口コミ分析レポート.pptx
+++ b/納品レポート/ホテル別レポート/court_shinyokohama_口コミ分析レポート.pptx
@@ -124,6 +124,261 @@
     <c:autoTitleDeleted val="1"/>
     <c:plotArea>
       <c:layout/>
+      <c:barChart>
+        <c:barDir val="bar"/>
+        <c:grouping val="clustered"/>
+        <c:varyColors val="0"/>
+        <c:ser>
+          <c:idx val="0"/>
+          <c:order val="0"/>
+          <c:tx>
+            <c:strRef>
+              <c:f>Sheet1!$B$1</c:f>
+              <c:strCache>
+                <c:ptCount val="1"/>
+                <c:pt idx="0">
+                  <c:v>10pt換算平均</c:v>
+                </c:pt>
+              </c:strCache>
+            </c:strRef>
+          </c:tx>
+          <c:spPr>
+            <a:solidFill>
+              <a:srgbClr val="3B7DD8"/>
+            </a:solidFill>
+            <a:effectLst/>
+          </c:spPr>
+          <c:invertIfNegative val="0"/>
+          <c:dLbls>
+            <c:numFmt formatCode="#,##0" sourceLinked="0"/>
+            <c:txPr>
+              <a:bodyPr/>
+              <a:lstStyle/>
+              <a:p>
+                <a:pPr>
+                  <a:defRPr b="0" i="0" strike="noStrike" sz="1200" u="none">
+                    <a:solidFill>
+                      <a:srgbClr val="334155"/>
+                    </a:solidFill>
+                    <a:latin typeface="Arial"/>
+                  </a:defRPr>
+                </a:pPr>
+              </a:p>
+            </c:txPr>
+            <c:showLegendKey val="0"/>
+            <c:showVal val="1"/>
+            <c:showCatName val="0"/>
+            <c:showSerName val="0"/>
+            <c:showPercent val="0"/>
+            <c:showBubbleSize val="0"/>
+            <c:showLeaderLines val="0"/>
+          </c:dLbls>
+          <c:cat>
+            <c:multiLvlStrRef>
+              <c:f>Sheet1!$A$2:$A$6</c:f>
+              <c:multiLvlStrCache>
+                <c:ptCount val="5"/>
+                <c:lvl>
+                  <c:pt idx="0">
+                    <c:v>Google</c:v>
+                  </c:pt>
+                  <c:pt idx="1">
+                    <c:v>楽天トラベル</c:v>
+                  </c:pt>
+                  <c:pt idx="2">
+                    <c:v>じゃらん</c:v>
+                  </c:pt>
+                  <c:pt idx="3">
+                    <c:v>Booking.com</c:v>
+                  </c:pt>
+                  <c:pt idx="4">
+                    <c:v>Trip.com</c:v>
+                  </c:pt>
+                </c:lvl>
+              </c:multiLvlStrCache>
+            </c:multiLvlStrRef>
+          </c:cat>
+          <c:val>
+            <c:numRef>
+              <c:f>Sheet1!$B$2:$B$6</c:f>
+              <c:numCache>
+                <c:formatCode>General</c:formatCode>
+                <c:ptCount val="5"/>
+                <c:pt idx="0">
+                  <c:v>7.71</c:v>
+                </c:pt>
+                <c:pt idx="1">
+                  <c:v>7.67</c:v>
+                </c:pt>
+                <c:pt idx="2">
+                  <c:v>7.27</c:v>
+                </c:pt>
+                <c:pt idx="3">
+                  <c:v>7.03</c:v>
+                </c:pt>
+                <c:pt idx="4">
+                  <c:v>6.67</c:v>
+                </c:pt>
+              </c:numCache>
+            </c:numRef>
+          </c:val>
+        </c:ser>
+        <c:dLbls>
+          <c:numFmt formatCode="#,##0" sourceLinked="0"/>
+          <c:txPr>
+            <a:bodyPr/>
+            <a:lstStyle/>
+            <a:p>
+              <a:pPr>
+                <a:defRPr b="0" i="0" strike="noStrike" sz="1200" u="none">
+                  <a:solidFill>
+                    <a:srgbClr val="334155"/>
+                  </a:solidFill>
+                  <a:latin typeface="Arial"/>
+                </a:defRPr>
+              </a:pPr>
+            </a:p>
+          </c:txPr>
+          <c:showLegendKey val="0"/>
+          <c:showVal val="1"/>
+          <c:showCatName val="0"/>
+          <c:showSerName val="0"/>
+          <c:showPercent val="0"/>
+          <c:showBubbleSize val="0"/>
+          <c:showLeaderLines val="0"/>
+        </c:dLbls>
+        <c:gapWidth val="150"/>
+        <c:overlap val="0"/>
+        <c:axId val="2094734554"/>
+        <c:axId val="2094734552"/>
+        <c:axId val="2094734556"/>
+      </c:barChart>
+      <c:catAx>
+        <c:axId val="2094734554"/>
+        <c:scaling>
+          <c:orientation val="minMax"/>
+        </c:scaling>
+        <c:delete val="0"/>
+        <c:axPos val="l"/>
+        <c:numFmt formatCode="General" sourceLinked="1"/>
+        <c:majorTickMark val="out"/>
+        <c:minorTickMark val="none"/>
+        <c:tickLblPos val="nextTo"/>
+        <c:spPr>
+          <a:ln w="12700" cap="flat">
+            <a:solidFill>
+              <a:srgbClr val="888888"/>
+            </a:solidFill>
+            <a:prstDash val="solid"/>
+            <a:round/>
+          </a:ln>
+        </c:spPr>
+        <c:txPr>
+          <a:bodyPr/>
+          <a:lstStyle/>
+          <a:p>
+            <a:pPr>
+              <a:defRPr sz="1000" b="0" i="0" u="none" strike="noStrike">
+                <a:solidFill>
+                  <a:srgbClr val="334155"/>
+                </a:solidFill>
+                <a:latin typeface="Arial"/>
+              </a:defRPr>
+            </a:pPr>
+            <a:endParaRPr lang="en-US"/>
+          </a:p>
+        </c:txPr>
+        <c:crossAx val="2094734552"/>
+        <c:crosses val="autoZero"/>
+        <c:auto val="1"/>
+        <c:lblAlgn val="ctr"/>
+        <c:noMultiLvlLbl val="1"/>
+      </c:catAx>
+      <c:valAx>
+        <c:axId val="2094734552"/>
+        <c:scaling>
+          <c:orientation val="minMax"/>
+          <c:max val="10"/>
+        </c:scaling>
+        <c:delete val="0"/>
+        <c:axPos val="b"/>
+        <c:majorGridlines>
+          <c:spPr>
+            <a:ln w="6350" cap="flat">
+              <a:solidFill>
+                <a:srgbClr val="E2E8F0"/>
+              </a:solidFill>
+              <a:prstDash val="solid"/>
+              <a:round/>
+            </a:ln>
+          </c:spPr>
+        </c:majorGridlines>
+        <c:numFmt formatCode="General" sourceLinked="0"/>
+        <c:majorTickMark val="out"/>
+        <c:minorTickMark val="none"/>
+        <c:tickLblPos val="low"/>
+        <c:spPr>
+          <a:ln w="12700" cap="flat">
+            <a:solidFill>
+              <a:srgbClr val="888888"/>
+            </a:solidFill>
+            <a:prstDash val="solid"/>
+            <a:round/>
+          </a:ln>
+        </c:spPr>
+        <c:txPr>
+          <a:bodyPr/>
+          <a:lstStyle/>
+          <a:p>
+            <a:pPr>
+              <a:defRPr sz="900" b="0" i="0" u="none" strike="noStrike">
+                <a:solidFill>
+                  <a:srgbClr val="64748B"/>
+                </a:solidFill>
+                <a:latin typeface="Arial"/>
+              </a:defRPr>
+            </a:pPr>
+            <a:endParaRPr lang="en-US"/>
+          </a:p>
+        </c:txPr>
+        <c:crossAx val="2094734554"/>
+        <c:crosses val="autoZero"/>
+        <c:crossBetween val="between"/>
+      </c:valAx>
+      <c:spPr>
+        <a:noFill/>
+        <a:ln>
+          <a:noFill/>
+        </a:ln>
+        <a:effectLst/>
+      </c:spPr>
+    </c:plotArea>
+    <c:plotVisOnly val="1"/>
+    <c:dispBlanksAs val="span"/>
+  </c:chart>
+  <c:spPr>
+    <a:solidFill>
+      <a:srgbClr val="FFFFFF"/>
+    </a:solidFill>
+    <a:ln>
+      <a:noFill/>
+    </a:ln>
+    <a:effectLst/>
+  </c:spPr>
+  <c:externalData r:id="rId1">
+    <c:autoUpdate val="0"/>
+  </c:externalData>
+</c:chartSpace>
+</file>
+
+<file path=ppt/charts/chart2.xml><?xml version="1.0" encoding="utf-8"?>
+<c:chartSpace xmlns:c="http://schemas.openxmlformats.org/drawingml/2006/chart" xmlns:a="http://schemas.openxmlformats.org/drawingml/2006/main" xmlns:r="http://schemas.openxmlformats.org/officeDocument/2006/relationships">
+  <c:date1904 val="0"/>
+  <c:roundedCorners val="1"/>
+  <c:chart>
+    <c:autoTitleDeleted val="1"/>
+    <c:plotArea>
+      <c:layout/>
       <c:doughnutChart>
         <c:varyColors val="1"/>
         <c:ser>
@@ -305,13 +560,13 @@
               <c:numCache>
                 <c:ptCount val="3"/>
                 <c:pt idx="0">
-                  <c:v>0</c:v>
+                  <c:v>60</c:v>
                 </c:pt>
                 <c:pt idx="1">
-                  <c:v>0</c:v>
+                  <c:v>44</c:v>
                 </c:pt>
                 <c:pt idx="2">
-                  <c:v>0</c:v>
+                  <c:v>14</c:v>
                 </c:pt>
               </c:numCache>
             </c:numRef>
@@ -351,6 +606,383 @@
   </c:chart>
   <c:spPr>
     <a:noFill/>
+    <a:ln>
+      <a:noFill/>
+    </a:ln>
+    <a:effectLst/>
+  </c:spPr>
+  <c:externalData r:id="rId1">
+    <c:autoUpdate val="0"/>
+  </c:externalData>
+</c:chartSpace>
+</file>
+
+<file path=ppt/charts/chart3.xml><?xml version="1.0" encoding="utf-8"?>
+<c:chartSpace xmlns:c="http://schemas.openxmlformats.org/drawingml/2006/chart" xmlns:a="http://schemas.openxmlformats.org/drawingml/2006/main" xmlns:r="http://schemas.openxmlformats.org/officeDocument/2006/relationships">
+  <c:date1904 val="0"/>
+  <c:roundedCorners val="1"/>
+  <c:chart>
+    <c:autoTitleDeleted val="1"/>
+    <c:plotArea>
+      <c:layout/>
+      <c:barChart>
+        <c:barDir val="col"/>
+        <c:grouping val="clustered"/>
+        <c:varyColors val="0"/>
+        <c:ser>
+          <c:idx val="0"/>
+          <c:order val="0"/>
+          <c:tx>
+            <c:strRef>
+              <c:f>Sheet1!$B$1</c:f>
+              <c:strCache>
+                <c:ptCount val="1"/>
+                <c:pt idx="0">
+                  <c:v>件数</c:v>
+                </c:pt>
+              </c:strCache>
+            </c:strRef>
+          </c:tx>
+          <c:spPr>
+            <a:solidFill>
+              <a:srgbClr val="16A34A"/>
+            </a:solidFill>
+            <a:effectLst/>
+          </c:spPr>
+          <c:invertIfNegative val="0"/>
+          <c:dLbls>
+            <c:numFmt formatCode="#,##0" sourceLinked="0"/>
+            <c:txPr>
+              <a:bodyPr/>
+              <a:lstStyle/>
+              <a:p>
+                <a:pPr>
+                  <a:defRPr b="0" i="0" strike="noStrike" sz="900" u="none">
+                    <a:solidFill>
+                      <a:srgbClr val="334155"/>
+                    </a:solidFill>
+                    <a:latin typeface="Arial"/>
+                  </a:defRPr>
+                </a:pPr>
+              </a:p>
+            </c:txPr>
+            <c:showLegendKey val="0"/>
+            <c:showVal val="1"/>
+            <c:showCatName val="0"/>
+            <c:showSerName val="0"/>
+            <c:showPercent val="0"/>
+            <c:showBubbleSize val="0"/>
+            <c:showLeaderLines val="0"/>
+          </c:dLbls>
+          <c:dPt>
+            <c:idx val="0"/>
+            <c:invertIfNegative val="0"/>
+            <c:bubble3D val="0"/>
+            <c:spPr>
+              <a:solidFill>
+                <a:srgbClr val="16A34A"/>
+              </a:solidFill>
+              <a:effectLst/>
+            </c:spPr>
+          </c:dPt>
+          <c:dPt>
+            <c:idx val="1"/>
+            <c:invertIfNegative val="0"/>
+            <c:bubble3D val="0"/>
+            <c:spPr>
+              <a:solidFill>
+                <a:srgbClr val="16A34A"/>
+              </a:solidFill>
+              <a:effectLst/>
+            </c:spPr>
+          </c:dPt>
+          <c:dPt>
+            <c:idx val="2"/>
+            <c:invertIfNegative val="0"/>
+            <c:bubble3D val="0"/>
+            <c:spPr>
+              <a:solidFill>
+                <a:srgbClr val="16A34A"/>
+              </a:solidFill>
+              <a:effectLst/>
+            </c:spPr>
+          </c:dPt>
+          <c:dPt>
+            <c:idx val="3"/>
+            <c:invertIfNegative val="0"/>
+            <c:bubble3D val="0"/>
+            <c:spPr>
+              <a:solidFill>
+                <a:srgbClr val="D4A843"/>
+              </a:solidFill>
+              <a:effectLst/>
+            </c:spPr>
+          </c:dPt>
+          <c:dPt>
+            <c:idx val="4"/>
+            <c:invertIfNegative val="0"/>
+            <c:bubble3D val="0"/>
+            <c:spPr>
+              <a:solidFill>
+                <a:srgbClr val="D4A843"/>
+              </a:solidFill>
+              <a:effectLst/>
+            </c:spPr>
+          </c:dPt>
+          <c:dPt>
+            <c:idx val="5"/>
+            <c:invertIfNegative val="0"/>
+            <c:bubble3D val="0"/>
+            <c:spPr>
+              <a:solidFill>
+                <a:srgbClr val="D4A843"/>
+              </a:solidFill>
+              <a:effectLst/>
+            </c:spPr>
+          </c:dPt>
+          <c:dPt>
+            <c:idx val="6"/>
+            <c:invertIfNegative val="0"/>
+            <c:bubble3D val="0"/>
+            <c:spPr>
+              <a:solidFill>
+                <a:srgbClr val="DC2626"/>
+              </a:solidFill>
+              <a:effectLst/>
+            </c:spPr>
+          </c:dPt>
+          <c:dPt>
+            <c:idx val="7"/>
+            <c:invertIfNegative val="0"/>
+            <c:bubble3D val="0"/>
+            <c:spPr>
+              <a:solidFill>
+                <a:srgbClr val="DC2626"/>
+              </a:solidFill>
+              <a:effectLst/>
+            </c:spPr>
+          </c:dPt>
+          <c:dPt>
+            <c:idx val="8"/>
+            <c:invertIfNegative val="0"/>
+            <c:bubble3D val="0"/>
+            <c:spPr>
+              <a:solidFill>
+                <a:srgbClr val="DC2626"/>
+              </a:solidFill>
+              <a:effectLst/>
+            </c:spPr>
+          </c:dPt>
+          <c:cat>
+            <c:multiLvlStrRef>
+              <c:f>Sheet1!$A$2:$A$10</c:f>
+              <c:multiLvlStrCache>
+                <c:ptCount val="9"/>
+                <c:lvl>
+                  <c:pt idx="0">
+                    <c:v>10点</c:v>
+                  </c:pt>
+                  <c:pt idx="1">
+                    <c:v>9点</c:v>
+                  </c:pt>
+                  <c:pt idx="2">
+                    <c:v>8点</c:v>
+                  </c:pt>
+                  <c:pt idx="3">
+                    <c:v>7点</c:v>
+                  </c:pt>
+                  <c:pt idx="4">
+                    <c:v>6点</c:v>
+                  </c:pt>
+                  <c:pt idx="5">
+                    <c:v>5点</c:v>
+                  </c:pt>
+                  <c:pt idx="6">
+                    <c:v>4点</c:v>
+                  </c:pt>
+                  <c:pt idx="7">
+                    <c:v>3点</c:v>
+                  </c:pt>
+                  <c:pt idx="8">
+                    <c:v>2点</c:v>
+                  </c:pt>
+                </c:lvl>
+              </c:multiLvlStrCache>
+            </c:multiLvlStrRef>
+          </c:cat>
+          <c:val>
+            <c:numRef>
+              <c:f>Sheet1!$B$2:$B$10</c:f>
+              <c:numCache>
+                <c:formatCode>General</c:formatCode>
+                <c:ptCount val="9"/>
+                <c:pt idx="0">
+                  <c:v>16</c:v>
+                </c:pt>
+                <c:pt idx="1">
+                  <c:v>10</c:v>
+                </c:pt>
+                <c:pt idx="2">
+                  <c:v>34</c:v>
+                </c:pt>
+                <c:pt idx="3">
+                  <c:v>18</c:v>
+                </c:pt>
+                <c:pt idx="4">
+                  <c:v>15</c:v>
+                </c:pt>
+                <c:pt idx="5">
+                  <c:v>11</c:v>
+                </c:pt>
+                <c:pt idx="6">
+                  <c:v>8</c:v>
+                </c:pt>
+                <c:pt idx="7">
+                  <c:v>3</c:v>
+                </c:pt>
+                <c:pt idx="8">
+                  <c:v>3</c:v>
+                </c:pt>
+              </c:numCache>
+            </c:numRef>
+          </c:val>
+        </c:ser>
+        <c:dLbls>
+          <c:numFmt formatCode="#,##0" sourceLinked="0"/>
+          <c:txPr>
+            <a:bodyPr/>
+            <a:lstStyle/>
+            <a:p>
+              <a:pPr>
+                <a:defRPr b="0" i="0" strike="noStrike" sz="900" u="none">
+                  <a:solidFill>
+                    <a:srgbClr val="334155"/>
+                  </a:solidFill>
+                  <a:latin typeface="Arial"/>
+                </a:defRPr>
+              </a:pPr>
+            </a:p>
+          </c:txPr>
+          <c:showLegendKey val="0"/>
+          <c:showVal val="1"/>
+          <c:showCatName val="0"/>
+          <c:showSerName val="0"/>
+          <c:showPercent val="0"/>
+          <c:showBubbleSize val="0"/>
+          <c:showLeaderLines val="0"/>
+        </c:dLbls>
+        <c:gapWidth val="150"/>
+        <c:overlap val="0"/>
+        <c:axId val="2094734554"/>
+        <c:axId val="2094734552"/>
+        <c:axId val="2094734556"/>
+      </c:barChart>
+      <c:catAx>
+        <c:axId val="2094734554"/>
+        <c:scaling>
+          <c:orientation val="minMax"/>
+        </c:scaling>
+        <c:delete val="0"/>
+        <c:axPos val="b"/>
+        <c:numFmt formatCode="General" sourceLinked="1"/>
+        <c:majorTickMark val="out"/>
+        <c:minorTickMark val="none"/>
+        <c:tickLblPos val="low"/>
+        <c:spPr>
+          <a:ln w="12700" cap="flat">
+            <a:solidFill>
+              <a:srgbClr val="888888"/>
+            </a:solidFill>
+            <a:prstDash val="solid"/>
+            <a:round/>
+          </a:ln>
+        </c:spPr>
+        <c:txPr>
+          <a:bodyPr/>
+          <a:lstStyle/>
+          <a:p>
+            <a:pPr>
+              <a:defRPr sz="900" b="0" i="0" u="none" strike="noStrike">
+                <a:solidFill>
+                  <a:srgbClr val="334155"/>
+                </a:solidFill>
+                <a:latin typeface="Arial"/>
+              </a:defRPr>
+            </a:pPr>
+            <a:endParaRPr lang="en-US"/>
+          </a:p>
+        </c:txPr>
+        <c:crossAx val="2094734552"/>
+        <c:crosses val="autoZero"/>
+        <c:auto val="1"/>
+        <c:lblAlgn val="ctr"/>
+        <c:noMultiLvlLbl val="1"/>
+      </c:catAx>
+      <c:valAx>
+        <c:axId val="2094734552"/>
+        <c:scaling>
+          <c:orientation val="minMax"/>
+        </c:scaling>
+        <c:delete val="0"/>
+        <c:axPos val="l"/>
+        <c:majorGridlines>
+          <c:spPr>
+            <a:ln w="6350" cap="flat">
+              <a:solidFill>
+                <a:srgbClr val="E2E8F0"/>
+              </a:solidFill>
+              <a:prstDash val="solid"/>
+              <a:round/>
+            </a:ln>
+          </c:spPr>
+        </c:majorGridlines>
+        <c:numFmt formatCode="General" sourceLinked="0"/>
+        <c:majorTickMark val="out"/>
+        <c:minorTickMark val="none"/>
+        <c:tickLblPos val="nextTo"/>
+        <c:spPr>
+          <a:ln w="12700" cap="flat">
+            <a:solidFill>
+              <a:srgbClr val="888888"/>
+            </a:solidFill>
+            <a:prstDash val="solid"/>
+            <a:round/>
+          </a:ln>
+        </c:spPr>
+        <c:txPr>
+          <a:bodyPr/>
+          <a:lstStyle/>
+          <a:p>
+            <a:pPr>
+              <a:defRPr sz="800" b="0" i="0" u="none" strike="noStrike">
+                <a:solidFill>
+                  <a:srgbClr val="64748B"/>
+                </a:solidFill>
+                <a:latin typeface="Arial"/>
+              </a:defRPr>
+            </a:pPr>
+            <a:endParaRPr lang="en-US"/>
+          </a:p>
+        </c:txPr>
+        <c:crossAx val="2094734554"/>
+        <c:crosses val="autoZero"/>
+        <c:crossBetween val="between"/>
+      </c:valAx>
+      <c:spPr>
+        <a:noFill/>
+        <a:ln>
+          <a:noFill/>
+        </a:ln>
+        <a:effectLst/>
+      </c:spPr>
+    </c:plotArea>
+    <c:plotVisOnly val="1"/>
+    <c:dispBlanksAs val="span"/>
+  </c:chart>
+  <c:spPr>
+    <a:solidFill>
+      <a:srgbClr val="FFFFFF"/>
+    </a:solidFill>
     <a:ln>
       <a:noFill/>
     </a:ln>
@@ -2140,7 +2772,7 @@
                 <a:ea typeface="Arial" pitchFamily="34" charset="-122"/>
                 <a:cs typeface="Arial" pitchFamily="34" charset="-120"/>
               </a:rPr>
-              <a:t>分析対象期間：2026年</a:t>
+              <a:t>分析対象期間：2026年1月〜2月</a:t>
             </a:r>
             <a:endParaRPr lang="en-US" sz="1000" dirty="0"/>
           </a:p>
@@ -2160,7 +2792,7 @@
                 <a:ea typeface="Arial" pitchFamily="34" charset="-122"/>
                 <a:cs typeface="Arial" pitchFamily="34" charset="-120"/>
               </a:rPr>
-              <a:t>レビュー総数：0件（0サイト）</a:t>
+              <a:t>レビュー総数：118件（5サイト）</a:t>
             </a:r>
             <a:endParaRPr lang="en-US" sz="1000" dirty="0"/>
           </a:p>
@@ -2726,7 +3358,7 @@
                           <a:ea typeface="Arial" pitchFamily="34" charset="-122"/>
                           <a:cs typeface="Arial" pitchFamily="34" charset="-120"/>
                         </a:rPr>
-                        <a:t>0.00点</a:t>
+                        <a:t>7.12点</a:t>
                       </a:r>
                       <a:endParaRPr lang="en-US" sz="1000" dirty="0">
                         <a:latin typeface="Arial" charset="0"/>
@@ -2794,7 +3426,7 @@
                           <a:ea typeface="Arial" pitchFamily="34" charset="-122"/>
                           <a:cs typeface="Arial" pitchFamily="34" charset="-120"/>
                         </a:rPr>
-                        <a:t>0.5点以上</a:t>
+                        <a:t>7.6点以上</a:t>
                       </a:r>
                       <a:endParaRPr lang="en-US" sz="1000" dirty="0">
                         <a:latin typeface="Arial" charset="0"/>
@@ -3000,7 +3632,7 @@
                           <a:ea typeface="Arial" pitchFamily="34" charset="-122"/>
                           <a:cs typeface="Arial" pitchFamily="34" charset="-120"/>
                         </a:rPr>
-                        <a:t>0.0%</a:t>
+                        <a:t>50.8%</a:t>
                       </a:r>
                       <a:endParaRPr lang="en-US" sz="1000" dirty="0">
                         <a:latin typeface="Arial" charset="0"/>
@@ -3068,7 +3700,7 @@
                           <a:ea typeface="Arial" pitchFamily="34" charset="-122"/>
                           <a:cs typeface="Arial" pitchFamily="34" charset="-120"/>
                         </a:rPr>
-                        <a:t>10%以上</a:t>
+                        <a:t>61%以上</a:t>
                       </a:r>
                       <a:endParaRPr lang="en-US" sz="1000" dirty="0">
                         <a:latin typeface="Arial" charset="0"/>
@@ -3274,7 +3906,7 @@
                           <a:ea typeface="Arial" pitchFamily="34" charset="-122"/>
                           <a:cs typeface="Arial" pitchFamily="34" charset="-120"/>
                         </a:rPr>
-                        <a:t>0.0%</a:t>
+                        <a:t>11.9%</a:t>
                       </a:r>
                       <a:endParaRPr lang="en-US" sz="1000" dirty="0">
                         <a:latin typeface="Arial" charset="0"/>
@@ -3342,7 +3974,7 @@
                           <a:ea typeface="Arial" pitchFamily="34" charset="-122"/>
                           <a:cs typeface="Arial" pitchFamily="34" charset="-120"/>
                         </a:rPr>
-                        <a:t>0%維持</a:t>
+                        <a:t>7%以下</a:t>
                       </a:r>
                       <a:endParaRPr lang="en-US" sz="1000" dirty="0">
                         <a:latin typeface="Arial" charset="0"/>
@@ -3736,6 +4368,280 @@
                   </a:tcPr>
                 </a:tc>
               </a:tr>
+              <a:tr h="320040">
+                <a:tc>
+                  <a:txBody>
+                    <a:bodyPr/>
+                    <a:lstStyle/>
+                    <a:p>
+                      <a:pPr indent="0" marL="0">
+                        <a:buNone/>
+                      </a:pPr>
+                      <a:r>
+                        <a:rPr lang="en-US" sz="1000" b="1" dirty="0">
+                          <a:solidFill>
+                            <a:srgbClr val="334155"/>
+                          </a:solidFill>
+                          <a:latin typeface="Arial" pitchFamily="34" charset="0"/>
+                          <a:ea typeface="Arial" pitchFamily="34" charset="-122"/>
+                          <a:cs typeface="Arial" pitchFamily="34" charset="-120"/>
+                        </a:rPr>
+                        <a:t>浴室・水回りクレーム</a:t>
+                      </a:r>
+                      <a:endParaRPr lang="en-US" sz="1000" dirty="0">
+                        <a:latin typeface="Arial" charset="0"/>
+                        <a:ea typeface="Arial" charset="0"/>
+                        <a:cs typeface="Arial" charset="0"/>
+                      </a:endParaRPr>
+                    </a:p>
+                  </a:txBody>
+                  <a:tcPr marL="91440" marR="91440" marT="45720" marB="45720">
+                    <a:lnL w="6350" cap="flat" cmpd="sng" algn="ctr">
+                      <a:solidFill>
+                        <a:srgbClr val="CBD5E1"/>
+                      </a:solidFill>
+                      <a:prstDash val="solid"/>
+                      <a:round/>
+                      <a:headEnd type="none" w="med" len="med"/>
+                      <a:tailEnd type="none" w="med" len="med"/>
+                    </a:lnL>
+                    <a:lnR w="6350" cap="flat" cmpd="sng" algn="ctr">
+                      <a:solidFill>
+                        <a:srgbClr val="CBD5E1"/>
+                      </a:solidFill>
+                      <a:prstDash val="solid"/>
+                      <a:round/>
+                      <a:headEnd type="none" w="med" len="med"/>
+                      <a:tailEnd type="none" w="med" len="med"/>
+                    </a:lnR>
+                    <a:lnT w="6350" cap="flat" cmpd="sng" algn="ctr">
+                      <a:solidFill>
+                        <a:srgbClr val="CBD5E1"/>
+                      </a:solidFill>
+                      <a:prstDash val="solid"/>
+                      <a:round/>
+                      <a:headEnd type="none" w="med" len="med"/>
+                      <a:tailEnd type="none" w="med" len="med"/>
+                    </a:lnT>
+                    <a:lnB w="6350" cap="flat" cmpd="sng" algn="ctr">
+                      <a:solidFill>
+                        <a:srgbClr val="CBD5E1"/>
+                      </a:solidFill>
+                      <a:prstDash val="solid"/>
+                      <a:round/>
+                      <a:headEnd type="none" w="med" len="med"/>
+                      <a:tailEnd type="none" w="med" len="med"/>
+                    </a:lnB>
+                    <a:solidFill>
+                      <a:srgbClr val="E8EFF8"/>
+                    </a:solidFill>
+                  </a:tcPr>
+                </a:tc>
+                <a:tc>
+                  <a:txBody>
+                    <a:bodyPr/>
+                    <a:lstStyle/>
+                    <a:p>
+                      <a:pPr algn="ctr" indent="0" marL="0">
+                        <a:buNone/>
+                      </a:pPr>
+                      <a:r>
+                        <a:rPr lang="en-US" sz="1000" dirty="0">
+                          <a:solidFill>
+                            <a:srgbClr val="64748B"/>
+                          </a:solidFill>
+                          <a:latin typeface="Arial" pitchFamily="34" charset="0"/>
+                          <a:ea typeface="Arial" pitchFamily="34" charset="-122"/>
+                          <a:cs typeface="Arial" pitchFamily="34" charset="-120"/>
+                        </a:rPr>
+                        <a:t>約16件/期間</a:t>
+                      </a:r>
+                      <a:endParaRPr lang="en-US" sz="1000" dirty="0">
+                        <a:latin typeface="Arial" charset="0"/>
+                        <a:ea typeface="Arial" charset="0"/>
+                        <a:cs typeface="Arial" charset="0"/>
+                      </a:endParaRPr>
+                    </a:p>
+                  </a:txBody>
+                  <a:tcPr marL="91440" marR="91440" marT="45720" marB="45720">
+                    <a:lnL w="6350" cap="flat" cmpd="sng" algn="ctr">
+                      <a:solidFill>
+                        <a:srgbClr val="CBD5E1"/>
+                      </a:solidFill>
+                      <a:prstDash val="solid"/>
+                      <a:round/>
+                      <a:headEnd type="none" w="med" len="med"/>
+                      <a:tailEnd type="none" w="med" len="med"/>
+                    </a:lnL>
+                    <a:lnR w="6350" cap="flat" cmpd="sng" algn="ctr">
+                      <a:solidFill>
+                        <a:srgbClr val="CBD5E1"/>
+                      </a:solidFill>
+                      <a:prstDash val="solid"/>
+                      <a:round/>
+                      <a:headEnd type="none" w="med" len="med"/>
+                      <a:tailEnd type="none" w="med" len="med"/>
+                    </a:lnR>
+                    <a:lnT w="6350" cap="flat" cmpd="sng" algn="ctr">
+                      <a:solidFill>
+                        <a:srgbClr val="CBD5E1"/>
+                      </a:solidFill>
+                      <a:prstDash val="solid"/>
+                      <a:round/>
+                      <a:headEnd type="none" w="med" len="med"/>
+                      <a:tailEnd type="none" w="med" len="med"/>
+                    </a:lnT>
+                    <a:lnB w="6350" cap="flat" cmpd="sng" algn="ctr">
+                      <a:solidFill>
+                        <a:srgbClr val="CBD5E1"/>
+                      </a:solidFill>
+                      <a:prstDash val="solid"/>
+                      <a:round/>
+                      <a:headEnd type="none" w="med" len="med"/>
+                      <a:tailEnd type="none" w="med" len="med"/>
+                    </a:lnB>
+                    <a:solidFill>
+                      <a:srgbClr val="E8EFF8"/>
+                    </a:solidFill>
+                  </a:tcPr>
+                </a:tc>
+                <a:tc>
+                  <a:txBody>
+                    <a:bodyPr/>
+                    <a:lstStyle/>
+                    <a:p>
+                      <a:pPr algn="ctr" indent="0" marL="0">
+                        <a:buNone/>
+                      </a:pPr>
+                      <a:r>
+                        <a:rPr lang="en-US" sz="1000" b="1" dirty="0">
+                          <a:solidFill>
+                            <a:srgbClr val="16A34A"/>
+                          </a:solidFill>
+                          <a:latin typeface="Arial" pitchFamily="34" charset="0"/>
+                          <a:ea typeface="Arial" pitchFamily="34" charset="-122"/>
+                          <a:cs typeface="Arial" pitchFamily="34" charset="-120"/>
+                        </a:rPr>
+                        <a:t>8件以下</a:t>
+                      </a:r>
+                      <a:endParaRPr lang="en-US" sz="1000" dirty="0">
+                        <a:latin typeface="Arial" charset="0"/>
+                        <a:ea typeface="Arial" charset="0"/>
+                        <a:cs typeface="Arial" charset="0"/>
+                      </a:endParaRPr>
+                    </a:p>
+                  </a:txBody>
+                  <a:tcPr marL="91440" marR="91440" marT="45720" marB="45720">
+                    <a:lnL w="6350" cap="flat" cmpd="sng" algn="ctr">
+                      <a:solidFill>
+                        <a:srgbClr val="CBD5E1"/>
+                      </a:solidFill>
+                      <a:prstDash val="solid"/>
+                      <a:round/>
+                      <a:headEnd type="none" w="med" len="med"/>
+                      <a:tailEnd type="none" w="med" len="med"/>
+                    </a:lnL>
+                    <a:lnR w="6350" cap="flat" cmpd="sng" algn="ctr">
+                      <a:solidFill>
+                        <a:srgbClr val="CBD5E1"/>
+                      </a:solidFill>
+                      <a:prstDash val="solid"/>
+                      <a:round/>
+                      <a:headEnd type="none" w="med" len="med"/>
+                      <a:tailEnd type="none" w="med" len="med"/>
+                    </a:lnR>
+                    <a:lnT w="6350" cap="flat" cmpd="sng" algn="ctr">
+                      <a:solidFill>
+                        <a:srgbClr val="CBD5E1"/>
+                      </a:solidFill>
+                      <a:prstDash val="solid"/>
+                      <a:round/>
+                      <a:headEnd type="none" w="med" len="med"/>
+                      <a:tailEnd type="none" w="med" len="med"/>
+                    </a:lnT>
+                    <a:lnB w="6350" cap="flat" cmpd="sng" algn="ctr">
+                      <a:solidFill>
+                        <a:srgbClr val="CBD5E1"/>
+                      </a:solidFill>
+                      <a:prstDash val="solid"/>
+                      <a:round/>
+                      <a:headEnd type="none" w="med" len="med"/>
+                      <a:tailEnd type="none" w="med" len="med"/>
+                    </a:lnB>
+                    <a:solidFill>
+                      <a:srgbClr val="E8EFF8"/>
+                    </a:solidFill>
+                  </a:tcPr>
+                </a:tc>
+                <a:tc>
+                  <a:txBody>
+                    <a:bodyPr/>
+                    <a:lstStyle/>
+                    <a:p>
+                      <a:pPr algn="ctr" indent="0" marL="0">
+                        <a:buNone/>
+                      </a:pPr>
+                      <a:r>
+                        <a:rPr lang="en-US" sz="1000" dirty="0">
+                          <a:solidFill>
+                            <a:srgbClr val="64748B"/>
+                          </a:solidFill>
+                          <a:latin typeface="Arial" pitchFamily="34" charset="0"/>
+                          <a:ea typeface="Arial" pitchFamily="34" charset="-122"/>
+                          <a:cs typeface="Arial" pitchFamily="34" charset="-120"/>
+                        </a:rPr>
+                        <a:t>2026年9月</a:t>
+                      </a:r>
+                      <a:endParaRPr lang="en-US" sz="1000" dirty="0">
+                        <a:latin typeface="Arial" charset="0"/>
+                        <a:ea typeface="Arial" charset="0"/>
+                        <a:cs typeface="Arial" charset="0"/>
+                      </a:endParaRPr>
+                    </a:p>
+                  </a:txBody>
+                  <a:tcPr marL="91440" marR="91440" marT="45720" marB="45720">
+                    <a:lnL w="6350" cap="flat" cmpd="sng" algn="ctr">
+                      <a:solidFill>
+                        <a:srgbClr val="CBD5E1"/>
+                      </a:solidFill>
+                      <a:prstDash val="solid"/>
+                      <a:round/>
+                      <a:headEnd type="none" w="med" len="med"/>
+                      <a:tailEnd type="none" w="med" len="med"/>
+                    </a:lnL>
+                    <a:lnR w="6350" cap="flat" cmpd="sng" algn="ctr">
+                      <a:solidFill>
+                        <a:srgbClr val="CBD5E1"/>
+                      </a:solidFill>
+                      <a:prstDash val="solid"/>
+                      <a:round/>
+                      <a:headEnd type="none" w="med" len="med"/>
+                      <a:tailEnd type="none" w="med" len="med"/>
+                    </a:lnR>
+                    <a:lnT w="6350" cap="flat" cmpd="sng" algn="ctr">
+                      <a:solidFill>
+                        <a:srgbClr val="CBD5E1"/>
+                      </a:solidFill>
+                      <a:prstDash val="solid"/>
+                      <a:round/>
+                      <a:headEnd type="none" w="med" len="med"/>
+                      <a:tailEnd type="none" w="med" len="med"/>
+                    </a:lnT>
+                    <a:lnB w="6350" cap="flat" cmpd="sng" algn="ctr">
+                      <a:solidFill>
+                        <a:srgbClr val="CBD5E1"/>
+                      </a:solidFill>
+                      <a:prstDash val="solid"/>
+                      <a:round/>
+                      <a:headEnd type="none" w="med" len="med"/>
+                      <a:tailEnd type="none" w="med" len="med"/>
+                    </a:lnB>
+                    <a:solidFill>
+                      <a:srgbClr val="E8EFF8"/>
+                    </a:solidFill>
+                  </a:tcPr>
+                </a:tc>
+              </a:tr>
             </a:tbl>
           </a:graphicData>
         </a:graphic>
@@ -3748,7 +4654,7 @@
         </p:nvSpPr>
         <p:spPr>
           <a:xfrm>
-            <a:off x="457200" y="2788920"/>
+            <a:off x="457200" y="3108960"/>
             <a:ext cx="8229600" cy="640080"/>
           </a:xfrm>
           <a:prstGeom prst="rect">
@@ -3775,7 +4681,7 @@
         </p:nvSpPr>
         <p:spPr>
           <a:xfrm>
-            <a:off x="457200" y="2788920"/>
+            <a:off x="457200" y="3108960"/>
             <a:ext cx="54864" cy="640080"/>
           </a:xfrm>
           <a:prstGeom prst="rect">
@@ -3795,7 +4701,7 @@
         </p:nvSpPr>
         <p:spPr>
           <a:xfrm>
-            <a:off x="640080" y="2788920"/>
+            <a:off x="640080" y="3108960"/>
             <a:ext cx="7863840" cy="640080"/>
           </a:xfrm>
           <a:prstGeom prst="rect">
@@ -4187,7 +5093,7 @@
                 <a:ea typeface="Arial" pitchFamily="34" charset="-122"/>
                 <a:cs typeface="Arial" pitchFamily="34" charset="-120"/>
               </a:rPr>
-              <a:t>0.00</a:t>
+              <a:t>7.12</a:t>
             </a:r>
             <a:endParaRPr lang="en-US" sz="3200" dirty="0"/>
           </a:p>
@@ -4312,7 +5218,7 @@
                 <a:ea typeface="Arial" pitchFamily="34" charset="-122"/>
                 <a:cs typeface="Arial" pitchFamily="34" charset="-120"/>
               </a:rPr>
-              <a:t>0.0%</a:t>
+              <a:t>50.8%</a:t>
             </a:r>
             <a:endParaRPr lang="en-US" sz="3200" dirty="0"/>
           </a:p>
@@ -4360,7 +5266,7 @@
             <a:avLst/>
           </a:prstGeom>
           <a:solidFill>
-            <a:srgbClr val="16A34A"/>
+            <a:srgbClr val="DC2626"/>
           </a:solidFill>
           <a:ln/>
         </p:spPr>
@@ -4431,13 +5337,13 @@
             <a:r>
               <a:rPr lang="en-US" sz="3200" b="1" dirty="0">
                 <a:solidFill>
-                  <a:srgbClr val="16A34A"/>
+                  <a:srgbClr val="DC2626"/>
                 </a:solidFill>
                 <a:latin typeface="Arial" pitchFamily="34" charset="0"/>
                 <a:ea typeface="Arial" pitchFamily="34" charset="-122"/>
                 <a:cs typeface="Arial" pitchFamily="34" charset="-120"/>
               </a:rPr>
-              <a:t>0.0%</a:t>
+              <a:t>11.9%</a:t>
             </a:r>
             <a:endParaRPr lang="en-US" sz="3200" dirty="0"/>
           </a:p>
@@ -4562,7 +5468,7 @@
                 <a:ea typeface="Arial" pitchFamily="34" charset="-122"/>
                 <a:cs typeface="Arial" pitchFamily="34" charset="-120"/>
               </a:rPr>
-              <a:t>0件</a:t>
+              <a:t>118件</a:t>
             </a:r>
             <a:endParaRPr lang="en-US" sz="3200" dirty="0"/>
           </a:p>
@@ -4690,7 +5596,7 @@
                 <a:ea typeface="Arial" pitchFamily="34" charset="-122"/>
                 <a:cs typeface="Arial" pitchFamily="34" charset="-120"/>
               </a:rPr>
-              <a:t>全体的な満足度 </a:t>
+              <a:t>立地・アクセス </a:t>
             </a:r>
             <a:endParaRPr lang="en-US" sz="1100" dirty="0"/>
           </a:p>
@@ -4710,7 +5616,7 @@
                 <a:ea typeface="Arial" pitchFamily="34" charset="-122"/>
                 <a:cs typeface="Arial" pitchFamily="34" charset="-120"/>
               </a:rPr>
-              <a:t>  ゲストから概ね好意的な評価を受けています</a:t>
+              <a:t>  駅から近いので便利 エアコンが暖房のみだった</a:t>
             </a:r>
             <a:endParaRPr lang="en-US" sz="1100" dirty="0"/>
           </a:p>
@@ -4730,7 +5636,7 @@
                 <a:ea typeface="Arial" pitchFamily="34" charset="-122"/>
                 <a:cs typeface="Arial" pitchFamily="34" charset="-120"/>
               </a:rPr>
-              <a:t>全体的な満足度 </a:t>
+              <a:t>スタッフの対応 </a:t>
             </a:r>
             <a:endParaRPr lang="en-US" sz="1100" dirty="0"/>
           </a:p>
@@ -4750,7 +5656,7 @@
                 <a:ea typeface="Arial" pitchFamily="34" charset="-122"/>
                 <a:cs typeface="Arial" pitchFamily="34" charset="-120"/>
               </a:rPr>
-              <a:t>  ゲストから概ね好意的な評価を受けています</a:t>
+              <a:t>  スタッフも感じが良い</a:t>
             </a:r>
             <a:endParaRPr lang="en-US" sz="1100" dirty="0"/>
           </a:p>
@@ -4770,7 +5676,7 @@
                 <a:ea typeface="Arial" pitchFamily="34" charset="-122"/>
                 <a:cs typeface="Arial" pitchFamily="34" charset="-120"/>
               </a:rPr>
-              <a:t>全体的な満足度 </a:t>
+              <a:t>清潔さ・清掃 </a:t>
             </a:r>
             <a:endParaRPr lang="en-US" sz="1100" dirty="0"/>
           </a:p>
@@ -4790,7 +5696,7 @@
                 <a:ea typeface="Arial" pitchFamily="34" charset="-122"/>
                 <a:cs typeface="Arial" pitchFamily="34" charset="-120"/>
               </a:rPr>
-              <a:t>  ゲストから概ね好意的な評価を受けています</a:t>
+              <a:t>  部屋が綺麗</a:t>
             </a:r>
             <a:endParaRPr lang="en-US" sz="1100" dirty="0"/>
           </a:p>
@@ -4918,7 +5824,7 @@
                 <a:ea typeface="Arial" pitchFamily="34" charset="-122"/>
                 <a:cs typeface="Arial" pitchFamily="34" charset="-120"/>
               </a:rPr>
-              <a:t>軽微な改善点 </a:t>
+              <a:t>浴室・水回り </a:t>
             </a:r>
             <a:endParaRPr lang="en-US" sz="1100" dirty="0"/>
           </a:p>
@@ -4938,7 +5844,7 @@
                 <a:ea typeface="Arial" pitchFamily="34" charset="-122"/>
                 <a:cs typeface="Arial" pitchFamily="34" charset="-120"/>
               </a:rPr>
-              <a:t>  大きな問題はないが、さらなる品質向上の余地あり</a:t>
+              <a:t>  シャワーの温度調節に苦労します</a:t>
             </a:r>
             <a:endParaRPr lang="en-US" sz="1100" dirty="0"/>
           </a:p>
@@ -4958,7 +5864,7 @@
                 <a:ea typeface="Arial" pitchFamily="34" charset="-122"/>
                 <a:cs typeface="Arial" pitchFamily="34" charset="-120"/>
               </a:rPr>
-              <a:t>軽微な改善点 </a:t>
+              <a:t>エアコン・空調 </a:t>
             </a:r>
             <a:endParaRPr lang="en-US" sz="1100" dirty="0"/>
           </a:p>
@@ -4978,7 +5884,7 @@
                 <a:ea typeface="Arial" pitchFamily="34" charset="-122"/>
                 <a:cs typeface="Arial" pitchFamily="34" charset="-120"/>
               </a:rPr>
-              <a:t>  大きな問題はないが、さらなる品質向上の余地あり</a:t>
+              <a:t>  シャワーの温度調節に苦労します</a:t>
             </a:r>
             <a:endParaRPr lang="en-US" sz="1100" dirty="0"/>
           </a:p>
@@ -4998,7 +5904,7 @@
                 <a:ea typeface="Arial" pitchFamily="34" charset="-122"/>
                 <a:cs typeface="Arial" pitchFamily="34" charset="-120"/>
               </a:rPr>
-              <a:t>軽微な改善点 </a:t>
+              <a:t>設備の老朽化 </a:t>
             </a:r>
             <a:endParaRPr lang="en-US" sz="1100" dirty="0"/>
           </a:p>
@@ -5018,7 +5924,7 @@
                 <a:ea typeface="Arial" pitchFamily="34" charset="-122"/>
                 <a:cs typeface="Arial" pitchFamily="34" charset="-120"/>
               </a:rPr>
-              <a:t>  大きな問題はないが、さらなる品質向上の余地あり</a:t>
+              <a:t>  少し建物古いかも</a:t>
             </a:r>
             <a:endParaRPr lang="en-US" sz="1100" dirty="0"/>
           </a:p>
@@ -5294,7 +6200,7 @@
             <a:avLst/>
           </a:prstGeom>
           <a:solidFill>
-            <a:srgbClr val="E74C3C"/>
+            <a:srgbClr val="FF9800"/>
           </a:solidFill>
           <a:ln/>
         </p:spPr>
@@ -5365,13 +6271,13 @@
             <a:r>
               <a:rPr lang="en-US" sz="3200" b="1" dirty="0">
                 <a:solidFill>
-                  <a:srgbClr val="E74C3C"/>
+                  <a:srgbClr val="FF9800"/>
                 </a:solidFill>
                 <a:latin typeface="Arial" pitchFamily="34" charset="0"/>
                 <a:ea typeface="Arial" pitchFamily="34" charset="-122"/>
                 <a:cs typeface="Arial" pitchFamily="34" charset="-120"/>
               </a:rPr>
-              <a:t>0.00</a:t>
+              <a:t>7.12</a:t>
             </a:r>
             <a:endParaRPr lang="en-US" sz="3200" dirty="0"/>
           </a:p>
@@ -5496,7 +6402,7 @@
                 <a:ea typeface="Arial" pitchFamily="34" charset="-122"/>
                 <a:cs typeface="Arial" pitchFamily="34" charset="-120"/>
               </a:rPr>
-              <a:t>0.0%</a:t>
+              <a:t>50.8%</a:t>
             </a:r>
             <a:endParaRPr lang="en-US" sz="3200" dirty="0"/>
           </a:p>
@@ -5544,7 +6450,7 @@
             <a:avLst/>
           </a:prstGeom>
           <a:solidFill>
-            <a:srgbClr val="16A34A"/>
+            <a:srgbClr val="DC2626"/>
           </a:solidFill>
           <a:ln/>
         </p:spPr>
@@ -5615,13 +6521,13 @@
             <a:r>
               <a:rPr lang="en-US" sz="3200" b="1" dirty="0">
                 <a:solidFill>
-                  <a:srgbClr val="16A34A"/>
+                  <a:srgbClr val="DC2626"/>
                 </a:solidFill>
                 <a:latin typeface="Arial" pitchFamily="34" charset="0"/>
                 <a:ea typeface="Arial" pitchFamily="34" charset="-122"/>
                 <a:cs typeface="Arial" pitchFamily="34" charset="-120"/>
               </a:rPr>
-              <a:t>0.0%</a:t>
+              <a:t>11.9%</a:t>
             </a:r>
             <a:endParaRPr lang="en-US" sz="3200" dirty="0"/>
           </a:p>
@@ -5746,7 +6652,7 @@
                 <a:ea typeface="Arial" pitchFamily="34" charset="-122"/>
                 <a:cs typeface="Arial" pitchFamily="34" charset="-120"/>
               </a:rPr>
-              <a:t>0件</a:t>
+              <a:t>118件</a:t>
             </a:r>
             <a:endParaRPr lang="en-US" sz="3200" dirty="0"/>
           </a:p>
@@ -5980,9 +6886,25 @@
           </a:p>
         </p:txBody>
       </p:sp>
-      <p:sp>
-        <p:nvSpPr>
-          <p:cNvPr id="5" name="Shape 3"/>
+      <p:graphicFrame>
+        <p:nvGraphicFramePr>
+          <p:cNvPr id="5" name="Chart 0" descr=""/>
+          <p:cNvGraphicFramePr/>
+          <p:nvPr/>
+        </p:nvGraphicFramePr>
+        <p:xfrm>
+          <a:off x="457200" y="1005840"/>
+          <a:ext cx="5029200" cy="3200400"/>
+        </p:xfrm>
+        <a:graphic xmlns:a="http://schemas.openxmlformats.org/drawingml/2006/main">
+          <a:graphicData uri="http://schemas.openxmlformats.org/drawingml/2006/chart">
+            <c:chart xmlns:c="http://schemas.openxmlformats.org/drawingml/2006/chart" r:id="rId1"/>
+          </a:graphicData>
+        </a:graphic>
+      </p:graphicFrame>
+      <p:sp>
+        <p:nvSpPr>
+          <p:cNvPr id="6" name="Shape 3"/>
           <p:cNvSpPr/>
           <p:nvPr/>
         </p:nvSpPr>
@@ -6009,7 +6931,7 @@
       </p:sp>
       <p:sp>
         <p:nvSpPr>
-          <p:cNvPr id="6" name="Shape 4"/>
+          <p:cNvPr id="7" name="Shape 4"/>
           <p:cNvSpPr/>
           <p:nvPr/>
         </p:nvSpPr>
@@ -6029,7 +6951,7 @@
       </p:sp>
       <p:sp>
         <p:nvSpPr>
-          <p:cNvPr id="7" name="Text 5"/>
+          <p:cNvPr id="8" name="Text 5"/>
           <p:cNvSpPr/>
           <p:nvPr/>
         </p:nvSpPr>
@@ -6068,7 +6990,7 @@
       </p:sp>
       <p:sp>
         <p:nvSpPr>
-          <p:cNvPr id="8" name="Text 6"/>
+          <p:cNvPr id="9" name="Text 6"/>
           <p:cNvSpPr/>
           <p:nvPr/>
         </p:nvSpPr>
@@ -6132,6 +7054,26 @@
                 <a:cs typeface="Arial" pitchFamily="34" charset="-120"/>
               </a:rPr>
               <a:t>高評価グループ</a:t>
+            </a:r>
+            <a:endParaRPr lang="en-US" sz="1100" dirty="0"/>
+          </a:p>
+          <a:p>
+            <a:pPr indent="0" marL="0">
+              <a:spcAft>
+                <a:spcPts val="200"/>
+              </a:spcAft>
+              <a:buNone/>
+            </a:pPr>
+            <a:r>
+              <a:rPr lang="en-US" sz="900" dirty="0">
+                <a:solidFill>
+                  <a:srgbClr val="64748B"/>
+                </a:solidFill>
+                <a:latin typeface="Arial" pitchFamily="34" charset="0"/>
+                <a:ea typeface="Arial" pitchFamily="34" charset="-122"/>
+                <a:cs typeface="Arial" pitchFamily="34" charset="-120"/>
+              </a:rPr>
+              <a:t>Google(7.71)が最高スコア。</a:t>
             </a:r>
             <a:endParaRPr lang="en-US" sz="1100" dirty="0"/>
           </a:p>
@@ -6554,13 +7496,1723 @@
                   </a:tcPr>
                 </a:tc>
               </a:tr>
+              <a:tr h="201168">
+                <a:tc>
+                  <a:txBody>
+                    <a:bodyPr/>
+                    <a:lstStyle/>
+                    <a:p>
+                      <a:pPr algn="ctr" indent="0" marL="0">
+                        <a:buNone/>
+                      </a:pPr>
+                      <a:r>
+                        <a:rPr lang="en-US" sz="900" dirty="0">
+                          <a:solidFill>
+                            <a:srgbClr val="000000"/>
+                          </a:solidFill>
+                          <a:latin typeface="Arial" pitchFamily="34" charset="0"/>
+                          <a:ea typeface="Arial" pitchFamily="34" charset="-122"/>
+                          <a:cs typeface="Arial" pitchFamily="34" charset="-120"/>
+                        </a:rPr>
+                        <a:t>Google</a:t>
+                      </a:r>
+                      <a:endParaRPr lang="en-US" sz="900" dirty="0">
+                        <a:latin typeface="Arial" charset="0"/>
+                        <a:ea typeface="Arial" charset="0"/>
+                        <a:cs typeface="Arial" charset="0"/>
+                      </a:endParaRPr>
+                    </a:p>
+                  </a:txBody>
+                  <a:tcPr marL="91440" marR="91440" marT="45720" marB="45720">
+                    <a:lnL w="6350" cap="flat" cmpd="sng" algn="ctr">
+                      <a:solidFill>
+                        <a:srgbClr val="CBD5E1"/>
+                      </a:solidFill>
+                      <a:prstDash val="solid"/>
+                      <a:round/>
+                      <a:headEnd type="none" w="med" len="med"/>
+                      <a:tailEnd type="none" w="med" len="med"/>
+                    </a:lnL>
+                    <a:lnR w="6350" cap="flat" cmpd="sng" algn="ctr">
+                      <a:solidFill>
+                        <a:srgbClr val="CBD5E1"/>
+                      </a:solidFill>
+                      <a:prstDash val="solid"/>
+                      <a:round/>
+                      <a:headEnd type="none" w="med" len="med"/>
+                      <a:tailEnd type="none" w="med" len="med"/>
+                    </a:lnR>
+                    <a:lnT w="6350" cap="flat" cmpd="sng" algn="ctr">
+                      <a:solidFill>
+                        <a:srgbClr val="CBD5E1"/>
+                      </a:solidFill>
+                      <a:prstDash val="solid"/>
+                      <a:round/>
+                      <a:headEnd type="none" w="med" len="med"/>
+                      <a:tailEnd type="none" w="med" len="med"/>
+                    </a:lnT>
+                    <a:lnB w="6350" cap="flat" cmpd="sng" algn="ctr">
+                      <a:solidFill>
+                        <a:srgbClr val="CBD5E1"/>
+                      </a:solidFill>
+                      <a:prstDash val="solid"/>
+                      <a:round/>
+                      <a:headEnd type="none" w="med" len="med"/>
+                      <a:tailEnd type="none" w="med" len="med"/>
+                    </a:lnB>
+                    <a:solidFill>
+                      <a:srgbClr val="E8EFF8"/>
+                    </a:solidFill>
+                  </a:tcPr>
+                </a:tc>
+                <a:tc>
+                  <a:txBody>
+                    <a:bodyPr/>
+                    <a:lstStyle/>
+                    <a:p>
+                      <a:pPr algn="ctr" indent="0" marL="0">
+                        <a:buNone/>
+                      </a:pPr>
+                      <a:r>
+                        <a:rPr lang="en-US" sz="900" dirty="0">
+                          <a:solidFill>
+                            <a:srgbClr val="000000"/>
+                          </a:solidFill>
+                          <a:latin typeface="Arial" pitchFamily="34" charset="0"/>
+                          <a:ea typeface="Arial" pitchFamily="34" charset="-122"/>
+                          <a:cs typeface="Arial" pitchFamily="34" charset="-120"/>
+                        </a:rPr>
+                        <a:t>7</a:t>
+                      </a:r>
+                      <a:endParaRPr lang="en-US" sz="900" dirty="0">
+                        <a:latin typeface="Arial" charset="0"/>
+                        <a:ea typeface="Arial" charset="0"/>
+                        <a:cs typeface="Arial" charset="0"/>
+                      </a:endParaRPr>
+                    </a:p>
+                  </a:txBody>
+                  <a:tcPr marL="91440" marR="91440" marT="45720" marB="45720">
+                    <a:lnL w="6350" cap="flat" cmpd="sng" algn="ctr">
+                      <a:solidFill>
+                        <a:srgbClr val="CBD5E1"/>
+                      </a:solidFill>
+                      <a:prstDash val="solid"/>
+                      <a:round/>
+                      <a:headEnd type="none" w="med" len="med"/>
+                      <a:tailEnd type="none" w="med" len="med"/>
+                    </a:lnL>
+                    <a:lnR w="6350" cap="flat" cmpd="sng" algn="ctr">
+                      <a:solidFill>
+                        <a:srgbClr val="CBD5E1"/>
+                      </a:solidFill>
+                      <a:prstDash val="solid"/>
+                      <a:round/>
+                      <a:headEnd type="none" w="med" len="med"/>
+                      <a:tailEnd type="none" w="med" len="med"/>
+                    </a:lnR>
+                    <a:lnT w="6350" cap="flat" cmpd="sng" algn="ctr">
+                      <a:solidFill>
+                        <a:srgbClr val="CBD5E1"/>
+                      </a:solidFill>
+                      <a:prstDash val="solid"/>
+                      <a:round/>
+                      <a:headEnd type="none" w="med" len="med"/>
+                      <a:tailEnd type="none" w="med" len="med"/>
+                    </a:lnT>
+                    <a:lnB w="6350" cap="flat" cmpd="sng" algn="ctr">
+                      <a:solidFill>
+                        <a:srgbClr val="CBD5E1"/>
+                      </a:solidFill>
+                      <a:prstDash val="solid"/>
+                      <a:round/>
+                      <a:headEnd type="none" w="med" len="med"/>
+                      <a:tailEnd type="none" w="med" len="med"/>
+                    </a:lnB>
+                    <a:solidFill>
+                      <a:srgbClr val="E8EFF8"/>
+                    </a:solidFill>
+                  </a:tcPr>
+                </a:tc>
+                <a:tc>
+                  <a:txBody>
+                    <a:bodyPr/>
+                    <a:lstStyle/>
+                    <a:p>
+                      <a:pPr algn="ctr" indent="0" marL="0">
+                        <a:buNone/>
+                      </a:pPr>
+                      <a:r>
+                        <a:rPr lang="en-US" sz="900" dirty="0">
+                          <a:solidFill>
+                            <a:srgbClr val="000000"/>
+                          </a:solidFill>
+                          <a:latin typeface="Arial" pitchFamily="34" charset="0"/>
+                          <a:ea typeface="Arial" pitchFamily="34" charset="-122"/>
+                          <a:cs typeface="Arial" pitchFamily="34" charset="-120"/>
+                        </a:rPr>
+                        <a:t>3.86</a:t>
+                      </a:r>
+                      <a:endParaRPr lang="en-US" sz="900" dirty="0">
+                        <a:latin typeface="Arial" charset="0"/>
+                        <a:ea typeface="Arial" charset="0"/>
+                        <a:cs typeface="Arial" charset="0"/>
+                      </a:endParaRPr>
+                    </a:p>
+                  </a:txBody>
+                  <a:tcPr marL="91440" marR="91440" marT="45720" marB="45720">
+                    <a:lnL w="6350" cap="flat" cmpd="sng" algn="ctr">
+                      <a:solidFill>
+                        <a:srgbClr val="CBD5E1"/>
+                      </a:solidFill>
+                      <a:prstDash val="solid"/>
+                      <a:round/>
+                      <a:headEnd type="none" w="med" len="med"/>
+                      <a:tailEnd type="none" w="med" len="med"/>
+                    </a:lnL>
+                    <a:lnR w="6350" cap="flat" cmpd="sng" algn="ctr">
+                      <a:solidFill>
+                        <a:srgbClr val="CBD5E1"/>
+                      </a:solidFill>
+                      <a:prstDash val="solid"/>
+                      <a:round/>
+                      <a:headEnd type="none" w="med" len="med"/>
+                      <a:tailEnd type="none" w="med" len="med"/>
+                    </a:lnR>
+                    <a:lnT w="6350" cap="flat" cmpd="sng" algn="ctr">
+                      <a:solidFill>
+                        <a:srgbClr val="CBD5E1"/>
+                      </a:solidFill>
+                      <a:prstDash val="solid"/>
+                      <a:round/>
+                      <a:headEnd type="none" w="med" len="med"/>
+                      <a:tailEnd type="none" w="med" len="med"/>
+                    </a:lnT>
+                    <a:lnB w="6350" cap="flat" cmpd="sng" algn="ctr">
+                      <a:solidFill>
+                        <a:srgbClr val="CBD5E1"/>
+                      </a:solidFill>
+                      <a:prstDash val="solid"/>
+                      <a:round/>
+                      <a:headEnd type="none" w="med" len="med"/>
+                      <a:tailEnd type="none" w="med" len="med"/>
+                    </a:lnB>
+                    <a:solidFill>
+                      <a:srgbClr val="E8EFF8"/>
+                    </a:solidFill>
+                  </a:tcPr>
+                </a:tc>
+                <a:tc>
+                  <a:txBody>
+                    <a:bodyPr/>
+                    <a:lstStyle/>
+                    <a:p>
+                      <a:pPr algn="ctr" indent="0" marL="0">
+                        <a:buNone/>
+                      </a:pPr>
+                      <a:r>
+                        <a:rPr lang="en-US" sz="900" dirty="0">
+                          <a:solidFill>
+                            <a:srgbClr val="000000"/>
+                          </a:solidFill>
+                          <a:latin typeface="Arial" pitchFamily="34" charset="0"/>
+                          <a:ea typeface="Arial" pitchFamily="34" charset="-122"/>
+                          <a:cs typeface="Arial" pitchFamily="34" charset="-120"/>
+                        </a:rPr>
+                        <a:t>/5 (×2)</a:t>
+                      </a:r>
+                      <a:endParaRPr lang="en-US" sz="900" dirty="0">
+                        <a:latin typeface="Arial" charset="0"/>
+                        <a:ea typeface="Arial" charset="0"/>
+                        <a:cs typeface="Arial" charset="0"/>
+                      </a:endParaRPr>
+                    </a:p>
+                  </a:txBody>
+                  <a:tcPr marL="91440" marR="91440" marT="45720" marB="45720">
+                    <a:lnL w="6350" cap="flat" cmpd="sng" algn="ctr">
+                      <a:solidFill>
+                        <a:srgbClr val="CBD5E1"/>
+                      </a:solidFill>
+                      <a:prstDash val="solid"/>
+                      <a:round/>
+                      <a:headEnd type="none" w="med" len="med"/>
+                      <a:tailEnd type="none" w="med" len="med"/>
+                    </a:lnL>
+                    <a:lnR w="6350" cap="flat" cmpd="sng" algn="ctr">
+                      <a:solidFill>
+                        <a:srgbClr val="CBD5E1"/>
+                      </a:solidFill>
+                      <a:prstDash val="solid"/>
+                      <a:round/>
+                      <a:headEnd type="none" w="med" len="med"/>
+                      <a:tailEnd type="none" w="med" len="med"/>
+                    </a:lnR>
+                    <a:lnT w="6350" cap="flat" cmpd="sng" algn="ctr">
+                      <a:solidFill>
+                        <a:srgbClr val="CBD5E1"/>
+                      </a:solidFill>
+                      <a:prstDash val="solid"/>
+                      <a:round/>
+                      <a:headEnd type="none" w="med" len="med"/>
+                      <a:tailEnd type="none" w="med" len="med"/>
+                    </a:lnT>
+                    <a:lnB w="6350" cap="flat" cmpd="sng" algn="ctr">
+                      <a:solidFill>
+                        <a:srgbClr val="CBD5E1"/>
+                      </a:solidFill>
+                      <a:prstDash val="solid"/>
+                      <a:round/>
+                      <a:headEnd type="none" w="med" len="med"/>
+                      <a:tailEnd type="none" w="med" len="med"/>
+                    </a:lnB>
+                    <a:solidFill>
+                      <a:srgbClr val="E8EFF8"/>
+                    </a:solidFill>
+                  </a:tcPr>
+                </a:tc>
+                <a:tc>
+                  <a:txBody>
+                    <a:bodyPr/>
+                    <a:lstStyle/>
+                    <a:p>
+                      <a:pPr algn="ctr" indent="0" marL="0">
+                        <a:buNone/>
+                      </a:pPr>
+                      <a:r>
+                        <a:rPr lang="en-US" sz="900" dirty="0">
+                          <a:solidFill>
+                            <a:srgbClr val="000000"/>
+                          </a:solidFill>
+                          <a:latin typeface="Arial" pitchFamily="34" charset="0"/>
+                          <a:ea typeface="Arial" pitchFamily="34" charset="-122"/>
+                          <a:cs typeface="Arial" pitchFamily="34" charset="-120"/>
+                        </a:rPr>
+                        <a:t>7.71</a:t>
+                      </a:r>
+                      <a:endParaRPr lang="en-US" sz="900" dirty="0">
+                        <a:latin typeface="Arial" charset="0"/>
+                        <a:ea typeface="Arial" charset="0"/>
+                        <a:cs typeface="Arial" charset="0"/>
+                      </a:endParaRPr>
+                    </a:p>
+                  </a:txBody>
+                  <a:tcPr marL="91440" marR="91440" marT="45720" marB="45720">
+                    <a:lnL w="6350" cap="flat" cmpd="sng" algn="ctr">
+                      <a:solidFill>
+                        <a:srgbClr val="CBD5E1"/>
+                      </a:solidFill>
+                      <a:prstDash val="solid"/>
+                      <a:round/>
+                      <a:headEnd type="none" w="med" len="med"/>
+                      <a:tailEnd type="none" w="med" len="med"/>
+                    </a:lnL>
+                    <a:lnR w="6350" cap="flat" cmpd="sng" algn="ctr">
+                      <a:solidFill>
+                        <a:srgbClr val="CBD5E1"/>
+                      </a:solidFill>
+                      <a:prstDash val="solid"/>
+                      <a:round/>
+                      <a:headEnd type="none" w="med" len="med"/>
+                      <a:tailEnd type="none" w="med" len="med"/>
+                    </a:lnR>
+                    <a:lnT w="6350" cap="flat" cmpd="sng" algn="ctr">
+                      <a:solidFill>
+                        <a:srgbClr val="CBD5E1"/>
+                      </a:solidFill>
+                      <a:prstDash val="solid"/>
+                      <a:round/>
+                      <a:headEnd type="none" w="med" len="med"/>
+                      <a:tailEnd type="none" w="med" len="med"/>
+                    </a:lnT>
+                    <a:lnB w="6350" cap="flat" cmpd="sng" algn="ctr">
+                      <a:solidFill>
+                        <a:srgbClr val="CBD5E1"/>
+                      </a:solidFill>
+                      <a:prstDash val="solid"/>
+                      <a:round/>
+                      <a:headEnd type="none" w="med" len="med"/>
+                      <a:tailEnd type="none" w="med" len="med"/>
+                    </a:lnB>
+                    <a:solidFill>
+                      <a:srgbClr val="E8EFF8"/>
+                    </a:solidFill>
+                  </a:tcPr>
+                </a:tc>
+              </a:tr>
+              <a:tr h="201168">
+                <a:tc>
+                  <a:txBody>
+                    <a:bodyPr/>
+                    <a:lstStyle/>
+                    <a:p>
+                      <a:pPr algn="ctr" indent="0" marL="0">
+                        <a:buNone/>
+                      </a:pPr>
+                      <a:r>
+                        <a:rPr lang="en-US" sz="900" dirty="0">
+                          <a:solidFill>
+                            <a:srgbClr val="000000"/>
+                          </a:solidFill>
+                          <a:latin typeface="Arial" pitchFamily="34" charset="0"/>
+                          <a:ea typeface="Arial" pitchFamily="34" charset="-122"/>
+                          <a:cs typeface="Arial" pitchFamily="34" charset="-120"/>
+                        </a:rPr>
+                        <a:t>楽天トラベル</a:t>
+                      </a:r>
+                      <a:endParaRPr lang="en-US" sz="900" dirty="0">
+                        <a:latin typeface="Arial" charset="0"/>
+                        <a:ea typeface="Arial" charset="0"/>
+                        <a:cs typeface="Arial" charset="0"/>
+                      </a:endParaRPr>
+                    </a:p>
+                  </a:txBody>
+                  <a:tcPr marL="91440" marR="91440" marT="45720" marB="45720">
+                    <a:lnL w="6350" cap="flat" cmpd="sng" algn="ctr">
+                      <a:solidFill>
+                        <a:srgbClr val="CBD5E1"/>
+                      </a:solidFill>
+                      <a:prstDash val="solid"/>
+                      <a:round/>
+                      <a:headEnd type="none" w="med" len="med"/>
+                      <a:tailEnd type="none" w="med" len="med"/>
+                    </a:lnL>
+                    <a:lnR w="6350" cap="flat" cmpd="sng" algn="ctr">
+                      <a:solidFill>
+                        <a:srgbClr val="CBD5E1"/>
+                      </a:solidFill>
+                      <a:prstDash val="solid"/>
+                      <a:round/>
+                      <a:headEnd type="none" w="med" len="med"/>
+                      <a:tailEnd type="none" w="med" len="med"/>
+                    </a:lnR>
+                    <a:lnT w="6350" cap="flat" cmpd="sng" algn="ctr">
+                      <a:solidFill>
+                        <a:srgbClr val="CBD5E1"/>
+                      </a:solidFill>
+                      <a:prstDash val="solid"/>
+                      <a:round/>
+                      <a:headEnd type="none" w="med" len="med"/>
+                      <a:tailEnd type="none" w="med" len="med"/>
+                    </a:lnT>
+                    <a:lnB w="6350" cap="flat" cmpd="sng" algn="ctr">
+                      <a:solidFill>
+                        <a:srgbClr val="CBD5E1"/>
+                      </a:solidFill>
+                      <a:prstDash val="solid"/>
+                      <a:round/>
+                      <a:headEnd type="none" w="med" len="med"/>
+                      <a:tailEnd type="none" w="med" len="med"/>
+                    </a:lnB>
+                    <a:solidFill>
+                      <a:srgbClr val="FFFFFF"/>
+                    </a:solidFill>
+                  </a:tcPr>
+                </a:tc>
+                <a:tc>
+                  <a:txBody>
+                    <a:bodyPr/>
+                    <a:lstStyle/>
+                    <a:p>
+                      <a:pPr algn="ctr" indent="0" marL="0">
+                        <a:buNone/>
+                      </a:pPr>
+                      <a:r>
+                        <a:rPr lang="en-US" sz="900" dirty="0">
+                          <a:solidFill>
+                            <a:srgbClr val="000000"/>
+                          </a:solidFill>
+                          <a:latin typeface="Arial" pitchFamily="34" charset="0"/>
+                          <a:ea typeface="Arial" pitchFamily="34" charset="-122"/>
+                          <a:cs typeface="Arial" pitchFamily="34" charset="-120"/>
+                        </a:rPr>
+                        <a:t>6</a:t>
+                      </a:r>
+                      <a:endParaRPr lang="en-US" sz="900" dirty="0">
+                        <a:latin typeface="Arial" charset="0"/>
+                        <a:ea typeface="Arial" charset="0"/>
+                        <a:cs typeface="Arial" charset="0"/>
+                      </a:endParaRPr>
+                    </a:p>
+                  </a:txBody>
+                  <a:tcPr marL="91440" marR="91440" marT="45720" marB="45720">
+                    <a:lnL w="6350" cap="flat" cmpd="sng" algn="ctr">
+                      <a:solidFill>
+                        <a:srgbClr val="CBD5E1"/>
+                      </a:solidFill>
+                      <a:prstDash val="solid"/>
+                      <a:round/>
+                      <a:headEnd type="none" w="med" len="med"/>
+                      <a:tailEnd type="none" w="med" len="med"/>
+                    </a:lnL>
+                    <a:lnR w="6350" cap="flat" cmpd="sng" algn="ctr">
+                      <a:solidFill>
+                        <a:srgbClr val="CBD5E1"/>
+                      </a:solidFill>
+                      <a:prstDash val="solid"/>
+                      <a:round/>
+                      <a:headEnd type="none" w="med" len="med"/>
+                      <a:tailEnd type="none" w="med" len="med"/>
+                    </a:lnR>
+                    <a:lnT w="6350" cap="flat" cmpd="sng" algn="ctr">
+                      <a:solidFill>
+                        <a:srgbClr val="CBD5E1"/>
+                      </a:solidFill>
+                      <a:prstDash val="solid"/>
+                      <a:round/>
+                      <a:headEnd type="none" w="med" len="med"/>
+                      <a:tailEnd type="none" w="med" len="med"/>
+                    </a:lnT>
+                    <a:lnB w="6350" cap="flat" cmpd="sng" algn="ctr">
+                      <a:solidFill>
+                        <a:srgbClr val="CBD5E1"/>
+                      </a:solidFill>
+                      <a:prstDash val="solid"/>
+                      <a:round/>
+                      <a:headEnd type="none" w="med" len="med"/>
+                      <a:tailEnd type="none" w="med" len="med"/>
+                    </a:lnB>
+                    <a:solidFill>
+                      <a:srgbClr val="FFFFFF"/>
+                    </a:solidFill>
+                  </a:tcPr>
+                </a:tc>
+                <a:tc>
+                  <a:txBody>
+                    <a:bodyPr/>
+                    <a:lstStyle/>
+                    <a:p>
+                      <a:pPr algn="ctr" indent="0" marL="0">
+                        <a:buNone/>
+                      </a:pPr>
+                      <a:r>
+                        <a:rPr lang="en-US" sz="900" dirty="0">
+                          <a:solidFill>
+                            <a:srgbClr val="000000"/>
+                          </a:solidFill>
+                          <a:latin typeface="Arial" pitchFamily="34" charset="0"/>
+                          <a:ea typeface="Arial" pitchFamily="34" charset="-122"/>
+                          <a:cs typeface="Arial" pitchFamily="34" charset="-120"/>
+                        </a:rPr>
+                        <a:t>3.83</a:t>
+                      </a:r>
+                      <a:endParaRPr lang="en-US" sz="900" dirty="0">
+                        <a:latin typeface="Arial" charset="0"/>
+                        <a:ea typeface="Arial" charset="0"/>
+                        <a:cs typeface="Arial" charset="0"/>
+                      </a:endParaRPr>
+                    </a:p>
+                  </a:txBody>
+                  <a:tcPr marL="91440" marR="91440" marT="45720" marB="45720">
+                    <a:lnL w="6350" cap="flat" cmpd="sng" algn="ctr">
+                      <a:solidFill>
+                        <a:srgbClr val="CBD5E1"/>
+                      </a:solidFill>
+                      <a:prstDash val="solid"/>
+                      <a:round/>
+                      <a:headEnd type="none" w="med" len="med"/>
+                      <a:tailEnd type="none" w="med" len="med"/>
+                    </a:lnL>
+                    <a:lnR w="6350" cap="flat" cmpd="sng" algn="ctr">
+                      <a:solidFill>
+                        <a:srgbClr val="CBD5E1"/>
+                      </a:solidFill>
+                      <a:prstDash val="solid"/>
+                      <a:round/>
+                      <a:headEnd type="none" w="med" len="med"/>
+                      <a:tailEnd type="none" w="med" len="med"/>
+                    </a:lnR>
+                    <a:lnT w="6350" cap="flat" cmpd="sng" algn="ctr">
+                      <a:solidFill>
+                        <a:srgbClr val="CBD5E1"/>
+                      </a:solidFill>
+                      <a:prstDash val="solid"/>
+                      <a:round/>
+                      <a:headEnd type="none" w="med" len="med"/>
+                      <a:tailEnd type="none" w="med" len="med"/>
+                    </a:lnT>
+                    <a:lnB w="6350" cap="flat" cmpd="sng" algn="ctr">
+                      <a:solidFill>
+                        <a:srgbClr val="CBD5E1"/>
+                      </a:solidFill>
+                      <a:prstDash val="solid"/>
+                      <a:round/>
+                      <a:headEnd type="none" w="med" len="med"/>
+                      <a:tailEnd type="none" w="med" len="med"/>
+                    </a:lnB>
+                    <a:solidFill>
+                      <a:srgbClr val="FFFFFF"/>
+                    </a:solidFill>
+                  </a:tcPr>
+                </a:tc>
+                <a:tc>
+                  <a:txBody>
+                    <a:bodyPr/>
+                    <a:lstStyle/>
+                    <a:p>
+                      <a:pPr algn="ctr" indent="0" marL="0">
+                        <a:buNone/>
+                      </a:pPr>
+                      <a:r>
+                        <a:rPr lang="en-US" sz="900" dirty="0">
+                          <a:solidFill>
+                            <a:srgbClr val="000000"/>
+                          </a:solidFill>
+                          <a:latin typeface="Arial" pitchFamily="34" charset="0"/>
+                          <a:ea typeface="Arial" pitchFamily="34" charset="-122"/>
+                          <a:cs typeface="Arial" pitchFamily="34" charset="-120"/>
+                        </a:rPr>
+                        <a:t>/5 (×2)</a:t>
+                      </a:r>
+                      <a:endParaRPr lang="en-US" sz="900" dirty="0">
+                        <a:latin typeface="Arial" charset="0"/>
+                        <a:ea typeface="Arial" charset="0"/>
+                        <a:cs typeface="Arial" charset="0"/>
+                      </a:endParaRPr>
+                    </a:p>
+                  </a:txBody>
+                  <a:tcPr marL="91440" marR="91440" marT="45720" marB="45720">
+                    <a:lnL w="6350" cap="flat" cmpd="sng" algn="ctr">
+                      <a:solidFill>
+                        <a:srgbClr val="CBD5E1"/>
+                      </a:solidFill>
+                      <a:prstDash val="solid"/>
+                      <a:round/>
+                      <a:headEnd type="none" w="med" len="med"/>
+                      <a:tailEnd type="none" w="med" len="med"/>
+                    </a:lnL>
+                    <a:lnR w="6350" cap="flat" cmpd="sng" algn="ctr">
+                      <a:solidFill>
+                        <a:srgbClr val="CBD5E1"/>
+                      </a:solidFill>
+                      <a:prstDash val="solid"/>
+                      <a:round/>
+                      <a:headEnd type="none" w="med" len="med"/>
+                      <a:tailEnd type="none" w="med" len="med"/>
+                    </a:lnR>
+                    <a:lnT w="6350" cap="flat" cmpd="sng" algn="ctr">
+                      <a:solidFill>
+                        <a:srgbClr val="CBD5E1"/>
+                      </a:solidFill>
+                      <a:prstDash val="solid"/>
+                      <a:round/>
+                      <a:headEnd type="none" w="med" len="med"/>
+                      <a:tailEnd type="none" w="med" len="med"/>
+                    </a:lnT>
+                    <a:lnB w="6350" cap="flat" cmpd="sng" algn="ctr">
+                      <a:solidFill>
+                        <a:srgbClr val="CBD5E1"/>
+                      </a:solidFill>
+                      <a:prstDash val="solid"/>
+                      <a:round/>
+                      <a:headEnd type="none" w="med" len="med"/>
+                      <a:tailEnd type="none" w="med" len="med"/>
+                    </a:lnB>
+                    <a:solidFill>
+                      <a:srgbClr val="FFFFFF"/>
+                    </a:solidFill>
+                  </a:tcPr>
+                </a:tc>
+                <a:tc>
+                  <a:txBody>
+                    <a:bodyPr/>
+                    <a:lstStyle/>
+                    <a:p>
+                      <a:pPr algn="ctr" indent="0" marL="0">
+                        <a:buNone/>
+                      </a:pPr>
+                      <a:r>
+                        <a:rPr lang="en-US" sz="900" dirty="0">
+                          <a:solidFill>
+                            <a:srgbClr val="000000"/>
+                          </a:solidFill>
+                          <a:latin typeface="Arial" pitchFamily="34" charset="0"/>
+                          <a:ea typeface="Arial" pitchFamily="34" charset="-122"/>
+                          <a:cs typeface="Arial" pitchFamily="34" charset="-120"/>
+                        </a:rPr>
+                        <a:t>7.67</a:t>
+                      </a:r>
+                      <a:endParaRPr lang="en-US" sz="900" dirty="0">
+                        <a:latin typeface="Arial" charset="0"/>
+                        <a:ea typeface="Arial" charset="0"/>
+                        <a:cs typeface="Arial" charset="0"/>
+                      </a:endParaRPr>
+                    </a:p>
+                  </a:txBody>
+                  <a:tcPr marL="91440" marR="91440" marT="45720" marB="45720">
+                    <a:lnL w="6350" cap="flat" cmpd="sng" algn="ctr">
+                      <a:solidFill>
+                        <a:srgbClr val="CBD5E1"/>
+                      </a:solidFill>
+                      <a:prstDash val="solid"/>
+                      <a:round/>
+                      <a:headEnd type="none" w="med" len="med"/>
+                      <a:tailEnd type="none" w="med" len="med"/>
+                    </a:lnL>
+                    <a:lnR w="6350" cap="flat" cmpd="sng" algn="ctr">
+                      <a:solidFill>
+                        <a:srgbClr val="CBD5E1"/>
+                      </a:solidFill>
+                      <a:prstDash val="solid"/>
+                      <a:round/>
+                      <a:headEnd type="none" w="med" len="med"/>
+                      <a:tailEnd type="none" w="med" len="med"/>
+                    </a:lnR>
+                    <a:lnT w="6350" cap="flat" cmpd="sng" algn="ctr">
+                      <a:solidFill>
+                        <a:srgbClr val="CBD5E1"/>
+                      </a:solidFill>
+                      <a:prstDash val="solid"/>
+                      <a:round/>
+                      <a:headEnd type="none" w="med" len="med"/>
+                      <a:tailEnd type="none" w="med" len="med"/>
+                    </a:lnT>
+                    <a:lnB w="6350" cap="flat" cmpd="sng" algn="ctr">
+                      <a:solidFill>
+                        <a:srgbClr val="CBD5E1"/>
+                      </a:solidFill>
+                      <a:prstDash val="solid"/>
+                      <a:round/>
+                      <a:headEnd type="none" w="med" len="med"/>
+                      <a:tailEnd type="none" w="med" len="med"/>
+                    </a:lnB>
+                    <a:solidFill>
+                      <a:srgbClr val="FFFFFF"/>
+                    </a:solidFill>
+                  </a:tcPr>
+                </a:tc>
+              </a:tr>
+              <a:tr h="201168">
+                <a:tc>
+                  <a:txBody>
+                    <a:bodyPr/>
+                    <a:lstStyle/>
+                    <a:p>
+                      <a:pPr algn="ctr" indent="0" marL="0">
+                        <a:buNone/>
+                      </a:pPr>
+                      <a:r>
+                        <a:rPr lang="en-US" sz="900" dirty="0">
+                          <a:solidFill>
+                            <a:srgbClr val="000000"/>
+                          </a:solidFill>
+                          <a:latin typeface="Arial" pitchFamily="34" charset="0"/>
+                          <a:ea typeface="Arial" pitchFamily="34" charset="-122"/>
+                          <a:cs typeface="Arial" pitchFamily="34" charset="-120"/>
+                        </a:rPr>
+                        <a:t>じゃらん</a:t>
+                      </a:r>
+                      <a:endParaRPr lang="en-US" sz="900" dirty="0">
+                        <a:latin typeface="Arial" charset="0"/>
+                        <a:ea typeface="Arial" charset="0"/>
+                        <a:cs typeface="Arial" charset="0"/>
+                      </a:endParaRPr>
+                    </a:p>
+                  </a:txBody>
+                  <a:tcPr marL="91440" marR="91440" marT="45720" marB="45720">
+                    <a:lnL w="6350" cap="flat" cmpd="sng" algn="ctr">
+                      <a:solidFill>
+                        <a:srgbClr val="CBD5E1"/>
+                      </a:solidFill>
+                      <a:prstDash val="solid"/>
+                      <a:round/>
+                      <a:headEnd type="none" w="med" len="med"/>
+                      <a:tailEnd type="none" w="med" len="med"/>
+                    </a:lnL>
+                    <a:lnR w="6350" cap="flat" cmpd="sng" algn="ctr">
+                      <a:solidFill>
+                        <a:srgbClr val="CBD5E1"/>
+                      </a:solidFill>
+                      <a:prstDash val="solid"/>
+                      <a:round/>
+                      <a:headEnd type="none" w="med" len="med"/>
+                      <a:tailEnd type="none" w="med" len="med"/>
+                    </a:lnR>
+                    <a:lnT w="6350" cap="flat" cmpd="sng" algn="ctr">
+                      <a:solidFill>
+                        <a:srgbClr val="CBD5E1"/>
+                      </a:solidFill>
+                      <a:prstDash val="solid"/>
+                      <a:round/>
+                      <a:headEnd type="none" w="med" len="med"/>
+                      <a:tailEnd type="none" w="med" len="med"/>
+                    </a:lnT>
+                    <a:lnB w="6350" cap="flat" cmpd="sng" algn="ctr">
+                      <a:solidFill>
+                        <a:srgbClr val="CBD5E1"/>
+                      </a:solidFill>
+                      <a:prstDash val="solid"/>
+                      <a:round/>
+                      <a:headEnd type="none" w="med" len="med"/>
+                      <a:tailEnd type="none" w="med" len="med"/>
+                    </a:lnB>
+                    <a:solidFill>
+                      <a:srgbClr val="E8EFF8"/>
+                    </a:solidFill>
+                  </a:tcPr>
+                </a:tc>
+                <a:tc>
+                  <a:txBody>
+                    <a:bodyPr/>
+                    <a:lstStyle/>
+                    <a:p>
+                      <a:pPr algn="ctr" indent="0" marL="0">
+                        <a:buNone/>
+                      </a:pPr>
+                      <a:r>
+                        <a:rPr lang="en-US" sz="900" dirty="0">
+                          <a:solidFill>
+                            <a:srgbClr val="000000"/>
+                          </a:solidFill>
+                          <a:latin typeface="Arial" pitchFamily="34" charset="0"/>
+                          <a:ea typeface="Arial" pitchFamily="34" charset="-122"/>
+                          <a:cs typeface="Arial" pitchFamily="34" charset="-120"/>
+                        </a:rPr>
+                        <a:t>11</a:t>
+                      </a:r>
+                      <a:endParaRPr lang="en-US" sz="900" dirty="0">
+                        <a:latin typeface="Arial" charset="0"/>
+                        <a:ea typeface="Arial" charset="0"/>
+                        <a:cs typeface="Arial" charset="0"/>
+                      </a:endParaRPr>
+                    </a:p>
+                  </a:txBody>
+                  <a:tcPr marL="91440" marR="91440" marT="45720" marB="45720">
+                    <a:lnL w="6350" cap="flat" cmpd="sng" algn="ctr">
+                      <a:solidFill>
+                        <a:srgbClr val="CBD5E1"/>
+                      </a:solidFill>
+                      <a:prstDash val="solid"/>
+                      <a:round/>
+                      <a:headEnd type="none" w="med" len="med"/>
+                      <a:tailEnd type="none" w="med" len="med"/>
+                    </a:lnL>
+                    <a:lnR w="6350" cap="flat" cmpd="sng" algn="ctr">
+                      <a:solidFill>
+                        <a:srgbClr val="CBD5E1"/>
+                      </a:solidFill>
+                      <a:prstDash val="solid"/>
+                      <a:round/>
+                      <a:headEnd type="none" w="med" len="med"/>
+                      <a:tailEnd type="none" w="med" len="med"/>
+                    </a:lnR>
+                    <a:lnT w="6350" cap="flat" cmpd="sng" algn="ctr">
+                      <a:solidFill>
+                        <a:srgbClr val="CBD5E1"/>
+                      </a:solidFill>
+                      <a:prstDash val="solid"/>
+                      <a:round/>
+                      <a:headEnd type="none" w="med" len="med"/>
+                      <a:tailEnd type="none" w="med" len="med"/>
+                    </a:lnT>
+                    <a:lnB w="6350" cap="flat" cmpd="sng" algn="ctr">
+                      <a:solidFill>
+                        <a:srgbClr val="CBD5E1"/>
+                      </a:solidFill>
+                      <a:prstDash val="solid"/>
+                      <a:round/>
+                      <a:headEnd type="none" w="med" len="med"/>
+                      <a:tailEnd type="none" w="med" len="med"/>
+                    </a:lnB>
+                    <a:solidFill>
+                      <a:srgbClr val="E8EFF8"/>
+                    </a:solidFill>
+                  </a:tcPr>
+                </a:tc>
+                <a:tc>
+                  <a:txBody>
+                    <a:bodyPr/>
+                    <a:lstStyle/>
+                    <a:p>
+                      <a:pPr algn="ctr" indent="0" marL="0">
+                        <a:buNone/>
+                      </a:pPr>
+                      <a:r>
+                        <a:rPr lang="en-US" sz="900" dirty="0">
+                          <a:solidFill>
+                            <a:srgbClr val="000000"/>
+                          </a:solidFill>
+                          <a:latin typeface="Arial" pitchFamily="34" charset="0"/>
+                          <a:ea typeface="Arial" pitchFamily="34" charset="-122"/>
+                          <a:cs typeface="Arial" pitchFamily="34" charset="-120"/>
+                        </a:rPr>
+                        <a:t>3.64</a:t>
+                      </a:r>
+                      <a:endParaRPr lang="en-US" sz="900" dirty="0">
+                        <a:latin typeface="Arial" charset="0"/>
+                        <a:ea typeface="Arial" charset="0"/>
+                        <a:cs typeface="Arial" charset="0"/>
+                      </a:endParaRPr>
+                    </a:p>
+                  </a:txBody>
+                  <a:tcPr marL="91440" marR="91440" marT="45720" marB="45720">
+                    <a:lnL w="6350" cap="flat" cmpd="sng" algn="ctr">
+                      <a:solidFill>
+                        <a:srgbClr val="CBD5E1"/>
+                      </a:solidFill>
+                      <a:prstDash val="solid"/>
+                      <a:round/>
+                      <a:headEnd type="none" w="med" len="med"/>
+                      <a:tailEnd type="none" w="med" len="med"/>
+                    </a:lnL>
+                    <a:lnR w="6350" cap="flat" cmpd="sng" algn="ctr">
+                      <a:solidFill>
+                        <a:srgbClr val="CBD5E1"/>
+                      </a:solidFill>
+                      <a:prstDash val="solid"/>
+                      <a:round/>
+                      <a:headEnd type="none" w="med" len="med"/>
+                      <a:tailEnd type="none" w="med" len="med"/>
+                    </a:lnR>
+                    <a:lnT w="6350" cap="flat" cmpd="sng" algn="ctr">
+                      <a:solidFill>
+                        <a:srgbClr val="CBD5E1"/>
+                      </a:solidFill>
+                      <a:prstDash val="solid"/>
+                      <a:round/>
+                      <a:headEnd type="none" w="med" len="med"/>
+                      <a:tailEnd type="none" w="med" len="med"/>
+                    </a:lnT>
+                    <a:lnB w="6350" cap="flat" cmpd="sng" algn="ctr">
+                      <a:solidFill>
+                        <a:srgbClr val="CBD5E1"/>
+                      </a:solidFill>
+                      <a:prstDash val="solid"/>
+                      <a:round/>
+                      <a:headEnd type="none" w="med" len="med"/>
+                      <a:tailEnd type="none" w="med" len="med"/>
+                    </a:lnB>
+                    <a:solidFill>
+                      <a:srgbClr val="E8EFF8"/>
+                    </a:solidFill>
+                  </a:tcPr>
+                </a:tc>
+                <a:tc>
+                  <a:txBody>
+                    <a:bodyPr/>
+                    <a:lstStyle/>
+                    <a:p>
+                      <a:pPr algn="ctr" indent="0" marL="0">
+                        <a:buNone/>
+                      </a:pPr>
+                      <a:r>
+                        <a:rPr lang="en-US" sz="900" dirty="0">
+                          <a:solidFill>
+                            <a:srgbClr val="000000"/>
+                          </a:solidFill>
+                          <a:latin typeface="Arial" pitchFamily="34" charset="0"/>
+                          <a:ea typeface="Arial" pitchFamily="34" charset="-122"/>
+                          <a:cs typeface="Arial" pitchFamily="34" charset="-120"/>
+                        </a:rPr>
+                        <a:t>/5 (×2)</a:t>
+                      </a:r>
+                      <a:endParaRPr lang="en-US" sz="900" dirty="0">
+                        <a:latin typeface="Arial" charset="0"/>
+                        <a:ea typeface="Arial" charset="0"/>
+                        <a:cs typeface="Arial" charset="0"/>
+                      </a:endParaRPr>
+                    </a:p>
+                  </a:txBody>
+                  <a:tcPr marL="91440" marR="91440" marT="45720" marB="45720">
+                    <a:lnL w="6350" cap="flat" cmpd="sng" algn="ctr">
+                      <a:solidFill>
+                        <a:srgbClr val="CBD5E1"/>
+                      </a:solidFill>
+                      <a:prstDash val="solid"/>
+                      <a:round/>
+                      <a:headEnd type="none" w="med" len="med"/>
+                      <a:tailEnd type="none" w="med" len="med"/>
+                    </a:lnL>
+                    <a:lnR w="6350" cap="flat" cmpd="sng" algn="ctr">
+                      <a:solidFill>
+                        <a:srgbClr val="CBD5E1"/>
+                      </a:solidFill>
+                      <a:prstDash val="solid"/>
+                      <a:round/>
+                      <a:headEnd type="none" w="med" len="med"/>
+                      <a:tailEnd type="none" w="med" len="med"/>
+                    </a:lnR>
+                    <a:lnT w="6350" cap="flat" cmpd="sng" algn="ctr">
+                      <a:solidFill>
+                        <a:srgbClr val="CBD5E1"/>
+                      </a:solidFill>
+                      <a:prstDash val="solid"/>
+                      <a:round/>
+                      <a:headEnd type="none" w="med" len="med"/>
+                      <a:tailEnd type="none" w="med" len="med"/>
+                    </a:lnT>
+                    <a:lnB w="6350" cap="flat" cmpd="sng" algn="ctr">
+                      <a:solidFill>
+                        <a:srgbClr val="CBD5E1"/>
+                      </a:solidFill>
+                      <a:prstDash val="solid"/>
+                      <a:round/>
+                      <a:headEnd type="none" w="med" len="med"/>
+                      <a:tailEnd type="none" w="med" len="med"/>
+                    </a:lnB>
+                    <a:solidFill>
+                      <a:srgbClr val="E8EFF8"/>
+                    </a:solidFill>
+                  </a:tcPr>
+                </a:tc>
+                <a:tc>
+                  <a:txBody>
+                    <a:bodyPr/>
+                    <a:lstStyle/>
+                    <a:p>
+                      <a:pPr algn="ctr" indent="0" marL="0">
+                        <a:buNone/>
+                      </a:pPr>
+                      <a:r>
+                        <a:rPr lang="en-US" sz="900" dirty="0">
+                          <a:solidFill>
+                            <a:srgbClr val="000000"/>
+                          </a:solidFill>
+                          <a:latin typeface="Arial" pitchFamily="34" charset="0"/>
+                          <a:ea typeface="Arial" pitchFamily="34" charset="-122"/>
+                          <a:cs typeface="Arial" pitchFamily="34" charset="-120"/>
+                        </a:rPr>
+                        <a:t>7.27</a:t>
+                      </a:r>
+                      <a:endParaRPr lang="en-US" sz="900" dirty="0">
+                        <a:latin typeface="Arial" charset="0"/>
+                        <a:ea typeface="Arial" charset="0"/>
+                        <a:cs typeface="Arial" charset="0"/>
+                      </a:endParaRPr>
+                    </a:p>
+                  </a:txBody>
+                  <a:tcPr marL="91440" marR="91440" marT="45720" marB="45720">
+                    <a:lnL w="6350" cap="flat" cmpd="sng" algn="ctr">
+                      <a:solidFill>
+                        <a:srgbClr val="CBD5E1"/>
+                      </a:solidFill>
+                      <a:prstDash val="solid"/>
+                      <a:round/>
+                      <a:headEnd type="none" w="med" len="med"/>
+                      <a:tailEnd type="none" w="med" len="med"/>
+                    </a:lnL>
+                    <a:lnR w="6350" cap="flat" cmpd="sng" algn="ctr">
+                      <a:solidFill>
+                        <a:srgbClr val="CBD5E1"/>
+                      </a:solidFill>
+                      <a:prstDash val="solid"/>
+                      <a:round/>
+                      <a:headEnd type="none" w="med" len="med"/>
+                      <a:tailEnd type="none" w="med" len="med"/>
+                    </a:lnR>
+                    <a:lnT w="6350" cap="flat" cmpd="sng" algn="ctr">
+                      <a:solidFill>
+                        <a:srgbClr val="CBD5E1"/>
+                      </a:solidFill>
+                      <a:prstDash val="solid"/>
+                      <a:round/>
+                      <a:headEnd type="none" w="med" len="med"/>
+                      <a:tailEnd type="none" w="med" len="med"/>
+                    </a:lnT>
+                    <a:lnB w="6350" cap="flat" cmpd="sng" algn="ctr">
+                      <a:solidFill>
+                        <a:srgbClr val="CBD5E1"/>
+                      </a:solidFill>
+                      <a:prstDash val="solid"/>
+                      <a:round/>
+                      <a:headEnd type="none" w="med" len="med"/>
+                      <a:tailEnd type="none" w="med" len="med"/>
+                    </a:lnB>
+                    <a:solidFill>
+                      <a:srgbClr val="E8EFF8"/>
+                    </a:solidFill>
+                  </a:tcPr>
+                </a:tc>
+              </a:tr>
+              <a:tr h="201168">
+                <a:tc>
+                  <a:txBody>
+                    <a:bodyPr/>
+                    <a:lstStyle/>
+                    <a:p>
+                      <a:pPr algn="ctr" indent="0" marL="0">
+                        <a:buNone/>
+                      </a:pPr>
+                      <a:r>
+                        <a:rPr lang="en-US" sz="900" dirty="0">
+                          <a:solidFill>
+                            <a:srgbClr val="000000"/>
+                          </a:solidFill>
+                          <a:latin typeface="Arial" pitchFamily="34" charset="0"/>
+                          <a:ea typeface="Arial" pitchFamily="34" charset="-122"/>
+                          <a:cs typeface="Arial" pitchFamily="34" charset="-120"/>
+                        </a:rPr>
+                        <a:t>Booking.com</a:t>
+                      </a:r>
+                      <a:endParaRPr lang="en-US" sz="900" dirty="0">
+                        <a:latin typeface="Arial" charset="0"/>
+                        <a:ea typeface="Arial" charset="0"/>
+                        <a:cs typeface="Arial" charset="0"/>
+                      </a:endParaRPr>
+                    </a:p>
+                  </a:txBody>
+                  <a:tcPr marL="91440" marR="91440" marT="45720" marB="45720">
+                    <a:lnL w="6350" cap="flat" cmpd="sng" algn="ctr">
+                      <a:solidFill>
+                        <a:srgbClr val="CBD5E1"/>
+                      </a:solidFill>
+                      <a:prstDash val="solid"/>
+                      <a:round/>
+                      <a:headEnd type="none" w="med" len="med"/>
+                      <a:tailEnd type="none" w="med" len="med"/>
+                    </a:lnL>
+                    <a:lnR w="6350" cap="flat" cmpd="sng" algn="ctr">
+                      <a:solidFill>
+                        <a:srgbClr val="CBD5E1"/>
+                      </a:solidFill>
+                      <a:prstDash val="solid"/>
+                      <a:round/>
+                      <a:headEnd type="none" w="med" len="med"/>
+                      <a:tailEnd type="none" w="med" len="med"/>
+                    </a:lnR>
+                    <a:lnT w="6350" cap="flat" cmpd="sng" algn="ctr">
+                      <a:solidFill>
+                        <a:srgbClr val="CBD5E1"/>
+                      </a:solidFill>
+                      <a:prstDash val="solid"/>
+                      <a:round/>
+                      <a:headEnd type="none" w="med" len="med"/>
+                      <a:tailEnd type="none" w="med" len="med"/>
+                    </a:lnT>
+                    <a:lnB w="6350" cap="flat" cmpd="sng" algn="ctr">
+                      <a:solidFill>
+                        <a:srgbClr val="CBD5E1"/>
+                      </a:solidFill>
+                      <a:prstDash val="solid"/>
+                      <a:round/>
+                      <a:headEnd type="none" w="med" len="med"/>
+                      <a:tailEnd type="none" w="med" len="med"/>
+                    </a:lnB>
+                    <a:solidFill>
+                      <a:srgbClr val="FFFFFF"/>
+                    </a:solidFill>
+                  </a:tcPr>
+                </a:tc>
+                <a:tc>
+                  <a:txBody>
+                    <a:bodyPr/>
+                    <a:lstStyle/>
+                    <a:p>
+                      <a:pPr algn="ctr" indent="0" marL="0">
+                        <a:buNone/>
+                      </a:pPr>
+                      <a:r>
+                        <a:rPr lang="en-US" sz="900" dirty="0">
+                          <a:solidFill>
+                            <a:srgbClr val="000000"/>
+                          </a:solidFill>
+                          <a:latin typeface="Arial" pitchFamily="34" charset="0"/>
+                          <a:ea typeface="Arial" pitchFamily="34" charset="-122"/>
+                          <a:cs typeface="Arial" pitchFamily="34" charset="-120"/>
+                        </a:rPr>
+                        <a:t>91</a:t>
+                      </a:r>
+                      <a:endParaRPr lang="en-US" sz="900" dirty="0">
+                        <a:latin typeface="Arial" charset="0"/>
+                        <a:ea typeface="Arial" charset="0"/>
+                        <a:cs typeface="Arial" charset="0"/>
+                      </a:endParaRPr>
+                    </a:p>
+                  </a:txBody>
+                  <a:tcPr marL="91440" marR="91440" marT="45720" marB="45720">
+                    <a:lnL w="6350" cap="flat" cmpd="sng" algn="ctr">
+                      <a:solidFill>
+                        <a:srgbClr val="CBD5E1"/>
+                      </a:solidFill>
+                      <a:prstDash val="solid"/>
+                      <a:round/>
+                      <a:headEnd type="none" w="med" len="med"/>
+                      <a:tailEnd type="none" w="med" len="med"/>
+                    </a:lnL>
+                    <a:lnR w="6350" cap="flat" cmpd="sng" algn="ctr">
+                      <a:solidFill>
+                        <a:srgbClr val="CBD5E1"/>
+                      </a:solidFill>
+                      <a:prstDash val="solid"/>
+                      <a:round/>
+                      <a:headEnd type="none" w="med" len="med"/>
+                      <a:tailEnd type="none" w="med" len="med"/>
+                    </a:lnR>
+                    <a:lnT w="6350" cap="flat" cmpd="sng" algn="ctr">
+                      <a:solidFill>
+                        <a:srgbClr val="CBD5E1"/>
+                      </a:solidFill>
+                      <a:prstDash val="solid"/>
+                      <a:round/>
+                      <a:headEnd type="none" w="med" len="med"/>
+                      <a:tailEnd type="none" w="med" len="med"/>
+                    </a:lnT>
+                    <a:lnB w="6350" cap="flat" cmpd="sng" algn="ctr">
+                      <a:solidFill>
+                        <a:srgbClr val="CBD5E1"/>
+                      </a:solidFill>
+                      <a:prstDash val="solid"/>
+                      <a:round/>
+                      <a:headEnd type="none" w="med" len="med"/>
+                      <a:tailEnd type="none" w="med" len="med"/>
+                    </a:lnB>
+                    <a:solidFill>
+                      <a:srgbClr val="FFFFFF"/>
+                    </a:solidFill>
+                  </a:tcPr>
+                </a:tc>
+                <a:tc>
+                  <a:txBody>
+                    <a:bodyPr/>
+                    <a:lstStyle/>
+                    <a:p>
+                      <a:pPr algn="ctr" indent="0" marL="0">
+                        <a:buNone/>
+                      </a:pPr>
+                      <a:r>
+                        <a:rPr lang="en-US" sz="900" dirty="0">
+                          <a:solidFill>
+                            <a:srgbClr val="000000"/>
+                          </a:solidFill>
+                          <a:latin typeface="Arial" pitchFamily="34" charset="0"/>
+                          <a:ea typeface="Arial" pitchFamily="34" charset="-122"/>
+                          <a:cs typeface="Arial" pitchFamily="34" charset="-120"/>
+                        </a:rPr>
+                        <a:t>7.03</a:t>
+                      </a:r>
+                      <a:endParaRPr lang="en-US" sz="900" dirty="0">
+                        <a:latin typeface="Arial" charset="0"/>
+                        <a:ea typeface="Arial" charset="0"/>
+                        <a:cs typeface="Arial" charset="0"/>
+                      </a:endParaRPr>
+                    </a:p>
+                  </a:txBody>
+                  <a:tcPr marL="91440" marR="91440" marT="45720" marB="45720">
+                    <a:lnL w="6350" cap="flat" cmpd="sng" algn="ctr">
+                      <a:solidFill>
+                        <a:srgbClr val="CBD5E1"/>
+                      </a:solidFill>
+                      <a:prstDash val="solid"/>
+                      <a:round/>
+                      <a:headEnd type="none" w="med" len="med"/>
+                      <a:tailEnd type="none" w="med" len="med"/>
+                    </a:lnL>
+                    <a:lnR w="6350" cap="flat" cmpd="sng" algn="ctr">
+                      <a:solidFill>
+                        <a:srgbClr val="CBD5E1"/>
+                      </a:solidFill>
+                      <a:prstDash val="solid"/>
+                      <a:round/>
+                      <a:headEnd type="none" w="med" len="med"/>
+                      <a:tailEnd type="none" w="med" len="med"/>
+                    </a:lnR>
+                    <a:lnT w="6350" cap="flat" cmpd="sng" algn="ctr">
+                      <a:solidFill>
+                        <a:srgbClr val="CBD5E1"/>
+                      </a:solidFill>
+                      <a:prstDash val="solid"/>
+                      <a:round/>
+                      <a:headEnd type="none" w="med" len="med"/>
+                      <a:tailEnd type="none" w="med" len="med"/>
+                    </a:lnT>
+                    <a:lnB w="6350" cap="flat" cmpd="sng" algn="ctr">
+                      <a:solidFill>
+                        <a:srgbClr val="CBD5E1"/>
+                      </a:solidFill>
+                      <a:prstDash val="solid"/>
+                      <a:round/>
+                      <a:headEnd type="none" w="med" len="med"/>
+                      <a:tailEnd type="none" w="med" len="med"/>
+                    </a:lnB>
+                    <a:solidFill>
+                      <a:srgbClr val="FFFFFF"/>
+                    </a:solidFill>
+                  </a:tcPr>
+                </a:tc>
+                <a:tc>
+                  <a:txBody>
+                    <a:bodyPr/>
+                    <a:lstStyle/>
+                    <a:p>
+                      <a:pPr algn="ctr" indent="0" marL="0">
+                        <a:buNone/>
+                      </a:pPr>
+                      <a:r>
+                        <a:rPr lang="en-US" sz="900" dirty="0">
+                          <a:solidFill>
+                            <a:srgbClr val="000000"/>
+                          </a:solidFill>
+                          <a:latin typeface="Arial" pitchFamily="34" charset="0"/>
+                          <a:ea typeface="Arial" pitchFamily="34" charset="-122"/>
+                          <a:cs typeface="Arial" pitchFamily="34" charset="-120"/>
+                        </a:rPr>
+                        <a:t>/10</a:t>
+                      </a:r>
+                      <a:endParaRPr lang="en-US" sz="900" dirty="0">
+                        <a:latin typeface="Arial" charset="0"/>
+                        <a:ea typeface="Arial" charset="0"/>
+                        <a:cs typeface="Arial" charset="0"/>
+                      </a:endParaRPr>
+                    </a:p>
+                  </a:txBody>
+                  <a:tcPr marL="91440" marR="91440" marT="45720" marB="45720">
+                    <a:lnL w="6350" cap="flat" cmpd="sng" algn="ctr">
+                      <a:solidFill>
+                        <a:srgbClr val="CBD5E1"/>
+                      </a:solidFill>
+                      <a:prstDash val="solid"/>
+                      <a:round/>
+                      <a:headEnd type="none" w="med" len="med"/>
+                      <a:tailEnd type="none" w="med" len="med"/>
+                    </a:lnL>
+                    <a:lnR w="6350" cap="flat" cmpd="sng" algn="ctr">
+                      <a:solidFill>
+                        <a:srgbClr val="CBD5E1"/>
+                      </a:solidFill>
+                      <a:prstDash val="solid"/>
+                      <a:round/>
+                      <a:headEnd type="none" w="med" len="med"/>
+                      <a:tailEnd type="none" w="med" len="med"/>
+                    </a:lnR>
+                    <a:lnT w="6350" cap="flat" cmpd="sng" algn="ctr">
+                      <a:solidFill>
+                        <a:srgbClr val="CBD5E1"/>
+                      </a:solidFill>
+                      <a:prstDash val="solid"/>
+                      <a:round/>
+                      <a:headEnd type="none" w="med" len="med"/>
+                      <a:tailEnd type="none" w="med" len="med"/>
+                    </a:lnT>
+                    <a:lnB w="6350" cap="flat" cmpd="sng" algn="ctr">
+                      <a:solidFill>
+                        <a:srgbClr val="CBD5E1"/>
+                      </a:solidFill>
+                      <a:prstDash val="solid"/>
+                      <a:round/>
+                      <a:headEnd type="none" w="med" len="med"/>
+                      <a:tailEnd type="none" w="med" len="med"/>
+                    </a:lnB>
+                    <a:solidFill>
+                      <a:srgbClr val="FFFFFF"/>
+                    </a:solidFill>
+                  </a:tcPr>
+                </a:tc>
+                <a:tc>
+                  <a:txBody>
+                    <a:bodyPr/>
+                    <a:lstStyle/>
+                    <a:p>
+                      <a:pPr algn="ctr" indent="0" marL="0">
+                        <a:buNone/>
+                      </a:pPr>
+                      <a:r>
+                        <a:rPr lang="en-US" sz="900" dirty="0">
+                          <a:solidFill>
+                            <a:srgbClr val="000000"/>
+                          </a:solidFill>
+                          <a:latin typeface="Arial" pitchFamily="34" charset="0"/>
+                          <a:ea typeface="Arial" pitchFamily="34" charset="-122"/>
+                          <a:cs typeface="Arial" pitchFamily="34" charset="-120"/>
+                        </a:rPr>
+                        <a:t>7.03</a:t>
+                      </a:r>
+                      <a:endParaRPr lang="en-US" sz="900" dirty="0">
+                        <a:latin typeface="Arial" charset="0"/>
+                        <a:ea typeface="Arial" charset="0"/>
+                        <a:cs typeface="Arial" charset="0"/>
+                      </a:endParaRPr>
+                    </a:p>
+                  </a:txBody>
+                  <a:tcPr marL="91440" marR="91440" marT="45720" marB="45720">
+                    <a:lnL w="6350" cap="flat" cmpd="sng" algn="ctr">
+                      <a:solidFill>
+                        <a:srgbClr val="CBD5E1"/>
+                      </a:solidFill>
+                      <a:prstDash val="solid"/>
+                      <a:round/>
+                      <a:headEnd type="none" w="med" len="med"/>
+                      <a:tailEnd type="none" w="med" len="med"/>
+                    </a:lnL>
+                    <a:lnR w="6350" cap="flat" cmpd="sng" algn="ctr">
+                      <a:solidFill>
+                        <a:srgbClr val="CBD5E1"/>
+                      </a:solidFill>
+                      <a:prstDash val="solid"/>
+                      <a:round/>
+                      <a:headEnd type="none" w="med" len="med"/>
+                      <a:tailEnd type="none" w="med" len="med"/>
+                    </a:lnR>
+                    <a:lnT w="6350" cap="flat" cmpd="sng" algn="ctr">
+                      <a:solidFill>
+                        <a:srgbClr val="CBD5E1"/>
+                      </a:solidFill>
+                      <a:prstDash val="solid"/>
+                      <a:round/>
+                      <a:headEnd type="none" w="med" len="med"/>
+                      <a:tailEnd type="none" w="med" len="med"/>
+                    </a:lnT>
+                    <a:lnB w="6350" cap="flat" cmpd="sng" algn="ctr">
+                      <a:solidFill>
+                        <a:srgbClr val="CBD5E1"/>
+                      </a:solidFill>
+                      <a:prstDash val="solid"/>
+                      <a:round/>
+                      <a:headEnd type="none" w="med" len="med"/>
+                      <a:tailEnd type="none" w="med" len="med"/>
+                    </a:lnB>
+                    <a:solidFill>
+                      <a:srgbClr val="FFFFFF"/>
+                    </a:solidFill>
+                  </a:tcPr>
+                </a:tc>
+              </a:tr>
+              <a:tr h="201168">
+                <a:tc>
+                  <a:txBody>
+                    <a:bodyPr/>
+                    <a:lstStyle/>
+                    <a:p>
+                      <a:pPr algn="ctr" indent="0" marL="0">
+                        <a:buNone/>
+                      </a:pPr>
+                      <a:r>
+                        <a:rPr lang="en-US" sz="900" dirty="0">
+                          <a:solidFill>
+                            <a:srgbClr val="000000"/>
+                          </a:solidFill>
+                          <a:latin typeface="Arial" pitchFamily="34" charset="0"/>
+                          <a:ea typeface="Arial" pitchFamily="34" charset="-122"/>
+                          <a:cs typeface="Arial" pitchFamily="34" charset="-120"/>
+                        </a:rPr>
+                        <a:t>Trip.com</a:t>
+                      </a:r>
+                      <a:endParaRPr lang="en-US" sz="900" dirty="0">
+                        <a:latin typeface="Arial" charset="0"/>
+                        <a:ea typeface="Arial" charset="0"/>
+                        <a:cs typeface="Arial" charset="0"/>
+                      </a:endParaRPr>
+                    </a:p>
+                  </a:txBody>
+                  <a:tcPr marL="91440" marR="91440" marT="45720" marB="45720">
+                    <a:lnL w="6350" cap="flat" cmpd="sng" algn="ctr">
+                      <a:solidFill>
+                        <a:srgbClr val="CBD5E1"/>
+                      </a:solidFill>
+                      <a:prstDash val="solid"/>
+                      <a:round/>
+                      <a:headEnd type="none" w="med" len="med"/>
+                      <a:tailEnd type="none" w="med" len="med"/>
+                    </a:lnL>
+                    <a:lnR w="6350" cap="flat" cmpd="sng" algn="ctr">
+                      <a:solidFill>
+                        <a:srgbClr val="CBD5E1"/>
+                      </a:solidFill>
+                      <a:prstDash val="solid"/>
+                      <a:round/>
+                      <a:headEnd type="none" w="med" len="med"/>
+                      <a:tailEnd type="none" w="med" len="med"/>
+                    </a:lnR>
+                    <a:lnT w="6350" cap="flat" cmpd="sng" algn="ctr">
+                      <a:solidFill>
+                        <a:srgbClr val="CBD5E1"/>
+                      </a:solidFill>
+                      <a:prstDash val="solid"/>
+                      <a:round/>
+                      <a:headEnd type="none" w="med" len="med"/>
+                      <a:tailEnd type="none" w="med" len="med"/>
+                    </a:lnT>
+                    <a:lnB w="6350" cap="flat" cmpd="sng" algn="ctr">
+                      <a:solidFill>
+                        <a:srgbClr val="CBD5E1"/>
+                      </a:solidFill>
+                      <a:prstDash val="solid"/>
+                      <a:round/>
+                      <a:headEnd type="none" w="med" len="med"/>
+                      <a:tailEnd type="none" w="med" len="med"/>
+                    </a:lnB>
+                    <a:solidFill>
+                      <a:srgbClr val="E8EFF8"/>
+                    </a:solidFill>
+                  </a:tcPr>
+                </a:tc>
+                <a:tc>
+                  <a:txBody>
+                    <a:bodyPr/>
+                    <a:lstStyle/>
+                    <a:p>
+                      <a:pPr algn="ctr" indent="0" marL="0">
+                        <a:buNone/>
+                      </a:pPr>
+                      <a:r>
+                        <a:rPr lang="en-US" sz="900" dirty="0">
+                          <a:solidFill>
+                            <a:srgbClr val="000000"/>
+                          </a:solidFill>
+                          <a:latin typeface="Arial" pitchFamily="34" charset="0"/>
+                          <a:ea typeface="Arial" pitchFamily="34" charset="-122"/>
+                          <a:cs typeface="Arial" pitchFamily="34" charset="-120"/>
+                        </a:rPr>
+                        <a:t>3</a:t>
+                      </a:r>
+                      <a:endParaRPr lang="en-US" sz="900" dirty="0">
+                        <a:latin typeface="Arial" charset="0"/>
+                        <a:ea typeface="Arial" charset="0"/>
+                        <a:cs typeface="Arial" charset="0"/>
+                      </a:endParaRPr>
+                    </a:p>
+                  </a:txBody>
+                  <a:tcPr marL="91440" marR="91440" marT="45720" marB="45720">
+                    <a:lnL w="6350" cap="flat" cmpd="sng" algn="ctr">
+                      <a:solidFill>
+                        <a:srgbClr val="CBD5E1"/>
+                      </a:solidFill>
+                      <a:prstDash val="solid"/>
+                      <a:round/>
+                      <a:headEnd type="none" w="med" len="med"/>
+                      <a:tailEnd type="none" w="med" len="med"/>
+                    </a:lnL>
+                    <a:lnR w="6350" cap="flat" cmpd="sng" algn="ctr">
+                      <a:solidFill>
+                        <a:srgbClr val="CBD5E1"/>
+                      </a:solidFill>
+                      <a:prstDash val="solid"/>
+                      <a:round/>
+                      <a:headEnd type="none" w="med" len="med"/>
+                      <a:tailEnd type="none" w="med" len="med"/>
+                    </a:lnR>
+                    <a:lnT w="6350" cap="flat" cmpd="sng" algn="ctr">
+                      <a:solidFill>
+                        <a:srgbClr val="CBD5E1"/>
+                      </a:solidFill>
+                      <a:prstDash val="solid"/>
+                      <a:round/>
+                      <a:headEnd type="none" w="med" len="med"/>
+                      <a:tailEnd type="none" w="med" len="med"/>
+                    </a:lnT>
+                    <a:lnB w="6350" cap="flat" cmpd="sng" algn="ctr">
+                      <a:solidFill>
+                        <a:srgbClr val="CBD5E1"/>
+                      </a:solidFill>
+                      <a:prstDash val="solid"/>
+                      <a:round/>
+                      <a:headEnd type="none" w="med" len="med"/>
+                      <a:tailEnd type="none" w="med" len="med"/>
+                    </a:lnB>
+                    <a:solidFill>
+                      <a:srgbClr val="E8EFF8"/>
+                    </a:solidFill>
+                  </a:tcPr>
+                </a:tc>
+                <a:tc>
+                  <a:txBody>
+                    <a:bodyPr/>
+                    <a:lstStyle/>
+                    <a:p>
+                      <a:pPr algn="ctr" indent="0" marL="0">
+                        <a:buNone/>
+                      </a:pPr>
+                      <a:r>
+                        <a:rPr lang="en-US" sz="900" dirty="0">
+                          <a:solidFill>
+                            <a:srgbClr val="000000"/>
+                          </a:solidFill>
+                          <a:latin typeface="Arial" pitchFamily="34" charset="0"/>
+                          <a:ea typeface="Arial" pitchFamily="34" charset="-122"/>
+                          <a:cs typeface="Arial" pitchFamily="34" charset="-120"/>
+                        </a:rPr>
+                        <a:t>6.67</a:t>
+                      </a:r>
+                      <a:endParaRPr lang="en-US" sz="900" dirty="0">
+                        <a:latin typeface="Arial" charset="0"/>
+                        <a:ea typeface="Arial" charset="0"/>
+                        <a:cs typeface="Arial" charset="0"/>
+                      </a:endParaRPr>
+                    </a:p>
+                  </a:txBody>
+                  <a:tcPr marL="91440" marR="91440" marT="45720" marB="45720">
+                    <a:lnL w="6350" cap="flat" cmpd="sng" algn="ctr">
+                      <a:solidFill>
+                        <a:srgbClr val="CBD5E1"/>
+                      </a:solidFill>
+                      <a:prstDash val="solid"/>
+                      <a:round/>
+                      <a:headEnd type="none" w="med" len="med"/>
+                      <a:tailEnd type="none" w="med" len="med"/>
+                    </a:lnL>
+                    <a:lnR w="6350" cap="flat" cmpd="sng" algn="ctr">
+                      <a:solidFill>
+                        <a:srgbClr val="CBD5E1"/>
+                      </a:solidFill>
+                      <a:prstDash val="solid"/>
+                      <a:round/>
+                      <a:headEnd type="none" w="med" len="med"/>
+                      <a:tailEnd type="none" w="med" len="med"/>
+                    </a:lnR>
+                    <a:lnT w="6350" cap="flat" cmpd="sng" algn="ctr">
+                      <a:solidFill>
+                        <a:srgbClr val="CBD5E1"/>
+                      </a:solidFill>
+                      <a:prstDash val="solid"/>
+                      <a:round/>
+                      <a:headEnd type="none" w="med" len="med"/>
+                      <a:tailEnd type="none" w="med" len="med"/>
+                    </a:lnT>
+                    <a:lnB w="6350" cap="flat" cmpd="sng" algn="ctr">
+                      <a:solidFill>
+                        <a:srgbClr val="CBD5E1"/>
+                      </a:solidFill>
+                      <a:prstDash val="solid"/>
+                      <a:round/>
+                      <a:headEnd type="none" w="med" len="med"/>
+                      <a:tailEnd type="none" w="med" len="med"/>
+                    </a:lnB>
+                    <a:solidFill>
+                      <a:srgbClr val="E8EFF8"/>
+                    </a:solidFill>
+                  </a:tcPr>
+                </a:tc>
+                <a:tc>
+                  <a:txBody>
+                    <a:bodyPr/>
+                    <a:lstStyle/>
+                    <a:p>
+                      <a:pPr algn="ctr" indent="0" marL="0">
+                        <a:buNone/>
+                      </a:pPr>
+                      <a:r>
+                        <a:rPr lang="en-US" sz="900" dirty="0">
+                          <a:solidFill>
+                            <a:srgbClr val="000000"/>
+                          </a:solidFill>
+                          <a:latin typeface="Arial" pitchFamily="34" charset="0"/>
+                          <a:ea typeface="Arial" pitchFamily="34" charset="-122"/>
+                          <a:cs typeface="Arial" pitchFamily="34" charset="-120"/>
+                        </a:rPr>
+                        <a:t>/10</a:t>
+                      </a:r>
+                      <a:endParaRPr lang="en-US" sz="900" dirty="0">
+                        <a:latin typeface="Arial" charset="0"/>
+                        <a:ea typeface="Arial" charset="0"/>
+                        <a:cs typeface="Arial" charset="0"/>
+                      </a:endParaRPr>
+                    </a:p>
+                  </a:txBody>
+                  <a:tcPr marL="91440" marR="91440" marT="45720" marB="45720">
+                    <a:lnL w="6350" cap="flat" cmpd="sng" algn="ctr">
+                      <a:solidFill>
+                        <a:srgbClr val="CBD5E1"/>
+                      </a:solidFill>
+                      <a:prstDash val="solid"/>
+                      <a:round/>
+                      <a:headEnd type="none" w="med" len="med"/>
+                      <a:tailEnd type="none" w="med" len="med"/>
+                    </a:lnL>
+                    <a:lnR w="6350" cap="flat" cmpd="sng" algn="ctr">
+                      <a:solidFill>
+                        <a:srgbClr val="CBD5E1"/>
+                      </a:solidFill>
+                      <a:prstDash val="solid"/>
+                      <a:round/>
+                      <a:headEnd type="none" w="med" len="med"/>
+                      <a:tailEnd type="none" w="med" len="med"/>
+                    </a:lnR>
+                    <a:lnT w="6350" cap="flat" cmpd="sng" algn="ctr">
+                      <a:solidFill>
+                        <a:srgbClr val="CBD5E1"/>
+                      </a:solidFill>
+                      <a:prstDash val="solid"/>
+                      <a:round/>
+                      <a:headEnd type="none" w="med" len="med"/>
+                      <a:tailEnd type="none" w="med" len="med"/>
+                    </a:lnT>
+                    <a:lnB w="6350" cap="flat" cmpd="sng" algn="ctr">
+                      <a:solidFill>
+                        <a:srgbClr val="CBD5E1"/>
+                      </a:solidFill>
+                      <a:prstDash val="solid"/>
+                      <a:round/>
+                      <a:headEnd type="none" w="med" len="med"/>
+                      <a:tailEnd type="none" w="med" len="med"/>
+                    </a:lnB>
+                    <a:solidFill>
+                      <a:srgbClr val="E8EFF8"/>
+                    </a:solidFill>
+                  </a:tcPr>
+                </a:tc>
+                <a:tc>
+                  <a:txBody>
+                    <a:bodyPr/>
+                    <a:lstStyle/>
+                    <a:p>
+                      <a:pPr algn="ctr" indent="0" marL="0">
+                        <a:buNone/>
+                      </a:pPr>
+                      <a:r>
+                        <a:rPr lang="en-US" sz="900" dirty="0">
+                          <a:solidFill>
+                            <a:srgbClr val="000000"/>
+                          </a:solidFill>
+                          <a:latin typeface="Arial" pitchFamily="34" charset="0"/>
+                          <a:ea typeface="Arial" pitchFamily="34" charset="-122"/>
+                          <a:cs typeface="Arial" pitchFamily="34" charset="-120"/>
+                        </a:rPr>
+                        <a:t>6.67</a:t>
+                      </a:r>
+                      <a:endParaRPr lang="en-US" sz="900" dirty="0">
+                        <a:latin typeface="Arial" charset="0"/>
+                        <a:ea typeface="Arial" charset="0"/>
+                        <a:cs typeface="Arial" charset="0"/>
+                      </a:endParaRPr>
+                    </a:p>
+                  </a:txBody>
+                  <a:tcPr marL="91440" marR="91440" marT="45720" marB="45720">
+                    <a:lnL w="6350" cap="flat" cmpd="sng" algn="ctr">
+                      <a:solidFill>
+                        <a:srgbClr val="CBD5E1"/>
+                      </a:solidFill>
+                      <a:prstDash val="solid"/>
+                      <a:round/>
+                      <a:headEnd type="none" w="med" len="med"/>
+                      <a:tailEnd type="none" w="med" len="med"/>
+                    </a:lnL>
+                    <a:lnR w="6350" cap="flat" cmpd="sng" algn="ctr">
+                      <a:solidFill>
+                        <a:srgbClr val="CBD5E1"/>
+                      </a:solidFill>
+                      <a:prstDash val="solid"/>
+                      <a:round/>
+                      <a:headEnd type="none" w="med" len="med"/>
+                      <a:tailEnd type="none" w="med" len="med"/>
+                    </a:lnR>
+                    <a:lnT w="6350" cap="flat" cmpd="sng" algn="ctr">
+                      <a:solidFill>
+                        <a:srgbClr val="CBD5E1"/>
+                      </a:solidFill>
+                      <a:prstDash val="solid"/>
+                      <a:round/>
+                      <a:headEnd type="none" w="med" len="med"/>
+                      <a:tailEnd type="none" w="med" len="med"/>
+                    </a:lnT>
+                    <a:lnB w="6350" cap="flat" cmpd="sng" algn="ctr">
+                      <a:solidFill>
+                        <a:srgbClr val="CBD5E1"/>
+                      </a:solidFill>
+                      <a:prstDash val="solid"/>
+                      <a:round/>
+                      <a:headEnd type="none" w="med" len="med"/>
+                      <a:tailEnd type="none" w="med" len="med"/>
+                    </a:lnB>
+                    <a:solidFill>
+                      <a:srgbClr val="E8EFF8"/>
+                    </a:solidFill>
+                  </a:tcPr>
+                </a:tc>
+              </a:tr>
             </a:tbl>
           </a:graphicData>
         </a:graphic>
       </p:graphicFrame>
       <p:sp>
         <p:nvSpPr>
-          <p:cNvPr id="10" name="Shape 7"/>
+          <p:cNvPr id="11" name="Shape 7"/>
           <p:cNvSpPr/>
           <p:nvPr/>
         </p:nvSpPr>
@@ -6580,7 +9232,7 @@
       </p:sp>
       <p:sp>
         <p:nvSpPr>
-          <p:cNvPr id="11" name="Text 8"/>
+          <p:cNvPr id="12" name="Text 8"/>
           <p:cNvSpPr/>
           <p:nvPr/>
         </p:nvSpPr>
@@ -6619,7 +9271,7 @@
       </p:sp>
       <p:sp>
         <p:nvSpPr>
-          <p:cNvPr id="12" name="Text 9"/>
+          <p:cNvPr id="13" name="Text 9"/>
           <p:cNvSpPr/>
           <p:nvPr/>
         </p:nvSpPr>
@@ -6802,9 +9454,25 @@
           </a:graphicData>
         </a:graphic>
       </p:graphicFrame>
-      <p:sp>
-        <p:nvSpPr>
-          <p:cNvPr id="6" name="Shape 3"/>
+      <p:graphicFrame>
+        <p:nvGraphicFramePr>
+          <p:cNvPr id="6" name="Chart 1" descr=""/>
+          <p:cNvGraphicFramePr/>
+          <p:nvPr/>
+        </p:nvGraphicFramePr>
+        <p:xfrm>
+          <a:off x="4114800" y="1097280"/>
+          <a:ext cx="4754880" cy="2926080"/>
+        </p:xfrm>
+        <a:graphic xmlns:a="http://schemas.openxmlformats.org/drawingml/2006/main">
+          <a:graphicData uri="http://schemas.openxmlformats.org/drawingml/2006/chart">
+            <c:chart xmlns:c="http://schemas.openxmlformats.org/drawingml/2006/chart" r:id="rId2"/>
+          </a:graphicData>
+        </a:graphic>
+      </p:graphicFrame>
+      <p:sp>
+        <p:nvSpPr>
+          <p:cNvPr id="7" name="Shape 3"/>
           <p:cNvSpPr/>
           <p:nvPr/>
         </p:nvSpPr>
@@ -6824,7 +9492,7 @@
       </p:sp>
       <p:sp>
         <p:nvSpPr>
-          <p:cNvPr id="7" name="Text 4"/>
+          <p:cNvPr id="8" name="Text 4"/>
           <p:cNvSpPr/>
           <p:nvPr/>
         </p:nvSpPr>
@@ -6863,7 +9531,7 @@
       </p:sp>
       <p:sp>
         <p:nvSpPr>
-          <p:cNvPr id="8" name="Text 5"/>
+          <p:cNvPr id="9" name="Text 5"/>
           <p:cNvSpPr/>
           <p:nvPr/>
         </p:nvSpPr>
@@ -6894,7 +9562,7 @@
                 <a:ea typeface="Arial" pitchFamily="34" charset="-122"/>
                 <a:cs typeface="Arial" pitchFamily="34" charset="-120"/>
               </a:rPr>
-              <a:t>0件（0.0%）</a:t>
+              <a:t>60件（50.8%）</a:t>
             </a:r>
             <a:endParaRPr lang="en-US" sz="1100" dirty="0"/>
           </a:p>
@@ -6902,7 +9570,7 @@
       </p:sp>
       <p:sp>
         <p:nvSpPr>
-          <p:cNvPr id="9" name="Shape 6"/>
+          <p:cNvPr id="10" name="Shape 6"/>
           <p:cNvSpPr/>
           <p:nvPr/>
         </p:nvSpPr>
@@ -6922,7 +9590,7 @@
       </p:sp>
       <p:sp>
         <p:nvSpPr>
-          <p:cNvPr id="10" name="Text 7"/>
+          <p:cNvPr id="11" name="Text 7"/>
           <p:cNvSpPr/>
           <p:nvPr/>
         </p:nvSpPr>
@@ -6961,7 +9629,7 @@
       </p:sp>
       <p:sp>
         <p:nvSpPr>
-          <p:cNvPr id="11" name="Text 8"/>
+          <p:cNvPr id="12" name="Text 8"/>
           <p:cNvSpPr/>
           <p:nvPr/>
         </p:nvSpPr>
@@ -6992,7 +9660,7 @@
                 <a:ea typeface="Arial" pitchFamily="34" charset="-122"/>
                 <a:cs typeface="Arial" pitchFamily="34" charset="-120"/>
               </a:rPr>
-              <a:t>0件（0.0%）</a:t>
+              <a:t>44件（37.3%）</a:t>
             </a:r>
             <a:endParaRPr lang="en-US" sz="1100" dirty="0"/>
           </a:p>
@@ -7000,7 +9668,7 @@
       </p:sp>
       <p:sp>
         <p:nvSpPr>
-          <p:cNvPr id="12" name="Shape 9"/>
+          <p:cNvPr id="13" name="Shape 9"/>
           <p:cNvSpPr/>
           <p:nvPr/>
         </p:nvSpPr>
@@ -7013,14 +9681,14 @@
             <a:avLst/>
           </a:prstGeom>
           <a:solidFill>
-            <a:srgbClr val="DCFCE7"/>
+            <a:srgbClr val="FEE2E2"/>
           </a:solidFill>
           <a:ln/>
         </p:spPr>
       </p:sp>
       <p:sp>
         <p:nvSpPr>
-          <p:cNvPr id="13" name="Text 10"/>
+          <p:cNvPr id="14" name="Text 10"/>
           <p:cNvSpPr/>
           <p:nvPr/>
         </p:nvSpPr>
@@ -7045,7 +9713,7 @@
             <a:r>
               <a:rPr lang="en-US" sz="1000" b="1" dirty="0">
                 <a:solidFill>
-                  <a:srgbClr val="16A34A"/>
+                  <a:srgbClr val="DC2626"/>
                 </a:solidFill>
                 <a:latin typeface="Arial" pitchFamily="34" charset="0"/>
                 <a:ea typeface="Arial" pitchFamily="34" charset="-122"/>
@@ -7059,7 +9727,7 @@
       </p:sp>
       <p:sp>
         <p:nvSpPr>
-          <p:cNvPr id="14" name="Text 11"/>
+          <p:cNvPr id="15" name="Text 11"/>
           <p:cNvSpPr/>
           <p:nvPr/>
         </p:nvSpPr>
@@ -7084,13 +9752,13 @@
             <a:r>
               <a:rPr lang="en-US" sz="1100" b="1" dirty="0">
                 <a:solidFill>
-                  <a:srgbClr val="16A34A"/>
+                  <a:srgbClr val="DC2626"/>
                 </a:solidFill>
                 <a:latin typeface="Arial" pitchFamily="34" charset="0"/>
                 <a:ea typeface="Arial" pitchFamily="34" charset="-122"/>
                 <a:cs typeface="Arial" pitchFamily="34" charset="-120"/>
               </a:rPr>
-              <a:t>0件（0.0%）</a:t>
+              <a:t>14件（11.9%）</a:t>
             </a:r>
             <a:endParaRPr lang="en-US" sz="1100" dirty="0"/>
           </a:p>
@@ -7098,7 +9766,7 @@
       </p:sp>
       <p:sp>
         <p:nvSpPr>
-          <p:cNvPr id="15" name="Shape 12"/>
+          <p:cNvPr id="16" name="Shape 12"/>
           <p:cNvSpPr/>
           <p:nvPr/>
         </p:nvSpPr>
@@ -7118,7 +9786,7 @@
       </p:sp>
       <p:sp>
         <p:nvSpPr>
-          <p:cNvPr id="16" name="Text 13"/>
+          <p:cNvPr id="17" name="Text 13"/>
           <p:cNvSpPr/>
           <p:nvPr/>
         </p:nvSpPr>
@@ -7157,7 +9825,7 @@
       </p:sp>
       <p:sp>
         <p:nvSpPr>
-          <p:cNvPr id="17" name="Text 14"/>
+          <p:cNvPr id="18" name="Text 14"/>
           <p:cNvSpPr/>
           <p:nvPr/>
         </p:nvSpPr>
@@ -7424,7 +10092,7 @@
                 <a:ea typeface="Arial" pitchFamily="34" charset="-122"/>
                 <a:cs typeface="Arial" pitchFamily="34" charset="-120"/>
               </a:rPr>
-              <a:t>少数</a:t>
+              <a:t>20件+</a:t>
             </a:r>
             <a:endParaRPr lang="en-US" sz="900" dirty="0"/>
           </a:p>
@@ -7463,7 +10131,7 @@
                 <a:ea typeface="Arial" pitchFamily="34" charset="-122"/>
                 <a:cs typeface="Arial" pitchFamily="34" charset="-120"/>
               </a:rPr>
-              <a:t>その他</a:t>
+              <a:t>立地・アクセス</a:t>
             </a:r>
             <a:endParaRPr lang="en-US" sz="1300" dirty="0"/>
           </a:p>
@@ -7502,7 +10170,7 @@
                 <a:ea typeface="Arial" pitchFamily="34" charset="-122"/>
                 <a:cs typeface="Arial" pitchFamily="34" charset="-120"/>
               </a:rPr>
-              <a:t>その他のポジティブな評価</a:t>
+              <a:t>駅から近いので便利 エアコンが暖房のみだった</a:t>
             </a:r>
             <a:endParaRPr lang="en-US" sz="900" dirty="0"/>
           </a:p>
@@ -7532,6 +10200,17 @@
             <a:pPr indent="0" marL="0">
               <a:buNone/>
             </a:pPr>
+            <a:r>
+              <a:rPr lang="en-US" sz="900" i="1" dirty="0">
+                <a:solidFill>
+                  <a:srgbClr val="3B7DD8"/>
+                </a:solidFill>
+                <a:latin typeface="Arial" pitchFamily="34" charset="0"/>
+                <a:ea typeface="Arial" pitchFamily="34" charset="-122"/>
+                <a:cs typeface="Arial" pitchFamily="34" charset="-120"/>
+              </a:rPr>
+              <a:t>「横浜アリーナに近い エアコン設置されてるが温度調整出来ない」</a:t>
+            </a:r>
             <a:endParaRPr lang="en-US" sz="900" dirty="0"/>
           </a:p>
         </p:txBody>
@@ -7636,7 +10315,7 @@
                 <a:ea typeface="Arial" pitchFamily="34" charset="-122"/>
                 <a:cs typeface="Arial" pitchFamily="34" charset="-120"/>
               </a:rPr>
-              <a:t>少数</a:t>
+              <a:t>10件+</a:t>
             </a:r>
             <a:endParaRPr lang="en-US" sz="900" dirty="0"/>
           </a:p>
@@ -7675,7 +10354,7 @@
                 <a:ea typeface="Arial" pitchFamily="34" charset="-122"/>
                 <a:cs typeface="Arial" pitchFamily="34" charset="-120"/>
               </a:rPr>
-              <a:t>その他</a:t>
+              <a:t>スタッフの対応</a:t>
             </a:r>
             <a:endParaRPr lang="en-US" sz="1300" dirty="0"/>
           </a:p>
@@ -7714,7 +10393,7 @@
                 <a:ea typeface="Arial" pitchFamily="34" charset="-122"/>
                 <a:cs typeface="Arial" pitchFamily="34" charset="-120"/>
               </a:rPr>
-              <a:t>その他のポジティブな評価</a:t>
+              <a:t>スタッフも感じが良い</a:t>
             </a:r>
             <a:endParaRPr lang="en-US" sz="900" dirty="0"/>
           </a:p>
@@ -7744,6 +10423,17 @@
             <a:pPr indent="0" marL="0">
               <a:buNone/>
             </a:pPr>
+            <a:r>
+              <a:rPr lang="en-US" sz="900" i="1" dirty="0">
+                <a:solidFill>
+                  <a:srgbClr val="3B7DD8"/>
+                </a:solidFill>
+                <a:latin typeface="Arial" pitchFamily="34" charset="0"/>
+                <a:ea typeface="Arial" pitchFamily="34" charset="-122"/>
+                <a:cs typeface="Arial" pitchFamily="34" charset="-120"/>
+              </a:rPr>
+              <a:t>「スタッフの方は、丁寧で対応も良かったです」</a:t>
+            </a:r>
             <a:endParaRPr lang="en-US" sz="900" dirty="0"/>
           </a:p>
         </p:txBody>
@@ -7848,7 +10538,7 @@
                 <a:ea typeface="Arial" pitchFamily="34" charset="-122"/>
                 <a:cs typeface="Arial" pitchFamily="34" charset="-120"/>
               </a:rPr>
-              <a:t>少数</a:t>
+              <a:t>10件+</a:t>
             </a:r>
             <a:endParaRPr lang="en-US" sz="900" dirty="0"/>
           </a:p>
@@ -7887,7 +10577,7 @@
                 <a:ea typeface="Arial" pitchFamily="34" charset="-122"/>
                 <a:cs typeface="Arial" pitchFamily="34" charset="-120"/>
               </a:rPr>
-              <a:t>その他</a:t>
+              <a:t>清潔さ・清掃</a:t>
             </a:r>
             <a:endParaRPr lang="en-US" sz="1300" dirty="0"/>
           </a:p>
@@ -7926,7 +10616,7 @@
                 <a:ea typeface="Arial" pitchFamily="34" charset="-122"/>
                 <a:cs typeface="Arial" pitchFamily="34" charset="-120"/>
               </a:rPr>
-              <a:t>その他のポジティブな評価</a:t>
+              <a:t>部屋が綺麗</a:t>
             </a:r>
             <a:endParaRPr lang="en-US" sz="900" dirty="0"/>
           </a:p>
@@ -7956,6 +10646,17 @@
             <a:pPr indent="0" marL="0">
               <a:buNone/>
             </a:pPr>
+            <a:r>
+              <a:rPr lang="en-US" sz="900" i="1" dirty="0">
+                <a:solidFill>
+                  <a:srgbClr val="3B7DD8"/>
+                </a:solidFill>
+                <a:latin typeface="Arial" pitchFamily="34" charset="0"/>
+                <a:ea typeface="Arial" pitchFamily="34" charset="-122"/>
+                <a:cs typeface="Arial" pitchFamily="34" charset="-120"/>
+              </a:rPr>
+              <a:t>「部屋も広くきれいで清潔感もあり気持ち良く  過ごせました」</a:t>
+            </a:r>
             <a:endParaRPr lang="en-US" sz="900" dirty="0"/>
           </a:p>
         </p:txBody>
@@ -8060,7 +10761,7 @@
                 <a:ea typeface="Arial" pitchFamily="34" charset="-122"/>
                 <a:cs typeface="Arial" pitchFamily="34" charset="-120"/>
               </a:rPr>
-              <a:t>少数</a:t>
+              <a:t>10件+</a:t>
             </a:r>
             <a:endParaRPr lang="en-US" sz="900" dirty="0"/>
           </a:p>
@@ -8099,7 +10800,7 @@
                 <a:ea typeface="Arial" pitchFamily="34" charset="-122"/>
                 <a:cs typeface="Arial" pitchFamily="34" charset="-120"/>
               </a:rPr>
-              <a:t>その他</a:t>
+              <a:t>快適さ・設備</a:t>
             </a:r>
             <a:endParaRPr lang="en-US" sz="1300" dirty="0"/>
           </a:p>
@@ -8138,7 +10839,7 @@
                 <a:ea typeface="Arial" pitchFamily="34" charset="-122"/>
                 <a:cs typeface="Arial" pitchFamily="34" charset="-120"/>
               </a:rPr>
-              <a:t>その他のポジティブな評価</a:t>
+              <a:t>アメニティをケチっている</a:t>
             </a:r>
             <a:endParaRPr lang="en-US" sz="900" dirty="0"/>
           </a:p>
@@ -8168,6 +10869,17 @@
             <a:pPr indent="0" marL="0">
               <a:buNone/>
             </a:pPr>
+            <a:r>
+              <a:rPr lang="en-US" sz="900" i="1" dirty="0">
+                <a:solidFill>
+                  <a:srgbClr val="3B7DD8"/>
+                </a:solidFill>
+                <a:latin typeface="Arial" pitchFamily="34" charset="0"/>
+                <a:ea typeface="Arial" pitchFamily="34" charset="-122"/>
+                <a:cs typeface="Arial" pitchFamily="34" charset="-120"/>
+              </a:rPr>
+              <a:t>「お部屋がとても広くきれいで、掃除も行き届いていて、快適に過ごすことができました」</a:t>
+            </a:r>
             <a:endParaRPr lang="en-US" sz="900" dirty="0"/>
           </a:p>
         </p:txBody>
@@ -8272,7 +10984,7 @@
                 <a:ea typeface="Arial" pitchFamily="34" charset="-122"/>
                 <a:cs typeface="Arial" pitchFamily="34" charset="-120"/>
               </a:rPr>
-              <a:t>少数</a:t>
+              <a:t>7件</a:t>
             </a:r>
             <a:endParaRPr lang="en-US" sz="900" dirty="0"/>
           </a:p>
@@ -8311,7 +11023,7 @@
                 <a:ea typeface="Arial" pitchFamily="34" charset="-122"/>
                 <a:cs typeface="Arial" pitchFamily="34" charset="-120"/>
               </a:rPr>
-              <a:t>その他</a:t>
+              <a:t>コンビニ・周辺施設</a:t>
             </a:r>
             <a:endParaRPr lang="en-US" sz="1300" dirty="0"/>
           </a:p>
@@ -8350,7 +11062,7 @@
                 <a:ea typeface="Arial" pitchFamily="34" charset="-122"/>
                 <a:cs typeface="Arial" pitchFamily="34" charset="-120"/>
               </a:rPr>
-              <a:t>その他のポジティブな評価</a:t>
+              <a:t>何度かお世話になっていますが、駅からも近く、周辺に食事をする所やコンビニも多いので便利です</a:t>
             </a:r>
             <a:endParaRPr lang="en-US" sz="900" dirty="0"/>
           </a:p>
@@ -8380,6 +11092,17 @@
             <a:pPr indent="0" marL="0">
               <a:buNone/>
             </a:pPr>
+            <a:r>
+              <a:rPr lang="en-US" sz="900" i="1" dirty="0">
+                <a:solidFill>
+                  <a:srgbClr val="3B7DD8"/>
+                </a:solidFill>
+                <a:latin typeface="Arial" pitchFamily="34" charset="0"/>
+                <a:ea typeface="Arial" pitchFamily="34" charset="-122"/>
+                <a:cs typeface="Arial" pitchFamily="34" charset="-120"/>
+              </a:rPr>
+              <a:t>「22:00前までならホテルの一階にあるレストランも利用できそう」</a:t>
+            </a:r>
             <a:endParaRPr lang="en-US" sz="900" dirty="0"/>
           </a:p>
         </p:txBody>
@@ -8484,7 +11207,7 @@
                 <a:ea typeface="Arial" pitchFamily="34" charset="-122"/>
                 <a:cs typeface="Arial" pitchFamily="34" charset="-120"/>
               </a:rPr>
-              <a:t>少数</a:t>
+              <a:t>6件</a:t>
             </a:r>
             <a:endParaRPr lang="en-US" sz="900" dirty="0"/>
           </a:p>
@@ -8523,7 +11246,7 @@
                 <a:ea typeface="Arial" pitchFamily="34" charset="-122"/>
                 <a:cs typeface="Arial" pitchFamily="34" charset="-120"/>
               </a:rPr>
-              <a:t>その他</a:t>
+              <a:t>コストパフォーマンス</a:t>
             </a:r>
             <a:endParaRPr lang="en-US" sz="1300" dirty="0"/>
           </a:p>
@@ -8562,7 +11285,7 @@
                 <a:ea typeface="Arial" pitchFamily="34" charset="-122"/>
                 <a:cs typeface="Arial" pitchFamily="34" charset="-120"/>
               </a:rPr>
-              <a:t>その他のポジティブな評価</a:t>
+              <a:t>値段がそれなりで安い 室内の温度が高くて寝苦しい 窓を開ければ多少緩和されたがそれでもこの時期が寒いとはいえ、室温...</a:t>
             </a:r>
             <a:endParaRPr lang="en-US" sz="900" dirty="0"/>
           </a:p>
@@ -8592,6 +11315,17 @@
             <a:pPr indent="0" marL="0">
               <a:buNone/>
             </a:pPr>
+            <a:r>
+              <a:rPr lang="en-US" sz="900" i="1" dirty="0">
+                <a:solidFill>
+                  <a:srgbClr val="3B7DD8"/>
+                </a:solidFill>
+                <a:latin typeface="Arial" pitchFamily="34" charset="0"/>
+                <a:ea typeface="Arial" pitchFamily="34" charset="-122"/>
+                <a:cs typeface="Arial" pitchFamily="34" charset="-120"/>
+              </a:rPr>
+              <a:t>「安い ちょっとバスルームカーテンが雑菌臭で臭いのと、トイレの流す水が少なすぎて、トイレットペーパーが初回では流れな...」</a:t>
+            </a:r>
             <a:endParaRPr lang="en-US" sz="900" dirty="0"/>
           </a:p>
         </p:txBody>
@@ -9126,6 +11860,2198 @@
                   </a:tcPr>
                 </a:tc>
               </a:tr>
+              <a:tr h="320040">
+                <a:tc>
+                  <a:txBody>
+                    <a:bodyPr/>
+                    <a:lstStyle/>
+                    <a:p>
+                      <a:pPr algn="ctr" indent="0" marL="0">
+                        <a:buNone/>
+                      </a:pPr>
+                      <a:r>
+                        <a:rPr lang="en-US" sz="1200" b="1" dirty="0">
+                          <a:solidFill>
+                            <a:srgbClr val="DC2626"/>
+                          </a:solidFill>
+                          <a:latin typeface="Arial" pitchFamily="34" charset="0"/>
+                          <a:ea typeface="Arial" pitchFamily="34" charset="-122"/>
+                          <a:cs typeface="Arial" pitchFamily="34" charset="-120"/>
+                        </a:rPr>
+                        <a:t>S</a:t>
+                      </a:r>
+                      <a:endParaRPr lang="en-US" sz="1200" dirty="0">
+                        <a:latin typeface="Arial" charset="0"/>
+                        <a:ea typeface="Arial" charset="0"/>
+                        <a:cs typeface="Arial" charset="0"/>
+                      </a:endParaRPr>
+                    </a:p>
+                  </a:txBody>
+                  <a:tcPr marL="91440" marR="91440" marT="45720" marB="45720">
+                    <a:lnL w="6350" cap="flat" cmpd="sng" algn="ctr">
+                      <a:solidFill>
+                        <a:srgbClr val="CBD5E1"/>
+                      </a:solidFill>
+                      <a:prstDash val="solid"/>
+                      <a:round/>
+                      <a:headEnd type="none" w="med" len="med"/>
+                      <a:tailEnd type="none" w="med" len="med"/>
+                    </a:lnL>
+                    <a:lnR w="6350" cap="flat" cmpd="sng" algn="ctr">
+                      <a:solidFill>
+                        <a:srgbClr val="CBD5E1"/>
+                      </a:solidFill>
+                      <a:prstDash val="solid"/>
+                      <a:round/>
+                      <a:headEnd type="none" w="med" len="med"/>
+                      <a:tailEnd type="none" w="med" len="med"/>
+                    </a:lnR>
+                    <a:lnT w="6350" cap="flat" cmpd="sng" algn="ctr">
+                      <a:solidFill>
+                        <a:srgbClr val="CBD5E1"/>
+                      </a:solidFill>
+                      <a:prstDash val="solid"/>
+                      <a:round/>
+                      <a:headEnd type="none" w="med" len="med"/>
+                      <a:tailEnd type="none" w="med" len="med"/>
+                    </a:lnT>
+                    <a:lnB w="6350" cap="flat" cmpd="sng" algn="ctr">
+                      <a:solidFill>
+                        <a:srgbClr val="CBD5E1"/>
+                      </a:solidFill>
+                      <a:prstDash val="solid"/>
+                      <a:round/>
+                      <a:headEnd type="none" w="med" len="med"/>
+                      <a:tailEnd type="none" w="med" len="med"/>
+                    </a:lnB>
+                    <a:solidFill>
+                      <a:srgbClr val="E8EFF8"/>
+                    </a:solidFill>
+                  </a:tcPr>
+                </a:tc>
+                <a:tc>
+                  <a:txBody>
+                    <a:bodyPr/>
+                    <a:lstStyle/>
+                    <a:p>
+                      <a:pPr indent="0" marL="0">
+                        <a:buNone/>
+                      </a:pPr>
+                      <a:r>
+                        <a:rPr lang="en-US" sz="900" b="1" dirty="0">
+                          <a:solidFill>
+                            <a:srgbClr val="334155"/>
+                          </a:solidFill>
+                          <a:latin typeface="Arial" pitchFamily="34" charset="0"/>
+                          <a:ea typeface="Arial" pitchFamily="34" charset="-122"/>
+                          <a:cs typeface="Arial" pitchFamily="34" charset="-120"/>
+                        </a:rPr>
+                        <a:t>浴室・水回り</a:t>
+                      </a:r>
+                      <a:endParaRPr lang="en-US" sz="900" dirty="0">
+                        <a:latin typeface="Arial" charset="0"/>
+                        <a:ea typeface="Arial" charset="0"/>
+                        <a:cs typeface="Arial" charset="0"/>
+                      </a:endParaRPr>
+                    </a:p>
+                  </a:txBody>
+                  <a:tcPr marL="91440" marR="91440" marT="45720" marB="45720">
+                    <a:lnL w="6350" cap="flat" cmpd="sng" algn="ctr">
+                      <a:solidFill>
+                        <a:srgbClr val="CBD5E1"/>
+                      </a:solidFill>
+                      <a:prstDash val="solid"/>
+                      <a:round/>
+                      <a:headEnd type="none" w="med" len="med"/>
+                      <a:tailEnd type="none" w="med" len="med"/>
+                    </a:lnL>
+                    <a:lnR w="6350" cap="flat" cmpd="sng" algn="ctr">
+                      <a:solidFill>
+                        <a:srgbClr val="CBD5E1"/>
+                      </a:solidFill>
+                      <a:prstDash val="solid"/>
+                      <a:round/>
+                      <a:headEnd type="none" w="med" len="med"/>
+                      <a:tailEnd type="none" w="med" len="med"/>
+                    </a:lnR>
+                    <a:lnT w="6350" cap="flat" cmpd="sng" algn="ctr">
+                      <a:solidFill>
+                        <a:srgbClr val="CBD5E1"/>
+                      </a:solidFill>
+                      <a:prstDash val="solid"/>
+                      <a:round/>
+                      <a:headEnd type="none" w="med" len="med"/>
+                      <a:tailEnd type="none" w="med" len="med"/>
+                    </a:lnT>
+                    <a:lnB w="6350" cap="flat" cmpd="sng" algn="ctr">
+                      <a:solidFill>
+                        <a:srgbClr val="CBD5E1"/>
+                      </a:solidFill>
+                      <a:prstDash val="solid"/>
+                      <a:round/>
+                      <a:headEnd type="none" w="med" len="med"/>
+                      <a:tailEnd type="none" w="med" len="med"/>
+                    </a:lnB>
+                    <a:solidFill>
+                      <a:srgbClr val="E8EFF8"/>
+                    </a:solidFill>
+                  </a:tcPr>
+                </a:tc>
+                <a:tc>
+                  <a:txBody>
+                    <a:bodyPr/>
+                    <a:lstStyle/>
+                    <a:p>
+                      <a:pPr indent="0" marL="0">
+                        <a:buNone/>
+                      </a:pPr>
+                      <a:r>
+                        <a:rPr lang="en-US" sz="900" dirty="0">
+                          <a:solidFill>
+                            <a:srgbClr val="64748B"/>
+                          </a:solidFill>
+                          <a:latin typeface="Arial" pitchFamily="34" charset="0"/>
+                          <a:ea typeface="Arial" pitchFamily="34" charset="-122"/>
+                          <a:cs typeface="Arial" pitchFamily="34" charset="-120"/>
+                        </a:rPr>
+                        <a:t>シャワーの温度調節に苦労します</a:t>
+                      </a:r>
+                      <a:endParaRPr lang="en-US" sz="900" dirty="0">
+                        <a:latin typeface="Arial" charset="0"/>
+                        <a:ea typeface="Arial" charset="0"/>
+                        <a:cs typeface="Arial" charset="0"/>
+                      </a:endParaRPr>
+                    </a:p>
+                  </a:txBody>
+                  <a:tcPr marL="91440" marR="91440" marT="45720" marB="45720">
+                    <a:lnL w="6350" cap="flat" cmpd="sng" algn="ctr">
+                      <a:solidFill>
+                        <a:srgbClr val="CBD5E1"/>
+                      </a:solidFill>
+                      <a:prstDash val="solid"/>
+                      <a:round/>
+                      <a:headEnd type="none" w="med" len="med"/>
+                      <a:tailEnd type="none" w="med" len="med"/>
+                    </a:lnL>
+                    <a:lnR w="6350" cap="flat" cmpd="sng" algn="ctr">
+                      <a:solidFill>
+                        <a:srgbClr val="CBD5E1"/>
+                      </a:solidFill>
+                      <a:prstDash val="solid"/>
+                      <a:round/>
+                      <a:headEnd type="none" w="med" len="med"/>
+                      <a:tailEnd type="none" w="med" len="med"/>
+                    </a:lnR>
+                    <a:lnT w="6350" cap="flat" cmpd="sng" algn="ctr">
+                      <a:solidFill>
+                        <a:srgbClr val="CBD5E1"/>
+                      </a:solidFill>
+                      <a:prstDash val="solid"/>
+                      <a:round/>
+                      <a:headEnd type="none" w="med" len="med"/>
+                      <a:tailEnd type="none" w="med" len="med"/>
+                    </a:lnT>
+                    <a:lnB w="6350" cap="flat" cmpd="sng" algn="ctr">
+                      <a:solidFill>
+                        <a:srgbClr val="CBD5E1"/>
+                      </a:solidFill>
+                      <a:prstDash val="solid"/>
+                      <a:round/>
+                      <a:headEnd type="none" w="med" len="med"/>
+                      <a:tailEnd type="none" w="med" len="med"/>
+                    </a:lnB>
+                    <a:solidFill>
+                      <a:srgbClr val="E8EFF8"/>
+                    </a:solidFill>
+                  </a:tcPr>
+                </a:tc>
+                <a:tc>
+                  <a:txBody>
+                    <a:bodyPr/>
+                    <a:lstStyle/>
+                    <a:p>
+                      <a:pPr algn="ctr" indent="0" marL="0">
+                        <a:buNone/>
+                      </a:pPr>
+                      <a:r>
+                        <a:rPr lang="en-US" sz="900" dirty="0">
+                          <a:solidFill>
+                            <a:srgbClr val="334155"/>
+                          </a:solidFill>
+                          <a:latin typeface="Arial" pitchFamily="34" charset="0"/>
+                          <a:ea typeface="Arial" pitchFamily="34" charset="-122"/>
+                          <a:cs typeface="Arial" pitchFamily="34" charset="-120"/>
+                        </a:rPr>
+                        <a:t>16件</a:t>
+                      </a:r>
+                      <a:endParaRPr lang="en-US" sz="900" dirty="0">
+                        <a:latin typeface="Arial" charset="0"/>
+                        <a:ea typeface="Arial" charset="0"/>
+                        <a:cs typeface="Arial" charset="0"/>
+                      </a:endParaRPr>
+                    </a:p>
+                  </a:txBody>
+                  <a:tcPr marL="91440" marR="91440" marT="45720" marB="45720">
+                    <a:lnL w="6350" cap="flat" cmpd="sng" algn="ctr">
+                      <a:solidFill>
+                        <a:srgbClr val="CBD5E1"/>
+                      </a:solidFill>
+                      <a:prstDash val="solid"/>
+                      <a:round/>
+                      <a:headEnd type="none" w="med" len="med"/>
+                      <a:tailEnd type="none" w="med" len="med"/>
+                    </a:lnL>
+                    <a:lnR w="6350" cap="flat" cmpd="sng" algn="ctr">
+                      <a:solidFill>
+                        <a:srgbClr val="CBD5E1"/>
+                      </a:solidFill>
+                      <a:prstDash val="solid"/>
+                      <a:round/>
+                      <a:headEnd type="none" w="med" len="med"/>
+                      <a:tailEnd type="none" w="med" len="med"/>
+                    </a:lnR>
+                    <a:lnT w="6350" cap="flat" cmpd="sng" algn="ctr">
+                      <a:solidFill>
+                        <a:srgbClr val="CBD5E1"/>
+                      </a:solidFill>
+                      <a:prstDash val="solid"/>
+                      <a:round/>
+                      <a:headEnd type="none" w="med" len="med"/>
+                      <a:tailEnd type="none" w="med" len="med"/>
+                    </a:lnT>
+                    <a:lnB w="6350" cap="flat" cmpd="sng" algn="ctr">
+                      <a:solidFill>
+                        <a:srgbClr val="CBD5E1"/>
+                      </a:solidFill>
+                      <a:prstDash val="solid"/>
+                      <a:round/>
+                      <a:headEnd type="none" w="med" len="med"/>
+                      <a:tailEnd type="none" w="med" len="med"/>
+                    </a:lnB>
+                    <a:solidFill>
+                      <a:srgbClr val="E8EFF8"/>
+                    </a:solidFill>
+                  </a:tcPr>
+                </a:tc>
+              </a:tr>
+              <a:tr h="320040">
+                <a:tc>
+                  <a:txBody>
+                    <a:bodyPr/>
+                    <a:lstStyle/>
+                    <a:p>
+                      <a:pPr algn="ctr" indent="0" marL="0">
+                        <a:buNone/>
+                      </a:pPr>
+                      <a:r>
+                        <a:rPr lang="en-US" sz="1200" b="1" dirty="0">
+                          <a:solidFill>
+                            <a:srgbClr val="EA580C"/>
+                          </a:solidFill>
+                          <a:latin typeface="Arial" pitchFamily="34" charset="0"/>
+                          <a:ea typeface="Arial" pitchFamily="34" charset="-122"/>
+                          <a:cs typeface="Arial" pitchFamily="34" charset="-120"/>
+                        </a:rPr>
+                        <a:t>A</a:t>
+                      </a:r>
+                      <a:endParaRPr lang="en-US" sz="1200" dirty="0">
+                        <a:latin typeface="Arial" charset="0"/>
+                        <a:ea typeface="Arial" charset="0"/>
+                        <a:cs typeface="Arial" charset="0"/>
+                      </a:endParaRPr>
+                    </a:p>
+                  </a:txBody>
+                  <a:tcPr marL="91440" marR="91440" marT="45720" marB="45720">
+                    <a:lnL w="6350" cap="flat" cmpd="sng" algn="ctr">
+                      <a:solidFill>
+                        <a:srgbClr val="CBD5E1"/>
+                      </a:solidFill>
+                      <a:prstDash val="solid"/>
+                      <a:round/>
+                      <a:headEnd type="none" w="med" len="med"/>
+                      <a:tailEnd type="none" w="med" len="med"/>
+                    </a:lnL>
+                    <a:lnR w="6350" cap="flat" cmpd="sng" algn="ctr">
+                      <a:solidFill>
+                        <a:srgbClr val="CBD5E1"/>
+                      </a:solidFill>
+                      <a:prstDash val="solid"/>
+                      <a:round/>
+                      <a:headEnd type="none" w="med" len="med"/>
+                      <a:tailEnd type="none" w="med" len="med"/>
+                    </a:lnR>
+                    <a:lnT w="6350" cap="flat" cmpd="sng" algn="ctr">
+                      <a:solidFill>
+                        <a:srgbClr val="CBD5E1"/>
+                      </a:solidFill>
+                      <a:prstDash val="solid"/>
+                      <a:round/>
+                      <a:headEnd type="none" w="med" len="med"/>
+                      <a:tailEnd type="none" w="med" len="med"/>
+                    </a:lnT>
+                    <a:lnB w="6350" cap="flat" cmpd="sng" algn="ctr">
+                      <a:solidFill>
+                        <a:srgbClr val="CBD5E1"/>
+                      </a:solidFill>
+                      <a:prstDash val="solid"/>
+                      <a:round/>
+                      <a:headEnd type="none" w="med" len="med"/>
+                      <a:tailEnd type="none" w="med" len="med"/>
+                    </a:lnB>
+                    <a:solidFill>
+                      <a:srgbClr val="FFFFFF"/>
+                    </a:solidFill>
+                  </a:tcPr>
+                </a:tc>
+                <a:tc>
+                  <a:txBody>
+                    <a:bodyPr/>
+                    <a:lstStyle/>
+                    <a:p>
+                      <a:pPr indent="0" marL="0">
+                        <a:buNone/>
+                      </a:pPr>
+                      <a:r>
+                        <a:rPr lang="en-US" sz="900" b="1" dirty="0">
+                          <a:solidFill>
+                            <a:srgbClr val="334155"/>
+                          </a:solidFill>
+                          <a:latin typeface="Arial" pitchFamily="34" charset="0"/>
+                          <a:ea typeface="Arial" pitchFamily="34" charset="-122"/>
+                          <a:cs typeface="Arial" pitchFamily="34" charset="-120"/>
+                        </a:rPr>
+                        <a:t>エアコン・空調</a:t>
+                      </a:r>
+                      <a:endParaRPr lang="en-US" sz="900" dirty="0">
+                        <a:latin typeface="Arial" charset="0"/>
+                        <a:ea typeface="Arial" charset="0"/>
+                        <a:cs typeface="Arial" charset="0"/>
+                      </a:endParaRPr>
+                    </a:p>
+                  </a:txBody>
+                  <a:tcPr marL="91440" marR="91440" marT="45720" marB="45720">
+                    <a:lnL w="6350" cap="flat" cmpd="sng" algn="ctr">
+                      <a:solidFill>
+                        <a:srgbClr val="CBD5E1"/>
+                      </a:solidFill>
+                      <a:prstDash val="solid"/>
+                      <a:round/>
+                      <a:headEnd type="none" w="med" len="med"/>
+                      <a:tailEnd type="none" w="med" len="med"/>
+                    </a:lnL>
+                    <a:lnR w="6350" cap="flat" cmpd="sng" algn="ctr">
+                      <a:solidFill>
+                        <a:srgbClr val="CBD5E1"/>
+                      </a:solidFill>
+                      <a:prstDash val="solid"/>
+                      <a:round/>
+                      <a:headEnd type="none" w="med" len="med"/>
+                      <a:tailEnd type="none" w="med" len="med"/>
+                    </a:lnR>
+                    <a:lnT w="6350" cap="flat" cmpd="sng" algn="ctr">
+                      <a:solidFill>
+                        <a:srgbClr val="CBD5E1"/>
+                      </a:solidFill>
+                      <a:prstDash val="solid"/>
+                      <a:round/>
+                      <a:headEnd type="none" w="med" len="med"/>
+                      <a:tailEnd type="none" w="med" len="med"/>
+                    </a:lnT>
+                    <a:lnB w="6350" cap="flat" cmpd="sng" algn="ctr">
+                      <a:solidFill>
+                        <a:srgbClr val="CBD5E1"/>
+                      </a:solidFill>
+                      <a:prstDash val="solid"/>
+                      <a:round/>
+                      <a:headEnd type="none" w="med" len="med"/>
+                      <a:tailEnd type="none" w="med" len="med"/>
+                    </a:lnB>
+                    <a:solidFill>
+                      <a:srgbClr val="FFFFFF"/>
+                    </a:solidFill>
+                  </a:tcPr>
+                </a:tc>
+                <a:tc>
+                  <a:txBody>
+                    <a:bodyPr/>
+                    <a:lstStyle/>
+                    <a:p>
+                      <a:pPr indent="0" marL="0">
+                        <a:buNone/>
+                      </a:pPr>
+                      <a:r>
+                        <a:rPr lang="en-US" sz="900" dirty="0">
+                          <a:solidFill>
+                            <a:srgbClr val="64748B"/>
+                          </a:solidFill>
+                          <a:latin typeface="Arial" pitchFamily="34" charset="0"/>
+                          <a:ea typeface="Arial" pitchFamily="34" charset="-122"/>
+                          <a:cs typeface="Arial" pitchFamily="34" charset="-120"/>
+                        </a:rPr>
+                        <a:t>シャワーの温度調節に苦労します</a:t>
+                      </a:r>
+                      <a:endParaRPr lang="en-US" sz="900" dirty="0">
+                        <a:latin typeface="Arial" charset="0"/>
+                        <a:ea typeface="Arial" charset="0"/>
+                        <a:cs typeface="Arial" charset="0"/>
+                      </a:endParaRPr>
+                    </a:p>
+                  </a:txBody>
+                  <a:tcPr marL="91440" marR="91440" marT="45720" marB="45720">
+                    <a:lnL w="6350" cap="flat" cmpd="sng" algn="ctr">
+                      <a:solidFill>
+                        <a:srgbClr val="CBD5E1"/>
+                      </a:solidFill>
+                      <a:prstDash val="solid"/>
+                      <a:round/>
+                      <a:headEnd type="none" w="med" len="med"/>
+                      <a:tailEnd type="none" w="med" len="med"/>
+                    </a:lnL>
+                    <a:lnR w="6350" cap="flat" cmpd="sng" algn="ctr">
+                      <a:solidFill>
+                        <a:srgbClr val="CBD5E1"/>
+                      </a:solidFill>
+                      <a:prstDash val="solid"/>
+                      <a:round/>
+                      <a:headEnd type="none" w="med" len="med"/>
+                      <a:tailEnd type="none" w="med" len="med"/>
+                    </a:lnR>
+                    <a:lnT w="6350" cap="flat" cmpd="sng" algn="ctr">
+                      <a:solidFill>
+                        <a:srgbClr val="CBD5E1"/>
+                      </a:solidFill>
+                      <a:prstDash val="solid"/>
+                      <a:round/>
+                      <a:headEnd type="none" w="med" len="med"/>
+                      <a:tailEnd type="none" w="med" len="med"/>
+                    </a:lnT>
+                    <a:lnB w="6350" cap="flat" cmpd="sng" algn="ctr">
+                      <a:solidFill>
+                        <a:srgbClr val="CBD5E1"/>
+                      </a:solidFill>
+                      <a:prstDash val="solid"/>
+                      <a:round/>
+                      <a:headEnd type="none" w="med" len="med"/>
+                      <a:tailEnd type="none" w="med" len="med"/>
+                    </a:lnB>
+                    <a:solidFill>
+                      <a:srgbClr val="FFFFFF"/>
+                    </a:solidFill>
+                  </a:tcPr>
+                </a:tc>
+                <a:tc>
+                  <a:txBody>
+                    <a:bodyPr/>
+                    <a:lstStyle/>
+                    <a:p>
+                      <a:pPr algn="ctr" indent="0" marL="0">
+                        <a:buNone/>
+                      </a:pPr>
+                      <a:r>
+                        <a:rPr lang="en-US" sz="900" dirty="0">
+                          <a:solidFill>
+                            <a:srgbClr val="334155"/>
+                          </a:solidFill>
+                          <a:latin typeface="Arial" pitchFamily="34" charset="0"/>
+                          <a:ea typeface="Arial" pitchFamily="34" charset="-122"/>
+                          <a:cs typeface="Arial" pitchFamily="34" charset="-120"/>
+                        </a:rPr>
+                        <a:t>12件</a:t>
+                      </a:r>
+                      <a:endParaRPr lang="en-US" sz="900" dirty="0">
+                        <a:latin typeface="Arial" charset="0"/>
+                        <a:ea typeface="Arial" charset="0"/>
+                        <a:cs typeface="Arial" charset="0"/>
+                      </a:endParaRPr>
+                    </a:p>
+                  </a:txBody>
+                  <a:tcPr marL="91440" marR="91440" marT="45720" marB="45720">
+                    <a:lnL w="6350" cap="flat" cmpd="sng" algn="ctr">
+                      <a:solidFill>
+                        <a:srgbClr val="CBD5E1"/>
+                      </a:solidFill>
+                      <a:prstDash val="solid"/>
+                      <a:round/>
+                      <a:headEnd type="none" w="med" len="med"/>
+                      <a:tailEnd type="none" w="med" len="med"/>
+                    </a:lnL>
+                    <a:lnR w="6350" cap="flat" cmpd="sng" algn="ctr">
+                      <a:solidFill>
+                        <a:srgbClr val="CBD5E1"/>
+                      </a:solidFill>
+                      <a:prstDash val="solid"/>
+                      <a:round/>
+                      <a:headEnd type="none" w="med" len="med"/>
+                      <a:tailEnd type="none" w="med" len="med"/>
+                    </a:lnR>
+                    <a:lnT w="6350" cap="flat" cmpd="sng" algn="ctr">
+                      <a:solidFill>
+                        <a:srgbClr val="CBD5E1"/>
+                      </a:solidFill>
+                      <a:prstDash val="solid"/>
+                      <a:round/>
+                      <a:headEnd type="none" w="med" len="med"/>
+                      <a:tailEnd type="none" w="med" len="med"/>
+                    </a:lnT>
+                    <a:lnB w="6350" cap="flat" cmpd="sng" algn="ctr">
+                      <a:solidFill>
+                        <a:srgbClr val="CBD5E1"/>
+                      </a:solidFill>
+                      <a:prstDash val="solid"/>
+                      <a:round/>
+                      <a:headEnd type="none" w="med" len="med"/>
+                      <a:tailEnd type="none" w="med" len="med"/>
+                    </a:lnB>
+                    <a:solidFill>
+                      <a:srgbClr val="FFFFFF"/>
+                    </a:solidFill>
+                  </a:tcPr>
+                </a:tc>
+              </a:tr>
+              <a:tr h="320040">
+                <a:tc>
+                  <a:txBody>
+                    <a:bodyPr/>
+                    <a:lstStyle/>
+                    <a:p>
+                      <a:pPr algn="ctr" indent="0" marL="0">
+                        <a:buNone/>
+                      </a:pPr>
+                      <a:r>
+                        <a:rPr lang="en-US" sz="1200" b="1" dirty="0">
+                          <a:solidFill>
+                            <a:srgbClr val="EA580C"/>
+                          </a:solidFill>
+                          <a:latin typeface="Arial" pitchFamily="34" charset="0"/>
+                          <a:ea typeface="Arial" pitchFamily="34" charset="-122"/>
+                          <a:cs typeface="Arial" pitchFamily="34" charset="-120"/>
+                        </a:rPr>
+                        <a:t>A</a:t>
+                      </a:r>
+                      <a:endParaRPr lang="en-US" sz="1200" dirty="0">
+                        <a:latin typeface="Arial" charset="0"/>
+                        <a:ea typeface="Arial" charset="0"/>
+                        <a:cs typeface="Arial" charset="0"/>
+                      </a:endParaRPr>
+                    </a:p>
+                  </a:txBody>
+                  <a:tcPr marL="91440" marR="91440" marT="45720" marB="45720">
+                    <a:lnL w="6350" cap="flat" cmpd="sng" algn="ctr">
+                      <a:solidFill>
+                        <a:srgbClr val="CBD5E1"/>
+                      </a:solidFill>
+                      <a:prstDash val="solid"/>
+                      <a:round/>
+                      <a:headEnd type="none" w="med" len="med"/>
+                      <a:tailEnd type="none" w="med" len="med"/>
+                    </a:lnL>
+                    <a:lnR w="6350" cap="flat" cmpd="sng" algn="ctr">
+                      <a:solidFill>
+                        <a:srgbClr val="CBD5E1"/>
+                      </a:solidFill>
+                      <a:prstDash val="solid"/>
+                      <a:round/>
+                      <a:headEnd type="none" w="med" len="med"/>
+                      <a:tailEnd type="none" w="med" len="med"/>
+                    </a:lnR>
+                    <a:lnT w="6350" cap="flat" cmpd="sng" algn="ctr">
+                      <a:solidFill>
+                        <a:srgbClr val="CBD5E1"/>
+                      </a:solidFill>
+                      <a:prstDash val="solid"/>
+                      <a:round/>
+                      <a:headEnd type="none" w="med" len="med"/>
+                      <a:tailEnd type="none" w="med" len="med"/>
+                    </a:lnT>
+                    <a:lnB w="6350" cap="flat" cmpd="sng" algn="ctr">
+                      <a:solidFill>
+                        <a:srgbClr val="CBD5E1"/>
+                      </a:solidFill>
+                      <a:prstDash val="solid"/>
+                      <a:round/>
+                      <a:headEnd type="none" w="med" len="med"/>
+                      <a:tailEnd type="none" w="med" len="med"/>
+                    </a:lnB>
+                    <a:solidFill>
+                      <a:srgbClr val="E8EFF8"/>
+                    </a:solidFill>
+                  </a:tcPr>
+                </a:tc>
+                <a:tc>
+                  <a:txBody>
+                    <a:bodyPr/>
+                    <a:lstStyle/>
+                    <a:p>
+                      <a:pPr indent="0" marL="0">
+                        <a:buNone/>
+                      </a:pPr>
+                      <a:r>
+                        <a:rPr lang="en-US" sz="900" b="1" dirty="0">
+                          <a:solidFill>
+                            <a:srgbClr val="334155"/>
+                          </a:solidFill>
+                          <a:latin typeface="Arial" pitchFamily="34" charset="0"/>
+                          <a:ea typeface="Arial" pitchFamily="34" charset="-122"/>
+                          <a:cs typeface="Arial" pitchFamily="34" charset="-120"/>
+                        </a:rPr>
+                        <a:t>設備の老朽化</a:t>
+                      </a:r>
+                      <a:endParaRPr lang="en-US" sz="900" dirty="0">
+                        <a:latin typeface="Arial" charset="0"/>
+                        <a:ea typeface="Arial" charset="0"/>
+                        <a:cs typeface="Arial" charset="0"/>
+                      </a:endParaRPr>
+                    </a:p>
+                  </a:txBody>
+                  <a:tcPr marL="91440" marR="91440" marT="45720" marB="45720">
+                    <a:lnL w="6350" cap="flat" cmpd="sng" algn="ctr">
+                      <a:solidFill>
+                        <a:srgbClr val="CBD5E1"/>
+                      </a:solidFill>
+                      <a:prstDash val="solid"/>
+                      <a:round/>
+                      <a:headEnd type="none" w="med" len="med"/>
+                      <a:tailEnd type="none" w="med" len="med"/>
+                    </a:lnL>
+                    <a:lnR w="6350" cap="flat" cmpd="sng" algn="ctr">
+                      <a:solidFill>
+                        <a:srgbClr val="CBD5E1"/>
+                      </a:solidFill>
+                      <a:prstDash val="solid"/>
+                      <a:round/>
+                      <a:headEnd type="none" w="med" len="med"/>
+                      <a:tailEnd type="none" w="med" len="med"/>
+                    </a:lnR>
+                    <a:lnT w="6350" cap="flat" cmpd="sng" algn="ctr">
+                      <a:solidFill>
+                        <a:srgbClr val="CBD5E1"/>
+                      </a:solidFill>
+                      <a:prstDash val="solid"/>
+                      <a:round/>
+                      <a:headEnd type="none" w="med" len="med"/>
+                      <a:tailEnd type="none" w="med" len="med"/>
+                    </a:lnT>
+                    <a:lnB w="6350" cap="flat" cmpd="sng" algn="ctr">
+                      <a:solidFill>
+                        <a:srgbClr val="CBD5E1"/>
+                      </a:solidFill>
+                      <a:prstDash val="solid"/>
+                      <a:round/>
+                      <a:headEnd type="none" w="med" len="med"/>
+                      <a:tailEnd type="none" w="med" len="med"/>
+                    </a:lnB>
+                    <a:solidFill>
+                      <a:srgbClr val="E8EFF8"/>
+                    </a:solidFill>
+                  </a:tcPr>
+                </a:tc>
+                <a:tc>
+                  <a:txBody>
+                    <a:bodyPr/>
+                    <a:lstStyle/>
+                    <a:p>
+                      <a:pPr indent="0" marL="0">
+                        <a:buNone/>
+                      </a:pPr>
+                      <a:r>
+                        <a:rPr lang="en-US" sz="900" dirty="0">
+                          <a:solidFill>
+                            <a:srgbClr val="64748B"/>
+                          </a:solidFill>
+                          <a:latin typeface="Arial" pitchFamily="34" charset="0"/>
+                          <a:ea typeface="Arial" pitchFamily="34" charset="-122"/>
+                          <a:cs typeface="Arial" pitchFamily="34" charset="-120"/>
+                        </a:rPr>
+                        <a:t>少し建物古いかも</a:t>
+                      </a:r>
+                      <a:endParaRPr lang="en-US" sz="900" dirty="0">
+                        <a:latin typeface="Arial" charset="0"/>
+                        <a:ea typeface="Arial" charset="0"/>
+                        <a:cs typeface="Arial" charset="0"/>
+                      </a:endParaRPr>
+                    </a:p>
+                  </a:txBody>
+                  <a:tcPr marL="91440" marR="91440" marT="45720" marB="45720">
+                    <a:lnL w="6350" cap="flat" cmpd="sng" algn="ctr">
+                      <a:solidFill>
+                        <a:srgbClr val="CBD5E1"/>
+                      </a:solidFill>
+                      <a:prstDash val="solid"/>
+                      <a:round/>
+                      <a:headEnd type="none" w="med" len="med"/>
+                      <a:tailEnd type="none" w="med" len="med"/>
+                    </a:lnL>
+                    <a:lnR w="6350" cap="flat" cmpd="sng" algn="ctr">
+                      <a:solidFill>
+                        <a:srgbClr val="CBD5E1"/>
+                      </a:solidFill>
+                      <a:prstDash val="solid"/>
+                      <a:round/>
+                      <a:headEnd type="none" w="med" len="med"/>
+                      <a:tailEnd type="none" w="med" len="med"/>
+                    </a:lnR>
+                    <a:lnT w="6350" cap="flat" cmpd="sng" algn="ctr">
+                      <a:solidFill>
+                        <a:srgbClr val="CBD5E1"/>
+                      </a:solidFill>
+                      <a:prstDash val="solid"/>
+                      <a:round/>
+                      <a:headEnd type="none" w="med" len="med"/>
+                      <a:tailEnd type="none" w="med" len="med"/>
+                    </a:lnT>
+                    <a:lnB w="6350" cap="flat" cmpd="sng" algn="ctr">
+                      <a:solidFill>
+                        <a:srgbClr val="CBD5E1"/>
+                      </a:solidFill>
+                      <a:prstDash val="solid"/>
+                      <a:round/>
+                      <a:headEnd type="none" w="med" len="med"/>
+                      <a:tailEnd type="none" w="med" len="med"/>
+                    </a:lnB>
+                    <a:solidFill>
+                      <a:srgbClr val="E8EFF8"/>
+                    </a:solidFill>
+                  </a:tcPr>
+                </a:tc>
+                <a:tc>
+                  <a:txBody>
+                    <a:bodyPr/>
+                    <a:lstStyle/>
+                    <a:p>
+                      <a:pPr algn="ctr" indent="0" marL="0">
+                        <a:buNone/>
+                      </a:pPr>
+                      <a:r>
+                        <a:rPr lang="en-US" sz="900" dirty="0">
+                          <a:solidFill>
+                            <a:srgbClr val="334155"/>
+                          </a:solidFill>
+                          <a:latin typeface="Arial" pitchFamily="34" charset="0"/>
+                          <a:ea typeface="Arial" pitchFamily="34" charset="-122"/>
+                          <a:cs typeface="Arial" pitchFamily="34" charset="-120"/>
+                        </a:rPr>
+                        <a:t>8件</a:t>
+                      </a:r>
+                      <a:endParaRPr lang="en-US" sz="900" dirty="0">
+                        <a:latin typeface="Arial" charset="0"/>
+                        <a:ea typeface="Arial" charset="0"/>
+                        <a:cs typeface="Arial" charset="0"/>
+                      </a:endParaRPr>
+                    </a:p>
+                  </a:txBody>
+                  <a:tcPr marL="91440" marR="91440" marT="45720" marB="45720">
+                    <a:lnL w="6350" cap="flat" cmpd="sng" algn="ctr">
+                      <a:solidFill>
+                        <a:srgbClr val="CBD5E1"/>
+                      </a:solidFill>
+                      <a:prstDash val="solid"/>
+                      <a:round/>
+                      <a:headEnd type="none" w="med" len="med"/>
+                      <a:tailEnd type="none" w="med" len="med"/>
+                    </a:lnL>
+                    <a:lnR w="6350" cap="flat" cmpd="sng" algn="ctr">
+                      <a:solidFill>
+                        <a:srgbClr val="CBD5E1"/>
+                      </a:solidFill>
+                      <a:prstDash val="solid"/>
+                      <a:round/>
+                      <a:headEnd type="none" w="med" len="med"/>
+                      <a:tailEnd type="none" w="med" len="med"/>
+                    </a:lnR>
+                    <a:lnT w="6350" cap="flat" cmpd="sng" algn="ctr">
+                      <a:solidFill>
+                        <a:srgbClr val="CBD5E1"/>
+                      </a:solidFill>
+                      <a:prstDash val="solid"/>
+                      <a:round/>
+                      <a:headEnd type="none" w="med" len="med"/>
+                      <a:tailEnd type="none" w="med" len="med"/>
+                    </a:lnT>
+                    <a:lnB w="6350" cap="flat" cmpd="sng" algn="ctr">
+                      <a:solidFill>
+                        <a:srgbClr val="CBD5E1"/>
+                      </a:solidFill>
+                      <a:prstDash val="solid"/>
+                      <a:round/>
+                      <a:headEnd type="none" w="med" len="med"/>
+                      <a:tailEnd type="none" w="med" len="med"/>
+                    </a:lnB>
+                    <a:solidFill>
+                      <a:srgbClr val="E8EFF8"/>
+                    </a:solidFill>
+                  </a:tcPr>
+                </a:tc>
+              </a:tr>
+              <a:tr h="320040">
+                <a:tc>
+                  <a:txBody>
+                    <a:bodyPr/>
+                    <a:lstStyle/>
+                    <a:p>
+                      <a:pPr algn="ctr" indent="0" marL="0">
+                        <a:buNone/>
+                      </a:pPr>
+                      <a:r>
+                        <a:rPr lang="en-US" sz="1200" b="1" dirty="0">
+                          <a:solidFill>
+                            <a:srgbClr val="D4A843"/>
+                          </a:solidFill>
+                          <a:latin typeface="Arial" pitchFamily="34" charset="0"/>
+                          <a:ea typeface="Arial" pitchFamily="34" charset="-122"/>
+                          <a:cs typeface="Arial" pitchFamily="34" charset="-120"/>
+                        </a:rPr>
+                        <a:t>B</a:t>
+                      </a:r>
+                      <a:endParaRPr lang="en-US" sz="1200" dirty="0">
+                        <a:latin typeface="Arial" charset="0"/>
+                        <a:ea typeface="Arial" charset="0"/>
+                        <a:cs typeface="Arial" charset="0"/>
+                      </a:endParaRPr>
+                    </a:p>
+                  </a:txBody>
+                  <a:tcPr marL="91440" marR="91440" marT="45720" marB="45720">
+                    <a:lnL w="6350" cap="flat" cmpd="sng" algn="ctr">
+                      <a:solidFill>
+                        <a:srgbClr val="CBD5E1"/>
+                      </a:solidFill>
+                      <a:prstDash val="solid"/>
+                      <a:round/>
+                      <a:headEnd type="none" w="med" len="med"/>
+                      <a:tailEnd type="none" w="med" len="med"/>
+                    </a:lnL>
+                    <a:lnR w="6350" cap="flat" cmpd="sng" algn="ctr">
+                      <a:solidFill>
+                        <a:srgbClr val="CBD5E1"/>
+                      </a:solidFill>
+                      <a:prstDash val="solid"/>
+                      <a:round/>
+                      <a:headEnd type="none" w="med" len="med"/>
+                      <a:tailEnd type="none" w="med" len="med"/>
+                    </a:lnR>
+                    <a:lnT w="6350" cap="flat" cmpd="sng" algn="ctr">
+                      <a:solidFill>
+                        <a:srgbClr val="CBD5E1"/>
+                      </a:solidFill>
+                      <a:prstDash val="solid"/>
+                      <a:round/>
+                      <a:headEnd type="none" w="med" len="med"/>
+                      <a:tailEnd type="none" w="med" len="med"/>
+                    </a:lnT>
+                    <a:lnB w="6350" cap="flat" cmpd="sng" algn="ctr">
+                      <a:solidFill>
+                        <a:srgbClr val="CBD5E1"/>
+                      </a:solidFill>
+                      <a:prstDash val="solid"/>
+                      <a:round/>
+                      <a:headEnd type="none" w="med" len="med"/>
+                      <a:tailEnd type="none" w="med" len="med"/>
+                    </a:lnB>
+                    <a:solidFill>
+                      <a:srgbClr val="FFFFFF"/>
+                    </a:solidFill>
+                  </a:tcPr>
+                </a:tc>
+                <a:tc>
+                  <a:txBody>
+                    <a:bodyPr/>
+                    <a:lstStyle/>
+                    <a:p>
+                      <a:pPr indent="0" marL="0">
+                        <a:buNone/>
+                      </a:pPr>
+                      <a:r>
+                        <a:rPr lang="en-US" sz="900" b="1" dirty="0">
+                          <a:solidFill>
+                            <a:srgbClr val="334155"/>
+                          </a:solidFill>
+                          <a:latin typeface="Arial" pitchFamily="34" charset="0"/>
+                          <a:ea typeface="Arial" pitchFamily="34" charset="-122"/>
+                          <a:cs typeface="Arial" pitchFamily="34" charset="-120"/>
+                        </a:rPr>
+                        <a:t>対応・サービスの不満</a:t>
+                      </a:r>
+                      <a:endParaRPr lang="en-US" sz="900" dirty="0">
+                        <a:latin typeface="Arial" charset="0"/>
+                        <a:ea typeface="Arial" charset="0"/>
+                        <a:cs typeface="Arial" charset="0"/>
+                      </a:endParaRPr>
+                    </a:p>
+                  </a:txBody>
+                  <a:tcPr marL="91440" marR="91440" marT="45720" marB="45720">
+                    <a:lnL w="6350" cap="flat" cmpd="sng" algn="ctr">
+                      <a:solidFill>
+                        <a:srgbClr val="CBD5E1"/>
+                      </a:solidFill>
+                      <a:prstDash val="solid"/>
+                      <a:round/>
+                      <a:headEnd type="none" w="med" len="med"/>
+                      <a:tailEnd type="none" w="med" len="med"/>
+                    </a:lnL>
+                    <a:lnR w="6350" cap="flat" cmpd="sng" algn="ctr">
+                      <a:solidFill>
+                        <a:srgbClr val="CBD5E1"/>
+                      </a:solidFill>
+                      <a:prstDash val="solid"/>
+                      <a:round/>
+                      <a:headEnd type="none" w="med" len="med"/>
+                      <a:tailEnd type="none" w="med" len="med"/>
+                    </a:lnR>
+                    <a:lnT w="6350" cap="flat" cmpd="sng" algn="ctr">
+                      <a:solidFill>
+                        <a:srgbClr val="CBD5E1"/>
+                      </a:solidFill>
+                      <a:prstDash val="solid"/>
+                      <a:round/>
+                      <a:headEnd type="none" w="med" len="med"/>
+                      <a:tailEnd type="none" w="med" len="med"/>
+                    </a:lnT>
+                    <a:lnB w="6350" cap="flat" cmpd="sng" algn="ctr">
+                      <a:solidFill>
+                        <a:srgbClr val="CBD5E1"/>
+                      </a:solidFill>
+                      <a:prstDash val="solid"/>
+                      <a:round/>
+                      <a:headEnd type="none" w="med" len="med"/>
+                      <a:tailEnd type="none" w="med" len="med"/>
+                    </a:lnB>
+                    <a:solidFill>
+                      <a:srgbClr val="FFFFFF"/>
+                    </a:solidFill>
+                  </a:tcPr>
+                </a:tc>
+                <a:tc>
+                  <a:txBody>
+                    <a:bodyPr/>
+                    <a:lstStyle/>
+                    <a:p>
+                      <a:pPr indent="0" marL="0">
+                        <a:buNone/>
+                      </a:pPr>
+                      <a:r>
+                        <a:rPr lang="en-US" sz="900" dirty="0">
+                          <a:solidFill>
+                            <a:srgbClr val="64748B"/>
+                          </a:solidFill>
+                          <a:latin typeface="Arial" pitchFamily="34" charset="0"/>
+                          <a:ea typeface="Arial" pitchFamily="34" charset="-122"/>
+                          <a:cs typeface="Arial" pitchFamily="34" charset="-120"/>
+                        </a:rPr>
+                        <a:t>喫煙の部屋でしたが、空気清浄機が無かったので、残念ですが、部屋内は綺麗でした</a:t>
+                      </a:r>
+                      <a:endParaRPr lang="en-US" sz="900" dirty="0">
+                        <a:latin typeface="Arial" charset="0"/>
+                        <a:ea typeface="Arial" charset="0"/>
+                        <a:cs typeface="Arial" charset="0"/>
+                      </a:endParaRPr>
+                    </a:p>
+                  </a:txBody>
+                  <a:tcPr marL="91440" marR="91440" marT="45720" marB="45720">
+                    <a:lnL w="6350" cap="flat" cmpd="sng" algn="ctr">
+                      <a:solidFill>
+                        <a:srgbClr val="CBD5E1"/>
+                      </a:solidFill>
+                      <a:prstDash val="solid"/>
+                      <a:round/>
+                      <a:headEnd type="none" w="med" len="med"/>
+                      <a:tailEnd type="none" w="med" len="med"/>
+                    </a:lnL>
+                    <a:lnR w="6350" cap="flat" cmpd="sng" algn="ctr">
+                      <a:solidFill>
+                        <a:srgbClr val="CBD5E1"/>
+                      </a:solidFill>
+                      <a:prstDash val="solid"/>
+                      <a:round/>
+                      <a:headEnd type="none" w="med" len="med"/>
+                      <a:tailEnd type="none" w="med" len="med"/>
+                    </a:lnR>
+                    <a:lnT w="6350" cap="flat" cmpd="sng" algn="ctr">
+                      <a:solidFill>
+                        <a:srgbClr val="CBD5E1"/>
+                      </a:solidFill>
+                      <a:prstDash val="solid"/>
+                      <a:round/>
+                      <a:headEnd type="none" w="med" len="med"/>
+                      <a:tailEnd type="none" w="med" len="med"/>
+                    </a:lnT>
+                    <a:lnB w="6350" cap="flat" cmpd="sng" algn="ctr">
+                      <a:solidFill>
+                        <a:srgbClr val="CBD5E1"/>
+                      </a:solidFill>
+                      <a:prstDash val="solid"/>
+                      <a:round/>
+                      <a:headEnd type="none" w="med" len="med"/>
+                      <a:tailEnd type="none" w="med" len="med"/>
+                    </a:lnB>
+                    <a:solidFill>
+                      <a:srgbClr val="FFFFFF"/>
+                    </a:solidFill>
+                  </a:tcPr>
+                </a:tc>
+                <a:tc>
+                  <a:txBody>
+                    <a:bodyPr/>
+                    <a:lstStyle/>
+                    <a:p>
+                      <a:pPr algn="ctr" indent="0" marL="0">
+                        <a:buNone/>
+                      </a:pPr>
+                      <a:r>
+                        <a:rPr lang="en-US" sz="900" dirty="0">
+                          <a:solidFill>
+                            <a:srgbClr val="334155"/>
+                          </a:solidFill>
+                          <a:latin typeface="Arial" pitchFamily="34" charset="0"/>
+                          <a:ea typeface="Arial" pitchFamily="34" charset="-122"/>
+                          <a:cs typeface="Arial" pitchFamily="34" charset="-120"/>
+                        </a:rPr>
+                        <a:t>5件</a:t>
+                      </a:r>
+                      <a:endParaRPr lang="en-US" sz="900" dirty="0">
+                        <a:latin typeface="Arial" charset="0"/>
+                        <a:ea typeface="Arial" charset="0"/>
+                        <a:cs typeface="Arial" charset="0"/>
+                      </a:endParaRPr>
+                    </a:p>
+                  </a:txBody>
+                  <a:tcPr marL="91440" marR="91440" marT="45720" marB="45720">
+                    <a:lnL w="6350" cap="flat" cmpd="sng" algn="ctr">
+                      <a:solidFill>
+                        <a:srgbClr val="CBD5E1"/>
+                      </a:solidFill>
+                      <a:prstDash val="solid"/>
+                      <a:round/>
+                      <a:headEnd type="none" w="med" len="med"/>
+                      <a:tailEnd type="none" w="med" len="med"/>
+                    </a:lnL>
+                    <a:lnR w="6350" cap="flat" cmpd="sng" algn="ctr">
+                      <a:solidFill>
+                        <a:srgbClr val="CBD5E1"/>
+                      </a:solidFill>
+                      <a:prstDash val="solid"/>
+                      <a:round/>
+                      <a:headEnd type="none" w="med" len="med"/>
+                      <a:tailEnd type="none" w="med" len="med"/>
+                    </a:lnR>
+                    <a:lnT w="6350" cap="flat" cmpd="sng" algn="ctr">
+                      <a:solidFill>
+                        <a:srgbClr val="CBD5E1"/>
+                      </a:solidFill>
+                      <a:prstDash val="solid"/>
+                      <a:round/>
+                      <a:headEnd type="none" w="med" len="med"/>
+                      <a:tailEnd type="none" w="med" len="med"/>
+                    </a:lnT>
+                    <a:lnB w="6350" cap="flat" cmpd="sng" algn="ctr">
+                      <a:solidFill>
+                        <a:srgbClr val="CBD5E1"/>
+                      </a:solidFill>
+                      <a:prstDash val="solid"/>
+                      <a:round/>
+                      <a:headEnd type="none" w="med" len="med"/>
+                      <a:tailEnd type="none" w="med" len="med"/>
+                    </a:lnB>
+                    <a:solidFill>
+                      <a:srgbClr val="FFFFFF"/>
+                    </a:solidFill>
+                  </a:tcPr>
+                </a:tc>
+              </a:tr>
+              <a:tr h="320040">
+                <a:tc>
+                  <a:txBody>
+                    <a:bodyPr/>
+                    <a:lstStyle/>
+                    <a:p>
+                      <a:pPr algn="ctr" indent="0" marL="0">
+                        <a:buNone/>
+                      </a:pPr>
+                      <a:r>
+                        <a:rPr lang="en-US" sz="1200" b="1" dirty="0">
+                          <a:solidFill>
+                            <a:srgbClr val="D4A843"/>
+                          </a:solidFill>
+                          <a:latin typeface="Arial" pitchFamily="34" charset="0"/>
+                          <a:ea typeface="Arial" pitchFamily="34" charset="-122"/>
+                          <a:cs typeface="Arial" pitchFamily="34" charset="-120"/>
+                        </a:rPr>
+                        <a:t>B</a:t>
+                      </a:r>
+                      <a:endParaRPr lang="en-US" sz="1200" dirty="0">
+                        <a:latin typeface="Arial" charset="0"/>
+                        <a:ea typeface="Arial" charset="0"/>
+                        <a:cs typeface="Arial" charset="0"/>
+                      </a:endParaRPr>
+                    </a:p>
+                  </a:txBody>
+                  <a:tcPr marL="91440" marR="91440" marT="45720" marB="45720">
+                    <a:lnL w="6350" cap="flat" cmpd="sng" algn="ctr">
+                      <a:solidFill>
+                        <a:srgbClr val="CBD5E1"/>
+                      </a:solidFill>
+                      <a:prstDash val="solid"/>
+                      <a:round/>
+                      <a:headEnd type="none" w="med" len="med"/>
+                      <a:tailEnd type="none" w="med" len="med"/>
+                    </a:lnL>
+                    <a:lnR w="6350" cap="flat" cmpd="sng" algn="ctr">
+                      <a:solidFill>
+                        <a:srgbClr val="CBD5E1"/>
+                      </a:solidFill>
+                      <a:prstDash val="solid"/>
+                      <a:round/>
+                      <a:headEnd type="none" w="med" len="med"/>
+                      <a:tailEnd type="none" w="med" len="med"/>
+                    </a:lnR>
+                    <a:lnT w="6350" cap="flat" cmpd="sng" algn="ctr">
+                      <a:solidFill>
+                        <a:srgbClr val="CBD5E1"/>
+                      </a:solidFill>
+                      <a:prstDash val="solid"/>
+                      <a:round/>
+                      <a:headEnd type="none" w="med" len="med"/>
+                      <a:tailEnd type="none" w="med" len="med"/>
+                    </a:lnT>
+                    <a:lnB w="6350" cap="flat" cmpd="sng" algn="ctr">
+                      <a:solidFill>
+                        <a:srgbClr val="CBD5E1"/>
+                      </a:solidFill>
+                      <a:prstDash val="solid"/>
+                      <a:round/>
+                      <a:headEnd type="none" w="med" len="med"/>
+                      <a:tailEnd type="none" w="med" len="med"/>
+                    </a:lnB>
+                    <a:solidFill>
+                      <a:srgbClr val="E8EFF8"/>
+                    </a:solidFill>
+                  </a:tcPr>
+                </a:tc>
+                <a:tc>
+                  <a:txBody>
+                    <a:bodyPr/>
+                    <a:lstStyle/>
+                    <a:p>
+                      <a:pPr indent="0" marL="0">
+                        <a:buNone/>
+                      </a:pPr>
+                      <a:r>
+                        <a:rPr lang="en-US" sz="900" b="1" dirty="0">
+                          <a:solidFill>
+                            <a:srgbClr val="334155"/>
+                          </a:solidFill>
+                          <a:latin typeface="Arial" pitchFamily="34" charset="0"/>
+                          <a:ea typeface="Arial" pitchFamily="34" charset="-122"/>
+                          <a:cs typeface="Arial" pitchFamily="34" charset="-120"/>
+                        </a:rPr>
+                        <a:t>臭い・匂い</a:t>
+                      </a:r>
+                      <a:endParaRPr lang="en-US" sz="900" dirty="0">
+                        <a:latin typeface="Arial" charset="0"/>
+                        <a:ea typeface="Arial" charset="0"/>
+                        <a:cs typeface="Arial" charset="0"/>
+                      </a:endParaRPr>
+                    </a:p>
+                  </a:txBody>
+                  <a:tcPr marL="91440" marR="91440" marT="45720" marB="45720">
+                    <a:lnL w="6350" cap="flat" cmpd="sng" algn="ctr">
+                      <a:solidFill>
+                        <a:srgbClr val="CBD5E1"/>
+                      </a:solidFill>
+                      <a:prstDash val="solid"/>
+                      <a:round/>
+                      <a:headEnd type="none" w="med" len="med"/>
+                      <a:tailEnd type="none" w="med" len="med"/>
+                    </a:lnL>
+                    <a:lnR w="6350" cap="flat" cmpd="sng" algn="ctr">
+                      <a:solidFill>
+                        <a:srgbClr val="CBD5E1"/>
+                      </a:solidFill>
+                      <a:prstDash val="solid"/>
+                      <a:round/>
+                      <a:headEnd type="none" w="med" len="med"/>
+                      <a:tailEnd type="none" w="med" len="med"/>
+                    </a:lnR>
+                    <a:lnT w="6350" cap="flat" cmpd="sng" algn="ctr">
+                      <a:solidFill>
+                        <a:srgbClr val="CBD5E1"/>
+                      </a:solidFill>
+                      <a:prstDash val="solid"/>
+                      <a:round/>
+                      <a:headEnd type="none" w="med" len="med"/>
+                      <a:tailEnd type="none" w="med" len="med"/>
+                    </a:lnT>
+                    <a:lnB w="6350" cap="flat" cmpd="sng" algn="ctr">
+                      <a:solidFill>
+                        <a:srgbClr val="CBD5E1"/>
+                      </a:solidFill>
+                      <a:prstDash val="solid"/>
+                      <a:round/>
+                      <a:headEnd type="none" w="med" len="med"/>
+                      <a:tailEnd type="none" w="med" len="med"/>
+                    </a:lnB>
+                    <a:solidFill>
+                      <a:srgbClr val="E8EFF8"/>
+                    </a:solidFill>
+                  </a:tcPr>
+                </a:tc>
+                <a:tc>
+                  <a:txBody>
+                    <a:bodyPr/>
+                    <a:lstStyle/>
+                    <a:p>
+                      <a:pPr indent="0" marL="0">
+                        <a:buNone/>
+                      </a:pPr>
+                      <a:r>
+                        <a:rPr lang="en-US" sz="900" dirty="0">
+                          <a:solidFill>
+                            <a:srgbClr val="64748B"/>
+                          </a:solidFill>
+                          <a:latin typeface="Arial" pitchFamily="34" charset="0"/>
+                          <a:ea typeface="Arial" pitchFamily="34" charset="-122"/>
+                          <a:cs typeface="Arial" pitchFamily="34" charset="-120"/>
+                        </a:rPr>
+                        <a:t>繁華街や駅に近い トイレの匂いが臭い</a:t>
+                      </a:r>
+                      <a:endParaRPr lang="en-US" sz="900" dirty="0">
+                        <a:latin typeface="Arial" charset="0"/>
+                        <a:ea typeface="Arial" charset="0"/>
+                        <a:cs typeface="Arial" charset="0"/>
+                      </a:endParaRPr>
+                    </a:p>
+                  </a:txBody>
+                  <a:tcPr marL="91440" marR="91440" marT="45720" marB="45720">
+                    <a:lnL w="6350" cap="flat" cmpd="sng" algn="ctr">
+                      <a:solidFill>
+                        <a:srgbClr val="CBD5E1"/>
+                      </a:solidFill>
+                      <a:prstDash val="solid"/>
+                      <a:round/>
+                      <a:headEnd type="none" w="med" len="med"/>
+                      <a:tailEnd type="none" w="med" len="med"/>
+                    </a:lnL>
+                    <a:lnR w="6350" cap="flat" cmpd="sng" algn="ctr">
+                      <a:solidFill>
+                        <a:srgbClr val="CBD5E1"/>
+                      </a:solidFill>
+                      <a:prstDash val="solid"/>
+                      <a:round/>
+                      <a:headEnd type="none" w="med" len="med"/>
+                      <a:tailEnd type="none" w="med" len="med"/>
+                    </a:lnR>
+                    <a:lnT w="6350" cap="flat" cmpd="sng" algn="ctr">
+                      <a:solidFill>
+                        <a:srgbClr val="CBD5E1"/>
+                      </a:solidFill>
+                      <a:prstDash val="solid"/>
+                      <a:round/>
+                      <a:headEnd type="none" w="med" len="med"/>
+                      <a:tailEnd type="none" w="med" len="med"/>
+                    </a:lnT>
+                    <a:lnB w="6350" cap="flat" cmpd="sng" algn="ctr">
+                      <a:solidFill>
+                        <a:srgbClr val="CBD5E1"/>
+                      </a:solidFill>
+                      <a:prstDash val="solid"/>
+                      <a:round/>
+                      <a:headEnd type="none" w="med" len="med"/>
+                      <a:tailEnd type="none" w="med" len="med"/>
+                    </a:lnB>
+                    <a:solidFill>
+                      <a:srgbClr val="E8EFF8"/>
+                    </a:solidFill>
+                  </a:tcPr>
+                </a:tc>
+                <a:tc>
+                  <a:txBody>
+                    <a:bodyPr/>
+                    <a:lstStyle/>
+                    <a:p>
+                      <a:pPr algn="ctr" indent="0" marL="0">
+                        <a:buNone/>
+                      </a:pPr>
+                      <a:r>
+                        <a:rPr lang="en-US" sz="900" dirty="0">
+                          <a:solidFill>
+                            <a:srgbClr val="334155"/>
+                          </a:solidFill>
+                          <a:latin typeface="Arial" pitchFamily="34" charset="0"/>
+                          <a:ea typeface="Arial" pitchFamily="34" charset="-122"/>
+                          <a:cs typeface="Arial" pitchFamily="34" charset="-120"/>
+                        </a:rPr>
+                        <a:t>4件</a:t>
+                      </a:r>
+                      <a:endParaRPr lang="en-US" sz="900" dirty="0">
+                        <a:latin typeface="Arial" charset="0"/>
+                        <a:ea typeface="Arial" charset="0"/>
+                        <a:cs typeface="Arial" charset="0"/>
+                      </a:endParaRPr>
+                    </a:p>
+                  </a:txBody>
+                  <a:tcPr marL="91440" marR="91440" marT="45720" marB="45720">
+                    <a:lnL w="6350" cap="flat" cmpd="sng" algn="ctr">
+                      <a:solidFill>
+                        <a:srgbClr val="CBD5E1"/>
+                      </a:solidFill>
+                      <a:prstDash val="solid"/>
+                      <a:round/>
+                      <a:headEnd type="none" w="med" len="med"/>
+                      <a:tailEnd type="none" w="med" len="med"/>
+                    </a:lnL>
+                    <a:lnR w="6350" cap="flat" cmpd="sng" algn="ctr">
+                      <a:solidFill>
+                        <a:srgbClr val="CBD5E1"/>
+                      </a:solidFill>
+                      <a:prstDash val="solid"/>
+                      <a:round/>
+                      <a:headEnd type="none" w="med" len="med"/>
+                      <a:tailEnd type="none" w="med" len="med"/>
+                    </a:lnR>
+                    <a:lnT w="6350" cap="flat" cmpd="sng" algn="ctr">
+                      <a:solidFill>
+                        <a:srgbClr val="CBD5E1"/>
+                      </a:solidFill>
+                      <a:prstDash val="solid"/>
+                      <a:round/>
+                      <a:headEnd type="none" w="med" len="med"/>
+                      <a:tailEnd type="none" w="med" len="med"/>
+                    </a:lnT>
+                    <a:lnB w="6350" cap="flat" cmpd="sng" algn="ctr">
+                      <a:solidFill>
+                        <a:srgbClr val="CBD5E1"/>
+                      </a:solidFill>
+                      <a:prstDash val="solid"/>
+                      <a:round/>
+                      <a:headEnd type="none" w="med" len="med"/>
+                      <a:tailEnd type="none" w="med" len="med"/>
+                    </a:lnB>
+                    <a:solidFill>
+                      <a:srgbClr val="E8EFF8"/>
+                    </a:solidFill>
+                  </a:tcPr>
+                </a:tc>
+              </a:tr>
+              <a:tr h="320040">
+                <a:tc>
+                  <a:txBody>
+                    <a:bodyPr/>
+                    <a:lstStyle/>
+                    <a:p>
+                      <a:pPr algn="ctr" indent="0" marL="0">
+                        <a:buNone/>
+                      </a:pPr>
+                      <a:r>
+                        <a:rPr lang="en-US" sz="1200" b="1" dirty="0">
+                          <a:solidFill>
+                            <a:srgbClr val="94A3B8"/>
+                          </a:solidFill>
+                          <a:latin typeface="Arial" pitchFamily="34" charset="0"/>
+                          <a:ea typeface="Arial" pitchFamily="34" charset="-122"/>
+                          <a:cs typeface="Arial" pitchFamily="34" charset="-120"/>
+                        </a:rPr>
+                        <a:t>C</a:t>
+                      </a:r>
+                      <a:endParaRPr lang="en-US" sz="1200" dirty="0">
+                        <a:latin typeface="Arial" charset="0"/>
+                        <a:ea typeface="Arial" charset="0"/>
+                        <a:cs typeface="Arial" charset="0"/>
+                      </a:endParaRPr>
+                    </a:p>
+                  </a:txBody>
+                  <a:tcPr marL="91440" marR="91440" marT="45720" marB="45720">
+                    <a:lnL w="6350" cap="flat" cmpd="sng" algn="ctr">
+                      <a:solidFill>
+                        <a:srgbClr val="CBD5E1"/>
+                      </a:solidFill>
+                      <a:prstDash val="solid"/>
+                      <a:round/>
+                      <a:headEnd type="none" w="med" len="med"/>
+                      <a:tailEnd type="none" w="med" len="med"/>
+                    </a:lnL>
+                    <a:lnR w="6350" cap="flat" cmpd="sng" algn="ctr">
+                      <a:solidFill>
+                        <a:srgbClr val="CBD5E1"/>
+                      </a:solidFill>
+                      <a:prstDash val="solid"/>
+                      <a:round/>
+                      <a:headEnd type="none" w="med" len="med"/>
+                      <a:tailEnd type="none" w="med" len="med"/>
+                    </a:lnR>
+                    <a:lnT w="6350" cap="flat" cmpd="sng" algn="ctr">
+                      <a:solidFill>
+                        <a:srgbClr val="CBD5E1"/>
+                      </a:solidFill>
+                      <a:prstDash val="solid"/>
+                      <a:round/>
+                      <a:headEnd type="none" w="med" len="med"/>
+                      <a:tailEnd type="none" w="med" len="med"/>
+                    </a:lnT>
+                    <a:lnB w="6350" cap="flat" cmpd="sng" algn="ctr">
+                      <a:solidFill>
+                        <a:srgbClr val="CBD5E1"/>
+                      </a:solidFill>
+                      <a:prstDash val="solid"/>
+                      <a:round/>
+                      <a:headEnd type="none" w="med" len="med"/>
+                      <a:tailEnd type="none" w="med" len="med"/>
+                    </a:lnB>
+                    <a:solidFill>
+                      <a:srgbClr val="FFFFFF"/>
+                    </a:solidFill>
+                  </a:tcPr>
+                </a:tc>
+                <a:tc>
+                  <a:txBody>
+                    <a:bodyPr/>
+                    <a:lstStyle/>
+                    <a:p>
+                      <a:pPr indent="0" marL="0">
+                        <a:buNone/>
+                      </a:pPr>
+                      <a:r>
+                        <a:rPr lang="en-US" sz="900" b="1" dirty="0">
+                          <a:solidFill>
+                            <a:srgbClr val="334155"/>
+                          </a:solidFill>
+                          <a:latin typeface="Arial" pitchFamily="34" charset="0"/>
+                          <a:ea typeface="Arial" pitchFamily="34" charset="-122"/>
+                          <a:cs typeface="Arial" pitchFamily="34" charset="-120"/>
+                        </a:rPr>
+                        <a:t>窓・採光</a:t>
+                      </a:r>
+                      <a:endParaRPr lang="en-US" sz="900" dirty="0">
+                        <a:latin typeface="Arial" charset="0"/>
+                        <a:ea typeface="Arial" charset="0"/>
+                        <a:cs typeface="Arial" charset="0"/>
+                      </a:endParaRPr>
+                    </a:p>
+                  </a:txBody>
+                  <a:tcPr marL="91440" marR="91440" marT="45720" marB="45720">
+                    <a:lnL w="6350" cap="flat" cmpd="sng" algn="ctr">
+                      <a:solidFill>
+                        <a:srgbClr val="CBD5E1"/>
+                      </a:solidFill>
+                      <a:prstDash val="solid"/>
+                      <a:round/>
+                      <a:headEnd type="none" w="med" len="med"/>
+                      <a:tailEnd type="none" w="med" len="med"/>
+                    </a:lnL>
+                    <a:lnR w="6350" cap="flat" cmpd="sng" algn="ctr">
+                      <a:solidFill>
+                        <a:srgbClr val="CBD5E1"/>
+                      </a:solidFill>
+                      <a:prstDash val="solid"/>
+                      <a:round/>
+                      <a:headEnd type="none" w="med" len="med"/>
+                      <a:tailEnd type="none" w="med" len="med"/>
+                    </a:lnR>
+                    <a:lnT w="6350" cap="flat" cmpd="sng" algn="ctr">
+                      <a:solidFill>
+                        <a:srgbClr val="CBD5E1"/>
+                      </a:solidFill>
+                      <a:prstDash val="solid"/>
+                      <a:round/>
+                      <a:headEnd type="none" w="med" len="med"/>
+                      <a:tailEnd type="none" w="med" len="med"/>
+                    </a:lnT>
+                    <a:lnB w="6350" cap="flat" cmpd="sng" algn="ctr">
+                      <a:solidFill>
+                        <a:srgbClr val="CBD5E1"/>
+                      </a:solidFill>
+                      <a:prstDash val="solid"/>
+                      <a:round/>
+                      <a:headEnd type="none" w="med" len="med"/>
+                      <a:tailEnd type="none" w="med" len="med"/>
+                    </a:lnB>
+                    <a:solidFill>
+                      <a:srgbClr val="FFFFFF"/>
+                    </a:solidFill>
+                  </a:tcPr>
+                </a:tc>
+                <a:tc>
+                  <a:txBody>
+                    <a:bodyPr/>
+                    <a:lstStyle/>
+                    <a:p>
+                      <a:pPr indent="0" marL="0">
+                        <a:buNone/>
+                      </a:pPr>
+                      <a:r>
+                        <a:rPr lang="en-US" sz="900" dirty="0">
+                          <a:solidFill>
+                            <a:srgbClr val="64748B"/>
+                          </a:solidFill>
+                          <a:latin typeface="Arial" pitchFamily="34" charset="0"/>
+                          <a:ea typeface="Arial" pitchFamily="34" charset="-122"/>
+                          <a:cs typeface="Arial" pitchFamily="34" charset="-120"/>
+                        </a:rPr>
+                        <a:t>値段がそれなりで安い 室内の温度が高くて寝苦しい 窓を開ければ多少緩和されたがそれでもこの時期が寒いとはいえ、室温...</a:t>
+                      </a:r>
+                      <a:endParaRPr lang="en-US" sz="900" dirty="0">
+                        <a:latin typeface="Arial" charset="0"/>
+                        <a:ea typeface="Arial" charset="0"/>
+                        <a:cs typeface="Arial" charset="0"/>
+                      </a:endParaRPr>
+                    </a:p>
+                  </a:txBody>
+                  <a:tcPr marL="91440" marR="91440" marT="45720" marB="45720">
+                    <a:lnL w="6350" cap="flat" cmpd="sng" algn="ctr">
+                      <a:solidFill>
+                        <a:srgbClr val="CBD5E1"/>
+                      </a:solidFill>
+                      <a:prstDash val="solid"/>
+                      <a:round/>
+                      <a:headEnd type="none" w="med" len="med"/>
+                      <a:tailEnd type="none" w="med" len="med"/>
+                    </a:lnL>
+                    <a:lnR w="6350" cap="flat" cmpd="sng" algn="ctr">
+                      <a:solidFill>
+                        <a:srgbClr val="CBD5E1"/>
+                      </a:solidFill>
+                      <a:prstDash val="solid"/>
+                      <a:round/>
+                      <a:headEnd type="none" w="med" len="med"/>
+                      <a:tailEnd type="none" w="med" len="med"/>
+                    </a:lnR>
+                    <a:lnT w="6350" cap="flat" cmpd="sng" algn="ctr">
+                      <a:solidFill>
+                        <a:srgbClr val="CBD5E1"/>
+                      </a:solidFill>
+                      <a:prstDash val="solid"/>
+                      <a:round/>
+                      <a:headEnd type="none" w="med" len="med"/>
+                      <a:tailEnd type="none" w="med" len="med"/>
+                    </a:lnT>
+                    <a:lnB w="6350" cap="flat" cmpd="sng" algn="ctr">
+                      <a:solidFill>
+                        <a:srgbClr val="CBD5E1"/>
+                      </a:solidFill>
+                      <a:prstDash val="solid"/>
+                      <a:round/>
+                      <a:headEnd type="none" w="med" len="med"/>
+                      <a:tailEnd type="none" w="med" len="med"/>
+                    </a:lnB>
+                    <a:solidFill>
+                      <a:srgbClr val="FFFFFF"/>
+                    </a:solidFill>
+                  </a:tcPr>
+                </a:tc>
+                <a:tc>
+                  <a:txBody>
+                    <a:bodyPr/>
+                    <a:lstStyle/>
+                    <a:p>
+                      <a:pPr algn="ctr" indent="0" marL="0">
+                        <a:buNone/>
+                      </a:pPr>
+                      <a:r>
+                        <a:rPr lang="en-US" sz="900" dirty="0">
+                          <a:solidFill>
+                            <a:srgbClr val="334155"/>
+                          </a:solidFill>
+                          <a:latin typeface="Arial" pitchFamily="34" charset="0"/>
+                          <a:ea typeface="Arial" pitchFamily="34" charset="-122"/>
+                          <a:cs typeface="Arial" pitchFamily="34" charset="-120"/>
+                        </a:rPr>
+                        <a:t>4件</a:t>
+                      </a:r>
+                      <a:endParaRPr lang="en-US" sz="900" dirty="0">
+                        <a:latin typeface="Arial" charset="0"/>
+                        <a:ea typeface="Arial" charset="0"/>
+                        <a:cs typeface="Arial" charset="0"/>
+                      </a:endParaRPr>
+                    </a:p>
+                  </a:txBody>
+                  <a:tcPr marL="91440" marR="91440" marT="45720" marB="45720">
+                    <a:lnL w="6350" cap="flat" cmpd="sng" algn="ctr">
+                      <a:solidFill>
+                        <a:srgbClr val="CBD5E1"/>
+                      </a:solidFill>
+                      <a:prstDash val="solid"/>
+                      <a:round/>
+                      <a:headEnd type="none" w="med" len="med"/>
+                      <a:tailEnd type="none" w="med" len="med"/>
+                    </a:lnL>
+                    <a:lnR w="6350" cap="flat" cmpd="sng" algn="ctr">
+                      <a:solidFill>
+                        <a:srgbClr val="CBD5E1"/>
+                      </a:solidFill>
+                      <a:prstDash val="solid"/>
+                      <a:round/>
+                      <a:headEnd type="none" w="med" len="med"/>
+                      <a:tailEnd type="none" w="med" len="med"/>
+                    </a:lnR>
+                    <a:lnT w="6350" cap="flat" cmpd="sng" algn="ctr">
+                      <a:solidFill>
+                        <a:srgbClr val="CBD5E1"/>
+                      </a:solidFill>
+                      <a:prstDash val="solid"/>
+                      <a:round/>
+                      <a:headEnd type="none" w="med" len="med"/>
+                      <a:tailEnd type="none" w="med" len="med"/>
+                    </a:lnT>
+                    <a:lnB w="6350" cap="flat" cmpd="sng" algn="ctr">
+                      <a:solidFill>
+                        <a:srgbClr val="CBD5E1"/>
+                      </a:solidFill>
+                      <a:prstDash val="solid"/>
+                      <a:round/>
+                      <a:headEnd type="none" w="med" len="med"/>
+                      <a:tailEnd type="none" w="med" len="med"/>
+                    </a:lnB>
+                    <a:solidFill>
+                      <a:srgbClr val="FFFFFF"/>
+                    </a:solidFill>
+                  </a:tcPr>
+                </a:tc>
+              </a:tr>
+              <a:tr h="320040">
+                <a:tc>
+                  <a:txBody>
+                    <a:bodyPr/>
+                    <a:lstStyle/>
+                    <a:p>
+                      <a:pPr algn="ctr" indent="0" marL="0">
+                        <a:buNone/>
+                      </a:pPr>
+                      <a:r>
+                        <a:rPr lang="en-US" sz="1200" b="1" dirty="0">
+                          <a:solidFill>
+                            <a:srgbClr val="94A3B8"/>
+                          </a:solidFill>
+                          <a:latin typeface="Arial" pitchFamily="34" charset="0"/>
+                          <a:ea typeface="Arial" pitchFamily="34" charset="-122"/>
+                          <a:cs typeface="Arial" pitchFamily="34" charset="-120"/>
+                        </a:rPr>
+                        <a:t>C</a:t>
+                      </a:r>
+                      <a:endParaRPr lang="en-US" sz="1200" dirty="0">
+                        <a:latin typeface="Arial" charset="0"/>
+                        <a:ea typeface="Arial" charset="0"/>
+                        <a:cs typeface="Arial" charset="0"/>
+                      </a:endParaRPr>
+                    </a:p>
+                  </a:txBody>
+                  <a:tcPr marL="91440" marR="91440" marT="45720" marB="45720">
+                    <a:lnL w="6350" cap="flat" cmpd="sng" algn="ctr">
+                      <a:solidFill>
+                        <a:srgbClr val="CBD5E1"/>
+                      </a:solidFill>
+                      <a:prstDash val="solid"/>
+                      <a:round/>
+                      <a:headEnd type="none" w="med" len="med"/>
+                      <a:tailEnd type="none" w="med" len="med"/>
+                    </a:lnL>
+                    <a:lnR w="6350" cap="flat" cmpd="sng" algn="ctr">
+                      <a:solidFill>
+                        <a:srgbClr val="CBD5E1"/>
+                      </a:solidFill>
+                      <a:prstDash val="solid"/>
+                      <a:round/>
+                      <a:headEnd type="none" w="med" len="med"/>
+                      <a:tailEnd type="none" w="med" len="med"/>
+                    </a:lnR>
+                    <a:lnT w="6350" cap="flat" cmpd="sng" algn="ctr">
+                      <a:solidFill>
+                        <a:srgbClr val="CBD5E1"/>
+                      </a:solidFill>
+                      <a:prstDash val="solid"/>
+                      <a:round/>
+                      <a:headEnd type="none" w="med" len="med"/>
+                      <a:tailEnd type="none" w="med" len="med"/>
+                    </a:lnT>
+                    <a:lnB w="6350" cap="flat" cmpd="sng" algn="ctr">
+                      <a:solidFill>
+                        <a:srgbClr val="CBD5E1"/>
+                      </a:solidFill>
+                      <a:prstDash val="solid"/>
+                      <a:round/>
+                      <a:headEnd type="none" w="med" len="med"/>
+                      <a:tailEnd type="none" w="med" len="med"/>
+                    </a:lnB>
+                    <a:solidFill>
+                      <a:srgbClr val="E8EFF8"/>
+                    </a:solidFill>
+                  </a:tcPr>
+                </a:tc>
+                <a:tc>
+                  <a:txBody>
+                    <a:bodyPr/>
+                    <a:lstStyle/>
+                    <a:p>
+                      <a:pPr indent="0" marL="0">
+                        <a:buNone/>
+                      </a:pPr>
+                      <a:r>
+                        <a:rPr lang="en-US" sz="900" b="1" dirty="0">
+                          <a:solidFill>
+                            <a:srgbClr val="334155"/>
+                          </a:solidFill>
+                          <a:latin typeface="Arial" pitchFamily="34" charset="0"/>
+                          <a:ea typeface="Arial" pitchFamily="34" charset="-122"/>
+                          <a:cs typeface="Arial" pitchFamily="34" charset="-120"/>
+                        </a:rPr>
+                        <a:t>防音性能</a:t>
+                      </a:r>
+                      <a:endParaRPr lang="en-US" sz="900" dirty="0">
+                        <a:latin typeface="Arial" charset="0"/>
+                        <a:ea typeface="Arial" charset="0"/>
+                        <a:cs typeface="Arial" charset="0"/>
+                      </a:endParaRPr>
+                    </a:p>
+                  </a:txBody>
+                  <a:tcPr marL="91440" marR="91440" marT="45720" marB="45720">
+                    <a:lnL w="6350" cap="flat" cmpd="sng" algn="ctr">
+                      <a:solidFill>
+                        <a:srgbClr val="CBD5E1"/>
+                      </a:solidFill>
+                      <a:prstDash val="solid"/>
+                      <a:round/>
+                      <a:headEnd type="none" w="med" len="med"/>
+                      <a:tailEnd type="none" w="med" len="med"/>
+                    </a:lnL>
+                    <a:lnR w="6350" cap="flat" cmpd="sng" algn="ctr">
+                      <a:solidFill>
+                        <a:srgbClr val="CBD5E1"/>
+                      </a:solidFill>
+                      <a:prstDash val="solid"/>
+                      <a:round/>
+                      <a:headEnd type="none" w="med" len="med"/>
+                      <a:tailEnd type="none" w="med" len="med"/>
+                    </a:lnR>
+                    <a:lnT w="6350" cap="flat" cmpd="sng" algn="ctr">
+                      <a:solidFill>
+                        <a:srgbClr val="CBD5E1"/>
+                      </a:solidFill>
+                      <a:prstDash val="solid"/>
+                      <a:round/>
+                      <a:headEnd type="none" w="med" len="med"/>
+                      <a:tailEnd type="none" w="med" len="med"/>
+                    </a:lnT>
+                    <a:lnB w="6350" cap="flat" cmpd="sng" algn="ctr">
+                      <a:solidFill>
+                        <a:srgbClr val="CBD5E1"/>
+                      </a:solidFill>
+                      <a:prstDash val="solid"/>
+                      <a:round/>
+                      <a:headEnd type="none" w="med" len="med"/>
+                      <a:tailEnd type="none" w="med" len="med"/>
+                    </a:lnB>
+                    <a:solidFill>
+                      <a:srgbClr val="E8EFF8"/>
+                    </a:solidFill>
+                  </a:tcPr>
+                </a:tc>
+                <a:tc>
+                  <a:txBody>
+                    <a:bodyPr/>
+                    <a:lstStyle/>
+                    <a:p>
+                      <a:pPr indent="0" marL="0">
+                        <a:buNone/>
+                      </a:pPr>
+                      <a:r>
+                        <a:rPr lang="en-US" sz="900" dirty="0">
+                          <a:solidFill>
+                            <a:srgbClr val="64748B"/>
+                          </a:solidFill>
+                          <a:latin typeface="Arial" pitchFamily="34" charset="0"/>
+                          <a:ea typeface="Arial" pitchFamily="34" charset="-122"/>
+                          <a:cs typeface="Arial" pitchFamily="34" charset="-120"/>
+                        </a:rPr>
+                        <a:t>各部屋の騒音がうるさかった</a:t>
+                      </a:r>
+                      <a:endParaRPr lang="en-US" sz="900" dirty="0">
+                        <a:latin typeface="Arial" charset="0"/>
+                        <a:ea typeface="Arial" charset="0"/>
+                        <a:cs typeface="Arial" charset="0"/>
+                      </a:endParaRPr>
+                    </a:p>
+                  </a:txBody>
+                  <a:tcPr marL="91440" marR="91440" marT="45720" marB="45720">
+                    <a:lnL w="6350" cap="flat" cmpd="sng" algn="ctr">
+                      <a:solidFill>
+                        <a:srgbClr val="CBD5E1"/>
+                      </a:solidFill>
+                      <a:prstDash val="solid"/>
+                      <a:round/>
+                      <a:headEnd type="none" w="med" len="med"/>
+                      <a:tailEnd type="none" w="med" len="med"/>
+                    </a:lnL>
+                    <a:lnR w="6350" cap="flat" cmpd="sng" algn="ctr">
+                      <a:solidFill>
+                        <a:srgbClr val="CBD5E1"/>
+                      </a:solidFill>
+                      <a:prstDash val="solid"/>
+                      <a:round/>
+                      <a:headEnd type="none" w="med" len="med"/>
+                      <a:tailEnd type="none" w="med" len="med"/>
+                    </a:lnR>
+                    <a:lnT w="6350" cap="flat" cmpd="sng" algn="ctr">
+                      <a:solidFill>
+                        <a:srgbClr val="CBD5E1"/>
+                      </a:solidFill>
+                      <a:prstDash val="solid"/>
+                      <a:round/>
+                      <a:headEnd type="none" w="med" len="med"/>
+                      <a:tailEnd type="none" w="med" len="med"/>
+                    </a:lnT>
+                    <a:lnB w="6350" cap="flat" cmpd="sng" algn="ctr">
+                      <a:solidFill>
+                        <a:srgbClr val="CBD5E1"/>
+                      </a:solidFill>
+                      <a:prstDash val="solid"/>
+                      <a:round/>
+                      <a:headEnd type="none" w="med" len="med"/>
+                      <a:tailEnd type="none" w="med" len="med"/>
+                    </a:lnB>
+                    <a:solidFill>
+                      <a:srgbClr val="E8EFF8"/>
+                    </a:solidFill>
+                  </a:tcPr>
+                </a:tc>
+                <a:tc>
+                  <a:txBody>
+                    <a:bodyPr/>
+                    <a:lstStyle/>
+                    <a:p>
+                      <a:pPr algn="ctr" indent="0" marL="0">
+                        <a:buNone/>
+                      </a:pPr>
+                      <a:r>
+                        <a:rPr lang="en-US" sz="900" dirty="0">
+                          <a:solidFill>
+                            <a:srgbClr val="334155"/>
+                          </a:solidFill>
+                          <a:latin typeface="Arial" pitchFamily="34" charset="0"/>
+                          <a:ea typeface="Arial" pitchFamily="34" charset="-122"/>
+                          <a:cs typeface="Arial" pitchFamily="34" charset="-120"/>
+                        </a:rPr>
+                        <a:t>3件</a:t>
+                      </a:r>
+                      <a:endParaRPr lang="en-US" sz="900" dirty="0">
+                        <a:latin typeface="Arial" charset="0"/>
+                        <a:ea typeface="Arial" charset="0"/>
+                        <a:cs typeface="Arial" charset="0"/>
+                      </a:endParaRPr>
+                    </a:p>
+                  </a:txBody>
+                  <a:tcPr marL="91440" marR="91440" marT="45720" marB="45720">
+                    <a:lnL w="6350" cap="flat" cmpd="sng" algn="ctr">
+                      <a:solidFill>
+                        <a:srgbClr val="CBD5E1"/>
+                      </a:solidFill>
+                      <a:prstDash val="solid"/>
+                      <a:round/>
+                      <a:headEnd type="none" w="med" len="med"/>
+                      <a:tailEnd type="none" w="med" len="med"/>
+                    </a:lnL>
+                    <a:lnR w="6350" cap="flat" cmpd="sng" algn="ctr">
+                      <a:solidFill>
+                        <a:srgbClr val="CBD5E1"/>
+                      </a:solidFill>
+                      <a:prstDash val="solid"/>
+                      <a:round/>
+                      <a:headEnd type="none" w="med" len="med"/>
+                      <a:tailEnd type="none" w="med" len="med"/>
+                    </a:lnR>
+                    <a:lnT w="6350" cap="flat" cmpd="sng" algn="ctr">
+                      <a:solidFill>
+                        <a:srgbClr val="CBD5E1"/>
+                      </a:solidFill>
+                      <a:prstDash val="solid"/>
+                      <a:round/>
+                      <a:headEnd type="none" w="med" len="med"/>
+                      <a:tailEnd type="none" w="med" len="med"/>
+                    </a:lnT>
+                    <a:lnB w="6350" cap="flat" cmpd="sng" algn="ctr">
+                      <a:solidFill>
+                        <a:srgbClr val="CBD5E1"/>
+                      </a:solidFill>
+                      <a:prstDash val="solid"/>
+                      <a:round/>
+                      <a:headEnd type="none" w="med" len="med"/>
+                      <a:tailEnd type="none" w="med" len="med"/>
+                    </a:lnB>
+                    <a:solidFill>
+                      <a:srgbClr val="E8EFF8"/>
+                    </a:solidFill>
+                  </a:tcPr>
+                </a:tc>
+              </a:tr>
+              <a:tr h="320040">
+                <a:tc>
+                  <a:txBody>
+                    <a:bodyPr/>
+                    <a:lstStyle/>
+                    <a:p>
+                      <a:pPr algn="ctr" indent="0" marL="0">
+                        <a:buNone/>
+                      </a:pPr>
+                      <a:r>
+                        <a:rPr lang="en-US" sz="1200" b="1" dirty="0">
+                          <a:solidFill>
+                            <a:srgbClr val="94A3B8"/>
+                          </a:solidFill>
+                          <a:latin typeface="Arial" pitchFamily="34" charset="0"/>
+                          <a:ea typeface="Arial" pitchFamily="34" charset="-122"/>
+                          <a:cs typeface="Arial" pitchFamily="34" charset="-120"/>
+                        </a:rPr>
+                        <a:t>C</a:t>
+                      </a:r>
+                      <a:endParaRPr lang="en-US" sz="1200" dirty="0">
+                        <a:latin typeface="Arial" charset="0"/>
+                        <a:ea typeface="Arial" charset="0"/>
+                        <a:cs typeface="Arial" charset="0"/>
+                      </a:endParaRPr>
+                    </a:p>
+                  </a:txBody>
+                  <a:tcPr marL="91440" marR="91440" marT="45720" marB="45720">
+                    <a:lnL w="6350" cap="flat" cmpd="sng" algn="ctr">
+                      <a:solidFill>
+                        <a:srgbClr val="CBD5E1"/>
+                      </a:solidFill>
+                      <a:prstDash val="solid"/>
+                      <a:round/>
+                      <a:headEnd type="none" w="med" len="med"/>
+                      <a:tailEnd type="none" w="med" len="med"/>
+                    </a:lnL>
+                    <a:lnR w="6350" cap="flat" cmpd="sng" algn="ctr">
+                      <a:solidFill>
+                        <a:srgbClr val="CBD5E1"/>
+                      </a:solidFill>
+                      <a:prstDash val="solid"/>
+                      <a:round/>
+                      <a:headEnd type="none" w="med" len="med"/>
+                      <a:tailEnd type="none" w="med" len="med"/>
+                    </a:lnR>
+                    <a:lnT w="6350" cap="flat" cmpd="sng" algn="ctr">
+                      <a:solidFill>
+                        <a:srgbClr val="CBD5E1"/>
+                      </a:solidFill>
+                      <a:prstDash val="solid"/>
+                      <a:round/>
+                      <a:headEnd type="none" w="med" len="med"/>
+                      <a:tailEnd type="none" w="med" len="med"/>
+                    </a:lnT>
+                    <a:lnB w="6350" cap="flat" cmpd="sng" algn="ctr">
+                      <a:solidFill>
+                        <a:srgbClr val="CBD5E1"/>
+                      </a:solidFill>
+                      <a:prstDash val="solid"/>
+                      <a:round/>
+                      <a:headEnd type="none" w="med" len="med"/>
+                      <a:tailEnd type="none" w="med" len="med"/>
+                    </a:lnB>
+                    <a:solidFill>
+                      <a:srgbClr val="FFFFFF"/>
+                    </a:solidFill>
+                  </a:tcPr>
+                </a:tc>
+                <a:tc>
+                  <a:txBody>
+                    <a:bodyPr/>
+                    <a:lstStyle/>
+                    <a:p>
+                      <a:pPr indent="0" marL="0">
+                        <a:buNone/>
+                      </a:pPr>
+                      <a:r>
+                        <a:rPr lang="en-US" sz="900" b="1" dirty="0">
+                          <a:solidFill>
+                            <a:srgbClr val="334155"/>
+                          </a:solidFill>
+                          <a:latin typeface="Arial" pitchFamily="34" charset="0"/>
+                          <a:ea typeface="Arial" pitchFamily="34" charset="-122"/>
+                          <a:cs typeface="Arial" pitchFamily="34" charset="-120"/>
+                        </a:rPr>
+                        <a:t>清掃不備</a:t>
+                      </a:r>
+                      <a:endParaRPr lang="en-US" sz="900" dirty="0">
+                        <a:latin typeface="Arial" charset="0"/>
+                        <a:ea typeface="Arial" charset="0"/>
+                        <a:cs typeface="Arial" charset="0"/>
+                      </a:endParaRPr>
+                    </a:p>
+                  </a:txBody>
+                  <a:tcPr marL="91440" marR="91440" marT="45720" marB="45720">
+                    <a:lnL w="6350" cap="flat" cmpd="sng" algn="ctr">
+                      <a:solidFill>
+                        <a:srgbClr val="CBD5E1"/>
+                      </a:solidFill>
+                      <a:prstDash val="solid"/>
+                      <a:round/>
+                      <a:headEnd type="none" w="med" len="med"/>
+                      <a:tailEnd type="none" w="med" len="med"/>
+                    </a:lnL>
+                    <a:lnR w="6350" cap="flat" cmpd="sng" algn="ctr">
+                      <a:solidFill>
+                        <a:srgbClr val="CBD5E1"/>
+                      </a:solidFill>
+                      <a:prstDash val="solid"/>
+                      <a:round/>
+                      <a:headEnd type="none" w="med" len="med"/>
+                      <a:tailEnd type="none" w="med" len="med"/>
+                    </a:lnR>
+                    <a:lnT w="6350" cap="flat" cmpd="sng" algn="ctr">
+                      <a:solidFill>
+                        <a:srgbClr val="CBD5E1"/>
+                      </a:solidFill>
+                      <a:prstDash val="solid"/>
+                      <a:round/>
+                      <a:headEnd type="none" w="med" len="med"/>
+                      <a:tailEnd type="none" w="med" len="med"/>
+                    </a:lnT>
+                    <a:lnB w="6350" cap="flat" cmpd="sng" algn="ctr">
+                      <a:solidFill>
+                        <a:srgbClr val="CBD5E1"/>
+                      </a:solidFill>
+                      <a:prstDash val="solid"/>
+                      <a:round/>
+                      <a:headEnd type="none" w="med" len="med"/>
+                      <a:tailEnd type="none" w="med" len="med"/>
+                    </a:lnB>
+                    <a:solidFill>
+                      <a:srgbClr val="FFFFFF"/>
+                    </a:solidFill>
+                  </a:tcPr>
+                </a:tc>
+                <a:tc>
+                  <a:txBody>
+                    <a:bodyPr/>
+                    <a:lstStyle/>
+                    <a:p>
+                      <a:pPr indent="0" marL="0">
+                        <a:buNone/>
+                      </a:pPr>
+                      <a:r>
+                        <a:rPr lang="en-US" sz="900" dirty="0">
+                          <a:solidFill>
+                            <a:srgbClr val="64748B"/>
+                          </a:solidFill>
+                          <a:latin typeface="Arial" pitchFamily="34" charset="0"/>
+                          <a:ea typeface="Arial" pitchFamily="34" charset="-122"/>
+                          <a:cs typeface="Arial" pitchFamily="34" charset="-120"/>
+                        </a:rPr>
+                        <a:t>値段がそれなりで安い 室内の温度が高くて寝苦しい 窓を開ければ多少緩和されたがそれでもこの時期が寒いとはいえ、室温...</a:t>
+                      </a:r>
+                      <a:endParaRPr lang="en-US" sz="900" dirty="0">
+                        <a:latin typeface="Arial" charset="0"/>
+                        <a:ea typeface="Arial" charset="0"/>
+                        <a:cs typeface="Arial" charset="0"/>
+                      </a:endParaRPr>
+                    </a:p>
+                  </a:txBody>
+                  <a:tcPr marL="91440" marR="91440" marT="45720" marB="45720">
+                    <a:lnL w="6350" cap="flat" cmpd="sng" algn="ctr">
+                      <a:solidFill>
+                        <a:srgbClr val="CBD5E1"/>
+                      </a:solidFill>
+                      <a:prstDash val="solid"/>
+                      <a:round/>
+                      <a:headEnd type="none" w="med" len="med"/>
+                      <a:tailEnd type="none" w="med" len="med"/>
+                    </a:lnL>
+                    <a:lnR w="6350" cap="flat" cmpd="sng" algn="ctr">
+                      <a:solidFill>
+                        <a:srgbClr val="CBD5E1"/>
+                      </a:solidFill>
+                      <a:prstDash val="solid"/>
+                      <a:round/>
+                      <a:headEnd type="none" w="med" len="med"/>
+                      <a:tailEnd type="none" w="med" len="med"/>
+                    </a:lnR>
+                    <a:lnT w="6350" cap="flat" cmpd="sng" algn="ctr">
+                      <a:solidFill>
+                        <a:srgbClr val="CBD5E1"/>
+                      </a:solidFill>
+                      <a:prstDash val="solid"/>
+                      <a:round/>
+                      <a:headEnd type="none" w="med" len="med"/>
+                      <a:tailEnd type="none" w="med" len="med"/>
+                    </a:lnT>
+                    <a:lnB w="6350" cap="flat" cmpd="sng" algn="ctr">
+                      <a:solidFill>
+                        <a:srgbClr val="CBD5E1"/>
+                      </a:solidFill>
+                      <a:prstDash val="solid"/>
+                      <a:round/>
+                      <a:headEnd type="none" w="med" len="med"/>
+                      <a:tailEnd type="none" w="med" len="med"/>
+                    </a:lnB>
+                    <a:solidFill>
+                      <a:srgbClr val="FFFFFF"/>
+                    </a:solidFill>
+                  </a:tcPr>
+                </a:tc>
+                <a:tc>
+                  <a:txBody>
+                    <a:bodyPr/>
+                    <a:lstStyle/>
+                    <a:p>
+                      <a:pPr algn="ctr" indent="0" marL="0">
+                        <a:buNone/>
+                      </a:pPr>
+                      <a:r>
+                        <a:rPr lang="en-US" sz="900" dirty="0">
+                          <a:solidFill>
+                            <a:srgbClr val="334155"/>
+                          </a:solidFill>
+                          <a:latin typeface="Arial" pitchFamily="34" charset="0"/>
+                          <a:ea typeface="Arial" pitchFamily="34" charset="-122"/>
+                          <a:cs typeface="Arial" pitchFamily="34" charset="-120"/>
+                        </a:rPr>
+                        <a:t>2件</a:t>
+                      </a:r>
+                      <a:endParaRPr lang="en-US" sz="900" dirty="0">
+                        <a:latin typeface="Arial" charset="0"/>
+                        <a:ea typeface="Arial" charset="0"/>
+                        <a:cs typeface="Arial" charset="0"/>
+                      </a:endParaRPr>
+                    </a:p>
+                  </a:txBody>
+                  <a:tcPr marL="91440" marR="91440" marT="45720" marB="45720">
+                    <a:lnL w="6350" cap="flat" cmpd="sng" algn="ctr">
+                      <a:solidFill>
+                        <a:srgbClr val="CBD5E1"/>
+                      </a:solidFill>
+                      <a:prstDash val="solid"/>
+                      <a:round/>
+                      <a:headEnd type="none" w="med" len="med"/>
+                      <a:tailEnd type="none" w="med" len="med"/>
+                    </a:lnL>
+                    <a:lnR w="6350" cap="flat" cmpd="sng" algn="ctr">
+                      <a:solidFill>
+                        <a:srgbClr val="CBD5E1"/>
+                      </a:solidFill>
+                      <a:prstDash val="solid"/>
+                      <a:round/>
+                      <a:headEnd type="none" w="med" len="med"/>
+                      <a:tailEnd type="none" w="med" len="med"/>
+                    </a:lnR>
+                    <a:lnT w="6350" cap="flat" cmpd="sng" algn="ctr">
+                      <a:solidFill>
+                        <a:srgbClr val="CBD5E1"/>
+                      </a:solidFill>
+                      <a:prstDash val="solid"/>
+                      <a:round/>
+                      <a:headEnd type="none" w="med" len="med"/>
+                      <a:tailEnd type="none" w="med" len="med"/>
+                    </a:lnT>
+                    <a:lnB w="6350" cap="flat" cmpd="sng" algn="ctr">
+                      <a:solidFill>
+                        <a:srgbClr val="CBD5E1"/>
+                      </a:solidFill>
+                      <a:prstDash val="solid"/>
+                      <a:round/>
+                      <a:headEnd type="none" w="med" len="med"/>
+                      <a:tailEnd type="none" w="med" len="med"/>
+                    </a:lnB>
+                    <a:solidFill>
+                      <a:srgbClr val="FFFFFF"/>
+                    </a:solidFill>
+                  </a:tcPr>
+                </a:tc>
+              </a:tr>
             </a:tbl>
           </a:graphicData>
         </a:graphic>
@@ -9614,7 +14540,7 @@
                 <a:ea typeface="Arial" pitchFamily="34" charset="-122"/>
                 <a:cs typeface="Arial" pitchFamily="34" charset="-120"/>
               </a:rPr>
-              <a:t>口コミモニタリング体制の構築</a:t>
+              <a:t>客室の消臭対策の強化</a:t>
             </a:r>
             <a:endParaRPr lang="en-US" sz="1200" dirty="0"/>
           </a:p>
@@ -9657,7 +14583,7 @@
                 <a:ea typeface="Arial" pitchFamily="34" charset="-122"/>
                 <a:cs typeface="Arial" pitchFamily="34" charset="-120"/>
               </a:rPr>
-              <a:t>全OTAサイトの口コミを週次で確認するフロー導入</a:t>
+              <a:t>チェックアウト後の換気・消臭スプレー処理の徹底</a:t>
             </a:r>
             <a:endParaRPr lang="en-US" sz="900" dirty="0"/>
           </a:p>
@@ -9678,7 +14604,7 @@
                 <a:ea typeface="Arial" pitchFamily="34" charset="-122"/>
                 <a:cs typeface="Arial" pitchFamily="34" charset="-120"/>
               </a:rPr>
-              <a:t>ネガティブコメントへの48時間以内の返信を目標設定</a:t>
+              <a:t>定期的な脱臭剤の設置と交換フローの確立</a:t>
             </a:r>
             <a:endParaRPr lang="en-US" sz="900" dirty="0"/>
           </a:p>
@@ -9699,7 +14625,7 @@
                 <a:ea typeface="Arial" pitchFamily="34" charset="-122"/>
                 <a:cs typeface="Arial" pitchFamily="34" charset="-120"/>
               </a:rPr>
-              <a:t>スタッフ間での口コミ共有ミーティングの定例化</a:t>
+              <a:t>喫煙・臭いに関するクレーム発生時の即座対応マニュアル作成</a:t>
             </a:r>
             <a:endParaRPr lang="en-US" sz="900" dirty="0"/>
           </a:p>
@@ -9785,7 +14711,7 @@
                 <a:ea typeface="Arial" pitchFamily="34" charset="-122"/>
                 <a:cs typeface="Arial" pitchFamily="34" charset="-120"/>
               </a:rPr>
-              <a:t>ゲストコミュニケーションの強化</a:t>
+              <a:t>清掃品質の向上</a:t>
             </a:r>
             <a:endParaRPr lang="en-US" sz="1200" dirty="0"/>
           </a:p>
@@ -9828,7 +14754,7 @@
                 <a:ea typeface="Arial" pitchFamily="34" charset="-122"/>
                 <a:cs typeface="Arial" pitchFamily="34" charset="-120"/>
               </a:rPr>
-              <a:t>チェックイン時の挨拶・案内の標準化</a:t>
+              <a:t>清掃チェックリストの見直しと強化（ベッド下・隅の重点確認）</a:t>
             </a:r>
             <a:endParaRPr lang="en-US" sz="900" dirty="0"/>
           </a:p>
@@ -9849,7 +14775,7 @@
                 <a:ea typeface="Arial" pitchFamily="34" charset="-122"/>
                 <a:cs typeface="Arial" pitchFamily="34" charset="-120"/>
               </a:rPr>
-              <a:t>チェックアウト時の簡易アンケート実施</a:t>
+              <a:t>清掃後のダブルチェック体制の導入</a:t>
             </a:r>
             <a:endParaRPr lang="en-US" sz="900" dirty="0"/>
           </a:p>
@@ -9870,7 +14796,7 @@
                 <a:ea typeface="Arial" pitchFamily="34" charset="-122"/>
                 <a:cs typeface="Arial" pitchFamily="34" charset="-120"/>
               </a:rPr>
-              <a:t>リピーターへの感謝メッセージの導入</a:t>
+              <a:t>清掃スタッフへの再研修実施</a:t>
             </a:r>
             <a:endParaRPr lang="en-US" sz="900" dirty="0"/>
           </a:p>
@@ -9879,6 +14805,348 @@
       <p:sp>
         <p:nvSpPr>
           <p:cNvPr id="14" name="Shape 12"/>
+          <p:cNvSpPr/>
+          <p:nvPr/>
+        </p:nvSpPr>
+        <p:spPr>
+          <a:xfrm>
+            <a:off x="457200" y="3017520"/>
+            <a:ext cx="3977640" cy="1600200"/>
+          </a:xfrm>
+          <a:prstGeom prst="rect">
+            <a:avLst/>
+          </a:prstGeom>
+          <a:solidFill>
+            <a:srgbClr val="FFFFFF"/>
+          </a:solidFill>
+          <a:ln/>
+          <a:effectLst>
+            <a:outerShdw sx="100000" sy="100000" kx="0" ky="0" algn="bl" rotWithShape="0" blurRad="50800" dist="25400" dir="8100000">
+              <a:srgbClr val="000000">
+                <a:alpha val="10000"/>
+              </a:srgbClr>
+            </a:outerShdw>
+          </a:effectLst>
+        </p:spPr>
+      </p:sp>
+      <p:sp>
+        <p:nvSpPr>
+          <p:cNvPr id="15" name="Shape 13"/>
+          <p:cNvSpPr/>
+          <p:nvPr/>
+        </p:nvSpPr>
+        <p:spPr>
+          <a:xfrm>
+            <a:off x="457200" y="3017520"/>
+            <a:ext cx="54864" cy="1600200"/>
+          </a:xfrm>
+          <a:prstGeom prst="rect">
+            <a:avLst/>
+          </a:prstGeom>
+          <a:solidFill>
+            <a:srgbClr val="3B7DD8"/>
+          </a:solidFill>
+          <a:ln/>
+        </p:spPr>
+      </p:sp>
+      <p:sp>
+        <p:nvSpPr>
+          <p:cNvPr id="16" name="Text 14"/>
+          <p:cNvSpPr/>
+          <p:nvPr/>
+        </p:nvSpPr>
+        <p:spPr>
+          <a:xfrm>
+            <a:off x="594360" y="3063240"/>
+            <a:ext cx="3657600" cy="320040"/>
+          </a:xfrm>
+          <a:prstGeom prst="rect">
+            <a:avLst/>
+          </a:prstGeom>
+          <a:noFill/>
+          <a:ln/>
+        </p:spPr>
+        <p:txBody>
+          <a:bodyPr wrap="square" lIns="0" tIns="0" rIns="0" bIns="0" rtlCol="0" anchor="ctr"/>
+          <a:lstStyle/>
+          <a:p>
+            <a:pPr indent="0" marL="0">
+              <a:buNone/>
+            </a:pPr>
+            <a:r>
+              <a:rPr lang="en-US" sz="1200" b="1" dirty="0">
+                <a:solidFill>
+                  <a:srgbClr val="1A2744"/>
+                </a:solidFill>
+                <a:latin typeface="Arial" pitchFamily="34" charset="0"/>
+                <a:ea typeface="Arial" pitchFamily="34" charset="-122"/>
+                <a:cs typeface="Arial" pitchFamily="34" charset="-120"/>
+              </a:rPr>
+              <a:t>エアコン・空調の定期点検強化</a:t>
+            </a:r>
+            <a:endParaRPr lang="en-US" sz="1200" dirty="0"/>
+          </a:p>
+        </p:txBody>
+      </p:sp>
+      <p:sp>
+        <p:nvSpPr>
+          <p:cNvPr id="17" name="Text 15"/>
+          <p:cNvSpPr/>
+          <p:nvPr/>
+        </p:nvSpPr>
+        <p:spPr>
+          <a:xfrm>
+            <a:off x="594360" y="3383280"/>
+            <a:ext cx="3657600" cy="1188720"/>
+          </a:xfrm>
+          <a:prstGeom prst="rect">
+            <a:avLst/>
+          </a:prstGeom>
+          <a:noFill/>
+          <a:ln/>
+        </p:spPr>
+        <p:txBody>
+          <a:bodyPr wrap="square" lIns="0" tIns="0" rIns="0" bIns="0" rtlCol="0" anchor="ctr"/>
+          <a:lstStyle/>
+          <a:p>
+            <a:pPr marL="342900" indent="-342900">
+              <a:spcAft>
+                <a:spcPts val="300"/>
+              </a:spcAft>
+              <a:buSzPct val="100000"/>
+              <a:buChar char="•"/>
+            </a:pPr>
+            <a:r>
+              <a:rPr lang="en-US" sz="900" dirty="0">
+                <a:solidFill>
+                  <a:srgbClr val="334155"/>
+                </a:solidFill>
+                <a:latin typeface="Arial" pitchFamily="34" charset="0"/>
+                <a:ea typeface="Arial" pitchFamily="34" charset="-122"/>
+                <a:cs typeface="Arial" pitchFamily="34" charset="-120"/>
+              </a:rPr>
+              <a:t>全室のエアコン設定を季節に応じてデフォルト確認する運用フロー導入</a:t>
+            </a:r>
+            <a:endParaRPr lang="en-US" sz="900" dirty="0"/>
+          </a:p>
+          <a:p>
+            <a:pPr marL="342900" indent="-342900">
+              <a:spcAft>
+                <a:spcPts val="300"/>
+              </a:spcAft>
+              <a:buSzPct val="100000"/>
+              <a:buChar char="•"/>
+            </a:pPr>
+            <a:r>
+              <a:rPr lang="en-US" sz="900" dirty="0">
+                <a:solidFill>
+                  <a:srgbClr val="334155"/>
+                </a:solidFill>
+                <a:latin typeface="Arial" pitchFamily="34" charset="0"/>
+                <a:ea typeface="Arial" pitchFamily="34" charset="-122"/>
+                <a:cs typeface="Arial" pitchFamily="34" charset="-120"/>
+              </a:rPr>
+              <a:t>冷暖房の正常動作を定期チェックリストに追加</a:t>
+            </a:r>
+            <a:endParaRPr lang="en-US" sz="900" dirty="0"/>
+          </a:p>
+          <a:p>
+            <a:pPr marL="342900" indent="-342900">
+              <a:spcAft>
+                <a:spcPts val="300"/>
+              </a:spcAft>
+              <a:buSzPct val="100000"/>
+              <a:buChar char="•"/>
+            </a:pPr>
+            <a:r>
+              <a:rPr lang="en-US" sz="900" dirty="0">
+                <a:solidFill>
+                  <a:srgbClr val="334155"/>
+                </a:solidFill>
+                <a:latin typeface="Arial" pitchFamily="34" charset="0"/>
+                <a:ea typeface="Arial" pitchFamily="34" charset="-122"/>
+                <a:cs typeface="Arial" pitchFamily="34" charset="-120"/>
+              </a:rPr>
+              <a:t>異常報告があった客室の優先メンテナンス実施</a:t>
+            </a:r>
+            <a:endParaRPr lang="en-US" sz="900" dirty="0"/>
+          </a:p>
+        </p:txBody>
+      </p:sp>
+      <p:sp>
+        <p:nvSpPr>
+          <p:cNvPr id="18" name="Shape 16"/>
+          <p:cNvSpPr/>
+          <p:nvPr/>
+        </p:nvSpPr>
+        <p:spPr>
+          <a:xfrm>
+            <a:off x="4663440" y="3017520"/>
+            <a:ext cx="3977640" cy="1600200"/>
+          </a:xfrm>
+          <a:prstGeom prst="rect">
+            <a:avLst/>
+          </a:prstGeom>
+          <a:solidFill>
+            <a:srgbClr val="FFFFFF"/>
+          </a:solidFill>
+          <a:ln/>
+          <a:effectLst>
+            <a:outerShdw sx="100000" sy="100000" kx="0" ky="0" algn="bl" rotWithShape="0" blurRad="50800" dist="25400" dir="8100000">
+              <a:srgbClr val="000000">
+                <a:alpha val="10000"/>
+              </a:srgbClr>
+            </a:outerShdw>
+          </a:effectLst>
+        </p:spPr>
+      </p:sp>
+      <p:sp>
+        <p:nvSpPr>
+          <p:cNvPr id="19" name="Shape 17"/>
+          <p:cNvSpPr/>
+          <p:nvPr/>
+        </p:nvSpPr>
+        <p:spPr>
+          <a:xfrm>
+            <a:off x="4663440" y="3017520"/>
+            <a:ext cx="54864" cy="1600200"/>
+          </a:xfrm>
+          <a:prstGeom prst="rect">
+            <a:avLst/>
+          </a:prstGeom>
+          <a:solidFill>
+            <a:srgbClr val="3B7DD8"/>
+          </a:solidFill>
+          <a:ln/>
+        </p:spPr>
+      </p:sp>
+      <p:sp>
+        <p:nvSpPr>
+          <p:cNvPr id="20" name="Text 18"/>
+          <p:cNvSpPr/>
+          <p:nvPr/>
+        </p:nvSpPr>
+        <p:spPr>
+          <a:xfrm>
+            <a:off x="4800600" y="3063240"/>
+            <a:ext cx="3657600" cy="320040"/>
+          </a:xfrm>
+          <a:prstGeom prst="rect">
+            <a:avLst/>
+          </a:prstGeom>
+          <a:noFill/>
+          <a:ln/>
+        </p:spPr>
+        <p:txBody>
+          <a:bodyPr wrap="square" lIns="0" tIns="0" rIns="0" bIns="0" rtlCol="0" anchor="ctr"/>
+          <a:lstStyle/>
+          <a:p>
+            <a:pPr indent="0" marL="0">
+              <a:buNone/>
+            </a:pPr>
+            <a:r>
+              <a:rPr lang="en-US" sz="1200" b="1" dirty="0">
+                <a:solidFill>
+                  <a:srgbClr val="1A2744"/>
+                </a:solidFill>
+                <a:latin typeface="Arial" pitchFamily="34" charset="0"/>
+                <a:ea typeface="Arial" pitchFamily="34" charset="-122"/>
+                <a:cs typeface="Arial" pitchFamily="34" charset="-120"/>
+              </a:rPr>
+              <a:t>スタッフ対応品質の統一</a:t>
+            </a:r>
+            <a:endParaRPr lang="en-US" sz="1200" dirty="0"/>
+          </a:p>
+        </p:txBody>
+      </p:sp>
+      <p:sp>
+        <p:nvSpPr>
+          <p:cNvPr id="21" name="Text 19"/>
+          <p:cNvSpPr/>
+          <p:nvPr/>
+        </p:nvSpPr>
+        <p:spPr>
+          <a:xfrm>
+            <a:off x="4800600" y="3383280"/>
+            <a:ext cx="3657600" cy="1188720"/>
+          </a:xfrm>
+          <a:prstGeom prst="rect">
+            <a:avLst/>
+          </a:prstGeom>
+          <a:noFill/>
+          <a:ln/>
+        </p:spPr>
+        <p:txBody>
+          <a:bodyPr wrap="square" lIns="0" tIns="0" rIns="0" bIns="0" rtlCol="0" anchor="ctr"/>
+          <a:lstStyle/>
+          <a:p>
+            <a:pPr marL="342900" indent="-342900">
+              <a:spcAft>
+                <a:spcPts val="300"/>
+              </a:spcAft>
+              <a:buSzPct val="100000"/>
+              <a:buChar char="•"/>
+            </a:pPr>
+            <a:r>
+              <a:rPr lang="en-US" sz="900" dirty="0">
+                <a:solidFill>
+                  <a:srgbClr val="334155"/>
+                </a:solidFill>
+                <a:latin typeface="Arial" pitchFamily="34" charset="0"/>
+                <a:ea typeface="Arial" pitchFamily="34" charset="-122"/>
+                <a:cs typeface="Arial" pitchFamily="34" charset="-120"/>
+              </a:rPr>
+              <a:t>接客マニュアルの見直しと全スタッフへの周知</a:t>
+            </a:r>
+            <a:endParaRPr lang="en-US" sz="900" dirty="0"/>
+          </a:p>
+          <a:p>
+            <a:pPr marL="342900" indent="-342900">
+              <a:spcAft>
+                <a:spcPts val="300"/>
+              </a:spcAft>
+              <a:buSzPct val="100000"/>
+              <a:buChar char="•"/>
+            </a:pPr>
+            <a:r>
+              <a:rPr lang="en-US" sz="900" dirty="0">
+                <a:solidFill>
+                  <a:srgbClr val="334155"/>
+                </a:solidFill>
+                <a:latin typeface="Arial" pitchFamily="34" charset="0"/>
+                <a:ea typeface="Arial" pitchFamily="34" charset="-122"/>
+                <a:cs typeface="Arial" pitchFamily="34" charset="-120"/>
+              </a:rPr>
+              <a:t>ゲストからのクレーム対応フローの明確化</a:t>
+            </a:r>
+            <a:endParaRPr lang="en-US" sz="900" dirty="0"/>
+          </a:p>
+          <a:p>
+            <a:pPr marL="342900" indent="-342900">
+              <a:spcAft>
+                <a:spcPts val="300"/>
+              </a:spcAft>
+              <a:buSzPct val="100000"/>
+              <a:buChar char="•"/>
+            </a:pPr>
+            <a:r>
+              <a:rPr lang="en-US" sz="900" dirty="0">
+                <a:solidFill>
+                  <a:srgbClr val="334155"/>
+                </a:solidFill>
+                <a:latin typeface="Arial" pitchFamily="34" charset="0"/>
+                <a:ea typeface="Arial" pitchFamily="34" charset="-122"/>
+                <a:cs typeface="Arial" pitchFamily="34" charset="-120"/>
+              </a:rPr>
+              <a:t>定期的なCS研修の実施</a:t>
+            </a:r>
+            <a:endParaRPr lang="en-US" sz="900" dirty="0"/>
+          </a:p>
+        </p:txBody>
+      </p:sp>
+      <p:sp>
+        <p:nvSpPr>
+          <p:cNvPr id="22" name="Shape 20"/>
           <p:cNvSpPr/>
           <p:nvPr/>
         </p:nvSpPr>
@@ -9898,7 +15166,7 @@
       </p:sp>
       <p:sp>
         <p:nvSpPr>
-          <p:cNvPr id="15" name="Text 13"/>
+          <p:cNvPr id="23" name="Text 21"/>
           <p:cNvSpPr/>
           <p:nvPr/>
         </p:nvSpPr>
@@ -9937,7 +15205,7 @@
       </p:sp>
       <p:sp>
         <p:nvSpPr>
-          <p:cNvPr id="16" name="Text 14"/>
+          <p:cNvPr id="24" name="Text 22"/>
           <p:cNvSpPr/>
           <p:nvPr/>
         </p:nvSpPr>
@@ -10223,7 +15491,7 @@
                 <a:ea typeface="Arial" pitchFamily="34" charset="-122"/>
                 <a:cs typeface="Arial" pitchFamily="34" charset="-120"/>
               </a:rPr>
-              <a:t>口コミ返信体制の構築</a:t>
+              <a:t>浴室の快適性向上</a:t>
             </a:r>
             <a:endParaRPr lang="en-US" sz="1000" dirty="0"/>
           </a:p>
@@ -10238,7 +15506,7 @@
         <p:spPr>
           <a:xfrm>
             <a:off x="640080" y="1719072"/>
-            <a:ext cx="3474720" cy="493776"/>
+            <a:ext cx="3474720" cy="694944"/>
           </a:xfrm>
           <a:prstGeom prst="rect">
             <a:avLst/>
@@ -10266,7 +15534,7 @@
                 <a:ea typeface="Arial" pitchFamily="34" charset="-122"/>
                 <a:cs typeface="Arial" pitchFamily="34" charset="-120"/>
               </a:rPr>
-              <a:t>全サイトの口コミに48時間以内の返信を目標に設定</a:t>
+              <a:t>排水口の清掃・修繕を全室で実施し、排水速度を改善</a:t>
             </a:r>
             <a:endParaRPr lang="en-US" sz="900" dirty="0"/>
           </a:p>
@@ -10287,15 +15555,284 @@
                 <a:ea typeface="Arial" pitchFamily="34" charset="-122"/>
                 <a:cs typeface="Arial" pitchFamily="34" charset="-120"/>
               </a:rPr>
-              <a:t>特に低評価レビューへのフォローアップ強化</a:t>
+              <a:t>シャワーヘッドの交換（水圧改善・節水タイプ導入）</a:t>
             </a:r>
             <a:endParaRPr lang="en-US" sz="900" dirty="0"/>
           </a:p>
+          <a:p>
+            <a:pPr marL="342900" indent="-342900">
+              <a:spcAft>
+                <a:spcPts val="200"/>
+              </a:spcAft>
+              <a:buSzPct val="100000"/>
+              <a:buChar char="•"/>
+            </a:pPr>
+            <a:r>
+              <a:rPr lang="en-US" sz="900" dirty="0">
+                <a:solidFill>
+                  <a:srgbClr val="64748B"/>
+                </a:solidFill>
+                <a:latin typeface="Arial" pitchFamily="34" charset="0"/>
+                <a:ea typeface="Arial" pitchFamily="34" charset="-122"/>
+                <a:cs typeface="Arial" pitchFamily="34" charset="-120"/>
+              </a:rPr>
+              <a:t>浴室換気・暖房設備の点検と改善</a:t>
+            </a:r>
+            <a:endParaRPr lang="en-US" sz="900" dirty="0"/>
+          </a:p>
         </p:txBody>
       </p:sp>
       <p:sp>
         <p:nvSpPr>
-          <p:cNvPr id="10" name="Shape 8"/>
+          <p:cNvPr id="10" name="Text 8"/>
+          <p:cNvSpPr/>
+          <p:nvPr/>
+        </p:nvSpPr>
+        <p:spPr>
+          <a:xfrm>
+            <a:off x="640080" y="2505456"/>
+            <a:ext cx="3474720" cy="274320"/>
+          </a:xfrm>
+          <a:prstGeom prst="rect">
+            <a:avLst/>
+          </a:prstGeom>
+          <a:noFill/>
+          <a:ln/>
+        </p:spPr>
+        <p:txBody>
+          <a:bodyPr wrap="square" lIns="0" tIns="0" rIns="0" bIns="0" rtlCol="0" anchor="ctr"/>
+          <a:lstStyle/>
+          <a:p>
+            <a:pPr indent="0" marL="0">
+              <a:buNone/>
+            </a:pPr>
+            <a:r>
+              <a:rPr lang="en-US" sz="1000" b="1" dirty="0">
+                <a:solidFill>
+                  <a:srgbClr val="1A2744"/>
+                </a:solidFill>
+                <a:latin typeface="Arial" pitchFamily="34" charset="0"/>
+                <a:ea typeface="Arial" pitchFamily="34" charset="-122"/>
+                <a:cs typeface="Arial" pitchFamily="34" charset="-120"/>
+              </a:rPr>
+              <a:t>防音対策の強化</a:t>
+            </a:r>
+            <a:endParaRPr lang="en-US" sz="1000" dirty="0"/>
+          </a:p>
+        </p:txBody>
+      </p:sp>
+      <p:sp>
+        <p:nvSpPr>
+          <p:cNvPr id="11" name="Text 9"/>
+          <p:cNvSpPr/>
+          <p:nvPr/>
+        </p:nvSpPr>
+        <p:spPr>
+          <a:xfrm>
+            <a:off x="640080" y="2761488"/>
+            <a:ext cx="3474720" cy="694944"/>
+          </a:xfrm>
+          <a:prstGeom prst="rect">
+            <a:avLst/>
+          </a:prstGeom>
+          <a:noFill/>
+          <a:ln/>
+        </p:spPr>
+        <p:txBody>
+          <a:bodyPr wrap="square" lIns="0" tIns="0" rIns="0" bIns="0" rtlCol="0" anchor="ctr"/>
+          <a:lstStyle/>
+          <a:p>
+            <a:pPr marL="342900" indent="-342900">
+              <a:spcAft>
+                <a:spcPts val="200"/>
+              </a:spcAft>
+              <a:buSzPct val="100000"/>
+              <a:buChar char="•"/>
+            </a:pPr>
+            <a:r>
+              <a:rPr lang="en-US" sz="900" dirty="0">
+                <a:solidFill>
+                  <a:srgbClr val="64748B"/>
+                </a:solidFill>
+                <a:latin typeface="Arial" pitchFamily="34" charset="0"/>
+                <a:ea typeface="Arial" pitchFamily="34" charset="-122"/>
+                <a:cs typeface="Arial" pitchFamily="34" charset="-120"/>
+              </a:rPr>
+              <a:t>窓際への防音カーテン導入（外部騒音対策）</a:t>
+            </a:r>
+            <a:endParaRPr lang="en-US" sz="900" dirty="0"/>
+          </a:p>
+          <a:p>
+            <a:pPr marL="342900" indent="-342900">
+              <a:spcAft>
+                <a:spcPts val="200"/>
+              </a:spcAft>
+              <a:buSzPct val="100000"/>
+              <a:buChar char="•"/>
+            </a:pPr>
+            <a:r>
+              <a:rPr lang="en-US" sz="900" dirty="0">
+                <a:solidFill>
+                  <a:srgbClr val="64748B"/>
+                </a:solidFill>
+                <a:latin typeface="Arial" pitchFamily="34" charset="0"/>
+                <a:ea typeface="Arial" pitchFamily="34" charset="-122"/>
+                <a:cs typeface="Arial" pitchFamily="34" charset="-120"/>
+              </a:rPr>
+              <a:t>ドア下部への隙間テープ設置（廊下・隣室からの音漏れ軽減）</a:t>
+            </a:r>
+            <a:endParaRPr lang="en-US" sz="900" dirty="0"/>
+          </a:p>
+          <a:p>
+            <a:pPr marL="342900" indent="-342900">
+              <a:spcAft>
+                <a:spcPts val="200"/>
+              </a:spcAft>
+              <a:buSzPct val="100000"/>
+              <a:buChar char="•"/>
+            </a:pPr>
+            <a:r>
+              <a:rPr lang="en-US" sz="900" dirty="0">
+                <a:solidFill>
+                  <a:srgbClr val="64748B"/>
+                </a:solidFill>
+                <a:latin typeface="Arial" pitchFamily="34" charset="0"/>
+                <a:ea typeface="Arial" pitchFamily="34" charset="-122"/>
+                <a:cs typeface="Arial" pitchFamily="34" charset="-120"/>
+              </a:rPr>
+              <a:t>騒音の少ない客室への優先案内の仕組み化</a:t>
+            </a:r>
+            <a:endParaRPr lang="en-US" sz="900" dirty="0"/>
+          </a:p>
+        </p:txBody>
+      </p:sp>
+      <p:sp>
+        <p:nvSpPr>
+          <p:cNvPr id="12" name="Text 10"/>
+          <p:cNvSpPr/>
+          <p:nvPr/>
+        </p:nvSpPr>
+        <p:spPr>
+          <a:xfrm>
+            <a:off x="640080" y="3547872"/>
+            <a:ext cx="3474720" cy="274320"/>
+          </a:xfrm>
+          <a:prstGeom prst="rect">
+            <a:avLst/>
+          </a:prstGeom>
+          <a:noFill/>
+          <a:ln/>
+        </p:spPr>
+        <p:txBody>
+          <a:bodyPr wrap="square" lIns="0" tIns="0" rIns="0" bIns="0" rtlCol="0" anchor="ctr"/>
+          <a:lstStyle/>
+          <a:p>
+            <a:pPr indent="0" marL="0">
+              <a:buNone/>
+            </a:pPr>
+            <a:r>
+              <a:rPr lang="en-US" sz="1000" b="1" dirty="0">
+                <a:solidFill>
+                  <a:srgbClr val="1A2744"/>
+                </a:solidFill>
+                <a:latin typeface="Arial" pitchFamily="34" charset="0"/>
+                <a:ea typeface="Arial" pitchFamily="34" charset="-122"/>
+                <a:cs typeface="Arial" pitchFamily="34" charset="-120"/>
+              </a:rPr>
+              <a:t>窓・採光環境の改善</a:t>
+            </a:r>
+            <a:endParaRPr lang="en-US" sz="1000" dirty="0"/>
+          </a:p>
+        </p:txBody>
+      </p:sp>
+      <p:sp>
+        <p:nvSpPr>
+          <p:cNvPr id="13" name="Text 11"/>
+          <p:cNvSpPr/>
+          <p:nvPr/>
+        </p:nvSpPr>
+        <p:spPr>
+          <a:xfrm>
+            <a:off x="640080" y="3803904"/>
+            <a:ext cx="3474720" cy="694944"/>
+          </a:xfrm>
+          <a:prstGeom prst="rect">
+            <a:avLst/>
+          </a:prstGeom>
+          <a:noFill/>
+          <a:ln/>
+        </p:spPr>
+        <p:txBody>
+          <a:bodyPr wrap="square" lIns="0" tIns="0" rIns="0" bIns="0" rtlCol="0" anchor="ctr"/>
+          <a:lstStyle/>
+          <a:p>
+            <a:pPr marL="342900" indent="-342900">
+              <a:spcAft>
+                <a:spcPts val="200"/>
+              </a:spcAft>
+              <a:buSzPct val="100000"/>
+              <a:buChar char="•"/>
+            </a:pPr>
+            <a:r>
+              <a:rPr lang="en-US" sz="900" dirty="0">
+                <a:solidFill>
+                  <a:srgbClr val="64748B"/>
+                </a:solidFill>
+                <a:latin typeface="Arial" pitchFamily="34" charset="0"/>
+                <a:ea typeface="Arial" pitchFamily="34" charset="-122"/>
+                <a:cs typeface="Arial" pitchFamily="34" charset="-120"/>
+              </a:rPr>
+              <a:t>遮光カーテンとレースカーテンの品質見直し</a:t>
+            </a:r>
+            <a:endParaRPr lang="en-US" sz="900" dirty="0"/>
+          </a:p>
+          <a:p>
+            <a:pPr marL="342900" indent="-342900">
+              <a:spcAft>
+                <a:spcPts val="200"/>
+              </a:spcAft>
+              <a:buSzPct val="100000"/>
+              <a:buChar char="•"/>
+            </a:pPr>
+            <a:r>
+              <a:rPr lang="en-US" sz="900" dirty="0">
+                <a:solidFill>
+                  <a:srgbClr val="64748B"/>
+                </a:solidFill>
+                <a:latin typeface="Arial" pitchFamily="34" charset="0"/>
+                <a:ea typeface="Arial" pitchFamily="34" charset="-122"/>
+                <a:cs typeface="Arial" pitchFamily="34" charset="-120"/>
+              </a:rPr>
+              <a:t>窓の開閉可否に関する事前案内の徹底</a:t>
+            </a:r>
+            <a:endParaRPr lang="en-US" sz="900" dirty="0"/>
+          </a:p>
+          <a:p>
+            <a:pPr marL="342900" indent="-342900">
+              <a:spcAft>
+                <a:spcPts val="200"/>
+              </a:spcAft>
+              <a:buSzPct val="100000"/>
+              <a:buChar char="•"/>
+            </a:pPr>
+            <a:r>
+              <a:rPr lang="en-US" sz="900" dirty="0">
+                <a:solidFill>
+                  <a:srgbClr val="64748B"/>
+                </a:solidFill>
+                <a:latin typeface="Arial" pitchFamily="34" charset="0"/>
+                <a:ea typeface="Arial" pitchFamily="34" charset="-122"/>
+                <a:cs typeface="Arial" pitchFamily="34" charset="-120"/>
+              </a:rPr>
+              <a:t>採光の良い客室の優先割り当てルール整備</a:t>
+            </a:r>
+            <a:endParaRPr lang="en-US" sz="900" dirty="0"/>
+          </a:p>
+        </p:txBody>
+      </p:sp>
+      <p:sp>
+        <p:nvSpPr>
+          <p:cNvPr id="14" name="Shape 12"/>
           <p:cNvSpPr/>
           <p:nvPr/>
         </p:nvSpPr>
@@ -10322,7 +15859,7 @@
       </p:sp>
       <p:sp>
         <p:nvSpPr>
-          <p:cNvPr id="11" name="Shape 9"/>
+          <p:cNvPr id="15" name="Shape 13"/>
           <p:cNvSpPr/>
           <p:nvPr/>
         </p:nvSpPr>
@@ -10342,7 +15879,7 @@
       </p:sp>
       <p:sp>
         <p:nvSpPr>
-          <p:cNvPr id="12" name="Text 10"/>
+          <p:cNvPr id="16" name="Text 14"/>
           <p:cNvSpPr/>
           <p:nvPr/>
         </p:nvSpPr>
@@ -10381,7 +15918,7 @@
       </p:sp>
       <p:sp>
         <p:nvSpPr>
-          <p:cNvPr id="13" name="Text 11"/>
+          <p:cNvPr id="17" name="Text 15"/>
           <p:cNvSpPr/>
           <p:nvPr/>
         </p:nvSpPr>
@@ -10412,7 +15949,7 @@
                 <a:ea typeface="Arial" pitchFamily="34" charset="-122"/>
                 <a:cs typeface="Arial" pitchFamily="34" charset="-120"/>
               </a:rPr>
-              <a:t>客室設備のアップグレード</a:t>
+              <a:t>客室リニューアル計画</a:t>
             </a:r>
             <a:endParaRPr lang="en-US" sz="1000" dirty="0"/>
           </a:p>
@@ -10420,7 +15957,7 @@
       </p:sp>
       <p:sp>
         <p:nvSpPr>
-          <p:cNvPr id="14" name="Text 12"/>
+          <p:cNvPr id="18" name="Text 16"/>
           <p:cNvSpPr/>
           <p:nvPr/>
         </p:nvSpPr>
@@ -10455,7 +15992,7 @@
                 <a:ea typeface="Arial" pitchFamily="34" charset="-122"/>
                 <a:cs typeface="Arial" pitchFamily="34" charset="-120"/>
               </a:rPr>
-              <a:t>内装の定期的なリフレッシュ計画の策定</a:t>
+              <a:t>壁紙・カーペットの張替えによる「古さ」印象の払拭</a:t>
             </a:r>
             <a:endParaRPr lang="en-US" sz="900" dirty="0"/>
           </a:p>
@@ -10476,7 +16013,7 @@
                 <a:ea typeface="Arial" pitchFamily="34" charset="-122"/>
                 <a:cs typeface="Arial" pitchFamily="34" charset="-120"/>
               </a:rPr>
-              <a:t>照明・電源周りの設備更新</a:t>
+              <a:t>照明のLED化・調光機能の追加で客室の雰囲気向上</a:t>
             </a:r>
             <a:endParaRPr lang="en-US" sz="900" dirty="0"/>
           </a:p>
@@ -10497,7 +16034,7 @@
                 <a:ea typeface="Arial" pitchFamily="34" charset="-122"/>
                 <a:cs typeface="Arial" pitchFamily="34" charset="-120"/>
               </a:rPr>
-              <a:t>快適性向上のための設備投資計画の立案</a:t>
+              <a:t>USB充電ポート付きコンセントの設置</a:t>
             </a:r>
             <a:endParaRPr lang="en-US" sz="900" dirty="0"/>
           </a:p>
@@ -10505,7 +16042,7 @@
       </p:sp>
       <p:sp>
         <p:nvSpPr>
-          <p:cNvPr id="15" name="Text 13"/>
+          <p:cNvPr id="19" name="Text 17"/>
           <p:cNvSpPr/>
           <p:nvPr/>
         </p:nvSpPr>
@@ -10536,7 +16073,7 @@
                 <a:ea typeface="Arial" pitchFamily="34" charset="-122"/>
                 <a:cs typeface="Arial" pitchFamily="34" charset="-120"/>
               </a:rPr>
-              <a:t>ブランド価値向上施策</a:t>
+              <a:t>浴室の抜本的改修</a:t>
             </a:r>
             <a:endParaRPr lang="en-US" sz="1000" dirty="0"/>
           </a:p>
@@ -10544,14 +16081,14 @@
       </p:sp>
       <p:sp>
         <p:nvSpPr>
-          <p:cNvPr id="16" name="Text 14"/>
+          <p:cNvPr id="20" name="Text 18"/>
           <p:cNvSpPr/>
           <p:nvPr/>
         </p:nvSpPr>
         <p:spPr>
           <a:xfrm>
             <a:off x="4892040" y="2761488"/>
-            <a:ext cx="3474720" cy="694944"/>
+            <a:ext cx="3474720" cy="493776"/>
           </a:xfrm>
           <a:prstGeom prst="rect">
             <a:avLst/>
@@ -10579,7 +16116,7 @@
                 <a:ea typeface="Arial" pitchFamily="34" charset="-122"/>
                 <a:cs typeface="Arial" pitchFamily="34" charset="-120"/>
               </a:rPr>
-              <a:t>ホテル独自のサービスコンセプトの策定</a:t>
+              <a:t>配管更新による排水問題の根本解決</a:t>
             </a:r>
             <a:endParaRPr lang="en-US" sz="900" dirty="0"/>
           </a:p>
@@ -10600,10 +16137,71 @@
                 <a:ea typeface="Arial" pitchFamily="34" charset="-122"/>
                 <a:cs typeface="Arial" pitchFamily="34" charset="-120"/>
               </a:rPr>
-              <a:t>差別化ポイントを活かしたプロモーション強化</a:t>
+              <a:t>換気設備の強化による浴室内の温度・湿度改善</a:t>
             </a:r>
             <a:endParaRPr lang="en-US" sz="900" dirty="0"/>
           </a:p>
+        </p:txBody>
+      </p:sp>
+      <p:sp>
+        <p:nvSpPr>
+          <p:cNvPr id="21" name="Text 19"/>
+          <p:cNvSpPr/>
+          <p:nvPr/>
+        </p:nvSpPr>
+        <p:spPr>
+          <a:xfrm>
+            <a:off x="4892040" y="3346704"/>
+            <a:ext cx="3474720" cy="274320"/>
+          </a:xfrm>
+          <a:prstGeom prst="rect">
+            <a:avLst/>
+          </a:prstGeom>
+          <a:noFill/>
+          <a:ln/>
+        </p:spPr>
+        <p:txBody>
+          <a:bodyPr wrap="square" lIns="0" tIns="0" rIns="0" bIns="0" rtlCol="0" anchor="ctr"/>
+          <a:lstStyle/>
+          <a:p>
+            <a:pPr indent="0" marL="0">
+              <a:buNone/>
+            </a:pPr>
+            <a:r>
+              <a:rPr lang="en-US" sz="1000" b="1" dirty="0">
+                <a:solidFill>
+                  <a:srgbClr val="1A2744"/>
+                </a:solidFill>
+                <a:latin typeface="Arial" pitchFamily="34" charset="0"/>
+                <a:ea typeface="Arial" pitchFamily="34" charset="-122"/>
+                <a:cs typeface="Arial" pitchFamily="34" charset="-120"/>
+              </a:rPr>
+              <a:t>防音工事</a:t>
+            </a:r>
+            <a:endParaRPr lang="en-US" sz="1000" dirty="0"/>
+          </a:p>
+        </p:txBody>
+      </p:sp>
+      <p:sp>
+        <p:nvSpPr>
+          <p:cNvPr id="22" name="Text 20"/>
+          <p:cNvSpPr/>
+          <p:nvPr/>
+        </p:nvSpPr>
+        <p:spPr>
+          <a:xfrm>
+            <a:off x="4892040" y="3602736"/>
+            <a:ext cx="3474720" cy="493776"/>
+          </a:xfrm>
+          <a:prstGeom prst="rect">
+            <a:avLst/>
+          </a:prstGeom>
+          <a:noFill/>
+          <a:ln/>
+        </p:spPr>
+        <p:txBody>
+          <a:bodyPr wrap="square" lIns="0" tIns="0" rIns="0" bIns="0" rtlCol="0" anchor="ctr"/>
+          <a:lstStyle/>
           <a:p>
             <a:pPr marL="342900" indent="-342900">
               <a:spcAft>
@@ -10621,15 +16219,36 @@
                 <a:ea typeface="Arial" pitchFamily="34" charset="-122"/>
                 <a:cs typeface="Arial" pitchFamily="34" charset="-120"/>
               </a:rPr>
-              <a:t>リピーター向け特典プログラムの導入</a:t>
+              <a:t>騒音源側客室の窓を二重サッシに交換</a:t>
             </a:r>
             <a:endParaRPr lang="en-US" sz="900" dirty="0"/>
           </a:p>
+          <a:p>
+            <a:pPr marL="342900" indent="-342900">
+              <a:spcAft>
+                <a:spcPts val="200"/>
+              </a:spcAft>
+              <a:buSzPct val="100000"/>
+              <a:buChar char="•"/>
+            </a:pPr>
+            <a:r>
+              <a:rPr lang="en-US" sz="900" dirty="0">
+                <a:solidFill>
+                  <a:srgbClr val="64748B"/>
+                </a:solidFill>
+                <a:latin typeface="Arial" pitchFamily="34" charset="0"/>
+                <a:ea typeface="Arial" pitchFamily="34" charset="-122"/>
+                <a:cs typeface="Arial" pitchFamily="34" charset="-120"/>
+              </a:rPr>
+              <a:t>隣室との壁面に遮音材を追加する改修工事の検討</a:t>
+            </a:r>
+            <a:endParaRPr lang="en-US" sz="900" dirty="0"/>
+          </a:p>
         </p:txBody>
       </p:sp>
       <p:sp>
         <p:nvSpPr>
-          <p:cNvPr id="17" name="Shape 15"/>
+          <p:cNvPr id="23" name="Shape 21"/>
           <p:cNvSpPr/>
           <p:nvPr/>
         </p:nvSpPr>
@@ -10649,7 +16268,7 @@
       </p:sp>
       <p:sp>
         <p:nvSpPr>
-          <p:cNvPr id="18" name="Text 16"/>
+          <p:cNvPr id="24" name="Text 22"/>
           <p:cNvSpPr/>
           <p:nvPr/>
         </p:nvSpPr>
@@ -10688,7 +16307,7 @@
       </p:sp>
       <p:sp>
         <p:nvSpPr>
-          <p:cNvPr id="19" name="Text 17"/>
+          <p:cNvPr id="25" name="Text 23"/>
           <p:cNvSpPr/>
           <p:nvPr/>
         </p:nvSpPr>

--- a/納品レポート/ホテル別レポート/court_shinyokohama_口コミ分析レポート.pptx
+++ b/納品レポート/ホテル別レポート/court_shinyokohama_口コミ分析レポート.pptx
@@ -2812,7 +2812,7 @@
                 <a:ea typeface="Arial" pitchFamily="34" charset="-122"/>
                 <a:cs typeface="Arial" pitchFamily="34" charset="-120"/>
               </a:rPr>
-              <a:t>作成日：2026年4月6日</a:t>
+              <a:t>作成日：2026年4月7日</a:t>
             </a:r>
             <a:endParaRPr lang="en-US" sz="1000" dirty="0"/>
           </a:p>

--- a/納品レポート/ホテル別レポート/court_shinyokohama_口コミ分析レポート.pptx
+++ b/納品レポート/ホテル別レポート/court_shinyokohama_口コミ分析レポート.pptx
@@ -2812,7 +2812,7 @@
                 <a:ea typeface="Arial" pitchFamily="34" charset="-122"/>
                 <a:cs typeface="Arial" pitchFamily="34" charset="-120"/>
               </a:rPr>
-              <a:t>作成日：2026年4月7日</a:t>
+              <a:t>作成日：2026年4月8日</a:t>
             </a:r>
             <a:endParaRPr lang="en-US" sz="1000" dirty="0"/>
           </a:p>

--- a/納品レポート/ホテル別レポート/court_shinyokohama_口コミ分析レポート.pptx
+++ b/納品レポート/ホテル別レポート/court_shinyokohama_口コミ分析レポート.pptx
@@ -2812,7 +2812,7 @@
                 <a:ea typeface="Arial" pitchFamily="34" charset="-122"/>
                 <a:cs typeface="Arial" pitchFamily="34" charset="-120"/>
               </a:rPr>
-              <a:t>作成日：2026年4月10日</a:t>
+              <a:t>作成日：2026年4月11日</a:t>
             </a:r>
             <a:endParaRPr lang="en-US" sz="1000" dirty="0"/>
           </a:p>

--- a/納品レポート/ホテル別レポート/court_shinyokohama_口コミ分析レポート.pptx
+++ b/納品レポート/ホテル別レポート/court_shinyokohama_口コミ分析レポート.pptx
@@ -2812,7 +2812,7 @@
                 <a:ea typeface="Arial" pitchFamily="34" charset="-122"/>
                 <a:cs typeface="Arial" pitchFamily="34" charset="-120"/>
               </a:rPr>
-              <a:t>作成日：2026年4月11日</a:t>
+              <a:t>作成日：2026年4月13日</a:t>
             </a:r>
             <a:endParaRPr lang="en-US" sz="1000" dirty="0"/>
           </a:p>

--- a/納品レポート/ホテル別レポート/court_shinyokohama_口コミ分析レポート.pptx
+++ b/納品レポート/ホテル別レポート/court_shinyokohama_口コミ分析レポート.pptx
@@ -2812,7 +2812,7 @@
                 <a:ea typeface="Arial" pitchFamily="34" charset="-122"/>
                 <a:cs typeface="Arial" pitchFamily="34" charset="-120"/>
               </a:rPr>
-              <a:t>作成日：2026年4月13日</a:t>
+              <a:t>作成日：2026年4月15日</a:t>
             </a:r>
             <a:endParaRPr lang="en-US" sz="1000" dirty="0"/>
           </a:p>

--- a/納品レポート/ホテル別レポート/court_shinyokohama_口コミ分析レポート.pptx
+++ b/納品レポート/ホテル別レポート/court_shinyokohama_口コミ分析レポート.pptx
@@ -2812,7 +2812,7 @@
                 <a:ea typeface="Arial" pitchFamily="34" charset="-122"/>
                 <a:cs typeface="Arial" pitchFamily="34" charset="-120"/>
               </a:rPr>
-              <a:t>作成日：2026年4月16日</a:t>
+              <a:t>作成日：2026年4月20日</a:t>
             </a:r>
             <a:endParaRPr lang="en-US" sz="1000" dirty="0"/>
           </a:p>

--- a/納品レポート/ホテル別レポート/court_shinyokohama_口コミ分析レポート.pptx
+++ b/納品レポート/ホテル別レポート/court_shinyokohama_口コミ分析レポート.pptx
@@ -2730,7 +2730,7 @@
                 <a:ea typeface="Arial" pitchFamily="34" charset="-122"/>
                 <a:cs typeface="Arial" pitchFamily="34" charset="-120"/>
               </a:rPr>
-              <a:t>コートホテル新横浜</a:t>
+              <a:t>コート横浜新横浜</a:t>
             </a:r>
             <a:endParaRPr lang="en-US" sz="1600" dirty="0"/>
           </a:p>
@@ -2812,7 +2812,7 @@
                 <a:ea typeface="Arial" pitchFamily="34" charset="-122"/>
                 <a:cs typeface="Arial" pitchFamily="34" charset="-120"/>
               </a:rPr>
-              <a:t>作成日：2026年4月20日</a:t>
+              <a:t>作成日：2026年4月21日</a:t>
             </a:r>
             <a:endParaRPr lang="en-US" sz="1000" dirty="0"/>
           </a:p>

--- a/納品レポート/ホテル別レポート/court_shinyokohama_口コミ分析レポート.pptx
+++ b/納品レポート/ホテル別レポート/court_shinyokohama_口コミ分析レポート.pptx
@@ -2730,7 +2730,7 @@
                 <a:ea typeface="Arial" pitchFamily="34" charset="-122"/>
                 <a:cs typeface="Arial" pitchFamily="34" charset="-120"/>
               </a:rPr>
-              <a:t>コート横浜新横浜</a:t>
+              <a:t>コートホテル新横浜</a:t>
             </a:r>
             <a:endParaRPr lang="en-US" sz="1600" dirty="0"/>
           </a:p>
@@ -2812,7 +2812,7 @@
                 <a:ea typeface="Arial" pitchFamily="34" charset="-122"/>
                 <a:cs typeface="Arial" pitchFamily="34" charset="-120"/>
               </a:rPr>
-              <a:t>作成日：2026年4月21日</a:t>
+              <a:t>作成日：2026年4月22日</a:t>
             </a:r>
             <a:endParaRPr lang="en-US" sz="1000" dirty="0"/>
           </a:p>
